--- a/docs/presentation/TrustChain_AI_Phase_III_Final_Enhanced.pptx
+++ b/docs/presentation/TrustChain_AI_Phase_III_Final_Enhanced.pptx
@@ -28,14 +28,15 @@
     <p:sldId id="295" r:id="rId19"/>
     <p:sldId id="296" r:id="rId20"/>
     <p:sldId id="297" r:id="rId21"/>
+    <p:sldId id="277" r:id="rId26"/>
+    <p:sldId id="300" r:id="rId34"/>
     <p:sldId id="298" r:id="rId22"/>
     <p:sldId id="275" r:id="rId23"/>
     <p:sldId id="266" r:id="rId24"/>
     <p:sldId id="267" r:id="rId25"/>
-    <p:sldId id="277" r:id="rId26"/>
-    <p:sldId id="300" r:id="rId34"/>
     <p:sldId id="301" r:id="rId35"/>
     <p:sldId id="302" r:id="rId36"/>
+    <p:sldId id="303" r:id="rId37"/>
     <p:sldId id="268" r:id="rId27"/>
     <p:sldId id="299" r:id="rId28"/>
   </p:sldIdLst>
@@ -17314,9 +17315,9 @@
                 <a:spcPct val="150000"/>
               </a:lnSpc>
               <a:spcAft>
-                <a:spcPts val="300"/>
-              </a:spcAft>
-              <a:defRPr sz="1500">
+                <a:spcPts val="250"/>
+              </a:spcAft>
+              <a:defRPr sz="1400">
                 <a:solidFill>
                   <a:srgbClr val="1E293B"/>
                 </a:solidFill>
@@ -17330,9 +17331,9 @@
           <a:p>
             <a:pPr>
               <a:spcAft>
-                <a:spcPts val="300"/>
-              </a:spcAft>
-              <a:defRPr sz="1500">
+                <a:spcPts val="250"/>
+              </a:spcAft>
+              <a:defRPr sz="1400">
                 <a:solidFill>
                   <a:srgbClr val="1E293B"/>
                 </a:solidFill>
@@ -17340,15 +17341,15 @@
               </a:defRPr>
             </a:pPr>
             <a:r>
-              <a:t>Literature Survey</a:t>
+              <a:t>Literature Survey &amp; Problem Statement</a:t>
             </a:r>
           </a:p>
           <a:p>
             <a:pPr>
               <a:spcAft>
-                <a:spcPts val="300"/>
-              </a:spcAft>
-              <a:defRPr sz="1500">
+                <a:spcPts val="250"/>
+              </a:spcAft>
+              <a:defRPr sz="1400">
                 <a:solidFill>
                   <a:srgbClr val="1E293B"/>
                 </a:solidFill>
@@ -17356,15 +17357,15 @@
               </a:defRPr>
             </a:pPr>
             <a:r>
-              <a:t>Problem Statement</a:t>
+              <a:t>Proposed Solution &amp; System Architecture</a:t>
             </a:r>
           </a:p>
           <a:p>
             <a:pPr>
               <a:spcAft>
-                <a:spcPts val="300"/>
-              </a:spcAft>
-              <a:defRPr sz="1500">
+                <a:spcPts val="250"/>
+              </a:spcAft>
+              <a:defRPr sz="1400">
                 <a:solidFill>
                   <a:srgbClr val="1E293B"/>
                 </a:solidFill>
@@ -17372,15 +17373,15 @@
               </a:defRPr>
             </a:pPr>
             <a:r>
-              <a:t>Proposed Solution &amp; System Architecture</a:t>
+              <a:t>Decentralized Identity &amp; Trust Intelligence Lifecycle</a:t>
             </a:r>
           </a:p>
           <a:p>
             <a:pPr>
               <a:spcAft>
-                <a:spcPts val="300"/>
-              </a:spcAft>
-              <a:defRPr sz="1500">
+                <a:spcPts val="250"/>
+              </a:spcAft>
+              <a:defRPr sz="1400">
                 <a:solidFill>
                   <a:srgbClr val="1E293B"/>
                 </a:solidFill>
@@ -17388,15 +17389,15 @@
               </a:defRPr>
             </a:pPr>
             <a:r>
-              <a:t>Decentralized Identity &amp; Trust Intelligence Lifecycle</a:t>
+              <a:t>Core Algorithms &amp; Adaptive Policy Enforcement</a:t>
             </a:r>
           </a:p>
           <a:p>
             <a:pPr>
               <a:spcAft>
-                <a:spcPts val="300"/>
-              </a:spcAft>
-              <a:defRPr sz="1500">
+                <a:spcPts val="250"/>
+              </a:spcAft>
+              <a:defRPr sz="1400">
                 <a:solidFill>
                   <a:srgbClr val="1E293B"/>
                 </a:solidFill>
@@ -17404,15 +17405,15 @@
               </a:defRPr>
             </a:pPr>
             <a:r>
-              <a:t>Software and Hardware Requirements</a:t>
+              <a:t>SOC Portal &amp; Actual Application Screenshots</a:t>
             </a:r>
           </a:p>
           <a:p>
             <a:pPr>
               <a:spcAft>
-                <a:spcPts val="300"/>
-              </a:spcAft>
-              <a:defRPr sz="1500">
+                <a:spcPts val="250"/>
+              </a:spcAft>
+              <a:defRPr sz="1400">
                 <a:solidFill>
                   <a:srgbClr val="1E293B"/>
                 </a:solidFill>
@@ -17420,15 +17421,15 @@
               </a:defRPr>
             </a:pPr>
             <a:r>
-              <a:t>Project Development Timeline (Gantt Chart)</a:t>
+              <a:t>Implementation Status &amp; Key Features</a:t>
             </a:r>
           </a:p>
           <a:p>
             <a:pPr>
               <a:spcAft>
-                <a:spcPts val="300"/>
-              </a:spcAft>
-              <a:defRPr sz="1500">
+                <a:spcPts val="250"/>
+              </a:spcAft>
+              <a:defRPr sz="1400">
                 <a:solidFill>
                   <a:srgbClr val="1E293B"/>
                 </a:solidFill>
@@ -17436,15 +17437,15 @@
               </a:defRPr>
             </a:pPr>
             <a:r>
-              <a:t>Implementation &amp; Technical Validation</a:t>
+              <a:t>Software &amp; Hardware Requirements</a:t>
             </a:r>
           </a:p>
           <a:p>
             <a:pPr>
               <a:spcAft>
-                <a:spcPts val="300"/>
-              </a:spcAft>
-              <a:defRPr sz="1500">
+                <a:spcPts val="250"/>
+              </a:spcAft>
+              <a:defRPr sz="1400">
                 <a:solidFill>
                   <a:srgbClr val="1E293B"/>
                 </a:solidFill>
@@ -17452,15 +17453,15 @@
               </a:defRPr>
             </a:pPr>
             <a:r>
-              <a:t>Results Analysis &amp; System Evaluation</a:t>
+              <a:t>Project Development Timeline (Gantt Chart)</a:t>
             </a:r>
           </a:p>
           <a:p>
             <a:pPr>
               <a:spcAft>
-                <a:spcPts val="300"/>
-              </a:spcAft>
-              <a:defRPr sz="1500">
+                <a:spcPts val="250"/>
+              </a:spcAft>
+              <a:defRPr sz="1400">
                 <a:solidFill>
                   <a:srgbClr val="1E293B"/>
                 </a:solidFill>
@@ -17468,15 +17469,47 @@
               </a:defRPr>
             </a:pPr>
             <a:r>
+              <a:t>Implementation &amp; Technical Validation</a:t>
+            </a:r>
+          </a:p>
+          <a:p>
+            <a:pPr>
+              <a:spcAft>
+                <a:spcPts val="250"/>
+              </a:spcAft>
+              <a:defRPr sz="1400">
+                <a:solidFill>
+                  <a:srgbClr val="1E293B"/>
+                </a:solidFill>
+                <a:latin typeface="Times New Roman"/>
+              </a:defRPr>
+            </a:pPr>
+            <a:r>
+              <a:t>Results Analysis &amp; System Evaluation</a:t>
+            </a:r>
+          </a:p>
+          <a:p>
+            <a:pPr>
+              <a:spcAft>
+                <a:spcPts val="250"/>
+              </a:spcAft>
+              <a:defRPr sz="1400">
+                <a:solidFill>
+                  <a:srgbClr val="1E293B"/>
+                </a:solidFill>
+                <a:latin typeface="Times New Roman"/>
+              </a:defRPr>
+            </a:pPr>
+            <a:r>
               <a:t>Project Outcomes &amp; Conclusion</a:t>
             </a:r>
           </a:p>
           <a:p>
             <a:pPr>
               <a:spcAft>
-                <a:spcPts val="300"/>
-              </a:spcAft>
-              <a:defRPr sz="1500">
+                <a:spcPts val="250"/>
+              </a:spcAft>
+              <a:defRPr sz="1400">
                 <a:solidFill>
                   <a:srgbClr val="1E293B"/>
                 </a:solidFill>
@@ -17554,13 +17587,26 @@
             <p:ph type="title"/>
           </p:nvPr>
         </p:nvSpPr>
-        <p:spPr/>
+        <p:spPr>
+          <a:xfrm>
+            <a:off x="457200" y="320040"/>
+            <a:ext cx="8229600" cy="502920"/>
+          </a:xfrm>
+        </p:spPr>
         <p:txBody>
           <a:bodyPr>
             <a:normAutofit/>
           </a:bodyPr>
           <a:lstStyle/>
           <a:p>
+            <a:pPr>
+              <a:defRPr sz="2200" b="1">
+                <a:solidFill>
+                  <a:srgbClr val="1F497D"/>
+                </a:solidFill>
+                <a:latin typeface="Times New Roman"/>
+              </a:defRPr>
+            </a:pPr>
             <a:r>
               <a:rPr lang="en-IN" dirty="0">
                 <a:latin typeface="Times New Roman" panose="02020603050405020304" pitchFamily="18" charset="0"/>
@@ -17598,6 +17644,426 @@
               <a:t>20</a:t>
             </a:fld>
             <a:endParaRPr lang="en-US"/>
+          </a:p>
+        </p:txBody>
+      </p:sp>
+      <p:sp>
+        <p:nvSpPr>
+          <p:cNvPr id="4" name="TextBox 3"/>
+          <p:cNvSpPr txBox="1"/>
+          <p:nvPr/>
+        </p:nvSpPr>
+        <p:spPr>
+          <a:xfrm>
+            <a:off x="457200" y="804672"/>
+            <a:ext cx="8229600" cy="274320"/>
+          </a:xfrm>
+          <a:prstGeom prst="rect">
+            <a:avLst/>
+          </a:prstGeom>
+          <a:noFill/>
+        </p:spPr>
+        <p:txBody>
+          <a:bodyPr wrap="square" lIns="0" tIns="0" rIns="0" bIns="0">
+            <a:spAutoFit/>
+          </a:bodyPr>
+          <a:lstStyle/>
+          <a:p>
+            <a:pPr>
+              <a:defRPr sz="1000" i="1">
+                <a:solidFill>
+                  <a:srgbClr val="64748B"/>
+                </a:solidFill>
+                <a:latin typeface="Times New Roman"/>
+              </a:defRPr>
+            </a:pPr>
+            <a:r>
+              <a:t>Security Operations Center Architecture • Live Telemetry Stream • Forensic Audit Drawer</a:t>
+            </a:r>
+          </a:p>
+        </p:txBody>
+      </p:sp>
+      <p:sp>
+        <p:nvSpPr>
+          <p:cNvPr id="5" name="Rounded Rectangle 4"/>
+          <p:cNvSpPr/>
+          <p:nvPr/>
+        </p:nvSpPr>
+        <p:spPr>
+          <a:xfrm>
+            <a:off x="457200" y="1188720"/>
+            <a:ext cx="3977639" cy="4892040"/>
+          </a:xfrm>
+          <a:prstGeom prst="roundRect">
+            <a:avLst/>
+          </a:prstGeom>
+          <a:solidFill>
+            <a:srgbClr val="F1F5F9"/>
+          </a:solidFill>
+          <a:ln w="19050">
+            <a:solidFill>
+              <a:srgbClr val="1F497D"/>
+            </a:solidFill>
+          </a:ln>
+        </p:spPr>
+        <p:style>
+          <a:lnRef idx="1">
+            <a:schemeClr val="accent1"/>
+          </a:lnRef>
+          <a:fillRef idx="3">
+            <a:schemeClr val="accent1"/>
+          </a:fillRef>
+          <a:effectRef idx="2">
+            <a:schemeClr val="accent1"/>
+          </a:effectRef>
+          <a:fontRef idx="minor">
+            <a:schemeClr val="lt1"/>
+          </a:fontRef>
+        </p:style>
+        <p:txBody>
+          <a:bodyPr rtlCol="0" anchor="ctr"/>
+          <a:lstStyle/>
+          <a:p>
+            <a:pPr algn="ctr"/>
+          </a:p>
+        </p:txBody>
+      </p:sp>
+      <p:pic>
+        <p:nvPicPr>
+          <p:cNvPr id="6" name="Picture 5" descr="telemetry_pipeline.png"/>
+          <p:cNvPicPr>
+            <a:picLocks noChangeAspect="1"/>
+          </p:cNvPicPr>
+          <p:nvPr/>
+        </p:nvPicPr>
+        <p:blipFill>
+          <a:blip r:embed="rId2"/>
+          <a:stretch>
+            <a:fillRect/>
+          </a:stretch>
+        </p:blipFill>
+        <p:spPr>
+          <a:xfrm>
+            <a:off x="548640" y="1325880"/>
+            <a:ext cx="3794760" cy="2240280"/>
+          </a:xfrm>
+          <a:prstGeom prst="rect">
+            <a:avLst/>
+          </a:prstGeom>
+        </p:spPr>
+      </p:pic>
+      <p:sp>
+        <p:nvSpPr>
+          <p:cNvPr id="7" name="TextBox 6"/>
+          <p:cNvSpPr txBox="1"/>
+          <p:nvPr/>
+        </p:nvSpPr>
+        <p:spPr>
+          <a:xfrm>
+            <a:off x="548640" y="3657600"/>
+            <a:ext cx="3794760" cy="2331720"/>
+          </a:xfrm>
+          <a:prstGeom prst="rect">
+            <a:avLst/>
+          </a:prstGeom>
+          <a:noFill/>
+        </p:spPr>
+        <p:txBody>
+          <a:bodyPr wrap="square" lIns="0" rIns="0" tIns="0" bIns="0">
+            <a:spAutoFit/>
+          </a:bodyPr>
+          <a:lstStyle/>
+          <a:p>
+            <a:pPr>
+              <a:spcAft>
+                <a:spcPts val="400"/>
+              </a:spcAft>
+              <a:defRPr sz="950" b="1">
+                <a:solidFill>
+                  <a:srgbClr val="1F497D"/>
+                </a:solidFill>
+                <a:latin typeface="Times New Roman"/>
+              </a:defRPr>
+            </a:pPr>
+            <a:r>
+              <a:t>Fig: End-to-End Telemetry Ingestion &amp; Real-Time Monitoring Pipeline</a:t>
+            </a:r>
+          </a:p>
+          <a:p>
+            <a:pPr>
+              <a:spcAft>
+                <a:spcPts val="200"/>
+              </a:spcAft>
+              <a:defRPr sz="800">
+                <a:solidFill>
+                  <a:srgbClr val="1E293B"/>
+                </a:solidFill>
+                <a:latin typeface="Times New Roman"/>
+              </a:defRPr>
+            </a:pPr>
+            <a:r>
+              <a:t>• Active Agent Monitoring: Captures granular execution metrics across distributed nodes.</a:t>
+            </a:r>
+          </a:p>
+          <a:p>
+            <a:pPr>
+              <a:spcAft>
+                <a:spcPts val="200"/>
+              </a:spcAft>
+              <a:defRPr sz="800">
+                <a:solidFill>
+                  <a:srgbClr val="1E293B"/>
+                </a:solidFill>
+                <a:latin typeface="Times New Roman"/>
+              </a:defRPr>
+            </a:pPr>
+            <a:r>
+              <a:t>• Dynamic Threat Detection: Identifies aberrant latency and compliance drops instantly.</a:t>
+            </a:r>
+          </a:p>
+          <a:p>
+            <a:pPr>
+              <a:spcAft>
+                <a:spcPts val="200"/>
+              </a:spcAft>
+              <a:defRPr sz="800">
+                <a:solidFill>
+                  <a:srgbClr val="1E293B"/>
+                </a:solidFill>
+                <a:latin typeface="Times New Roman"/>
+              </a:defRPr>
+            </a:pPr>
+            <a:r>
+              <a:t>• Immutable SQLite WAL Logging: Stores telemetry events with microsecond timestamps.</a:t>
+            </a:r>
+          </a:p>
+        </p:txBody>
+      </p:sp>
+      <p:sp>
+        <p:nvSpPr>
+          <p:cNvPr id="8" name="Rounded Rectangle 7"/>
+          <p:cNvSpPr/>
+          <p:nvPr/>
+        </p:nvSpPr>
+        <p:spPr>
+          <a:xfrm>
+            <a:off x="4709160" y="1188720"/>
+            <a:ext cx="3977639" cy="4892040"/>
+          </a:xfrm>
+          <a:prstGeom prst="roundRect">
+            <a:avLst/>
+          </a:prstGeom>
+          <a:solidFill>
+            <a:srgbClr val="F8FAFC"/>
+          </a:solidFill>
+          <a:ln w="15240">
+            <a:solidFill>
+              <a:srgbClr val="1F497D"/>
+            </a:solidFill>
+          </a:ln>
+        </p:spPr>
+        <p:style>
+          <a:lnRef idx="1">
+            <a:schemeClr val="accent1"/>
+          </a:lnRef>
+          <a:fillRef idx="3">
+            <a:schemeClr val="accent1"/>
+          </a:fillRef>
+          <a:effectRef idx="2">
+            <a:schemeClr val="accent1"/>
+          </a:effectRef>
+          <a:fontRef idx="minor">
+            <a:schemeClr val="lt1"/>
+          </a:fontRef>
+        </p:style>
+        <p:txBody>
+          <a:bodyPr rtlCol="0" anchor="ctr" wrap="square" lIns="109728" rIns="109728" tIns="91440" bIns="73152"/>
+          <a:lstStyle/>
+          <a:p>
+            <a:pPr algn="ctr">
+              <a:spcAft>
+                <a:spcPts val="300"/>
+              </a:spcAft>
+              <a:defRPr sz="1050" b="1">
+                <a:solidFill>
+                  <a:srgbClr val="1F497D"/>
+                </a:solidFill>
+                <a:latin typeface="Times New Roman"/>
+              </a:defRPr>
+            </a:pPr>
+            <a:r>
+              <a:t>SOC Operational Capabilities &amp; Investigation</a:t>
+            </a:r>
+          </a:p>
+          <a:p>
+            <a:pPr>
+              <a:spcAft>
+                <a:spcPts val="200"/>
+              </a:spcAft>
+              <a:defRPr sz="850">
+                <a:latin typeface="Times New Roman"/>
+              </a:defRPr>
+            </a:pPr>
+            <a:r>
+              <a:rPr b="1">
+                <a:solidFill>
+                  <a:srgbClr val="1F497D"/>
+                </a:solidFill>
+              </a:rPr>
+              <a:t>• </a:t>
+            </a:r>
+            <a:r>
+              <a:rPr b="1">
+                <a:solidFill>
+                  <a:srgbClr val="1E293B"/>
+                </a:solidFill>
+              </a:rPr>
+              <a:t>Live Behavioral Telemetry Stream: </a:t>
+            </a:r>
+            <a:r>
+              <a:rPr>
+                <a:solidFill>
+                  <a:srgbClr val="1E293B"/>
+                </a:solidFill>
+              </a:rPr>
+              <a:t>Ingests Task Success (Si), Compliance (Ci), and Latency penalty (Li) via FastAPI endpoint in real time.</a:t>
+            </a:r>
+          </a:p>
+          <a:p>
+            <a:pPr>
+              <a:spcAft>
+                <a:spcPts val="200"/>
+              </a:spcAft>
+              <a:defRPr sz="850">
+                <a:latin typeface="Times New Roman"/>
+              </a:defRPr>
+            </a:pPr>
+            <a:r>
+              <a:rPr b="1">
+                <a:solidFill>
+                  <a:srgbClr val="1F497D"/>
+                </a:solidFill>
+              </a:rPr>
+              <a:t>• </a:t>
+            </a:r>
+            <a:r>
+              <a:rPr b="1">
+                <a:solidFill>
+                  <a:srgbClr val="1E293B"/>
+                </a:solidFill>
+              </a:rPr>
+              <a:t>Interactive Investigation Drawer: </a:t>
+            </a:r>
+            <a:r>
+              <a:rPr>
+                <a:solidFill>
+                  <a:srgbClr val="1E293B"/>
+                </a:solidFill>
+              </a:rPr>
+              <a:t>Enables security analysts to inspect raw DID documents, Ed25519 public keys, issued Verifiable Credentials, and historical trust scores.</a:t>
+            </a:r>
+          </a:p>
+          <a:p>
+            <a:pPr>
+              <a:spcAft>
+                <a:spcPts val="200"/>
+              </a:spcAft>
+              <a:defRPr sz="850">
+                <a:latin typeface="Times New Roman"/>
+              </a:defRPr>
+            </a:pPr>
+            <a:r>
+              <a:rPr b="1">
+                <a:solidFill>
+                  <a:srgbClr val="1F497D"/>
+                </a:solidFill>
+              </a:rPr>
+              <a:t>• </a:t>
+            </a:r>
+            <a:r>
+              <a:rPr b="1">
+                <a:solidFill>
+                  <a:srgbClr val="1E293B"/>
+                </a:solidFill>
+              </a:rPr>
+              <a:t>Administrative Override Controls: </a:t>
+            </a:r>
+            <a:r>
+              <a:rPr>
+                <a:solidFill>
+                  <a:srgbClr val="1E293B"/>
+                </a:solidFill>
+              </a:rPr>
+              <a:t>Administrators can quarantine suspicious agents, trigger diagnostic reviews, or execute permanent revocations with one click.</a:t>
+            </a:r>
+          </a:p>
+          <a:p>
+            <a:pPr>
+              <a:spcAft>
+                <a:spcPts val="200"/>
+              </a:spcAft>
+              <a:defRPr sz="850">
+                <a:latin typeface="Times New Roman"/>
+              </a:defRPr>
+            </a:pPr>
+            <a:r>
+              <a:rPr b="1">
+                <a:solidFill>
+                  <a:srgbClr val="1F497D"/>
+                </a:solidFill>
+              </a:rPr>
+              <a:t>• </a:t>
+            </a:r>
+            <a:r>
+              <a:rPr b="1">
+                <a:solidFill>
+                  <a:srgbClr val="1E293B"/>
+                </a:solidFill>
+              </a:rPr>
+              <a:t>Cryptographic Audit Trail: </a:t>
+            </a:r>
+            <a:r>
+              <a:rPr>
+                <a:solidFill>
+                  <a:srgbClr val="1E293B"/>
+                </a:solidFill>
+              </a:rPr>
+              <a:t>Every state transition, session event, and override is immutably logged into the 13-table SQLite WAL Verifiable Data Registry.</a:t>
+            </a:r>
+          </a:p>
+          <a:p>
+            <a:pPr>
+              <a:spcAft>
+                <a:spcPts val="200"/>
+              </a:spcAft>
+              <a:defRPr sz="850">
+                <a:latin typeface="Times New Roman"/>
+              </a:defRPr>
+            </a:pPr>
+            <a:r>
+              <a:rPr b="1">
+                <a:solidFill>
+                  <a:srgbClr val="1F497D"/>
+                </a:solidFill>
+              </a:rPr>
+              <a:t>• </a:t>
+            </a:r>
+            <a:r>
+              <a:rPr b="1">
+                <a:solidFill>
+                  <a:srgbClr val="1E293B"/>
+                </a:solidFill>
+              </a:rPr>
+              <a:t>Fail-Closed Zero Trust: </a:t>
+            </a:r>
+            <a:r>
+              <a:rPr>
+                <a:solidFill>
+                  <a:srgbClr val="1E293B"/>
+                </a:solidFill>
+              </a:rPr>
+              <a:t>Throttles or severs compromised agent connections before lateral contamination affects critical multi-agent pipelines.</a:t>
+            </a:r>
           </a:p>
         </p:txBody>
       </p:sp>
@@ -17690,12 +18156,17 @@
           <a:bodyPr/>
           <a:lstStyle/>
           <a:p>
-            <a:fld id="{B6F15528-21DE-4FAA-801E-634DDDAF4B2B}" type="slidenum">
-              <a:rPr lang="en-US" smtClean="0"/>
-              <a:pPr/>
-              <a:t>21</a:t>
-            </a:fld>
-            <a:endParaRPr lang="en-US"/>
+            <a:pPr algn="r">
+              <a:defRPr sz="1200">
+                <a:solidFill>
+                  <a:srgbClr val="64748B"/>
+                </a:solidFill>
+                <a:latin typeface="Times New Roman"/>
+              </a:defRPr>
+            </a:pPr>
+            <a:r>
+              <a:t>23</a:t>
+            </a:r>
           </a:p>
         </p:txBody>
       </p:sp>
@@ -19788,12 +20259,17 @@
           <a:bodyPr/>
           <a:lstStyle/>
           <a:p>
-            <a:fld id="{B6F15528-21DE-4FAA-801E-634DDDAF4B2B}" type="slidenum">
-              <a:rPr lang="en-US" smtClean="0"/>
-              <a:pPr/>
-              <a:t>22</a:t>
-            </a:fld>
-            <a:endParaRPr lang="en-US"/>
+            <a:pPr algn="r">
+              <a:defRPr sz="1200">
+                <a:solidFill>
+                  <a:srgbClr val="64748B"/>
+                </a:solidFill>
+                <a:latin typeface="Times New Roman"/>
+              </a:defRPr>
+            </a:pPr>
+            <a:r>
+              <a:t>24</a:t>
+            </a:r>
           </a:p>
         </p:txBody>
       </p:sp>
@@ -20055,12 +20531,17 @@
           <a:bodyPr/>
           <a:lstStyle/>
           <a:p>
-            <a:fld id="{B6F15528-21DE-4FAA-801E-634DDDAF4B2B}" type="slidenum">
-              <a:rPr lang="en-US" smtClean="0"/>
-              <a:pPr/>
-              <a:t>23</a:t>
-            </a:fld>
-            <a:endParaRPr lang="en-US"/>
+            <a:pPr algn="r">
+              <a:defRPr sz="1200">
+                <a:solidFill>
+                  <a:srgbClr val="64748B"/>
+                </a:solidFill>
+                <a:latin typeface="Times New Roman"/>
+              </a:defRPr>
+            </a:pPr>
+            <a:r>
+              <a:t>25</a:t>
+            </a:r>
           </a:p>
         </p:txBody>
       </p:sp>
@@ -20553,12 +21034,17 @@
           <a:bodyPr/>
           <a:lstStyle/>
           <a:p>
-            <a:fld id="{B6F15528-21DE-4FAA-801E-634DDDAF4B2B}" type="slidenum">
-              <a:rPr lang="en-US" smtClean="0"/>
-              <a:pPr/>
-              <a:t>24</a:t>
-            </a:fld>
-            <a:endParaRPr lang="en-US"/>
+            <a:pPr algn="r">
+              <a:defRPr sz="1200">
+                <a:solidFill>
+                  <a:srgbClr val="64748B"/>
+                </a:solidFill>
+                <a:latin typeface="Times New Roman"/>
+              </a:defRPr>
+            </a:pPr>
+            <a:r>
+              <a:t>26</a:t>
+            </a:r>
           </a:p>
         </p:txBody>
       </p:sp>
@@ -20663,52 +21149,130 @@
       </p:grpSpPr>
       <p:sp>
         <p:nvSpPr>
-          <p:cNvPr id="2" name="Slide Number Placeholder 1">
-            <a:extLst>
-              <a:ext uri="{FF2B5EF4-FFF2-40B4-BE49-F238E27FC236}">
-                <a16:creationId xmlns:a16="http://schemas.microsoft.com/office/drawing/2014/main" id="{E6573F37-0C5B-9177-8935-CF5CD82924DA}"/>
-              </a:ext>
-            </a:extLst>
-          </p:cNvPr>
-          <p:cNvSpPr>
-            <a:spLocks noGrp="1"/>
-          </p:cNvSpPr>
-          <p:nvPr>
-            <p:ph type="sldNum" sz="quarter" idx="12"/>
-          </p:nvPr>
+          <p:cNvPr id="2" name="TextBox 1"/>
+          <p:cNvSpPr txBox="1"/>
+          <p:nvPr/>
         </p:nvSpPr>
-        <p:spPr/>
+        <p:spPr>
+          <a:xfrm>
+            <a:off x="457200" y="320040"/>
+            <a:ext cx="8229600" cy="502920"/>
+          </a:xfrm>
+          <a:prstGeom prst="rect">
+            <a:avLst/>
+          </a:prstGeom>
+          <a:noFill/>
+        </p:spPr>
         <p:txBody>
-          <a:bodyPr/>
+          <a:bodyPr wrap="square" lIns="0" tIns="0" rIns="0" bIns="0">
+            <a:spAutoFit/>
+          </a:bodyPr>
           <a:lstStyle/>
           <a:p>
-            <a:fld id="{B6F15528-21DE-4FAA-801E-634DDDAF4B2B}" type="slidenum">
-              <a:rPr lang="en-US" smtClean="0"/>
-              <a:pPr/>
-              <a:t>25</a:t>
-            </a:fld>
-            <a:endParaRPr lang="en-US"/>
+            <a:pPr>
+              <a:defRPr sz="2200" b="1">
+                <a:solidFill>
+                  <a:srgbClr val="1F497D"/>
+                </a:solidFill>
+                <a:latin typeface="Times New Roman"/>
+              </a:defRPr>
+            </a:pPr>
+            <a:r>
+              <a:t>Actual Project Screenshots: SOC Dashboard &amp; Agent Identity</a:t>
+            </a:r>
           </a:p>
         </p:txBody>
       </p:sp>
       <p:sp>
         <p:nvSpPr>
-          <p:cNvPr id="3" name="Rounded Rectangle 2"/>
+          <p:cNvPr id="3" name="TextBox 2"/>
+          <p:cNvSpPr txBox="1"/>
+          <p:nvPr/>
+        </p:nvSpPr>
+        <p:spPr>
+          <a:xfrm>
+            <a:off x="457200" y="804672"/>
+            <a:ext cx="8229600" cy="256032"/>
+          </a:xfrm>
+          <a:prstGeom prst="rect">
+            <a:avLst/>
+          </a:prstGeom>
+          <a:noFill/>
+        </p:spPr>
+        <p:txBody>
+          <a:bodyPr wrap="square" lIns="0" tIns="0" rIns="0" bIns="0">
+            <a:spAutoFit/>
+          </a:bodyPr>
+          <a:lstStyle/>
+          <a:p>
+            <a:pPr>
+              <a:defRPr sz="1000" i="1">
+                <a:solidFill>
+                  <a:srgbClr val="64748B"/>
+                </a:solidFill>
+                <a:latin typeface="Times New Roman"/>
+              </a:defRPr>
+            </a:pPr>
+            <a:r>
+              <a:t>Operational Telemetry Monitoring • W3C DID Explorer • Verifiable Credential Verification</a:t>
+            </a:r>
+          </a:p>
+        </p:txBody>
+      </p:sp>
+      <p:sp>
+        <p:nvSpPr>
+          <p:cNvPr id="4" name="TextBox 3"/>
+          <p:cNvSpPr txBox="1"/>
+          <p:nvPr/>
+        </p:nvSpPr>
+        <p:spPr>
+          <a:xfrm>
+            <a:off x="6547104" y="6355080"/>
+            <a:ext cx="2130552" cy="320040"/>
+          </a:xfrm>
+          <a:prstGeom prst="rect">
+            <a:avLst/>
+          </a:prstGeom>
+          <a:noFill/>
+        </p:spPr>
+        <p:txBody>
+          <a:bodyPr wrap="none" lIns="0" tIns="0" rIns="0" bIns="0">
+            <a:spAutoFit/>
+          </a:bodyPr>
+          <a:lstStyle/>
+          <a:p>
+            <a:pPr algn="r">
+              <a:defRPr sz="1200">
+                <a:solidFill>
+                  <a:srgbClr val="64748B"/>
+                </a:solidFill>
+                <a:latin typeface="Times New Roman"/>
+              </a:defRPr>
+            </a:pPr>
+            <a:r>
+              <a:t>21</a:t>
+            </a:r>
+          </a:p>
+        </p:txBody>
+      </p:sp>
+      <p:sp>
+        <p:nvSpPr>
+          <p:cNvPr id="5" name="Rounded Rectangle 4"/>
           <p:cNvSpPr/>
           <p:nvPr/>
         </p:nvSpPr>
         <p:spPr>
           <a:xfrm>
-            <a:off x="914400" y="1645920"/>
-            <a:ext cx="7315200" cy="3474720"/>
+            <a:off x="457200" y="1188720"/>
+            <a:ext cx="3977639" cy="2240280"/>
           </a:xfrm>
           <a:prstGeom prst="roundRect">
             <a:avLst/>
           </a:prstGeom>
           <a:solidFill>
-            <a:srgbClr val="F8FAFC"/>
+            <a:srgbClr val="F1F5F9"/>
           </a:solidFill>
-          <a:ln w="25400">
+          <a:ln w="19050">
             <a:solidFill>
               <a:srgbClr val="1F497D"/>
             </a:solidFill>
@@ -20729,86 +21293,490 @@
           </a:fontRef>
         </p:style>
         <p:txBody>
-          <a:bodyPr rtlCol="0" anchor="ctr" wrap="square" tIns="274320" lIns="365760" rIns="365760"/>
+          <a:bodyPr rtlCol="0" anchor="ctr"/>
           <a:lstStyle/>
           <a:p>
+            <a:pPr algn="ctr"/>
+          </a:p>
+        </p:txBody>
+      </p:sp>
+      <p:pic>
+        <p:nvPicPr>
+          <p:cNvPr id="6" name="Picture 5" descr="trust_degradation_dashboard.png"/>
+          <p:cNvPicPr>
+            <a:picLocks noChangeAspect="1"/>
+          </p:cNvPicPr>
+          <p:nvPr/>
+        </p:nvPicPr>
+        <p:blipFill>
+          <a:blip r:embed="rId2"/>
+          <a:stretch>
+            <a:fillRect/>
+          </a:stretch>
+        </p:blipFill>
+        <p:spPr>
+          <a:xfrm>
+            <a:off x="493776" y="1225296"/>
+            <a:ext cx="3904487" cy="2167128"/>
+          </a:xfrm>
+          <a:prstGeom prst="rect">
+            <a:avLst/>
+          </a:prstGeom>
+        </p:spPr>
+      </p:pic>
+      <p:sp>
+        <p:nvSpPr>
+          <p:cNvPr id="7" name="Rounded Rectangle 6"/>
+          <p:cNvSpPr/>
+          <p:nvPr/>
+        </p:nvSpPr>
+        <p:spPr>
+          <a:xfrm>
+            <a:off x="457200" y="3520440"/>
+            <a:ext cx="3977639" cy="2606040"/>
+          </a:xfrm>
+          <a:prstGeom prst="roundRect">
+            <a:avLst/>
+          </a:prstGeom>
+          <a:solidFill>
+            <a:srgbClr val="F8FAFC"/>
+          </a:solidFill>
+          <a:ln w="15240">
+            <a:solidFill>
+              <a:srgbClr val="1F497D"/>
+            </a:solidFill>
+          </a:ln>
+        </p:spPr>
+        <p:style>
+          <a:lnRef idx="1">
+            <a:schemeClr val="accent1"/>
+          </a:lnRef>
+          <a:fillRef idx="3">
+            <a:schemeClr val="accent1"/>
+          </a:fillRef>
+          <a:effectRef idx="2">
+            <a:schemeClr val="accent1"/>
+          </a:effectRef>
+          <a:fontRef idx="minor">
+            <a:schemeClr val="lt1"/>
+          </a:fontRef>
+        </p:style>
+        <p:txBody>
+          <a:bodyPr rtlCol="0" anchor="ctr" wrap="square" lIns="109728" rIns="109728" tIns="91440" bIns="73152"/>
+          <a:lstStyle/>
+          <a:p>
             <a:pPr algn="ctr">
               <a:spcAft>
-                <a:spcPts val="800"/>
-              </a:spcAft>
-              <a:defRPr sz="1300" b="1">
-                <a:solidFill>
-                  <a:srgbClr val="3B82F6"/>
+                <a:spcPts val="300"/>
+              </a:spcAft>
+              <a:defRPr sz="1050" b="1">
+                <a:solidFill>
+                  <a:srgbClr val="1F497D"/>
                 </a:solidFill>
                 <a:latin typeface="Times New Roman"/>
               </a:defRPr>
             </a:pPr>
             <a:r>
-              <a:t>SECTION V: TECHNICAL VALIDATION &amp; PROJECT OUTCOMES</a:t>
-            </a:r>
-          </a:p>
-          <a:p>
-            <a:pPr algn="ctr">
-              <a:spcAft>
-                <a:spcPts val="1600"/>
-              </a:spcAft>
-              <a:defRPr sz="2000" b="1">
-                <a:solidFill>
-                  <a:srgbClr val="1F497D"/>
-                </a:solidFill>
+              <a:t>Fig 1. Real-Time SOC Dashboard &amp; Behavioral Telemetry Stream</a:t>
+            </a:r>
+          </a:p>
+          <a:p>
+            <a:pPr>
+              <a:spcAft>
+                <a:spcPts val="200"/>
+              </a:spcAft>
+              <a:defRPr sz="760">
                 <a:latin typeface="Times New Roman"/>
               </a:defRPr>
             </a:pPr>
             <a:r>
-              <a:t>System Implementation, Empirical Results &amp; Capstone Conclusion</a:t>
-            </a:r>
-          </a:p>
-          <a:p>
-            <a:pPr algn="l">
-              <a:spcAft>
-                <a:spcPts val="600"/>
-              </a:spcAft>
-              <a:defRPr sz="1050">
+              <a:rPr b="1">
+                <a:solidFill>
+                  <a:srgbClr val="1F497D"/>
+                </a:solidFill>
+              </a:rPr>
+              <a:t>• </a:t>
+            </a:r>
+            <a:r>
+              <a:rPr b="1">
                 <a:solidFill>
                   <a:srgbClr val="1E293B"/>
                 </a:solidFill>
+              </a:rPr>
+              <a:t>Live Telemetry Stream: </a:t>
+            </a:r>
+            <a:r>
+              <a:rPr>
+                <a:solidFill>
+                  <a:srgbClr val="1E293B"/>
+                </a:solidFill>
+              </a:rPr>
+              <a:t>Ingests task execution events, policy compliance checks, and response latency (Si, Ci, Li) across active agents.</a:t>
+            </a:r>
+          </a:p>
+          <a:p>
+            <a:pPr>
+              <a:spcAft>
+                <a:spcPts val="200"/>
+              </a:spcAft>
+              <a:defRPr sz="760">
                 <a:latin typeface="Times New Roman"/>
               </a:defRPr>
             </a:pPr>
             <a:r>
-              <a:t>• 1. Implementation &amp; Technical Validation: W3C DID, Ed25519, Trust Engine, 80/80 Tests, SQLite WAL VDR.</a:t>
-            </a:r>
-          </a:p>
-          <a:p>
-            <a:pPr algn="l">
-              <a:spcAft>
-                <a:spcPts val="600"/>
-              </a:spcAft>
-              <a:defRPr sz="1050">
+              <a:rPr b="1">
+                <a:solidFill>
+                  <a:srgbClr val="1F497D"/>
+                </a:solidFill>
+              </a:rPr>
+              <a:t>• </a:t>
+            </a:r>
+            <a:r>
+              <a:rPr b="1">
                 <a:solidFill>
                   <a:srgbClr val="1E293B"/>
                 </a:solidFill>
+              </a:rPr>
+              <a:t>Temporal Trust Trajectory: </a:t>
+            </a:r>
+            <a:r>
+              <a:rPr>
+                <a:solidFill>
+                  <a:srgbClr val="1E293B"/>
+                </a:solidFill>
+              </a:rPr>
+              <a:t>Visualizes Exponential Moving Average (EMA) score evolution over time (Ti(t) = 0.70 Ti(t-1) + 0.30 Pi(t)).</a:t>
+            </a:r>
+          </a:p>
+          <a:p>
+            <a:pPr>
+              <a:spcAft>
+                <a:spcPts val="200"/>
+              </a:spcAft>
+              <a:defRPr sz="760">
                 <a:latin typeface="Times New Roman"/>
               </a:defRPr>
             </a:pPr>
             <a:r>
-              <a:t>• 2. Results Analysis &amp; System Evaluation: Dynamic Trust Formula, Adaptive Matrix, Discovery vs. Matching.</a:t>
-            </a:r>
-          </a:p>
-          <a:p>
-            <a:pPr algn="l">
-              <a:spcAft>
-                <a:spcPts val="600"/>
-              </a:spcAft>
-              <a:defRPr sz="1050">
+              <a:rPr b="1">
+                <a:solidFill>
+                  <a:srgbClr val="1F497D"/>
+                </a:solidFill>
+              </a:rPr>
+              <a:t>• </a:t>
+            </a:r>
+            <a:r>
+              <a:rPr b="1">
                 <a:solidFill>
                   <a:srgbClr val="1E293B"/>
                 </a:solidFill>
+              </a:rPr>
+              <a:t>Dynamic Trust-State Classification: </a:t>
+            </a:r>
+            <a:r>
+              <a:rPr>
+                <a:solidFill>
+                  <a:srgbClr val="1E293B"/>
+                </a:solidFill>
+              </a:rPr>
+              <a:t>Displays real-time status badges (TRUSTED &gt;= 0.80, SUSPICIOUS 0.50-0.79, QUARANTINED &lt; 0.50, REVOKED).</a:t>
+            </a:r>
+          </a:p>
+          <a:p>
+            <a:pPr>
+              <a:spcAft>
+                <a:spcPts val="200"/>
+              </a:spcAft>
+              <a:defRPr sz="760">
                 <a:latin typeface="Times New Roman"/>
               </a:defRPr>
             </a:pPr>
             <a:r>
-              <a:t>• 3. Project Outcomes &amp; Conclusion: Zero-Trust Deliverables, Research Contributions, Limitations &amp; Roadmap.</a:t>
+              <a:rPr b="1">
+                <a:solidFill>
+                  <a:srgbClr val="1F497D"/>
+                </a:solidFill>
+              </a:rPr>
+              <a:t>• </a:t>
+            </a:r>
+            <a:r>
+              <a:rPr b="1">
+                <a:solidFill>
+                  <a:srgbClr val="1E293B"/>
+                </a:solidFill>
+              </a:rPr>
+              <a:t>Active Incident Response: </a:t>
+            </a:r>
+            <a:r>
+              <a:rPr>
+                <a:solidFill>
+                  <a:srgbClr val="1E293B"/>
+                </a:solidFill>
+              </a:rPr>
+              <a:t>Real-time alert triggers when an agent's score degrades, alerting security operators.</a:t>
+            </a:r>
+          </a:p>
+        </p:txBody>
+      </p:sp>
+      <p:sp>
+        <p:nvSpPr>
+          <p:cNvPr id="8" name="Rounded Rectangle 7"/>
+          <p:cNvSpPr/>
+          <p:nvPr/>
+        </p:nvSpPr>
+        <p:spPr>
+          <a:xfrm>
+            <a:off x="4709160" y="1188720"/>
+            <a:ext cx="3977639" cy="2240280"/>
+          </a:xfrm>
+          <a:prstGeom prst="roundRect">
+            <a:avLst/>
+          </a:prstGeom>
+          <a:solidFill>
+            <a:srgbClr val="F1F5F9"/>
+          </a:solidFill>
+          <a:ln w="19050">
+            <a:solidFill>
+              <a:srgbClr val="0284C7"/>
+            </a:solidFill>
+          </a:ln>
+        </p:spPr>
+        <p:style>
+          <a:lnRef idx="1">
+            <a:schemeClr val="accent1"/>
+          </a:lnRef>
+          <a:fillRef idx="3">
+            <a:schemeClr val="accent1"/>
+          </a:fillRef>
+          <a:effectRef idx="2">
+            <a:schemeClr val="accent1"/>
+          </a:effectRef>
+          <a:fontRef idx="minor">
+            <a:schemeClr val="lt1"/>
+          </a:fontRef>
+        </p:style>
+        <p:txBody>
+          <a:bodyPr rtlCol="0" anchor="ctr"/>
+          <a:lstStyle/>
+          <a:p>
+            <a:pPr algn="ctr"/>
+          </a:p>
+        </p:txBody>
+      </p:sp>
+      <p:pic>
+        <p:nvPicPr>
+          <p:cNvPr id="9" name="Picture 8" descr="agent_identity_vc.png"/>
+          <p:cNvPicPr>
+            <a:picLocks noChangeAspect="1"/>
+          </p:cNvPicPr>
+          <p:nvPr/>
+        </p:nvPicPr>
+        <p:blipFill>
+          <a:blip r:embed="rId3"/>
+          <a:stretch>
+            <a:fillRect/>
+          </a:stretch>
+        </p:blipFill>
+        <p:spPr>
+          <a:xfrm>
+            <a:off x="4745736" y="1225296"/>
+            <a:ext cx="3904487" cy="2167128"/>
+          </a:xfrm>
+          <a:prstGeom prst="rect">
+            <a:avLst/>
+          </a:prstGeom>
+        </p:spPr>
+      </p:pic>
+      <p:sp>
+        <p:nvSpPr>
+          <p:cNvPr id="10" name="Rounded Rectangle 9"/>
+          <p:cNvSpPr/>
+          <p:nvPr/>
+        </p:nvSpPr>
+        <p:spPr>
+          <a:xfrm>
+            <a:off x="4709160" y="3520440"/>
+            <a:ext cx="3977639" cy="2606040"/>
+          </a:xfrm>
+          <a:prstGeom prst="roundRect">
+            <a:avLst/>
+          </a:prstGeom>
+          <a:solidFill>
+            <a:srgbClr val="F8FAFC"/>
+          </a:solidFill>
+          <a:ln w="15240">
+            <a:solidFill>
+              <a:srgbClr val="0284C7"/>
+            </a:solidFill>
+          </a:ln>
+        </p:spPr>
+        <p:style>
+          <a:lnRef idx="1">
+            <a:schemeClr val="accent1"/>
+          </a:lnRef>
+          <a:fillRef idx="3">
+            <a:schemeClr val="accent1"/>
+          </a:fillRef>
+          <a:effectRef idx="2">
+            <a:schemeClr val="accent1"/>
+          </a:effectRef>
+          <a:fontRef idx="minor">
+            <a:schemeClr val="lt1"/>
+          </a:fontRef>
+        </p:style>
+        <p:txBody>
+          <a:bodyPr rtlCol="0" anchor="ctr" wrap="square" lIns="109728" rIns="109728" tIns="91440" bIns="73152"/>
+          <a:lstStyle/>
+          <a:p>
+            <a:pPr algn="ctr">
+              <a:spcAft>
+                <a:spcPts val="300"/>
+              </a:spcAft>
+              <a:defRPr sz="1050" b="1">
+                <a:solidFill>
+                  <a:srgbClr val="0284C7"/>
+                </a:solidFill>
+                <a:latin typeface="Times New Roman"/>
+              </a:defRPr>
+            </a:pPr>
+            <a:r>
+              <a:t>Fig 2. Agent Identity Explorer &amp; W3C Verifiable Credential Verification</a:t>
+            </a:r>
+          </a:p>
+          <a:p>
+            <a:pPr>
+              <a:spcAft>
+                <a:spcPts val="200"/>
+              </a:spcAft>
+              <a:defRPr sz="760">
+                <a:latin typeface="Times New Roman"/>
+              </a:defRPr>
+            </a:pPr>
+            <a:r>
+              <a:rPr b="1">
+                <a:solidFill>
+                  <a:srgbClr val="0284C7"/>
+                </a:solidFill>
+              </a:rPr>
+              <a:t>• </a:t>
+            </a:r>
+            <a:r>
+              <a:rPr b="1">
+                <a:solidFill>
+                  <a:srgbClr val="1E293B"/>
+                </a:solidFill>
+              </a:rPr>
+              <a:t>W3C Decentralized Identifiers: </a:t>
+            </a:r>
+            <a:r>
+              <a:rPr>
+                <a:solidFill>
+                  <a:srgbClr val="1E293B"/>
+                </a:solidFill>
+              </a:rPr>
+              <a:t>Displays self-sovereign did:key identifiers derived from Ed25519 public keys with multicodec prefix 0xed01.</a:t>
+            </a:r>
+          </a:p>
+          <a:p>
+            <a:pPr>
+              <a:spcAft>
+                <a:spcPts val="200"/>
+              </a:spcAft>
+              <a:defRPr sz="760">
+                <a:latin typeface="Times New Roman"/>
+              </a:defRPr>
+            </a:pPr>
+            <a:r>
+              <a:rPr b="1">
+                <a:solidFill>
+                  <a:srgbClr val="0284C7"/>
+                </a:solidFill>
+              </a:rPr>
+              <a:t>• </a:t>
+            </a:r>
+            <a:r>
+              <a:rPr b="1">
+                <a:solidFill>
+                  <a:srgbClr val="1E293B"/>
+                </a:solidFill>
+              </a:rPr>
+              <a:t>Cryptographic Signatures: </a:t>
+            </a:r>
+            <a:r>
+              <a:rPr>
+                <a:solidFill>
+                  <a:srgbClr val="1E293B"/>
+                </a:solidFill>
+              </a:rPr>
+              <a:t>RFC 8032 Ed25519 256-bit signature verification for authenticating agent identity without passwords.</a:t>
+            </a:r>
+          </a:p>
+          <a:p>
+            <a:pPr>
+              <a:spcAft>
+                <a:spcPts val="200"/>
+              </a:spcAft>
+              <a:defRPr sz="760">
+                <a:latin typeface="Times New Roman"/>
+              </a:defRPr>
+            </a:pPr>
+            <a:r>
+              <a:rPr b="1">
+                <a:solidFill>
+                  <a:srgbClr val="0284C7"/>
+                </a:solidFill>
+              </a:rPr>
+              <a:t>• </a:t>
+            </a:r>
+            <a:r>
+              <a:rPr b="1">
+                <a:solidFill>
+                  <a:srgbClr val="1E293B"/>
+                </a:solidFill>
+              </a:rPr>
+              <a:t>Verifiable Credentials (VC 2.0): </a:t>
+            </a:r>
+            <a:r>
+              <a:rPr>
+                <a:solidFill>
+                  <a:srgbClr val="1E293B"/>
+                </a:solidFill>
+              </a:rPr>
+              <a:t>Inspects JSON-LD credential claims (capabilities, issuer, valid-until) with SHA-256 tamper-evident integrity hashes.</a:t>
+            </a:r>
+          </a:p>
+          <a:p>
+            <a:pPr>
+              <a:spcAft>
+                <a:spcPts val="200"/>
+              </a:spcAft>
+              <a:defRPr sz="760">
+                <a:latin typeface="Times New Roman"/>
+              </a:defRPr>
+            </a:pPr>
+            <a:r>
+              <a:rPr b="1">
+                <a:solidFill>
+                  <a:srgbClr val="0284C7"/>
+                </a:solidFill>
+              </a:rPr>
+              <a:t>• </a:t>
+            </a:r>
+            <a:r>
+              <a:rPr b="1">
+                <a:solidFill>
+                  <a:srgbClr val="1E293B"/>
+                </a:solidFill>
+              </a:rPr>
+              <a:t>Cryptographic Status: </a:t>
+            </a:r>
+            <a:r>
+              <a:rPr>
+                <a:solidFill>
+                  <a:srgbClr val="1E293B"/>
+                </a:solidFill>
+              </a:rPr>
+              <a:t>Shows verified credential validity, issuance timestamps, and cryptographic revocation status.</a:t>
             </a:r>
           </a:p>
         </p:txBody>
@@ -20873,7 +21841,7 @@
               </a:defRPr>
             </a:pPr>
             <a:r>
-              <a:t>29</a:t>
+              <a:t>30</a:t>
             </a:r>
           </a:p>
         </p:txBody>
@@ -21326,7 +22294,7 @@
               </a:defRPr>
             </a:pPr>
             <a:r>
-              <a:t>30</a:t>
+              <a:t>31</a:t>
             </a:r>
           </a:p>
         </p:txBody>
@@ -21753,7 +22721,7 @@
               </a:defRPr>
             </a:pPr>
             <a:r>
-              <a:t>Implementation &amp; Technical Validation</a:t>
+              <a:t>Actual Project Screenshots: Discovery, Matching &amp; Workflows</a:t>
             </a:r>
           </a:p>
         </p:txBody>
@@ -21789,7 +22757,7 @@
               </a:defRPr>
             </a:pPr>
             <a:r>
-              <a:t>Complete Architecture Integration • Forensic Codebase Verification • Automated CI/CD Metrics</a:t>
+              <a:t>Capability-Based Discovery • Algorithmic Matchmaker • Multi-Agent Collaboration Pipelines</a:t>
             </a:r>
           </a:p>
         </p:txBody>
@@ -21825,7 +22793,659 @@
               </a:defRPr>
             </a:pPr>
             <a:r>
-              <a:t>26</a:t>
+              <a:t>22</a:t>
+            </a:r>
+          </a:p>
+        </p:txBody>
+      </p:sp>
+      <p:sp>
+        <p:nvSpPr>
+          <p:cNvPr id="5" name="Rounded Rectangle 4"/>
+          <p:cNvSpPr/>
+          <p:nvPr/>
+        </p:nvSpPr>
+        <p:spPr>
+          <a:xfrm>
+            <a:off x="457200" y="1188720"/>
+            <a:ext cx="3977639" cy="2240280"/>
+          </a:xfrm>
+          <a:prstGeom prst="roundRect">
+            <a:avLst/>
+          </a:prstGeom>
+          <a:solidFill>
+            <a:srgbClr val="F1F5F9"/>
+          </a:solidFill>
+          <a:ln w="19050">
+            <a:solidFill>
+              <a:srgbClr val="1F497D"/>
+            </a:solidFill>
+          </a:ln>
+        </p:spPr>
+        <p:style>
+          <a:lnRef idx="1">
+            <a:schemeClr val="accent1"/>
+          </a:lnRef>
+          <a:fillRef idx="3">
+            <a:schemeClr val="accent1"/>
+          </a:fillRef>
+          <a:effectRef idx="2">
+            <a:schemeClr val="accent1"/>
+          </a:effectRef>
+          <a:fontRef idx="minor">
+            <a:schemeClr val="lt1"/>
+          </a:fontRef>
+        </p:style>
+        <p:txBody>
+          <a:bodyPr rtlCol="0" anchor="ctr"/>
+          <a:lstStyle/>
+          <a:p>
+            <a:pPr algn="ctr"/>
+          </a:p>
+        </p:txBody>
+      </p:sp>
+      <p:pic>
+        <p:nvPicPr>
+          <p:cNvPr id="6" name="Picture 5" descr="agent_matching_view.png"/>
+          <p:cNvPicPr>
+            <a:picLocks noChangeAspect="1"/>
+          </p:cNvPicPr>
+          <p:nvPr/>
+        </p:nvPicPr>
+        <p:blipFill>
+          <a:blip r:embed="rId2"/>
+          <a:stretch>
+            <a:fillRect/>
+          </a:stretch>
+        </p:blipFill>
+        <p:spPr>
+          <a:xfrm>
+            <a:off x="493776" y="1225296"/>
+            <a:ext cx="3904487" cy="2167128"/>
+          </a:xfrm>
+          <a:prstGeom prst="rect">
+            <a:avLst/>
+          </a:prstGeom>
+        </p:spPr>
+      </p:pic>
+      <p:sp>
+        <p:nvSpPr>
+          <p:cNvPr id="7" name="Rounded Rectangle 6"/>
+          <p:cNvSpPr/>
+          <p:nvPr/>
+        </p:nvSpPr>
+        <p:spPr>
+          <a:xfrm>
+            <a:off x="457200" y="3520440"/>
+            <a:ext cx="3977639" cy="2606040"/>
+          </a:xfrm>
+          <a:prstGeom prst="roundRect">
+            <a:avLst/>
+          </a:prstGeom>
+          <a:solidFill>
+            <a:srgbClr val="F8FAFC"/>
+          </a:solidFill>
+          <a:ln w="15240">
+            <a:solidFill>
+              <a:srgbClr val="1F497D"/>
+            </a:solidFill>
+          </a:ln>
+        </p:spPr>
+        <p:style>
+          <a:lnRef idx="1">
+            <a:schemeClr val="accent1"/>
+          </a:lnRef>
+          <a:fillRef idx="3">
+            <a:schemeClr val="accent1"/>
+          </a:fillRef>
+          <a:effectRef idx="2">
+            <a:schemeClr val="accent1"/>
+          </a:effectRef>
+          <a:fontRef idx="minor">
+            <a:schemeClr val="lt1"/>
+          </a:fontRef>
+        </p:style>
+        <p:txBody>
+          <a:bodyPr rtlCol="0" anchor="ctr" wrap="square" lIns="109728" rIns="109728" tIns="91440" bIns="73152"/>
+          <a:lstStyle/>
+          <a:p>
+            <a:pPr algn="ctr">
+              <a:spcAft>
+                <a:spcPts val="300"/>
+              </a:spcAft>
+              <a:defRPr sz="1050" b="1">
+                <a:solidFill>
+                  <a:srgbClr val="1F497D"/>
+                </a:solidFill>
+                <a:latin typeface="Times New Roman"/>
+              </a:defRPr>
+            </a:pPr>
+            <a:r>
+              <a:t>Fig 3. Task-Driven Algorithmic Matchmaker &amp; Explainable Ranking</a:t>
+            </a:r>
+          </a:p>
+          <a:p>
+            <a:pPr>
+              <a:spcAft>
+                <a:spcPts val="200"/>
+              </a:spcAft>
+              <a:defRPr sz="760">
+                <a:latin typeface="Times New Roman"/>
+              </a:defRPr>
+            </a:pPr>
+            <a:r>
+              <a:rPr b="1">
+                <a:solidFill>
+                  <a:srgbClr val="1F497D"/>
+                </a:solidFill>
+              </a:rPr>
+              <a:t>• </a:t>
+            </a:r>
+            <a:r>
+              <a:rPr b="1">
+                <a:solidFill>
+                  <a:srgbClr val="1E293B"/>
+                </a:solidFill>
+              </a:rPr>
+              <a:t>Multi-Factor Ranking Formula: </a:t>
+            </a:r>
+            <a:r>
+              <a:rPr>
+                <a:solidFill>
+                  <a:srgbClr val="1E293B"/>
+                </a:solidFill>
+              </a:rPr>
+              <a:t>Computes MatchScore = 0.40 T + 0.30 (r/5) + 0.20 sigma + 0.10 (1 - lambda).</a:t>
+            </a:r>
+          </a:p>
+          <a:p>
+            <a:pPr>
+              <a:spcAft>
+                <a:spcPts val="200"/>
+              </a:spcAft>
+              <a:defRPr sz="760">
+                <a:latin typeface="Times New Roman"/>
+              </a:defRPr>
+            </a:pPr>
+            <a:r>
+              <a:rPr b="1">
+                <a:solidFill>
+                  <a:srgbClr val="1F497D"/>
+                </a:solidFill>
+              </a:rPr>
+              <a:t>• </a:t>
+            </a:r>
+            <a:r>
+              <a:rPr b="1">
+                <a:solidFill>
+                  <a:srgbClr val="1E293B"/>
+                </a:solidFill>
+              </a:rPr>
+              <a:t>Explainable Match Breakdown: </a:t>
+            </a:r>
+            <a:r>
+              <a:rPr>
+                <a:solidFill>
+                  <a:srgbClr val="1E293B"/>
+                </a:solidFill>
+              </a:rPr>
+              <a:t>Displays transparent decomposition of trust (T), peer reputation (r), success rate (sigma), and latency penalty (lambda).</a:t>
+            </a:r>
+          </a:p>
+          <a:p>
+            <a:pPr>
+              <a:spcAft>
+                <a:spcPts val="200"/>
+              </a:spcAft>
+              <a:defRPr sz="760">
+                <a:latin typeface="Times New Roman"/>
+              </a:defRPr>
+            </a:pPr>
+            <a:r>
+              <a:rPr b="1">
+                <a:solidFill>
+                  <a:srgbClr val="1F497D"/>
+                </a:solidFill>
+              </a:rPr>
+              <a:t>• </a:t>
+            </a:r>
+            <a:r>
+              <a:rPr b="1">
+                <a:solidFill>
+                  <a:srgbClr val="1E293B"/>
+                </a:solidFill>
+              </a:rPr>
+              <a:t>Zero-Trust Policy Clamp: </a:t>
+            </a:r>
+            <a:r>
+              <a:rPr>
+                <a:solidFill>
+                  <a:srgbClr val="1E293B"/>
+                </a:solidFill>
+              </a:rPr>
+              <a:t>Automatically overrides scores for QUARANTINED (T &lt; 0.50) or REVOKED agents, forcing score to 0.000 ('REJECTED BY POLICY').</a:t>
+            </a:r>
+          </a:p>
+          <a:p>
+            <a:pPr>
+              <a:spcAft>
+                <a:spcPts val="200"/>
+              </a:spcAft>
+              <a:defRPr sz="760">
+                <a:latin typeface="Times New Roman"/>
+              </a:defRPr>
+            </a:pPr>
+            <a:r>
+              <a:rPr b="1">
+                <a:solidFill>
+                  <a:srgbClr val="1F497D"/>
+                </a:solidFill>
+              </a:rPr>
+              <a:t>• </a:t>
+            </a:r>
+            <a:r>
+              <a:rPr b="1">
+                <a:solidFill>
+                  <a:srgbClr val="1E293B"/>
+                </a:solidFill>
+              </a:rPr>
+              <a:t>Capability Filtering: </a:t>
+            </a:r>
+            <a:r>
+              <a:rPr>
+                <a:solidFill>
+                  <a:srgbClr val="1E293B"/>
+                </a:solidFill>
+              </a:rPr>
+              <a:t>Pre-filters candidates by capability tags, availability (AVAILABLE), and HTTP 200 health check probe.</a:t>
+            </a:r>
+          </a:p>
+        </p:txBody>
+      </p:sp>
+      <p:sp>
+        <p:nvSpPr>
+          <p:cNvPr id="8" name="Rounded Rectangle 7"/>
+          <p:cNvSpPr/>
+          <p:nvPr/>
+        </p:nvSpPr>
+        <p:spPr>
+          <a:xfrm>
+            <a:off x="4709160" y="1188720"/>
+            <a:ext cx="3977639" cy="2240280"/>
+          </a:xfrm>
+          <a:prstGeom prst="roundRect">
+            <a:avLst/>
+          </a:prstGeom>
+          <a:solidFill>
+            <a:srgbClr val="F1F5F9"/>
+          </a:solidFill>
+          <a:ln w="19050">
+            <a:solidFill>
+              <a:srgbClr val="0284C7"/>
+            </a:solidFill>
+          </a:ln>
+        </p:spPr>
+        <p:style>
+          <a:lnRef idx="1">
+            <a:schemeClr val="accent1"/>
+          </a:lnRef>
+          <a:fillRef idx="3">
+            <a:schemeClr val="accent1"/>
+          </a:fillRef>
+          <a:effectRef idx="2">
+            <a:schemeClr val="accent1"/>
+          </a:effectRef>
+          <a:fontRef idx="minor">
+            <a:schemeClr val="lt1"/>
+          </a:fontRef>
+        </p:style>
+        <p:txBody>
+          <a:bodyPr rtlCol="0" anchor="ctr"/>
+          <a:lstStyle/>
+          <a:p>
+            <a:pPr algn="ctr"/>
+          </a:p>
+        </p:txBody>
+      </p:sp>
+      <p:pic>
+        <p:nvPicPr>
+          <p:cNvPr id="9" name="Picture 8" descr="collaboration_workflows.png"/>
+          <p:cNvPicPr>
+            <a:picLocks noChangeAspect="1"/>
+          </p:cNvPicPr>
+          <p:nvPr/>
+        </p:nvPicPr>
+        <p:blipFill>
+          <a:blip r:embed="rId3"/>
+          <a:stretch>
+            <a:fillRect/>
+          </a:stretch>
+        </p:blipFill>
+        <p:spPr>
+          <a:xfrm>
+            <a:off x="4745736" y="1225296"/>
+            <a:ext cx="3904487" cy="2167128"/>
+          </a:xfrm>
+          <a:prstGeom prst="rect">
+            <a:avLst/>
+          </a:prstGeom>
+        </p:spPr>
+      </p:pic>
+      <p:sp>
+        <p:nvSpPr>
+          <p:cNvPr id="10" name="Rounded Rectangle 9"/>
+          <p:cNvSpPr/>
+          <p:nvPr/>
+        </p:nvSpPr>
+        <p:spPr>
+          <a:xfrm>
+            <a:off x="4709160" y="3520440"/>
+            <a:ext cx="3977639" cy="2606040"/>
+          </a:xfrm>
+          <a:prstGeom prst="roundRect">
+            <a:avLst/>
+          </a:prstGeom>
+          <a:solidFill>
+            <a:srgbClr val="F8FAFC"/>
+          </a:solidFill>
+          <a:ln w="15240">
+            <a:solidFill>
+              <a:srgbClr val="0284C7"/>
+            </a:solidFill>
+          </a:ln>
+        </p:spPr>
+        <p:style>
+          <a:lnRef idx="1">
+            <a:schemeClr val="accent1"/>
+          </a:lnRef>
+          <a:fillRef idx="3">
+            <a:schemeClr val="accent1"/>
+          </a:fillRef>
+          <a:effectRef idx="2">
+            <a:schemeClr val="accent1"/>
+          </a:effectRef>
+          <a:fontRef idx="minor">
+            <a:schemeClr val="lt1"/>
+          </a:fontRef>
+        </p:style>
+        <p:txBody>
+          <a:bodyPr rtlCol="0" anchor="ctr" wrap="square" lIns="109728" rIns="109728" tIns="91440" bIns="73152"/>
+          <a:lstStyle/>
+          <a:p>
+            <a:pPr algn="ctr">
+              <a:spcAft>
+                <a:spcPts val="300"/>
+              </a:spcAft>
+              <a:defRPr sz="1050" b="1">
+                <a:solidFill>
+                  <a:srgbClr val="0284C7"/>
+                </a:solidFill>
+                <a:latin typeface="Times New Roman"/>
+              </a:defRPr>
+            </a:pPr>
+            <a:r>
+              <a:t>Fig 4. Multi-Agent Collaboration Sessions &amp; Sequential Workflows</a:t>
+            </a:r>
+          </a:p>
+          <a:p>
+            <a:pPr>
+              <a:spcAft>
+                <a:spcPts val="200"/>
+              </a:spcAft>
+              <a:defRPr sz="760">
+                <a:latin typeface="Times New Roman"/>
+              </a:defRPr>
+            </a:pPr>
+            <a:r>
+              <a:rPr b="1">
+                <a:solidFill>
+                  <a:srgbClr val="0284C7"/>
+                </a:solidFill>
+              </a:rPr>
+              <a:t>• </a:t>
+            </a:r>
+            <a:r>
+              <a:rPr b="1">
+                <a:solidFill>
+                  <a:srgbClr val="1E293B"/>
+                </a:solidFill>
+              </a:rPr>
+              <a:t>Lifecycle State Machine: </a:t>
+            </a:r>
+            <a:r>
+              <a:rPr>
+                <a:solidFill>
+                  <a:srgbClr val="1E293B"/>
+                </a:solidFill>
+              </a:rPr>
+              <a:t>Governs collaboration sessions across four states: PENDING -&gt; ACTIVE -&gt; COMPLETED (or TERMINATED).</a:t>
+            </a:r>
+          </a:p>
+          <a:p>
+            <a:pPr>
+              <a:spcAft>
+                <a:spcPts val="200"/>
+              </a:spcAft>
+              <a:defRPr sz="760">
+                <a:latin typeface="Times New Roman"/>
+              </a:defRPr>
+            </a:pPr>
+            <a:r>
+              <a:rPr b="1">
+                <a:solidFill>
+                  <a:srgbClr val="0284C7"/>
+                </a:solidFill>
+              </a:rPr>
+              <a:t>• </a:t>
+            </a:r>
+            <a:r>
+              <a:rPr b="1">
+                <a:solidFill>
+                  <a:srgbClr val="1E293B"/>
+                </a:solidFill>
+              </a:rPr>
+              <a:t>Sequential Workflow Execution: </a:t>
+            </a:r>
+            <a:r>
+              <a:rPr>
+                <a:solidFill>
+                  <a:srgbClr val="1E293B"/>
+                </a:solidFill>
+              </a:rPr>
+              <a:t>Orchestrates multi-step pipelines (e.g. Planning -&gt; Coding -&gt; Review) with mutual authentication.</a:t>
+            </a:r>
+          </a:p>
+          <a:p>
+            <a:pPr>
+              <a:spcAft>
+                <a:spcPts val="200"/>
+              </a:spcAft>
+              <a:defRPr sz="760">
+                <a:latin typeface="Times New Roman"/>
+              </a:defRPr>
+            </a:pPr>
+            <a:r>
+              <a:rPr b="1">
+                <a:solidFill>
+                  <a:srgbClr val="0284C7"/>
+                </a:solidFill>
+              </a:rPr>
+              <a:t>• </a:t>
+            </a:r>
+            <a:r>
+              <a:rPr b="1">
+                <a:solidFill>
+                  <a:srgbClr val="1E293B"/>
+                </a:solidFill>
+              </a:rPr>
+              <a:t>Per-Step Telemetry Ingestion: </a:t>
+            </a:r>
+            <a:r>
+              <a:rPr>
+                <a:solidFill>
+                  <a:srgbClr val="1E293B"/>
+                </a:solidFill>
+              </a:rPr>
+              <a:t>Collects telemetry after every pipeline step and dynamically re-evaluates the executing agent's trust score.</a:t>
+            </a:r>
+          </a:p>
+          <a:p>
+            <a:pPr>
+              <a:spcAft>
+                <a:spcPts val="200"/>
+              </a:spcAft>
+              <a:defRPr sz="760">
+                <a:latin typeface="Times New Roman"/>
+              </a:defRPr>
+            </a:pPr>
+            <a:r>
+              <a:rPr b="1">
+                <a:solidFill>
+                  <a:srgbClr val="0284C7"/>
+                </a:solidFill>
+              </a:rPr>
+              <a:t>• </a:t>
+            </a:r>
+            <a:r>
+              <a:rPr b="1">
+                <a:solidFill>
+                  <a:srgbClr val="1E293B"/>
+                </a:solidFill>
+              </a:rPr>
+              <a:t>Mid-Execution Fail-Closed Abort: </a:t>
+            </a:r>
+            <a:r>
+              <a:rPr>
+                <a:solidFill>
+                  <a:srgbClr val="1E293B"/>
+                </a:solidFill>
+              </a:rPr>
+              <a:t>If an agent's trust score drops below 0.50 mid-session, the workflow immediately aborts with HTTP 403.</a:t>
+            </a:r>
+          </a:p>
+        </p:txBody>
+      </p:sp>
+    </p:spTree>
+  </p:cSld>
+  <p:clrMapOvr>
+    <a:masterClrMapping/>
+  </p:clrMapOvr>
+</p:sld>
+</file>
+
+<file path=ppt/slides/slide29.xml><?xml version="1.0" encoding="utf-8"?>
+<p:sld xmlns:a="http://schemas.openxmlformats.org/drawingml/2006/main" xmlns:p="http://schemas.openxmlformats.org/presentationml/2006/main" xmlns:r="http://schemas.openxmlformats.org/officeDocument/2006/relationships">
+  <p:cSld>
+    <p:spTree>
+      <p:nvGrpSpPr>
+        <p:cNvPr id="1" name=""/>
+        <p:cNvGrpSpPr/>
+        <p:nvPr/>
+      </p:nvGrpSpPr>
+      <p:grpSpPr/>
+      <p:sp>
+        <p:nvSpPr>
+          <p:cNvPr id="2" name="TextBox 1"/>
+          <p:cNvSpPr txBox="1"/>
+          <p:nvPr/>
+        </p:nvSpPr>
+        <p:spPr>
+          <a:xfrm>
+            <a:off x="457200" y="320040"/>
+            <a:ext cx="8229600" cy="502920"/>
+          </a:xfrm>
+          <a:prstGeom prst="rect">
+            <a:avLst/>
+          </a:prstGeom>
+          <a:noFill/>
+        </p:spPr>
+        <p:txBody>
+          <a:bodyPr wrap="square" lIns="0" tIns="0" rIns="0" bIns="0">
+            <a:spAutoFit/>
+          </a:bodyPr>
+          <a:lstStyle/>
+          <a:p>
+            <a:pPr>
+              <a:defRPr sz="2200" b="1">
+                <a:solidFill>
+                  <a:srgbClr val="1F497D"/>
+                </a:solidFill>
+                <a:latin typeface="Times New Roman"/>
+              </a:defRPr>
+            </a:pPr>
+            <a:r>
+              <a:t>Implementation &amp; Technical Validation</a:t>
+            </a:r>
+          </a:p>
+        </p:txBody>
+      </p:sp>
+      <p:sp>
+        <p:nvSpPr>
+          <p:cNvPr id="3" name="TextBox 2"/>
+          <p:cNvSpPr txBox="1"/>
+          <p:nvPr/>
+        </p:nvSpPr>
+        <p:spPr>
+          <a:xfrm>
+            <a:off x="457200" y="804672"/>
+            <a:ext cx="8229600" cy="256032"/>
+          </a:xfrm>
+          <a:prstGeom prst="rect">
+            <a:avLst/>
+          </a:prstGeom>
+          <a:noFill/>
+        </p:spPr>
+        <p:txBody>
+          <a:bodyPr wrap="square" lIns="0" tIns="0" rIns="0" bIns="0">
+            <a:spAutoFit/>
+          </a:bodyPr>
+          <a:lstStyle/>
+          <a:p>
+            <a:pPr>
+              <a:defRPr sz="1000" i="1">
+                <a:solidFill>
+                  <a:srgbClr val="64748B"/>
+                </a:solidFill>
+                <a:latin typeface="Times New Roman"/>
+              </a:defRPr>
+            </a:pPr>
+            <a:r>
+              <a:t>Complete Architecture Integration • Forensic Codebase Verification • Automated CI/CD Metrics</a:t>
+            </a:r>
+          </a:p>
+        </p:txBody>
+      </p:sp>
+      <p:sp>
+        <p:nvSpPr>
+          <p:cNvPr id="4" name="TextBox 3"/>
+          <p:cNvSpPr txBox="1"/>
+          <p:nvPr/>
+        </p:nvSpPr>
+        <p:spPr>
+          <a:xfrm>
+            <a:off x="6547104" y="6355080"/>
+            <a:ext cx="2130552" cy="320040"/>
+          </a:xfrm>
+          <a:prstGeom prst="rect">
+            <a:avLst/>
+          </a:prstGeom>
+          <a:noFill/>
+        </p:spPr>
+        <p:txBody>
+          <a:bodyPr wrap="none" lIns="0" tIns="0" rIns="0" bIns="0">
+            <a:spAutoFit/>
+          </a:bodyPr>
+          <a:lstStyle/>
+          <a:p>
+            <a:pPr algn="r">
+              <a:defRPr sz="1200">
+                <a:solidFill>
+                  <a:srgbClr val="64748B"/>
+                </a:solidFill>
+                <a:latin typeface="Times New Roman"/>
+              </a:defRPr>
+            </a:pPr>
+            <a:r>
+              <a:t>27</a:t>
             </a:r>
           </a:p>
         </p:txBody>
@@ -21868,14 +23488,14 @@
           </a:fontRef>
         </p:style>
         <p:txBody>
-          <a:bodyPr rtlCol="0" anchor="ctr" wrap="square" lIns="109728" rIns="109728" tIns="109728" bIns="91440"/>
+          <a:bodyPr rtlCol="0" anchor="ctr" wrap="square" lIns="109728" rIns="109728" tIns="91440" bIns="73152"/>
           <a:lstStyle/>
           <a:p>
             <a:pPr algn="ctr">
               <a:spcAft>
-                <a:spcPts val="400"/>
-              </a:spcAft>
-              <a:defRPr sz="1100" b="1">
+                <a:spcPts val="300"/>
+              </a:spcAft>
+              <a:defRPr sz="1050" b="1">
                 <a:solidFill>
                   <a:srgbClr val="1F497D"/>
                 </a:solidFill>
@@ -21889,9 +23509,9 @@
           <a:p>
             <a:pPr>
               <a:spcAft>
-                <a:spcPts val="300"/>
-              </a:spcAft>
-              <a:defRPr sz="850">
+                <a:spcPts val="200"/>
+              </a:spcAft>
+              <a:defRPr sz="800">
                 <a:latin typeface="Times New Roman"/>
               </a:defRPr>
             </a:pPr>
@@ -21923,9 +23543,9 @@
           <a:p>
             <a:pPr>
               <a:spcAft>
-                <a:spcPts val="300"/>
-              </a:spcAft>
-              <a:defRPr sz="850">
+                <a:spcPts val="200"/>
+              </a:spcAft>
+              <a:defRPr sz="800">
                 <a:latin typeface="Times New Roman"/>
               </a:defRPr>
             </a:pPr>
@@ -21957,9 +23577,9 @@
           <a:p>
             <a:pPr>
               <a:spcAft>
-                <a:spcPts val="300"/>
-              </a:spcAft>
-              <a:defRPr sz="850">
+                <a:spcPts val="200"/>
+              </a:spcAft>
+              <a:defRPr sz="800">
                 <a:latin typeface="Times New Roman"/>
               </a:defRPr>
             </a:pPr>
@@ -21991,9 +23611,9 @@
           <a:p>
             <a:pPr>
               <a:spcAft>
-                <a:spcPts val="300"/>
-              </a:spcAft>
-              <a:defRPr sz="850">
+                <a:spcPts val="200"/>
+              </a:spcAft>
+              <a:defRPr sz="800">
                 <a:latin typeface="Times New Roman"/>
               </a:defRPr>
             </a:pPr>
@@ -22062,14 +23682,14 @@
           </a:fontRef>
         </p:style>
         <p:txBody>
-          <a:bodyPr rtlCol="0" anchor="ctr" wrap="square" lIns="109728" rIns="109728" tIns="109728" bIns="91440"/>
+          <a:bodyPr rtlCol="0" anchor="ctr" wrap="square" lIns="109728" rIns="109728" tIns="91440" bIns="73152"/>
           <a:lstStyle/>
           <a:p>
             <a:pPr algn="ctr">
               <a:spcAft>
-                <a:spcPts val="400"/>
-              </a:spcAft>
-              <a:defRPr sz="1100" b="1">
+                <a:spcPts val="300"/>
+              </a:spcAft>
+              <a:defRPr sz="1050" b="1">
                 <a:solidFill>
                   <a:srgbClr val="15803D"/>
                 </a:solidFill>
@@ -22083,9 +23703,9 @@
           <a:p>
             <a:pPr>
               <a:spcAft>
-                <a:spcPts val="300"/>
-              </a:spcAft>
-              <a:defRPr sz="850">
+                <a:spcPts val="200"/>
+              </a:spcAft>
+              <a:defRPr sz="800">
                 <a:latin typeface="Times New Roman"/>
               </a:defRPr>
             </a:pPr>
@@ -22117,9 +23737,9 @@
           <a:p>
             <a:pPr>
               <a:spcAft>
-                <a:spcPts val="300"/>
-              </a:spcAft>
-              <a:defRPr sz="850">
+                <a:spcPts val="200"/>
+              </a:spcAft>
+              <a:defRPr sz="800">
                 <a:latin typeface="Times New Roman"/>
               </a:defRPr>
             </a:pPr>
@@ -22151,9 +23771,9 @@
           <a:p>
             <a:pPr>
               <a:spcAft>
-                <a:spcPts val="300"/>
-              </a:spcAft>
-              <a:defRPr sz="850">
+                <a:spcPts val="200"/>
+              </a:spcAft>
+              <a:defRPr sz="800">
                 <a:latin typeface="Times New Roman"/>
               </a:defRPr>
             </a:pPr>
@@ -22185,9 +23805,9 @@
           <a:p>
             <a:pPr>
               <a:spcAft>
-                <a:spcPts val="300"/>
-              </a:spcAft>
-              <a:defRPr sz="850">
+                <a:spcPts val="200"/>
+              </a:spcAft>
+              <a:defRPr sz="800">
                 <a:latin typeface="Times New Roman"/>
               </a:defRPr>
             </a:pPr>
@@ -22219,9 +23839,9 @@
           <a:p>
             <a:pPr>
               <a:spcAft>
-                <a:spcPts val="300"/>
-              </a:spcAft>
-              <a:defRPr sz="850">
+                <a:spcPts val="200"/>
+              </a:spcAft>
+              <a:defRPr sz="800">
                 <a:latin typeface="Times New Roman"/>
               </a:defRPr>
             </a:pPr>
@@ -22290,14 +23910,14 @@
           </a:fontRef>
         </p:style>
         <p:txBody>
-          <a:bodyPr rtlCol="0" anchor="ctr" wrap="square" lIns="109728" rIns="109728" tIns="109728" bIns="91440"/>
+          <a:bodyPr rtlCol="0" anchor="ctr" wrap="square" lIns="109728" rIns="109728" tIns="91440" bIns="73152"/>
           <a:lstStyle/>
           <a:p>
             <a:pPr algn="ctr">
               <a:spcAft>
-                <a:spcPts val="400"/>
-              </a:spcAft>
-              <a:defRPr sz="1100" b="1">
+                <a:spcPts val="300"/>
+              </a:spcAft>
+              <a:defRPr sz="1050" b="1">
                 <a:solidFill>
                   <a:srgbClr val="B45309"/>
                 </a:solidFill>
@@ -22311,9 +23931,9 @@
           <a:p>
             <a:pPr>
               <a:spcAft>
-                <a:spcPts val="300"/>
-              </a:spcAft>
-              <a:defRPr sz="850">
+                <a:spcPts val="200"/>
+              </a:spcAft>
+              <a:defRPr sz="800">
                 <a:latin typeface="Times New Roman"/>
               </a:defRPr>
             </a:pPr>
@@ -22345,9 +23965,9 @@
           <a:p>
             <a:pPr>
               <a:spcAft>
-                <a:spcPts val="300"/>
-              </a:spcAft>
-              <a:defRPr sz="850">
+                <a:spcPts val="200"/>
+              </a:spcAft>
+              <a:defRPr sz="800">
                 <a:latin typeface="Times New Roman"/>
               </a:defRPr>
             </a:pPr>
@@ -22379,9 +23999,9 @@
           <a:p>
             <a:pPr>
               <a:spcAft>
-                <a:spcPts val="300"/>
-              </a:spcAft>
-              <a:defRPr sz="850">
+                <a:spcPts val="200"/>
+              </a:spcAft>
+              <a:defRPr sz="800">
                 <a:latin typeface="Times New Roman"/>
               </a:defRPr>
             </a:pPr>
@@ -22413,9 +24033,9 @@
           <a:p>
             <a:pPr>
               <a:spcAft>
-                <a:spcPts val="300"/>
-              </a:spcAft>
-              <a:defRPr sz="850">
+                <a:spcPts val="200"/>
+              </a:spcAft>
+              <a:defRPr sz="800">
                 <a:latin typeface="Times New Roman"/>
               </a:defRPr>
             </a:pPr>
@@ -22447,9 +24067,9 @@
           <a:p>
             <a:pPr>
               <a:spcAft>
-                <a:spcPts val="300"/>
-              </a:spcAft>
-              <a:defRPr sz="850">
+                <a:spcPts val="200"/>
+              </a:spcAft>
+              <a:defRPr sz="800">
                 <a:latin typeface="Times New Roman"/>
               </a:defRPr>
             </a:pPr>
@@ -22518,14 +24138,14 @@
           </a:fontRef>
         </p:style>
         <p:txBody>
-          <a:bodyPr rtlCol="0" anchor="ctr" wrap="square" lIns="109728" rIns="109728" tIns="109728" bIns="91440"/>
+          <a:bodyPr rtlCol="0" anchor="ctr" wrap="square" lIns="109728" rIns="109728" tIns="91440" bIns="73152"/>
           <a:lstStyle/>
           <a:p>
             <a:pPr algn="ctr">
               <a:spcAft>
-                <a:spcPts val="400"/>
-              </a:spcAft>
-              <a:defRPr sz="1100" b="1">
+                <a:spcPts val="300"/>
+              </a:spcAft>
+              <a:defRPr sz="1050" b="1">
                 <a:solidFill>
                   <a:srgbClr val="334155"/>
                 </a:solidFill>
@@ -22539,9 +24159,9 @@
           <a:p>
             <a:pPr>
               <a:spcAft>
-                <a:spcPts val="300"/>
-              </a:spcAft>
-              <a:defRPr sz="850">
+                <a:spcPts val="200"/>
+              </a:spcAft>
+              <a:defRPr sz="800">
                 <a:latin typeface="Times New Roman"/>
               </a:defRPr>
             </a:pPr>
@@ -22573,9 +24193,9 @@
           <a:p>
             <a:pPr>
               <a:spcAft>
-                <a:spcPts val="300"/>
-              </a:spcAft>
-              <a:defRPr sz="850">
+                <a:spcPts val="200"/>
+              </a:spcAft>
+              <a:defRPr sz="800">
                 <a:latin typeface="Times New Roman"/>
               </a:defRPr>
             </a:pPr>
@@ -22607,9 +24227,9 @@
           <a:p>
             <a:pPr>
               <a:spcAft>
-                <a:spcPts val="300"/>
-              </a:spcAft>
-              <a:defRPr sz="850">
+                <a:spcPts val="200"/>
+              </a:spcAft>
+              <a:defRPr sz="800">
                 <a:latin typeface="Times New Roman"/>
               </a:defRPr>
             </a:pPr>
@@ -22641,9 +24261,9 @@
           <a:p>
             <a:pPr>
               <a:spcAft>
-                <a:spcPts val="300"/>
-              </a:spcAft>
-              <a:defRPr sz="850">
+                <a:spcPts val="200"/>
+              </a:spcAft>
+              <a:defRPr sz="800">
                 <a:latin typeface="Times New Roman"/>
               </a:defRPr>
             </a:pPr>
@@ -22675,9 +24295,9 @@
           <a:p>
             <a:pPr>
               <a:spcAft>
-                <a:spcPts val="300"/>
-              </a:spcAft>
-              <a:defRPr sz="850">
+                <a:spcPts val="200"/>
+              </a:spcAft>
+              <a:defRPr sz="800">
                 <a:latin typeface="Times New Roman"/>
               </a:defRPr>
             </a:pPr>
@@ -23111,7 +24731,1800 @@
 </p:sld>
 </file>
 
-<file path=ppt/slides/slide29.xml><?xml version="1.0" encoding="utf-8"?>
+<file path=ppt/slides/slide3.xml><?xml version="1.0" encoding="utf-8"?>
+<p:sld xmlns:a="http://schemas.openxmlformats.org/drawingml/2006/main" xmlns:r="http://schemas.openxmlformats.org/officeDocument/2006/relationships" xmlns:p="http://schemas.openxmlformats.org/presentationml/2006/main">
+  <p:cSld>
+    <p:spTree>
+      <p:nvGrpSpPr>
+        <p:cNvPr id="1" name=""/>
+        <p:cNvGrpSpPr/>
+        <p:nvPr/>
+      </p:nvGrpSpPr>
+      <p:grpSpPr>
+        <a:xfrm>
+          <a:off x="0" y="0"/>
+          <a:ext cx="0" cy="0"/>
+          <a:chOff x="0" y="0"/>
+          <a:chExt cx="0" cy="0"/>
+        </a:xfrm>
+      </p:grpSpPr>
+      <p:sp>
+        <p:nvSpPr>
+          <p:cNvPr id="2" name="Title 1">
+            <a:extLst>
+              <a:ext uri="{FF2B5EF4-FFF2-40B4-BE49-F238E27FC236}">
+                <a16:creationId xmlns:a16="http://schemas.microsoft.com/office/drawing/2014/main" id="{178401B0-A38E-1EB6-320C-DCDFBCE4C106}"/>
+              </a:ext>
+            </a:extLst>
+          </p:cNvPr>
+          <p:cNvSpPr>
+            <a:spLocks noGrp="1"/>
+          </p:cNvSpPr>
+          <p:nvPr>
+            <p:ph type="title"/>
+          </p:nvPr>
+        </p:nvSpPr>
+        <p:spPr>
+          <a:xfrm>
+            <a:off x="425245" y="1143000"/>
+            <a:ext cx="8229600" cy="914400"/>
+          </a:xfrm>
+        </p:spPr>
+        <p:txBody>
+          <a:bodyPr>
+            <a:normAutofit/>
+          </a:bodyPr>
+          <a:lstStyle/>
+          <a:p>
+            <a:r>
+              <a:rPr lang="en-IN" dirty="0"/>
+              <a:t>Progress Since Phase II</a:t>
+            </a:r>
+          </a:p>
+        </p:txBody>
+      </p:sp>
+      <p:sp>
+        <p:nvSpPr>
+          <p:cNvPr id="4" name="Slide Number Placeholder 3">
+            <a:extLst>
+              <a:ext uri="{FF2B5EF4-FFF2-40B4-BE49-F238E27FC236}">
+                <a16:creationId xmlns:a16="http://schemas.microsoft.com/office/drawing/2014/main" id="{7C5AE437-DC0C-0A9B-A490-9267571E8838}"/>
+              </a:ext>
+            </a:extLst>
+          </p:cNvPr>
+          <p:cNvSpPr>
+            <a:spLocks noGrp="1"/>
+          </p:cNvSpPr>
+          <p:nvPr>
+            <p:ph type="sldNum" idx="12"/>
+          </p:nvPr>
+        </p:nvSpPr>
+        <p:spPr/>
+        <p:txBody>
+          <a:bodyPr/>
+          <a:lstStyle/>
+          <a:p>
+            <a:fld id="{B6F15528-21DE-4FAA-801E-634DDDAF4B2B}" type="slidenum">
+              <a:rPr lang="en-US" smtClean="0"/>
+              <a:pPr/>
+              <a:t>3</a:t>
+            </a:fld>
+            <a:endParaRPr lang="en-US"/>
+          </a:p>
+        </p:txBody>
+      </p:sp>
+      <p:graphicFrame>
+        <p:nvGraphicFramePr>
+          <p:cNvPr id="5" name="Table 4">
+            <a:extLst>
+              <a:ext uri="{FF2B5EF4-FFF2-40B4-BE49-F238E27FC236}">
+                <a16:creationId xmlns:a16="http://schemas.microsoft.com/office/drawing/2014/main" id="{1A73FA75-2E92-8256-198C-1329EA0B40DD}"/>
+              </a:ext>
+            </a:extLst>
+          </p:cNvPr>
+          <p:cNvGraphicFramePr>
+            <a:graphicFrameLocks noGrp="1"/>
+          </p:cNvGraphicFramePr>
+          <p:nvPr>
+            <p:extLst>
+              <p:ext uri="{D42A27DB-BD31-4B8C-83A1-F6EECF244321}">
+                <p14:modId xmlns:p14="http://schemas.microsoft.com/office/powerpoint/2010/main" val="1504180756"/>
+              </p:ext>
+            </p:extLst>
+          </p:nvPr>
+        </p:nvGraphicFramePr>
+        <p:xfrm>
+          <a:off x="457200" y="1920615"/>
+          <a:ext cx="8077200" cy="4589717"/>
+        </p:xfrm>
+        <a:graphic>
+          <a:graphicData uri="http://schemas.openxmlformats.org/drawingml/2006/table">
+            <a:tbl>
+              <a:tblPr>
+                <a:tableStyleId>{2D5ABB26-0587-4C30-8999-92F81FD0307C}</a:tableStyleId>
+              </a:tblPr>
+              <a:tblGrid>
+                <a:gridCol w="2692400">
+                  <a:extLst>
+                    <a:ext uri="{9D8B030D-6E8A-4147-A177-3AD203B41FA5}">
+                      <a16:colId xmlns:a16="http://schemas.microsoft.com/office/drawing/2014/main" val="1025360909"/>
+                    </a:ext>
+                  </a:extLst>
+                </a:gridCol>
+                <a:gridCol w="2692400">
+                  <a:extLst>
+                    <a:ext uri="{9D8B030D-6E8A-4147-A177-3AD203B41FA5}">
+                      <a16:colId xmlns:a16="http://schemas.microsoft.com/office/drawing/2014/main" val="3955646252"/>
+                    </a:ext>
+                  </a:extLst>
+                </a:gridCol>
+                <a:gridCol w="2692400">
+                  <a:extLst>
+                    <a:ext uri="{9D8B030D-6E8A-4147-A177-3AD203B41FA5}">
+                      <a16:colId xmlns:a16="http://schemas.microsoft.com/office/drawing/2014/main" val="7229974"/>
+                    </a:ext>
+                  </a:extLst>
+                </a:gridCol>
+              </a:tblGrid>
+              <a:tr h="381000">
+                <a:tc>
+                  <a:txBody>
+                    <a:bodyPr/>
+                    <a:lstStyle/>
+                    <a:p>
+                      <a:pPr>
+                        <a:buNone/>
+                      </a:pPr>
+                      <a:r>
+                        <a:rPr lang="en-IN" sz="1200" b="1" dirty="0">
+                          <a:effectLst/>
+                          <a:latin typeface="Times New Roman" panose="02020603050405020304" pitchFamily="18" charset="0"/>
+                          <a:cs typeface="Times New Roman" panose="02020603050405020304" pitchFamily="18" charset="0"/>
+                        </a:rPr>
+                        <a:t>Area</a:t>
+                      </a:r>
+                    </a:p>
+                  </a:txBody>
+                  <a:tcPr marL="67464" marR="67464" marT="33732" marB="33732" anchor="ctr">
+                    <a:lnL w="12700" cap="flat" cmpd="sng" algn="ctr">
+                      <a:solidFill>
+                        <a:schemeClr val="tx1"/>
+                      </a:solidFill>
+                      <a:prstDash val="solid"/>
+                      <a:round/>
+                      <a:headEnd type="none" w="med" len="med"/>
+                      <a:tailEnd type="none" w="med" len="med"/>
+                    </a:lnL>
+                    <a:lnR w="12700" cap="flat" cmpd="sng" algn="ctr">
+                      <a:solidFill>
+                        <a:schemeClr val="tx1"/>
+                      </a:solidFill>
+                      <a:prstDash val="solid"/>
+                      <a:round/>
+                      <a:headEnd type="none" w="med" len="med"/>
+                      <a:tailEnd type="none" w="med" len="med"/>
+                    </a:lnR>
+                    <a:lnT w="12700" cap="flat" cmpd="sng" algn="ctr">
+                      <a:solidFill>
+                        <a:schemeClr val="tx1"/>
+                      </a:solidFill>
+                      <a:prstDash val="solid"/>
+                      <a:round/>
+                      <a:headEnd type="none" w="med" len="med"/>
+                      <a:tailEnd type="none" w="med" len="med"/>
+                    </a:lnT>
+                    <a:lnB w="12700" cap="flat" cmpd="sng" algn="ctr">
+                      <a:solidFill>
+                        <a:schemeClr val="tx1"/>
+                      </a:solidFill>
+                      <a:prstDash val="solid"/>
+                      <a:round/>
+                      <a:headEnd type="none" w="med" len="med"/>
+                      <a:tailEnd type="none" w="med" len="med"/>
+                    </a:lnB>
+                    <a:solidFill>
+                      <a:schemeClr val="bg1">
+                        <a:lumMod val="75000"/>
+                      </a:schemeClr>
+                    </a:solidFill>
+                  </a:tcPr>
+                </a:tc>
+                <a:tc>
+                  <a:txBody>
+                    <a:bodyPr/>
+                    <a:lstStyle/>
+                    <a:p>
+                      <a:pPr>
+                        <a:buNone/>
+                      </a:pPr>
+                      <a:r>
+                        <a:rPr lang="en-IN" sz="1200" b="1" dirty="0">
+                          <a:effectLst/>
+                          <a:latin typeface="Times New Roman" panose="02020603050405020304" pitchFamily="18" charset="0"/>
+                          <a:cs typeface="Times New Roman" panose="02020603050405020304" pitchFamily="18" charset="0"/>
+                        </a:rPr>
+                        <a:t>At Phase II</a:t>
+                      </a:r>
+                    </a:p>
+                  </a:txBody>
+                  <a:tcPr marL="67464" marR="67464" marT="33732" marB="33732" anchor="ctr">
+                    <a:lnL w="12700" cap="flat" cmpd="sng" algn="ctr">
+                      <a:solidFill>
+                        <a:schemeClr val="tx1"/>
+                      </a:solidFill>
+                      <a:prstDash val="solid"/>
+                      <a:round/>
+                      <a:headEnd type="none" w="med" len="med"/>
+                      <a:tailEnd type="none" w="med" len="med"/>
+                    </a:lnL>
+                    <a:lnR w="12700" cap="flat" cmpd="sng" algn="ctr">
+                      <a:solidFill>
+                        <a:schemeClr val="tx1"/>
+                      </a:solidFill>
+                      <a:prstDash val="solid"/>
+                      <a:round/>
+                      <a:headEnd type="none" w="med" len="med"/>
+                      <a:tailEnd type="none" w="med" len="med"/>
+                    </a:lnR>
+                    <a:lnT w="12700" cap="flat" cmpd="sng" algn="ctr">
+                      <a:solidFill>
+                        <a:schemeClr val="tx1"/>
+                      </a:solidFill>
+                      <a:prstDash val="solid"/>
+                      <a:round/>
+                      <a:headEnd type="none" w="med" len="med"/>
+                      <a:tailEnd type="none" w="med" len="med"/>
+                    </a:lnT>
+                    <a:lnB w="12700" cap="flat" cmpd="sng" algn="ctr">
+                      <a:solidFill>
+                        <a:schemeClr val="tx1"/>
+                      </a:solidFill>
+                      <a:prstDash val="solid"/>
+                      <a:round/>
+                      <a:headEnd type="none" w="med" len="med"/>
+                      <a:tailEnd type="none" w="med" len="med"/>
+                    </a:lnB>
+                    <a:solidFill>
+                      <a:schemeClr val="bg1">
+                        <a:lumMod val="75000"/>
+                      </a:schemeClr>
+                    </a:solidFill>
+                  </a:tcPr>
+                </a:tc>
+                <a:tc>
+                  <a:txBody>
+                    <a:bodyPr/>
+                    <a:lstStyle/>
+                    <a:p>
+                      <a:pPr>
+                        <a:buNone/>
+                      </a:pPr>
+                      <a:r>
+                        <a:rPr lang="en-IN" sz="1200" b="1" dirty="0">
+                          <a:effectLst/>
+                          <a:latin typeface="Times New Roman" panose="02020603050405020304" pitchFamily="18" charset="0"/>
+                          <a:cs typeface="Times New Roman" panose="02020603050405020304" pitchFamily="18" charset="0"/>
+                        </a:rPr>
+                        <a:t>At Phase III</a:t>
+                      </a:r>
+                    </a:p>
+                  </a:txBody>
+                  <a:tcPr marL="67464" marR="67464" marT="33732" marB="33732" anchor="ctr">
+                    <a:lnL w="12700" cap="flat" cmpd="sng" algn="ctr">
+                      <a:solidFill>
+                        <a:schemeClr val="tx1"/>
+                      </a:solidFill>
+                      <a:prstDash val="solid"/>
+                      <a:round/>
+                      <a:headEnd type="none" w="med" len="med"/>
+                      <a:tailEnd type="none" w="med" len="med"/>
+                    </a:lnL>
+                    <a:lnR w="12700" cap="flat" cmpd="sng" algn="ctr">
+                      <a:solidFill>
+                        <a:schemeClr val="tx1"/>
+                      </a:solidFill>
+                      <a:prstDash val="solid"/>
+                      <a:round/>
+                      <a:headEnd type="none" w="med" len="med"/>
+                      <a:tailEnd type="none" w="med" len="med"/>
+                    </a:lnR>
+                    <a:lnT w="12700" cap="flat" cmpd="sng" algn="ctr">
+                      <a:solidFill>
+                        <a:schemeClr val="tx1"/>
+                      </a:solidFill>
+                      <a:prstDash val="solid"/>
+                      <a:round/>
+                      <a:headEnd type="none" w="med" len="med"/>
+                      <a:tailEnd type="none" w="med" len="med"/>
+                    </a:lnT>
+                    <a:lnB w="12700" cap="flat" cmpd="sng" algn="ctr">
+                      <a:solidFill>
+                        <a:schemeClr val="tx1"/>
+                      </a:solidFill>
+                      <a:prstDash val="solid"/>
+                      <a:round/>
+                      <a:headEnd type="none" w="med" len="med"/>
+                      <a:tailEnd type="none" w="med" len="med"/>
+                    </a:lnB>
+                    <a:solidFill>
+                      <a:schemeClr val="bg1">
+                        <a:lumMod val="75000"/>
+                      </a:schemeClr>
+                    </a:solidFill>
+                  </a:tcPr>
+                </a:tc>
+                <a:extLst>
+                  <a:ext uri="{0D108BD9-81ED-4DB2-BD59-A6C34878D82A}">
+                    <a16:rowId xmlns:a16="http://schemas.microsoft.com/office/drawing/2014/main" val="2906989919"/>
+                  </a:ext>
+                </a:extLst>
+              </a:tr>
+              <a:tr h="736285">
+                <a:tc>
+                  <a:txBody>
+                    <a:bodyPr/>
+                    <a:lstStyle/>
+                    <a:p>
+                      <a:pPr algn="ctr">
+                        <a:buNone/>
+                      </a:pPr>
+                      <a:r>
+                        <a:rPr lang="en-IN" sz="1200" dirty="0">
+                          <a:effectLst/>
+                          <a:latin typeface="Times New Roman" panose="02020603050405020304" pitchFamily="18" charset="0"/>
+                          <a:cs typeface="Times New Roman" panose="02020603050405020304" pitchFamily="18" charset="0"/>
+                        </a:rPr>
+                        <a:t>Identity</a:t>
+                      </a:r>
+                    </a:p>
+                  </a:txBody>
+                  <a:tcPr marL="67464" marR="67464" marT="33732" marB="33732" anchor="ctr">
+                    <a:lnL w="12700" cap="flat" cmpd="sng" algn="ctr">
+                      <a:solidFill>
+                        <a:schemeClr val="tx1"/>
+                      </a:solidFill>
+                      <a:prstDash val="solid"/>
+                      <a:round/>
+                      <a:headEnd type="none" w="med" len="med"/>
+                      <a:tailEnd type="none" w="med" len="med"/>
+                    </a:lnL>
+                    <a:lnR w="12700" cap="flat" cmpd="sng" algn="ctr">
+                      <a:solidFill>
+                        <a:schemeClr val="tx1"/>
+                      </a:solidFill>
+                      <a:prstDash val="solid"/>
+                      <a:round/>
+                      <a:headEnd type="none" w="med" len="med"/>
+                      <a:tailEnd type="none" w="med" len="med"/>
+                    </a:lnR>
+                    <a:lnT w="12700" cap="flat" cmpd="sng" algn="ctr">
+                      <a:solidFill>
+                        <a:schemeClr val="tx1"/>
+                      </a:solidFill>
+                      <a:prstDash val="solid"/>
+                      <a:round/>
+                      <a:headEnd type="none" w="med" len="med"/>
+                      <a:tailEnd type="none" w="med" len="med"/>
+                    </a:lnT>
+                    <a:lnB w="12700" cap="flat" cmpd="sng" algn="ctr">
+                      <a:solidFill>
+                        <a:schemeClr val="tx1"/>
+                      </a:solidFill>
+                      <a:prstDash val="solid"/>
+                      <a:round/>
+                      <a:headEnd type="none" w="med" len="med"/>
+                      <a:tailEnd type="none" w="med" len="med"/>
+                    </a:lnB>
+                  </a:tcPr>
+                </a:tc>
+                <a:tc>
+                  <a:txBody>
+                    <a:bodyPr/>
+                    <a:lstStyle/>
+                    <a:p>
+                      <a:pPr algn="ctr">
+                        <a:buNone/>
+                      </a:pPr>
+                      <a:r>
+                        <a:rPr lang="en-IN" sz="1200" dirty="0" err="1">
+                          <a:effectLst/>
+                          <a:latin typeface="Times New Roman" panose="02020603050405020304" pitchFamily="18" charset="0"/>
+                          <a:cs typeface="Times New Roman" panose="02020603050405020304" pitchFamily="18" charset="0"/>
+                        </a:rPr>
+                        <a:t>did:key</a:t>
+                      </a:r>
+                      <a:r>
+                        <a:rPr lang="en-IN" sz="1200" dirty="0">
+                          <a:effectLst/>
+                          <a:latin typeface="Times New Roman" panose="02020603050405020304" pitchFamily="18" charset="0"/>
+                          <a:cs typeface="Times New Roman" panose="02020603050405020304" pitchFamily="18" charset="0"/>
+                        </a:rPr>
+                        <a:t> + Ed25519 demonstrated</a:t>
+                      </a:r>
+                    </a:p>
+                  </a:txBody>
+                  <a:tcPr marL="67464" marR="67464" marT="33732" marB="33732" anchor="ctr">
+                    <a:lnL w="12700" cap="flat" cmpd="sng" algn="ctr">
+                      <a:solidFill>
+                        <a:schemeClr val="tx1"/>
+                      </a:solidFill>
+                      <a:prstDash val="solid"/>
+                      <a:round/>
+                      <a:headEnd type="none" w="med" len="med"/>
+                      <a:tailEnd type="none" w="med" len="med"/>
+                    </a:lnL>
+                    <a:lnR w="12700" cap="flat" cmpd="sng" algn="ctr">
+                      <a:solidFill>
+                        <a:schemeClr val="tx1"/>
+                      </a:solidFill>
+                      <a:prstDash val="solid"/>
+                      <a:round/>
+                      <a:headEnd type="none" w="med" len="med"/>
+                      <a:tailEnd type="none" w="med" len="med"/>
+                    </a:lnR>
+                    <a:lnT w="12700" cap="flat" cmpd="sng" algn="ctr">
+                      <a:solidFill>
+                        <a:schemeClr val="tx1"/>
+                      </a:solidFill>
+                      <a:prstDash val="solid"/>
+                      <a:round/>
+                      <a:headEnd type="none" w="med" len="med"/>
+                      <a:tailEnd type="none" w="med" len="med"/>
+                    </a:lnT>
+                    <a:lnB w="12700" cap="flat" cmpd="sng" algn="ctr">
+                      <a:solidFill>
+                        <a:schemeClr val="tx1"/>
+                      </a:solidFill>
+                      <a:prstDash val="solid"/>
+                      <a:round/>
+                      <a:headEnd type="none" w="med" len="med"/>
+                      <a:tailEnd type="none" w="med" len="med"/>
+                    </a:lnB>
+                  </a:tcPr>
+                </a:tc>
+                <a:tc>
+                  <a:txBody>
+                    <a:bodyPr/>
+                    <a:lstStyle/>
+                    <a:p>
+                      <a:pPr algn="ctr">
+                        <a:buNone/>
+                      </a:pPr>
+                      <a:r>
+                        <a:rPr lang="en-IN" sz="1200" dirty="0">
+                          <a:effectLst/>
+                          <a:latin typeface="Times New Roman" panose="02020603050405020304" pitchFamily="18" charset="0"/>
+                          <a:cs typeface="Times New Roman" panose="02020603050405020304" pitchFamily="18" charset="0"/>
+                        </a:rPr>
+                        <a:t>Full </a:t>
+                      </a:r>
+                      <a:r>
+                        <a:rPr lang="en-IN" sz="1200" dirty="0" err="1">
+                          <a:effectLst/>
+                          <a:latin typeface="Times New Roman" panose="02020603050405020304" pitchFamily="18" charset="0"/>
+                          <a:cs typeface="Times New Roman" panose="02020603050405020304" pitchFamily="18" charset="0"/>
+                        </a:rPr>
+                        <a:t>did:key</a:t>
+                      </a:r>
+                      <a:r>
+                        <a:rPr lang="en-IN" sz="1200" dirty="0">
+                          <a:effectLst/>
+                          <a:latin typeface="Times New Roman" panose="02020603050405020304" pitchFamily="18" charset="0"/>
+                          <a:cs typeface="Times New Roman" panose="02020603050405020304" pitchFamily="18" charset="0"/>
+                        </a:rPr>
+                        <a:t> + W3C VC lifecycle with URDNA2015 canonicalization and Ed25519Signature2020 proofs</a:t>
+                      </a:r>
+                    </a:p>
+                  </a:txBody>
+                  <a:tcPr marL="67464" marR="67464" marT="33732" marB="33732" anchor="ctr">
+                    <a:lnL w="12700" cap="flat" cmpd="sng" algn="ctr">
+                      <a:solidFill>
+                        <a:schemeClr val="tx1"/>
+                      </a:solidFill>
+                      <a:prstDash val="solid"/>
+                      <a:round/>
+                      <a:headEnd type="none" w="med" len="med"/>
+                      <a:tailEnd type="none" w="med" len="med"/>
+                    </a:lnL>
+                    <a:lnR w="12700" cap="flat" cmpd="sng" algn="ctr">
+                      <a:solidFill>
+                        <a:schemeClr val="tx1"/>
+                      </a:solidFill>
+                      <a:prstDash val="solid"/>
+                      <a:round/>
+                      <a:headEnd type="none" w="med" len="med"/>
+                      <a:tailEnd type="none" w="med" len="med"/>
+                    </a:lnR>
+                    <a:lnT w="12700" cap="flat" cmpd="sng" algn="ctr">
+                      <a:solidFill>
+                        <a:schemeClr val="tx1"/>
+                      </a:solidFill>
+                      <a:prstDash val="solid"/>
+                      <a:round/>
+                      <a:headEnd type="none" w="med" len="med"/>
+                      <a:tailEnd type="none" w="med" len="med"/>
+                    </a:lnT>
+                    <a:lnB w="12700" cap="flat" cmpd="sng" algn="ctr">
+                      <a:solidFill>
+                        <a:schemeClr val="tx1"/>
+                      </a:solidFill>
+                      <a:prstDash val="solid"/>
+                      <a:round/>
+                      <a:headEnd type="none" w="med" len="med"/>
+                      <a:tailEnd type="none" w="med" len="med"/>
+                    </a:lnB>
+                  </a:tcPr>
+                </a:tc>
+                <a:extLst>
+                  <a:ext uri="{0D108BD9-81ED-4DB2-BD59-A6C34878D82A}">
+                    <a16:rowId xmlns:a16="http://schemas.microsoft.com/office/drawing/2014/main" val="3076031548"/>
+                  </a:ext>
+                </a:extLst>
+              </a:tr>
+              <a:tr h="570027">
+                <a:tc>
+                  <a:txBody>
+                    <a:bodyPr/>
+                    <a:lstStyle/>
+                    <a:p>
+                      <a:pPr algn="ctr">
+                        <a:buNone/>
+                      </a:pPr>
+                      <a:r>
+                        <a:rPr lang="en-IN" sz="1200" dirty="0">
+                          <a:effectLst/>
+                          <a:latin typeface="Times New Roman" panose="02020603050405020304" pitchFamily="18" charset="0"/>
+                          <a:cs typeface="Times New Roman" panose="02020603050405020304" pitchFamily="18" charset="0"/>
+                        </a:rPr>
+                        <a:t>Trust engine</a:t>
+                      </a:r>
+                    </a:p>
+                  </a:txBody>
+                  <a:tcPr marL="67464" marR="67464" marT="33732" marB="33732" anchor="ctr">
+                    <a:lnL w="12700" cap="flat" cmpd="sng" algn="ctr">
+                      <a:solidFill>
+                        <a:schemeClr val="tx1"/>
+                      </a:solidFill>
+                      <a:prstDash val="solid"/>
+                      <a:round/>
+                      <a:headEnd type="none" w="med" len="med"/>
+                      <a:tailEnd type="none" w="med" len="med"/>
+                    </a:lnL>
+                    <a:lnR w="12700" cap="flat" cmpd="sng" algn="ctr">
+                      <a:solidFill>
+                        <a:schemeClr val="tx1"/>
+                      </a:solidFill>
+                      <a:prstDash val="solid"/>
+                      <a:round/>
+                      <a:headEnd type="none" w="med" len="med"/>
+                      <a:tailEnd type="none" w="med" len="med"/>
+                    </a:lnR>
+                    <a:lnT w="12700" cap="flat" cmpd="sng" algn="ctr">
+                      <a:solidFill>
+                        <a:schemeClr val="tx1"/>
+                      </a:solidFill>
+                      <a:prstDash val="solid"/>
+                      <a:round/>
+                      <a:headEnd type="none" w="med" len="med"/>
+                      <a:tailEnd type="none" w="med" len="med"/>
+                    </a:lnT>
+                    <a:lnB w="12700" cap="flat" cmpd="sng" algn="ctr">
+                      <a:solidFill>
+                        <a:schemeClr val="tx1"/>
+                      </a:solidFill>
+                      <a:prstDash val="solid"/>
+                      <a:round/>
+                      <a:headEnd type="none" w="med" len="med"/>
+                      <a:tailEnd type="none" w="med" len="med"/>
+                    </a:lnB>
+                  </a:tcPr>
+                </a:tc>
+                <a:tc>
+                  <a:txBody>
+                    <a:bodyPr/>
+                    <a:lstStyle/>
+                    <a:p>
+                      <a:pPr algn="ctr">
+                        <a:buNone/>
+                      </a:pPr>
+                      <a:r>
+                        <a:rPr lang="en-IN" sz="1200" dirty="0">
+                          <a:effectLst/>
+                          <a:latin typeface="Times New Roman" panose="02020603050405020304" pitchFamily="18" charset="0"/>
+                          <a:cs typeface="Times New Roman" panose="02020603050405020304" pitchFamily="18" charset="0"/>
+                        </a:rPr>
+                        <a:t>EMA scoring, 3 states + revoke</a:t>
+                      </a:r>
+                    </a:p>
+                  </a:txBody>
+                  <a:tcPr marL="67464" marR="67464" marT="33732" marB="33732" anchor="ctr">
+                    <a:lnL w="12700" cap="flat" cmpd="sng" algn="ctr">
+                      <a:solidFill>
+                        <a:schemeClr val="tx1"/>
+                      </a:solidFill>
+                      <a:prstDash val="solid"/>
+                      <a:round/>
+                      <a:headEnd type="none" w="med" len="med"/>
+                      <a:tailEnd type="none" w="med" len="med"/>
+                    </a:lnL>
+                    <a:lnR w="12700" cap="flat" cmpd="sng" algn="ctr">
+                      <a:solidFill>
+                        <a:schemeClr val="tx1"/>
+                      </a:solidFill>
+                      <a:prstDash val="solid"/>
+                      <a:round/>
+                      <a:headEnd type="none" w="med" len="med"/>
+                      <a:tailEnd type="none" w="med" len="med"/>
+                    </a:lnR>
+                    <a:lnT w="12700" cap="flat" cmpd="sng" algn="ctr">
+                      <a:solidFill>
+                        <a:schemeClr val="tx1"/>
+                      </a:solidFill>
+                      <a:prstDash val="solid"/>
+                      <a:round/>
+                      <a:headEnd type="none" w="med" len="med"/>
+                      <a:tailEnd type="none" w="med" len="med"/>
+                    </a:lnT>
+                    <a:lnB w="12700" cap="flat" cmpd="sng" algn="ctr">
+                      <a:solidFill>
+                        <a:schemeClr val="tx1"/>
+                      </a:solidFill>
+                      <a:prstDash val="solid"/>
+                      <a:round/>
+                      <a:headEnd type="none" w="med" len="med"/>
+                      <a:tailEnd type="none" w="med" len="med"/>
+                    </a:lnB>
+                  </a:tcPr>
+                </a:tc>
+                <a:tc>
+                  <a:txBody>
+                    <a:bodyPr/>
+                    <a:lstStyle/>
+                    <a:p>
+                      <a:pPr algn="ctr">
+                        <a:buNone/>
+                      </a:pPr>
+                      <a:r>
+                        <a:rPr lang="en-IN" sz="1200" dirty="0">
+                          <a:effectLst/>
+                          <a:latin typeface="Times New Roman" panose="02020603050405020304" pitchFamily="18" charset="0"/>
+                          <a:cs typeface="Times New Roman" panose="02020603050405020304" pitchFamily="18" charset="0"/>
+                        </a:rPr>
+                        <a:t>Same engine, validated with a 10-round scenario and a live /health probe</a:t>
+                      </a:r>
+                    </a:p>
+                  </a:txBody>
+                  <a:tcPr marL="67464" marR="67464" marT="33732" marB="33732" anchor="ctr">
+                    <a:lnL w="12700" cap="flat" cmpd="sng" algn="ctr">
+                      <a:solidFill>
+                        <a:schemeClr val="tx1"/>
+                      </a:solidFill>
+                      <a:prstDash val="solid"/>
+                      <a:round/>
+                      <a:headEnd type="none" w="med" len="med"/>
+                      <a:tailEnd type="none" w="med" len="med"/>
+                    </a:lnL>
+                    <a:lnR w="12700" cap="flat" cmpd="sng" algn="ctr">
+                      <a:solidFill>
+                        <a:schemeClr val="tx1"/>
+                      </a:solidFill>
+                      <a:prstDash val="solid"/>
+                      <a:round/>
+                      <a:headEnd type="none" w="med" len="med"/>
+                      <a:tailEnd type="none" w="med" len="med"/>
+                    </a:lnR>
+                    <a:lnT w="12700" cap="flat" cmpd="sng" algn="ctr">
+                      <a:solidFill>
+                        <a:schemeClr val="tx1"/>
+                      </a:solidFill>
+                      <a:prstDash val="solid"/>
+                      <a:round/>
+                      <a:headEnd type="none" w="med" len="med"/>
+                      <a:tailEnd type="none" w="med" len="med"/>
+                    </a:lnT>
+                    <a:lnB w="12700" cap="flat" cmpd="sng" algn="ctr">
+                      <a:solidFill>
+                        <a:schemeClr val="tx1"/>
+                      </a:solidFill>
+                      <a:prstDash val="solid"/>
+                      <a:round/>
+                      <a:headEnd type="none" w="med" len="med"/>
+                      <a:tailEnd type="none" w="med" len="med"/>
+                    </a:lnB>
+                  </a:tcPr>
+                </a:tc>
+                <a:extLst>
+                  <a:ext uri="{0D108BD9-81ED-4DB2-BD59-A6C34878D82A}">
+                    <a16:rowId xmlns:a16="http://schemas.microsoft.com/office/drawing/2014/main" val="2373644050"/>
+                  </a:ext>
+                </a:extLst>
+              </a:tr>
+              <a:tr h="736285">
+                <a:tc>
+                  <a:txBody>
+                    <a:bodyPr/>
+                    <a:lstStyle/>
+                    <a:p>
+                      <a:pPr algn="ctr">
+                        <a:buNone/>
+                      </a:pPr>
+                      <a:r>
+                        <a:rPr lang="en-IN" sz="1200" dirty="0">
+                          <a:effectLst/>
+                          <a:latin typeface="Times New Roman" panose="02020603050405020304" pitchFamily="18" charset="0"/>
+                          <a:cs typeface="Times New Roman" panose="02020603050405020304" pitchFamily="18" charset="0"/>
+                        </a:rPr>
+                        <a:t>Authorization</a:t>
+                      </a:r>
+                    </a:p>
+                  </a:txBody>
+                  <a:tcPr marL="67464" marR="67464" marT="33732" marB="33732" anchor="ctr">
+                    <a:lnL w="12700" cap="flat" cmpd="sng" algn="ctr">
+                      <a:solidFill>
+                        <a:schemeClr val="tx1"/>
+                      </a:solidFill>
+                      <a:prstDash val="solid"/>
+                      <a:round/>
+                      <a:headEnd type="none" w="med" len="med"/>
+                      <a:tailEnd type="none" w="med" len="med"/>
+                    </a:lnL>
+                    <a:lnR w="12700" cap="flat" cmpd="sng" algn="ctr">
+                      <a:solidFill>
+                        <a:schemeClr val="tx1"/>
+                      </a:solidFill>
+                      <a:prstDash val="solid"/>
+                      <a:round/>
+                      <a:headEnd type="none" w="med" len="med"/>
+                      <a:tailEnd type="none" w="med" len="med"/>
+                    </a:lnR>
+                    <a:lnT w="12700" cap="flat" cmpd="sng" algn="ctr">
+                      <a:solidFill>
+                        <a:schemeClr val="tx1"/>
+                      </a:solidFill>
+                      <a:prstDash val="solid"/>
+                      <a:round/>
+                      <a:headEnd type="none" w="med" len="med"/>
+                      <a:tailEnd type="none" w="med" len="med"/>
+                    </a:lnT>
+                    <a:lnB w="12700" cap="flat" cmpd="sng" algn="ctr">
+                      <a:solidFill>
+                        <a:schemeClr val="tx1"/>
+                      </a:solidFill>
+                      <a:prstDash val="solid"/>
+                      <a:round/>
+                      <a:headEnd type="none" w="med" len="med"/>
+                      <a:tailEnd type="none" w="med" len="med"/>
+                    </a:lnB>
+                  </a:tcPr>
+                </a:tc>
+                <a:tc>
+                  <a:txBody>
+                    <a:bodyPr/>
+                    <a:lstStyle/>
+                    <a:p>
+                      <a:pPr algn="ctr">
+                        <a:buNone/>
+                      </a:pPr>
+                      <a:r>
+                        <a:rPr lang="en-IN" sz="1200" dirty="0">
+                          <a:effectLst/>
+                          <a:latin typeface="Times New Roman" panose="02020603050405020304" pitchFamily="18" charset="0"/>
+                          <a:cs typeface="Times New Roman" panose="02020603050405020304" pitchFamily="18" charset="0"/>
+                        </a:rPr>
+                        <a:t>SUSPICIOUS allowed (logged)</a:t>
+                      </a:r>
+                    </a:p>
+                  </a:txBody>
+                  <a:tcPr marL="67464" marR="67464" marT="33732" marB="33732" anchor="ctr">
+                    <a:lnL w="12700" cap="flat" cmpd="sng" algn="ctr">
+                      <a:solidFill>
+                        <a:schemeClr val="tx1"/>
+                      </a:solidFill>
+                      <a:prstDash val="solid"/>
+                      <a:round/>
+                      <a:headEnd type="none" w="med" len="med"/>
+                      <a:tailEnd type="none" w="med" len="med"/>
+                    </a:lnL>
+                    <a:lnR w="12700" cap="flat" cmpd="sng" algn="ctr">
+                      <a:solidFill>
+                        <a:schemeClr val="tx1"/>
+                      </a:solidFill>
+                      <a:prstDash val="solid"/>
+                      <a:round/>
+                      <a:headEnd type="none" w="med" len="med"/>
+                      <a:tailEnd type="none" w="med" len="med"/>
+                    </a:lnR>
+                    <a:lnT w="12700" cap="flat" cmpd="sng" algn="ctr">
+                      <a:solidFill>
+                        <a:schemeClr val="tx1"/>
+                      </a:solidFill>
+                      <a:prstDash val="solid"/>
+                      <a:round/>
+                      <a:headEnd type="none" w="med" len="med"/>
+                      <a:tailEnd type="none" w="med" len="med"/>
+                    </a:lnT>
+                    <a:lnB w="12700" cap="flat" cmpd="sng" algn="ctr">
+                      <a:solidFill>
+                        <a:schemeClr val="tx1"/>
+                      </a:solidFill>
+                      <a:prstDash val="solid"/>
+                      <a:round/>
+                      <a:headEnd type="none" w="med" len="med"/>
+                      <a:tailEnd type="none" w="med" len="med"/>
+                    </a:lnB>
+                  </a:tcPr>
+                </a:tc>
+                <a:tc>
+                  <a:txBody>
+                    <a:bodyPr/>
+                    <a:lstStyle/>
+                    <a:p>
+                      <a:pPr algn="ctr">
+                        <a:buNone/>
+                      </a:pPr>
+                      <a:r>
+                        <a:rPr lang="en-IN" sz="1200">
+                          <a:effectLst/>
+                          <a:latin typeface="Times New Roman" panose="02020603050405020304" pitchFamily="18" charset="0"/>
+                          <a:cs typeface="Times New Roman" panose="02020603050405020304" pitchFamily="18" charset="0"/>
+                        </a:rPr>
+                        <a:t>SUSPICIOUS blocks privileged actions (HTTP 403); human RBAC added (ADMIN, OPERATOR, VIEWER)</a:t>
+                      </a:r>
+                    </a:p>
+                  </a:txBody>
+                  <a:tcPr marL="67464" marR="67464" marT="33732" marB="33732" anchor="ctr">
+                    <a:lnL w="12700" cap="flat" cmpd="sng" algn="ctr">
+                      <a:solidFill>
+                        <a:schemeClr val="tx1"/>
+                      </a:solidFill>
+                      <a:prstDash val="solid"/>
+                      <a:round/>
+                      <a:headEnd type="none" w="med" len="med"/>
+                      <a:tailEnd type="none" w="med" len="med"/>
+                    </a:lnL>
+                    <a:lnR w="12700" cap="flat" cmpd="sng" algn="ctr">
+                      <a:solidFill>
+                        <a:schemeClr val="tx1"/>
+                      </a:solidFill>
+                      <a:prstDash val="solid"/>
+                      <a:round/>
+                      <a:headEnd type="none" w="med" len="med"/>
+                      <a:tailEnd type="none" w="med" len="med"/>
+                    </a:lnR>
+                    <a:lnT w="12700" cap="flat" cmpd="sng" algn="ctr">
+                      <a:solidFill>
+                        <a:schemeClr val="tx1"/>
+                      </a:solidFill>
+                      <a:prstDash val="solid"/>
+                      <a:round/>
+                      <a:headEnd type="none" w="med" len="med"/>
+                      <a:tailEnd type="none" w="med" len="med"/>
+                    </a:lnT>
+                    <a:lnB w="12700" cap="flat" cmpd="sng" algn="ctr">
+                      <a:solidFill>
+                        <a:schemeClr val="tx1"/>
+                      </a:solidFill>
+                      <a:prstDash val="solid"/>
+                      <a:round/>
+                      <a:headEnd type="none" w="med" len="med"/>
+                      <a:tailEnd type="none" w="med" len="med"/>
+                    </a:lnB>
+                  </a:tcPr>
+                </a:tc>
+                <a:extLst>
+                  <a:ext uri="{0D108BD9-81ED-4DB2-BD59-A6C34878D82A}">
+                    <a16:rowId xmlns:a16="http://schemas.microsoft.com/office/drawing/2014/main" val="4043239163"/>
+                  </a:ext>
+                </a:extLst>
+              </a:tr>
+              <a:tr h="403769">
+                <a:tc>
+                  <a:txBody>
+                    <a:bodyPr/>
+                    <a:lstStyle/>
+                    <a:p>
+                      <a:pPr algn="ctr">
+                        <a:buNone/>
+                      </a:pPr>
+                      <a:r>
+                        <a:rPr lang="en-IN" sz="1200" dirty="0">
+                          <a:effectLst/>
+                          <a:latin typeface="Times New Roman" panose="02020603050405020304" pitchFamily="18" charset="0"/>
+                          <a:cs typeface="Times New Roman" panose="02020603050405020304" pitchFamily="18" charset="0"/>
+                        </a:rPr>
+                        <a:t>Discovery and matching</a:t>
+                      </a:r>
+                    </a:p>
+                  </a:txBody>
+                  <a:tcPr marL="67464" marR="67464" marT="33732" marB="33732" anchor="ctr">
+                    <a:lnL w="12700" cap="flat" cmpd="sng" algn="ctr">
+                      <a:solidFill>
+                        <a:schemeClr val="tx1"/>
+                      </a:solidFill>
+                      <a:prstDash val="solid"/>
+                      <a:round/>
+                      <a:headEnd type="none" w="med" len="med"/>
+                      <a:tailEnd type="none" w="med" len="med"/>
+                    </a:lnL>
+                    <a:lnR w="12700" cap="flat" cmpd="sng" algn="ctr">
+                      <a:solidFill>
+                        <a:schemeClr val="tx1"/>
+                      </a:solidFill>
+                      <a:prstDash val="solid"/>
+                      <a:round/>
+                      <a:headEnd type="none" w="med" len="med"/>
+                      <a:tailEnd type="none" w="med" len="med"/>
+                    </a:lnR>
+                    <a:lnT w="12700" cap="flat" cmpd="sng" algn="ctr">
+                      <a:solidFill>
+                        <a:schemeClr val="tx1"/>
+                      </a:solidFill>
+                      <a:prstDash val="solid"/>
+                      <a:round/>
+                      <a:headEnd type="none" w="med" len="med"/>
+                      <a:tailEnd type="none" w="med" len="med"/>
+                    </a:lnT>
+                    <a:lnB w="12700" cap="flat" cmpd="sng" algn="ctr">
+                      <a:solidFill>
+                        <a:schemeClr val="tx1"/>
+                      </a:solidFill>
+                      <a:prstDash val="solid"/>
+                      <a:round/>
+                      <a:headEnd type="none" w="med" len="med"/>
+                      <a:tailEnd type="none" w="med" len="med"/>
+                    </a:lnB>
+                  </a:tcPr>
+                </a:tc>
+                <a:tc>
+                  <a:txBody>
+                    <a:bodyPr/>
+                    <a:lstStyle/>
+                    <a:p>
+                      <a:pPr algn="ctr">
+                        <a:buNone/>
+                      </a:pPr>
+                      <a:r>
+                        <a:rPr lang="en-IN" sz="1200" dirty="0">
+                          <a:effectLst/>
+                          <a:latin typeface="Times New Roman" panose="02020603050405020304" pitchFamily="18" charset="0"/>
+                          <a:cs typeface="Times New Roman" panose="02020603050405020304" pitchFamily="18" charset="0"/>
+                        </a:rPr>
+                        <a:t>Not present</a:t>
+                      </a:r>
+                    </a:p>
+                  </a:txBody>
+                  <a:tcPr marL="67464" marR="67464" marT="33732" marB="33732" anchor="ctr">
+                    <a:lnL w="12700" cap="flat" cmpd="sng" algn="ctr">
+                      <a:solidFill>
+                        <a:schemeClr val="tx1"/>
+                      </a:solidFill>
+                      <a:prstDash val="solid"/>
+                      <a:round/>
+                      <a:headEnd type="none" w="med" len="med"/>
+                      <a:tailEnd type="none" w="med" len="med"/>
+                    </a:lnL>
+                    <a:lnR w="12700" cap="flat" cmpd="sng" algn="ctr">
+                      <a:solidFill>
+                        <a:schemeClr val="tx1"/>
+                      </a:solidFill>
+                      <a:prstDash val="solid"/>
+                      <a:round/>
+                      <a:headEnd type="none" w="med" len="med"/>
+                      <a:tailEnd type="none" w="med" len="med"/>
+                    </a:lnR>
+                    <a:lnT w="12700" cap="flat" cmpd="sng" algn="ctr">
+                      <a:solidFill>
+                        <a:schemeClr val="tx1"/>
+                      </a:solidFill>
+                      <a:prstDash val="solid"/>
+                      <a:round/>
+                      <a:headEnd type="none" w="med" len="med"/>
+                      <a:tailEnd type="none" w="med" len="med"/>
+                    </a:lnT>
+                    <a:lnB w="12700" cap="flat" cmpd="sng" algn="ctr">
+                      <a:solidFill>
+                        <a:schemeClr val="tx1"/>
+                      </a:solidFill>
+                      <a:prstDash val="solid"/>
+                      <a:round/>
+                      <a:headEnd type="none" w="med" len="med"/>
+                      <a:tailEnd type="none" w="med" len="med"/>
+                    </a:lnB>
+                  </a:tcPr>
+                </a:tc>
+                <a:tc>
+                  <a:txBody>
+                    <a:bodyPr/>
+                    <a:lstStyle/>
+                    <a:p>
+                      <a:pPr algn="ctr">
+                        <a:buNone/>
+                      </a:pPr>
+                      <a:r>
+                        <a:rPr lang="en-IN" sz="1200">
+                          <a:effectLst/>
+                          <a:latin typeface="Times New Roman" panose="02020603050405020304" pitchFamily="18" charset="0"/>
+                          <a:cs typeface="Times New Roman" panose="02020603050405020304" pitchFamily="18" charset="0"/>
+                        </a:rPr>
+                        <a:t>Explainable discovery and multi-factor MatchScore ranking</a:t>
+                      </a:r>
+                    </a:p>
+                  </a:txBody>
+                  <a:tcPr marL="67464" marR="67464" marT="33732" marB="33732" anchor="ctr">
+                    <a:lnL w="12700" cap="flat" cmpd="sng" algn="ctr">
+                      <a:solidFill>
+                        <a:schemeClr val="tx1"/>
+                      </a:solidFill>
+                      <a:prstDash val="solid"/>
+                      <a:round/>
+                      <a:headEnd type="none" w="med" len="med"/>
+                      <a:tailEnd type="none" w="med" len="med"/>
+                    </a:lnL>
+                    <a:lnR w="12700" cap="flat" cmpd="sng" algn="ctr">
+                      <a:solidFill>
+                        <a:schemeClr val="tx1"/>
+                      </a:solidFill>
+                      <a:prstDash val="solid"/>
+                      <a:round/>
+                      <a:headEnd type="none" w="med" len="med"/>
+                      <a:tailEnd type="none" w="med" len="med"/>
+                    </a:lnR>
+                    <a:lnT w="12700" cap="flat" cmpd="sng" algn="ctr">
+                      <a:solidFill>
+                        <a:schemeClr val="tx1"/>
+                      </a:solidFill>
+                      <a:prstDash val="solid"/>
+                      <a:round/>
+                      <a:headEnd type="none" w="med" len="med"/>
+                      <a:tailEnd type="none" w="med" len="med"/>
+                    </a:lnT>
+                    <a:lnB w="12700" cap="flat" cmpd="sng" algn="ctr">
+                      <a:solidFill>
+                        <a:schemeClr val="tx1"/>
+                      </a:solidFill>
+                      <a:prstDash val="solid"/>
+                      <a:round/>
+                      <a:headEnd type="none" w="med" len="med"/>
+                      <a:tailEnd type="none" w="med" len="med"/>
+                    </a:lnB>
+                  </a:tcPr>
+                </a:tc>
+                <a:extLst>
+                  <a:ext uri="{0D108BD9-81ED-4DB2-BD59-A6C34878D82A}">
+                    <a16:rowId xmlns:a16="http://schemas.microsoft.com/office/drawing/2014/main" val="11376807"/>
+                  </a:ext>
+                </a:extLst>
+              </a:tr>
+              <a:tr h="403769">
+                <a:tc>
+                  <a:txBody>
+                    <a:bodyPr/>
+                    <a:lstStyle/>
+                    <a:p>
+                      <a:pPr algn="ctr">
+                        <a:buNone/>
+                      </a:pPr>
+                      <a:r>
+                        <a:rPr lang="en-IN" sz="1200" dirty="0">
+                          <a:effectLst/>
+                          <a:latin typeface="Times New Roman" panose="02020603050405020304" pitchFamily="18" charset="0"/>
+                          <a:cs typeface="Times New Roman" panose="02020603050405020304" pitchFamily="18" charset="0"/>
+                        </a:rPr>
+                        <a:t>Collaboration</a:t>
+                      </a:r>
+                    </a:p>
+                  </a:txBody>
+                  <a:tcPr marL="67464" marR="67464" marT="33732" marB="33732" anchor="ctr">
+                    <a:lnL w="12700" cap="flat" cmpd="sng" algn="ctr">
+                      <a:solidFill>
+                        <a:schemeClr val="tx1"/>
+                      </a:solidFill>
+                      <a:prstDash val="solid"/>
+                      <a:round/>
+                      <a:headEnd type="none" w="med" len="med"/>
+                      <a:tailEnd type="none" w="med" len="med"/>
+                    </a:lnL>
+                    <a:lnR w="12700" cap="flat" cmpd="sng" algn="ctr">
+                      <a:solidFill>
+                        <a:schemeClr val="tx1"/>
+                      </a:solidFill>
+                      <a:prstDash val="solid"/>
+                      <a:round/>
+                      <a:headEnd type="none" w="med" len="med"/>
+                      <a:tailEnd type="none" w="med" len="med"/>
+                    </a:lnR>
+                    <a:lnT w="12700" cap="flat" cmpd="sng" algn="ctr">
+                      <a:solidFill>
+                        <a:schemeClr val="tx1"/>
+                      </a:solidFill>
+                      <a:prstDash val="solid"/>
+                      <a:round/>
+                      <a:headEnd type="none" w="med" len="med"/>
+                      <a:tailEnd type="none" w="med" len="med"/>
+                    </a:lnT>
+                    <a:lnB w="12700" cap="flat" cmpd="sng" algn="ctr">
+                      <a:solidFill>
+                        <a:schemeClr val="tx1"/>
+                      </a:solidFill>
+                      <a:prstDash val="solid"/>
+                      <a:round/>
+                      <a:headEnd type="none" w="med" len="med"/>
+                      <a:tailEnd type="none" w="med" len="med"/>
+                    </a:lnB>
+                  </a:tcPr>
+                </a:tc>
+                <a:tc>
+                  <a:txBody>
+                    <a:bodyPr/>
+                    <a:lstStyle/>
+                    <a:p>
+                      <a:pPr algn="ctr">
+                        <a:buNone/>
+                      </a:pPr>
+                      <a:r>
+                        <a:rPr lang="en-IN" sz="1200" dirty="0">
+                          <a:effectLst/>
+                          <a:latin typeface="Times New Roman" panose="02020603050405020304" pitchFamily="18" charset="0"/>
+                          <a:cs typeface="Times New Roman" panose="02020603050405020304" pitchFamily="18" charset="0"/>
+                        </a:rPr>
+                        <a:t>Not present</a:t>
+                      </a:r>
+                    </a:p>
+                  </a:txBody>
+                  <a:tcPr marL="67464" marR="67464" marT="33732" marB="33732" anchor="ctr">
+                    <a:lnL w="12700" cap="flat" cmpd="sng" algn="ctr">
+                      <a:solidFill>
+                        <a:schemeClr val="tx1"/>
+                      </a:solidFill>
+                      <a:prstDash val="solid"/>
+                      <a:round/>
+                      <a:headEnd type="none" w="med" len="med"/>
+                      <a:tailEnd type="none" w="med" len="med"/>
+                    </a:lnL>
+                    <a:lnR w="12700" cap="flat" cmpd="sng" algn="ctr">
+                      <a:solidFill>
+                        <a:schemeClr val="tx1"/>
+                      </a:solidFill>
+                      <a:prstDash val="solid"/>
+                      <a:round/>
+                      <a:headEnd type="none" w="med" len="med"/>
+                      <a:tailEnd type="none" w="med" len="med"/>
+                    </a:lnR>
+                    <a:lnT w="12700" cap="flat" cmpd="sng" algn="ctr">
+                      <a:solidFill>
+                        <a:schemeClr val="tx1"/>
+                      </a:solidFill>
+                      <a:prstDash val="solid"/>
+                      <a:round/>
+                      <a:headEnd type="none" w="med" len="med"/>
+                      <a:tailEnd type="none" w="med" len="med"/>
+                    </a:lnT>
+                    <a:lnB w="12700" cap="flat" cmpd="sng" algn="ctr">
+                      <a:solidFill>
+                        <a:schemeClr val="tx1"/>
+                      </a:solidFill>
+                      <a:prstDash val="solid"/>
+                      <a:round/>
+                      <a:headEnd type="none" w="med" len="med"/>
+                      <a:tailEnd type="none" w="med" len="med"/>
+                    </a:lnB>
+                  </a:tcPr>
+                </a:tc>
+                <a:tc>
+                  <a:txBody>
+                    <a:bodyPr/>
+                    <a:lstStyle/>
+                    <a:p>
+                      <a:pPr algn="ctr">
+                        <a:buNone/>
+                      </a:pPr>
+                      <a:r>
+                        <a:rPr lang="en-IN" sz="1200">
+                          <a:effectLst/>
+                          <a:latin typeface="Times New Roman" panose="02020603050405020304" pitchFamily="18" charset="0"/>
+                          <a:cs typeface="Times New Roman" panose="02020603050405020304" pitchFamily="18" charset="0"/>
+                        </a:rPr>
+                        <a:t>Bilateral sessions, sequential pipelines, mid-session abort</a:t>
+                      </a:r>
+                    </a:p>
+                  </a:txBody>
+                  <a:tcPr marL="67464" marR="67464" marT="33732" marB="33732" anchor="ctr">
+                    <a:lnL w="12700" cap="flat" cmpd="sng" algn="ctr">
+                      <a:solidFill>
+                        <a:schemeClr val="tx1"/>
+                      </a:solidFill>
+                      <a:prstDash val="solid"/>
+                      <a:round/>
+                      <a:headEnd type="none" w="med" len="med"/>
+                      <a:tailEnd type="none" w="med" len="med"/>
+                    </a:lnL>
+                    <a:lnR w="12700" cap="flat" cmpd="sng" algn="ctr">
+                      <a:solidFill>
+                        <a:schemeClr val="tx1"/>
+                      </a:solidFill>
+                      <a:prstDash val="solid"/>
+                      <a:round/>
+                      <a:headEnd type="none" w="med" len="med"/>
+                      <a:tailEnd type="none" w="med" len="med"/>
+                    </a:lnR>
+                    <a:lnT w="12700" cap="flat" cmpd="sng" algn="ctr">
+                      <a:solidFill>
+                        <a:schemeClr val="tx1"/>
+                      </a:solidFill>
+                      <a:prstDash val="solid"/>
+                      <a:round/>
+                      <a:headEnd type="none" w="med" len="med"/>
+                      <a:tailEnd type="none" w="med" len="med"/>
+                    </a:lnT>
+                    <a:lnB w="12700" cap="flat" cmpd="sng" algn="ctr">
+                      <a:solidFill>
+                        <a:schemeClr val="tx1"/>
+                      </a:solidFill>
+                      <a:prstDash val="solid"/>
+                      <a:round/>
+                      <a:headEnd type="none" w="med" len="med"/>
+                      <a:tailEnd type="none" w="med" len="med"/>
+                    </a:lnB>
+                  </a:tcPr>
+                </a:tc>
+                <a:extLst>
+                  <a:ext uri="{0D108BD9-81ED-4DB2-BD59-A6C34878D82A}">
+                    <a16:rowId xmlns:a16="http://schemas.microsoft.com/office/drawing/2014/main" val="2982247268"/>
+                  </a:ext>
+                </a:extLst>
+              </a:tr>
+              <a:tr h="403769">
+                <a:tc>
+                  <a:txBody>
+                    <a:bodyPr/>
+                    <a:lstStyle/>
+                    <a:p>
+                      <a:pPr algn="ctr">
+                        <a:buNone/>
+                      </a:pPr>
+                      <a:r>
+                        <a:rPr lang="en-IN" sz="1200" dirty="0">
+                          <a:effectLst/>
+                          <a:latin typeface="Times New Roman" panose="02020603050405020304" pitchFamily="18" charset="0"/>
+                          <a:cs typeface="Times New Roman" panose="02020603050405020304" pitchFamily="18" charset="0"/>
+                        </a:rPr>
+                        <a:t>Storage</a:t>
+                      </a:r>
+                    </a:p>
+                  </a:txBody>
+                  <a:tcPr marL="67464" marR="67464" marT="33732" marB="33732" anchor="ctr">
+                    <a:lnL w="12700" cap="flat" cmpd="sng" algn="ctr">
+                      <a:solidFill>
+                        <a:schemeClr val="tx1"/>
+                      </a:solidFill>
+                      <a:prstDash val="solid"/>
+                      <a:round/>
+                      <a:headEnd type="none" w="med" len="med"/>
+                      <a:tailEnd type="none" w="med" len="med"/>
+                    </a:lnL>
+                    <a:lnR w="12700" cap="flat" cmpd="sng" algn="ctr">
+                      <a:solidFill>
+                        <a:schemeClr val="tx1"/>
+                      </a:solidFill>
+                      <a:prstDash val="solid"/>
+                      <a:round/>
+                      <a:headEnd type="none" w="med" len="med"/>
+                      <a:tailEnd type="none" w="med" len="med"/>
+                    </a:lnR>
+                    <a:lnT w="12700" cap="flat" cmpd="sng" algn="ctr">
+                      <a:solidFill>
+                        <a:schemeClr val="tx1"/>
+                      </a:solidFill>
+                      <a:prstDash val="solid"/>
+                      <a:round/>
+                      <a:headEnd type="none" w="med" len="med"/>
+                      <a:tailEnd type="none" w="med" len="med"/>
+                    </a:lnT>
+                    <a:lnB w="12700" cap="flat" cmpd="sng" algn="ctr">
+                      <a:solidFill>
+                        <a:schemeClr val="tx1"/>
+                      </a:solidFill>
+                      <a:prstDash val="solid"/>
+                      <a:round/>
+                      <a:headEnd type="none" w="med" len="med"/>
+                      <a:tailEnd type="none" w="med" len="med"/>
+                    </a:lnB>
+                  </a:tcPr>
+                </a:tc>
+                <a:tc>
+                  <a:txBody>
+                    <a:bodyPr/>
+                    <a:lstStyle/>
+                    <a:p>
+                      <a:pPr algn="ctr">
+                        <a:buNone/>
+                      </a:pPr>
+                      <a:r>
+                        <a:rPr lang="en-IN" sz="1200" dirty="0">
+                          <a:effectLst/>
+                          <a:latin typeface="Times New Roman" panose="02020603050405020304" pitchFamily="18" charset="0"/>
+                          <a:cs typeface="Times New Roman" panose="02020603050405020304" pitchFamily="18" charset="0"/>
+                        </a:rPr>
+                        <a:t>SQLite VDR</a:t>
+                      </a:r>
+                    </a:p>
+                  </a:txBody>
+                  <a:tcPr marL="67464" marR="67464" marT="33732" marB="33732" anchor="ctr">
+                    <a:lnL w="12700" cap="flat" cmpd="sng" algn="ctr">
+                      <a:solidFill>
+                        <a:schemeClr val="tx1"/>
+                      </a:solidFill>
+                      <a:prstDash val="solid"/>
+                      <a:round/>
+                      <a:headEnd type="none" w="med" len="med"/>
+                      <a:tailEnd type="none" w="med" len="med"/>
+                    </a:lnL>
+                    <a:lnR w="12700" cap="flat" cmpd="sng" algn="ctr">
+                      <a:solidFill>
+                        <a:schemeClr val="tx1"/>
+                      </a:solidFill>
+                      <a:prstDash val="solid"/>
+                      <a:round/>
+                      <a:headEnd type="none" w="med" len="med"/>
+                      <a:tailEnd type="none" w="med" len="med"/>
+                    </a:lnR>
+                    <a:lnT w="12700" cap="flat" cmpd="sng" algn="ctr">
+                      <a:solidFill>
+                        <a:schemeClr val="tx1"/>
+                      </a:solidFill>
+                      <a:prstDash val="solid"/>
+                      <a:round/>
+                      <a:headEnd type="none" w="med" len="med"/>
+                      <a:tailEnd type="none" w="med" len="med"/>
+                    </a:lnT>
+                    <a:lnB w="12700" cap="flat" cmpd="sng" algn="ctr">
+                      <a:solidFill>
+                        <a:schemeClr val="tx1"/>
+                      </a:solidFill>
+                      <a:prstDash val="solid"/>
+                      <a:round/>
+                      <a:headEnd type="none" w="med" len="med"/>
+                      <a:tailEnd type="none" w="med" len="med"/>
+                    </a:lnB>
+                  </a:tcPr>
+                </a:tc>
+                <a:tc>
+                  <a:txBody>
+                    <a:bodyPr/>
+                    <a:lstStyle/>
+                    <a:p>
+                      <a:pPr algn="ctr">
+                        <a:buNone/>
+                      </a:pPr>
+                      <a:r>
+                        <a:rPr lang="en-IN" sz="1200" dirty="0">
+                          <a:effectLst/>
+                          <a:latin typeface="Times New Roman" panose="02020603050405020304" pitchFamily="18" charset="0"/>
+                          <a:cs typeface="Times New Roman" panose="02020603050405020304" pitchFamily="18" charset="0"/>
+                        </a:rPr>
+                        <a:t>13-table SQLite WAL VDR with four audit streams</a:t>
+                      </a:r>
+                    </a:p>
+                  </a:txBody>
+                  <a:tcPr marL="67464" marR="67464" marT="33732" marB="33732" anchor="ctr">
+                    <a:lnL w="12700" cap="flat" cmpd="sng" algn="ctr">
+                      <a:solidFill>
+                        <a:schemeClr val="tx1"/>
+                      </a:solidFill>
+                      <a:prstDash val="solid"/>
+                      <a:round/>
+                      <a:headEnd type="none" w="med" len="med"/>
+                      <a:tailEnd type="none" w="med" len="med"/>
+                    </a:lnL>
+                    <a:lnR w="12700" cap="flat" cmpd="sng" algn="ctr">
+                      <a:solidFill>
+                        <a:schemeClr val="tx1"/>
+                      </a:solidFill>
+                      <a:prstDash val="solid"/>
+                      <a:round/>
+                      <a:headEnd type="none" w="med" len="med"/>
+                      <a:tailEnd type="none" w="med" len="med"/>
+                    </a:lnR>
+                    <a:lnT w="12700" cap="flat" cmpd="sng" algn="ctr">
+                      <a:solidFill>
+                        <a:schemeClr val="tx1"/>
+                      </a:solidFill>
+                      <a:prstDash val="solid"/>
+                      <a:round/>
+                      <a:headEnd type="none" w="med" len="med"/>
+                      <a:tailEnd type="none" w="med" len="med"/>
+                    </a:lnT>
+                    <a:lnB w="12700" cap="flat" cmpd="sng" algn="ctr">
+                      <a:solidFill>
+                        <a:schemeClr val="tx1"/>
+                      </a:solidFill>
+                      <a:prstDash val="solid"/>
+                      <a:round/>
+                      <a:headEnd type="none" w="med" len="med"/>
+                      <a:tailEnd type="none" w="med" len="med"/>
+                    </a:lnB>
+                  </a:tcPr>
+                </a:tc>
+                <a:extLst>
+                  <a:ext uri="{0D108BD9-81ED-4DB2-BD59-A6C34878D82A}">
+                    <a16:rowId xmlns:a16="http://schemas.microsoft.com/office/drawing/2014/main" val="1515333743"/>
+                  </a:ext>
+                </a:extLst>
+              </a:tr>
+              <a:tr h="403769">
+                <a:tc>
+                  <a:txBody>
+                    <a:bodyPr/>
+                    <a:lstStyle/>
+                    <a:p>
+                      <a:pPr algn="ctr">
+                        <a:buNone/>
+                      </a:pPr>
+                      <a:r>
+                        <a:rPr lang="en-IN" sz="1200" dirty="0">
+                          <a:effectLst/>
+                          <a:latin typeface="Times New Roman" panose="02020603050405020304" pitchFamily="18" charset="0"/>
+                          <a:cs typeface="Times New Roman" panose="02020603050405020304" pitchFamily="18" charset="0"/>
+                        </a:rPr>
+                        <a:t>Frontend</a:t>
+                      </a:r>
+                    </a:p>
+                  </a:txBody>
+                  <a:tcPr marL="67464" marR="67464" marT="33732" marB="33732" anchor="ctr">
+                    <a:lnL w="12700" cap="flat" cmpd="sng" algn="ctr">
+                      <a:solidFill>
+                        <a:schemeClr val="tx1"/>
+                      </a:solidFill>
+                      <a:prstDash val="solid"/>
+                      <a:round/>
+                      <a:headEnd type="none" w="med" len="med"/>
+                      <a:tailEnd type="none" w="med" len="med"/>
+                    </a:lnL>
+                    <a:lnR w="12700" cap="flat" cmpd="sng" algn="ctr">
+                      <a:solidFill>
+                        <a:schemeClr val="tx1"/>
+                      </a:solidFill>
+                      <a:prstDash val="solid"/>
+                      <a:round/>
+                      <a:headEnd type="none" w="med" len="med"/>
+                      <a:tailEnd type="none" w="med" len="med"/>
+                    </a:lnR>
+                    <a:lnT w="12700" cap="flat" cmpd="sng" algn="ctr">
+                      <a:solidFill>
+                        <a:schemeClr val="tx1"/>
+                      </a:solidFill>
+                      <a:prstDash val="solid"/>
+                      <a:round/>
+                      <a:headEnd type="none" w="med" len="med"/>
+                      <a:tailEnd type="none" w="med" len="med"/>
+                    </a:lnT>
+                    <a:lnB w="12700" cap="flat" cmpd="sng" algn="ctr">
+                      <a:solidFill>
+                        <a:schemeClr val="tx1"/>
+                      </a:solidFill>
+                      <a:prstDash val="solid"/>
+                      <a:round/>
+                      <a:headEnd type="none" w="med" len="med"/>
+                      <a:tailEnd type="none" w="med" len="med"/>
+                    </a:lnB>
+                  </a:tcPr>
+                </a:tc>
+                <a:tc>
+                  <a:txBody>
+                    <a:bodyPr/>
+                    <a:lstStyle/>
+                    <a:p>
+                      <a:pPr algn="ctr">
+                        <a:buNone/>
+                      </a:pPr>
+                      <a:r>
+                        <a:rPr lang="en-IN" sz="1200">
+                          <a:effectLst/>
+                          <a:latin typeface="Times New Roman" panose="02020603050405020304" pitchFamily="18" charset="0"/>
+                          <a:cs typeface="Times New Roman" panose="02020603050405020304" pitchFamily="18" charset="0"/>
+                        </a:rPr>
+                        <a:t>Dashboard</a:t>
+                      </a:r>
+                    </a:p>
+                  </a:txBody>
+                  <a:tcPr marL="67464" marR="67464" marT="33732" marB="33732" anchor="ctr">
+                    <a:lnL w="12700" cap="flat" cmpd="sng" algn="ctr">
+                      <a:solidFill>
+                        <a:schemeClr val="tx1"/>
+                      </a:solidFill>
+                      <a:prstDash val="solid"/>
+                      <a:round/>
+                      <a:headEnd type="none" w="med" len="med"/>
+                      <a:tailEnd type="none" w="med" len="med"/>
+                    </a:lnL>
+                    <a:lnR w="12700" cap="flat" cmpd="sng" algn="ctr">
+                      <a:solidFill>
+                        <a:schemeClr val="tx1"/>
+                      </a:solidFill>
+                      <a:prstDash val="solid"/>
+                      <a:round/>
+                      <a:headEnd type="none" w="med" len="med"/>
+                      <a:tailEnd type="none" w="med" len="med"/>
+                    </a:lnR>
+                    <a:lnT w="12700" cap="flat" cmpd="sng" algn="ctr">
+                      <a:solidFill>
+                        <a:schemeClr val="tx1"/>
+                      </a:solidFill>
+                      <a:prstDash val="solid"/>
+                      <a:round/>
+                      <a:headEnd type="none" w="med" len="med"/>
+                      <a:tailEnd type="none" w="med" len="med"/>
+                    </a:lnT>
+                    <a:lnB w="12700" cap="flat" cmpd="sng" algn="ctr">
+                      <a:solidFill>
+                        <a:schemeClr val="tx1"/>
+                      </a:solidFill>
+                      <a:prstDash val="solid"/>
+                      <a:round/>
+                      <a:headEnd type="none" w="med" len="med"/>
+                      <a:tailEnd type="none" w="med" len="med"/>
+                    </a:lnB>
+                  </a:tcPr>
+                </a:tc>
+                <a:tc>
+                  <a:txBody>
+                    <a:bodyPr/>
+                    <a:lstStyle/>
+                    <a:p>
+                      <a:pPr algn="ctr">
+                        <a:buNone/>
+                      </a:pPr>
+                      <a:r>
+                        <a:rPr lang="en-IN" sz="1200" dirty="0">
+                          <a:effectLst/>
+                          <a:latin typeface="Times New Roman" panose="02020603050405020304" pitchFamily="18" charset="0"/>
+                          <a:cs typeface="Times New Roman" panose="02020603050405020304" pitchFamily="18" charset="0"/>
+                        </a:rPr>
+                        <a:t>Five-module SOC portal with Agent Investigation Drawer</a:t>
+                      </a:r>
+                    </a:p>
+                  </a:txBody>
+                  <a:tcPr marL="67464" marR="67464" marT="33732" marB="33732" anchor="ctr">
+                    <a:lnL w="12700" cap="flat" cmpd="sng" algn="ctr">
+                      <a:solidFill>
+                        <a:schemeClr val="tx1"/>
+                      </a:solidFill>
+                      <a:prstDash val="solid"/>
+                      <a:round/>
+                      <a:headEnd type="none" w="med" len="med"/>
+                      <a:tailEnd type="none" w="med" len="med"/>
+                    </a:lnL>
+                    <a:lnR w="12700" cap="flat" cmpd="sng" algn="ctr">
+                      <a:solidFill>
+                        <a:schemeClr val="tx1"/>
+                      </a:solidFill>
+                      <a:prstDash val="solid"/>
+                      <a:round/>
+                      <a:headEnd type="none" w="med" len="med"/>
+                      <a:tailEnd type="none" w="med" len="med"/>
+                    </a:lnR>
+                    <a:lnT w="12700" cap="flat" cmpd="sng" algn="ctr">
+                      <a:solidFill>
+                        <a:schemeClr val="tx1"/>
+                      </a:solidFill>
+                      <a:prstDash val="solid"/>
+                      <a:round/>
+                      <a:headEnd type="none" w="med" len="med"/>
+                      <a:tailEnd type="none" w="med" len="med"/>
+                    </a:lnT>
+                    <a:lnB w="12700" cap="flat" cmpd="sng" algn="ctr">
+                      <a:solidFill>
+                        <a:schemeClr val="tx1"/>
+                      </a:solidFill>
+                      <a:prstDash val="solid"/>
+                      <a:round/>
+                      <a:headEnd type="none" w="med" len="med"/>
+                      <a:tailEnd type="none" w="med" len="med"/>
+                    </a:lnB>
+                  </a:tcPr>
+                </a:tc>
+                <a:extLst>
+                  <a:ext uri="{0D108BD9-81ED-4DB2-BD59-A6C34878D82A}">
+                    <a16:rowId xmlns:a16="http://schemas.microsoft.com/office/drawing/2014/main" val="1060874517"/>
+                  </a:ext>
+                </a:extLst>
+              </a:tr>
+              <a:tr h="403769">
+                <a:tc>
+                  <a:txBody>
+                    <a:bodyPr/>
+                    <a:lstStyle/>
+                    <a:p>
+                      <a:pPr algn="ctr">
+                        <a:buNone/>
+                      </a:pPr>
+                      <a:r>
+                        <a:rPr lang="en-IN" sz="1200" dirty="0">
+                          <a:effectLst/>
+                          <a:latin typeface="Times New Roman" panose="02020603050405020304" pitchFamily="18" charset="0"/>
+                          <a:cs typeface="Times New Roman" panose="02020603050405020304" pitchFamily="18" charset="0"/>
+                        </a:rPr>
+                        <a:t>Testing</a:t>
+                      </a:r>
+                    </a:p>
+                  </a:txBody>
+                  <a:tcPr marL="67464" marR="67464" marT="33732" marB="33732" anchor="ctr">
+                    <a:lnL w="12700" cap="flat" cmpd="sng" algn="ctr">
+                      <a:solidFill>
+                        <a:schemeClr val="tx1"/>
+                      </a:solidFill>
+                      <a:prstDash val="solid"/>
+                      <a:round/>
+                      <a:headEnd type="none" w="med" len="med"/>
+                      <a:tailEnd type="none" w="med" len="med"/>
+                    </a:lnL>
+                    <a:lnR w="12700" cap="flat" cmpd="sng" algn="ctr">
+                      <a:solidFill>
+                        <a:schemeClr val="tx1"/>
+                      </a:solidFill>
+                      <a:prstDash val="solid"/>
+                      <a:round/>
+                      <a:headEnd type="none" w="med" len="med"/>
+                      <a:tailEnd type="none" w="med" len="med"/>
+                    </a:lnR>
+                    <a:lnT w="12700" cap="flat" cmpd="sng" algn="ctr">
+                      <a:solidFill>
+                        <a:schemeClr val="tx1"/>
+                      </a:solidFill>
+                      <a:prstDash val="solid"/>
+                      <a:round/>
+                      <a:headEnd type="none" w="med" len="med"/>
+                      <a:tailEnd type="none" w="med" len="med"/>
+                    </a:lnT>
+                    <a:lnB w="12700" cap="flat" cmpd="sng" algn="ctr">
+                      <a:solidFill>
+                        <a:schemeClr val="tx1"/>
+                      </a:solidFill>
+                      <a:prstDash val="solid"/>
+                      <a:round/>
+                      <a:headEnd type="none" w="med" len="med"/>
+                      <a:tailEnd type="none" w="med" len="med"/>
+                    </a:lnB>
+                  </a:tcPr>
+                </a:tc>
+                <a:tc>
+                  <a:txBody>
+                    <a:bodyPr/>
+                    <a:lstStyle/>
+                    <a:p>
+                      <a:pPr algn="ctr">
+                        <a:buNone/>
+                      </a:pPr>
+                      <a:r>
+                        <a:rPr lang="en-IN" sz="1200" dirty="0">
+                          <a:effectLst/>
+                          <a:latin typeface="Times New Roman" panose="02020603050405020304" pitchFamily="18" charset="0"/>
+                          <a:cs typeface="Times New Roman" panose="02020603050405020304" pitchFamily="18" charset="0"/>
+                        </a:rPr>
+                        <a:t>40 tests</a:t>
+                      </a:r>
+                    </a:p>
+                  </a:txBody>
+                  <a:tcPr marL="67464" marR="67464" marT="33732" marB="33732" anchor="ctr">
+                    <a:lnL w="12700" cap="flat" cmpd="sng" algn="ctr">
+                      <a:solidFill>
+                        <a:schemeClr val="tx1"/>
+                      </a:solidFill>
+                      <a:prstDash val="solid"/>
+                      <a:round/>
+                      <a:headEnd type="none" w="med" len="med"/>
+                      <a:tailEnd type="none" w="med" len="med"/>
+                    </a:lnL>
+                    <a:lnR w="12700" cap="flat" cmpd="sng" algn="ctr">
+                      <a:solidFill>
+                        <a:schemeClr val="tx1"/>
+                      </a:solidFill>
+                      <a:prstDash val="solid"/>
+                      <a:round/>
+                      <a:headEnd type="none" w="med" len="med"/>
+                      <a:tailEnd type="none" w="med" len="med"/>
+                    </a:lnR>
+                    <a:lnT w="12700" cap="flat" cmpd="sng" algn="ctr">
+                      <a:solidFill>
+                        <a:schemeClr val="tx1"/>
+                      </a:solidFill>
+                      <a:prstDash val="solid"/>
+                      <a:round/>
+                      <a:headEnd type="none" w="med" len="med"/>
+                      <a:tailEnd type="none" w="med" len="med"/>
+                    </a:lnT>
+                    <a:lnB w="12700" cap="flat" cmpd="sng" algn="ctr">
+                      <a:solidFill>
+                        <a:schemeClr val="tx1"/>
+                      </a:solidFill>
+                      <a:prstDash val="solid"/>
+                      <a:round/>
+                      <a:headEnd type="none" w="med" len="med"/>
+                      <a:tailEnd type="none" w="med" len="med"/>
+                    </a:lnB>
+                  </a:tcPr>
+                </a:tc>
+                <a:tc>
+                  <a:txBody>
+                    <a:bodyPr/>
+                    <a:lstStyle/>
+                    <a:p>
+                      <a:pPr algn="ctr">
+                        <a:buNone/>
+                      </a:pPr>
+                      <a:r>
+                        <a:rPr lang="en-IN" sz="1200" dirty="0">
+                          <a:effectLst/>
+                          <a:latin typeface="Times New Roman" panose="02020603050405020304" pitchFamily="18" charset="0"/>
+                          <a:cs typeface="Times New Roman" panose="02020603050405020304" pitchFamily="18" charset="0"/>
+                        </a:rPr>
+                        <a:t>80 tests passing in 15.04 s; Vite build with 0 errors</a:t>
+                      </a:r>
+                    </a:p>
+                  </a:txBody>
+                  <a:tcPr marL="67464" marR="67464" marT="33732" marB="33732" anchor="ctr">
+                    <a:lnL w="12700" cap="flat" cmpd="sng" algn="ctr">
+                      <a:solidFill>
+                        <a:schemeClr val="tx1"/>
+                      </a:solidFill>
+                      <a:prstDash val="solid"/>
+                      <a:round/>
+                      <a:headEnd type="none" w="med" len="med"/>
+                      <a:tailEnd type="none" w="med" len="med"/>
+                    </a:lnL>
+                    <a:lnR w="12700" cap="flat" cmpd="sng" algn="ctr">
+                      <a:solidFill>
+                        <a:schemeClr val="tx1"/>
+                      </a:solidFill>
+                      <a:prstDash val="solid"/>
+                      <a:round/>
+                      <a:headEnd type="none" w="med" len="med"/>
+                      <a:tailEnd type="none" w="med" len="med"/>
+                    </a:lnR>
+                    <a:lnT w="12700" cap="flat" cmpd="sng" algn="ctr">
+                      <a:solidFill>
+                        <a:schemeClr val="tx1"/>
+                      </a:solidFill>
+                      <a:prstDash val="solid"/>
+                      <a:round/>
+                      <a:headEnd type="none" w="med" len="med"/>
+                      <a:tailEnd type="none" w="med" len="med"/>
+                    </a:lnT>
+                    <a:lnB w="12700" cap="flat" cmpd="sng" algn="ctr">
+                      <a:solidFill>
+                        <a:schemeClr val="tx1"/>
+                      </a:solidFill>
+                      <a:prstDash val="solid"/>
+                      <a:round/>
+                      <a:headEnd type="none" w="med" len="med"/>
+                      <a:tailEnd type="none" w="med" len="med"/>
+                    </a:lnB>
+                  </a:tcPr>
+                </a:tc>
+                <a:extLst>
+                  <a:ext uri="{0D108BD9-81ED-4DB2-BD59-A6C34878D82A}">
+                    <a16:rowId xmlns:a16="http://schemas.microsoft.com/office/drawing/2014/main" val="3621753361"/>
+                  </a:ext>
+                </a:extLst>
+              </a:tr>
+            </a:tbl>
+          </a:graphicData>
+        </a:graphic>
+      </p:graphicFrame>
+    </p:spTree>
+    <p:extLst>
+      <p:ext uri="{BB962C8B-B14F-4D97-AF65-F5344CB8AC3E}">
+        <p14:creationId xmlns:p14="http://schemas.microsoft.com/office/powerpoint/2010/main" val="2211805373"/>
+      </p:ext>
+    </p:extLst>
+  </p:cSld>
+  <p:clrMapOvr>
+    <a:masterClrMapping/>
+  </p:clrMapOvr>
+</p:sld>
+</file>
+
+<file path=ppt/slides/slide30.xml><?xml version="1.0" encoding="utf-8"?>
 <p:sld xmlns:a="http://schemas.openxmlformats.org/drawingml/2006/main" xmlns:p="http://schemas.openxmlformats.org/presentationml/2006/main" xmlns:r="http://schemas.openxmlformats.org/officeDocument/2006/relationships">
   <p:cSld>
     <p:spTree>
@@ -23224,7 +26637,7 @@
               </a:defRPr>
             </a:pPr>
             <a:r>
-              <a:t>27</a:t>
+              <a:t>28</a:t>
             </a:r>
           </a:p>
         </p:txBody>
@@ -24537,1800 +27950,7 @@
 </p:sld>
 </file>
 
-<file path=ppt/slides/slide3.xml><?xml version="1.0" encoding="utf-8"?>
-<p:sld xmlns:a="http://schemas.openxmlformats.org/drawingml/2006/main" xmlns:r="http://schemas.openxmlformats.org/officeDocument/2006/relationships" xmlns:p="http://schemas.openxmlformats.org/presentationml/2006/main">
-  <p:cSld>
-    <p:spTree>
-      <p:nvGrpSpPr>
-        <p:cNvPr id="1" name=""/>
-        <p:cNvGrpSpPr/>
-        <p:nvPr/>
-      </p:nvGrpSpPr>
-      <p:grpSpPr>
-        <a:xfrm>
-          <a:off x="0" y="0"/>
-          <a:ext cx="0" cy="0"/>
-          <a:chOff x="0" y="0"/>
-          <a:chExt cx="0" cy="0"/>
-        </a:xfrm>
-      </p:grpSpPr>
-      <p:sp>
-        <p:nvSpPr>
-          <p:cNvPr id="2" name="Title 1">
-            <a:extLst>
-              <a:ext uri="{FF2B5EF4-FFF2-40B4-BE49-F238E27FC236}">
-                <a16:creationId xmlns:a16="http://schemas.microsoft.com/office/drawing/2014/main" id="{178401B0-A38E-1EB6-320C-DCDFBCE4C106}"/>
-              </a:ext>
-            </a:extLst>
-          </p:cNvPr>
-          <p:cNvSpPr>
-            <a:spLocks noGrp="1"/>
-          </p:cNvSpPr>
-          <p:nvPr>
-            <p:ph type="title"/>
-          </p:nvPr>
-        </p:nvSpPr>
-        <p:spPr>
-          <a:xfrm>
-            <a:off x="425245" y="1143000"/>
-            <a:ext cx="8229600" cy="914400"/>
-          </a:xfrm>
-        </p:spPr>
-        <p:txBody>
-          <a:bodyPr>
-            <a:normAutofit/>
-          </a:bodyPr>
-          <a:lstStyle/>
-          <a:p>
-            <a:r>
-              <a:rPr lang="en-IN" dirty="0"/>
-              <a:t>Progress Since Phase II</a:t>
-            </a:r>
-          </a:p>
-        </p:txBody>
-      </p:sp>
-      <p:sp>
-        <p:nvSpPr>
-          <p:cNvPr id="4" name="Slide Number Placeholder 3">
-            <a:extLst>
-              <a:ext uri="{FF2B5EF4-FFF2-40B4-BE49-F238E27FC236}">
-                <a16:creationId xmlns:a16="http://schemas.microsoft.com/office/drawing/2014/main" id="{7C5AE437-DC0C-0A9B-A490-9267571E8838}"/>
-              </a:ext>
-            </a:extLst>
-          </p:cNvPr>
-          <p:cNvSpPr>
-            <a:spLocks noGrp="1"/>
-          </p:cNvSpPr>
-          <p:nvPr>
-            <p:ph type="sldNum" idx="12"/>
-          </p:nvPr>
-        </p:nvSpPr>
-        <p:spPr/>
-        <p:txBody>
-          <a:bodyPr/>
-          <a:lstStyle/>
-          <a:p>
-            <a:fld id="{B6F15528-21DE-4FAA-801E-634DDDAF4B2B}" type="slidenum">
-              <a:rPr lang="en-US" smtClean="0"/>
-              <a:pPr/>
-              <a:t>3</a:t>
-            </a:fld>
-            <a:endParaRPr lang="en-US"/>
-          </a:p>
-        </p:txBody>
-      </p:sp>
-      <p:graphicFrame>
-        <p:nvGraphicFramePr>
-          <p:cNvPr id="5" name="Table 4">
-            <a:extLst>
-              <a:ext uri="{FF2B5EF4-FFF2-40B4-BE49-F238E27FC236}">
-                <a16:creationId xmlns:a16="http://schemas.microsoft.com/office/drawing/2014/main" id="{1A73FA75-2E92-8256-198C-1329EA0B40DD}"/>
-              </a:ext>
-            </a:extLst>
-          </p:cNvPr>
-          <p:cNvGraphicFramePr>
-            <a:graphicFrameLocks noGrp="1"/>
-          </p:cNvGraphicFramePr>
-          <p:nvPr>
-            <p:extLst>
-              <p:ext uri="{D42A27DB-BD31-4B8C-83A1-F6EECF244321}">
-                <p14:modId xmlns:p14="http://schemas.microsoft.com/office/powerpoint/2010/main" val="1504180756"/>
-              </p:ext>
-            </p:extLst>
-          </p:nvPr>
-        </p:nvGraphicFramePr>
-        <p:xfrm>
-          <a:off x="457200" y="1920615"/>
-          <a:ext cx="8077200" cy="4589717"/>
-        </p:xfrm>
-        <a:graphic>
-          <a:graphicData uri="http://schemas.openxmlformats.org/drawingml/2006/table">
-            <a:tbl>
-              <a:tblPr>
-                <a:tableStyleId>{2D5ABB26-0587-4C30-8999-92F81FD0307C}</a:tableStyleId>
-              </a:tblPr>
-              <a:tblGrid>
-                <a:gridCol w="2692400">
-                  <a:extLst>
-                    <a:ext uri="{9D8B030D-6E8A-4147-A177-3AD203B41FA5}">
-                      <a16:colId xmlns:a16="http://schemas.microsoft.com/office/drawing/2014/main" val="1025360909"/>
-                    </a:ext>
-                  </a:extLst>
-                </a:gridCol>
-                <a:gridCol w="2692400">
-                  <a:extLst>
-                    <a:ext uri="{9D8B030D-6E8A-4147-A177-3AD203B41FA5}">
-                      <a16:colId xmlns:a16="http://schemas.microsoft.com/office/drawing/2014/main" val="3955646252"/>
-                    </a:ext>
-                  </a:extLst>
-                </a:gridCol>
-                <a:gridCol w="2692400">
-                  <a:extLst>
-                    <a:ext uri="{9D8B030D-6E8A-4147-A177-3AD203B41FA5}">
-                      <a16:colId xmlns:a16="http://schemas.microsoft.com/office/drawing/2014/main" val="7229974"/>
-                    </a:ext>
-                  </a:extLst>
-                </a:gridCol>
-              </a:tblGrid>
-              <a:tr h="381000">
-                <a:tc>
-                  <a:txBody>
-                    <a:bodyPr/>
-                    <a:lstStyle/>
-                    <a:p>
-                      <a:pPr>
-                        <a:buNone/>
-                      </a:pPr>
-                      <a:r>
-                        <a:rPr lang="en-IN" sz="1200" b="1" dirty="0">
-                          <a:effectLst/>
-                          <a:latin typeface="Times New Roman" panose="02020603050405020304" pitchFamily="18" charset="0"/>
-                          <a:cs typeface="Times New Roman" panose="02020603050405020304" pitchFamily="18" charset="0"/>
-                        </a:rPr>
-                        <a:t>Area</a:t>
-                      </a:r>
-                    </a:p>
-                  </a:txBody>
-                  <a:tcPr marL="67464" marR="67464" marT="33732" marB="33732" anchor="ctr">
-                    <a:lnL w="12700" cap="flat" cmpd="sng" algn="ctr">
-                      <a:solidFill>
-                        <a:schemeClr val="tx1"/>
-                      </a:solidFill>
-                      <a:prstDash val="solid"/>
-                      <a:round/>
-                      <a:headEnd type="none" w="med" len="med"/>
-                      <a:tailEnd type="none" w="med" len="med"/>
-                    </a:lnL>
-                    <a:lnR w="12700" cap="flat" cmpd="sng" algn="ctr">
-                      <a:solidFill>
-                        <a:schemeClr val="tx1"/>
-                      </a:solidFill>
-                      <a:prstDash val="solid"/>
-                      <a:round/>
-                      <a:headEnd type="none" w="med" len="med"/>
-                      <a:tailEnd type="none" w="med" len="med"/>
-                    </a:lnR>
-                    <a:lnT w="12700" cap="flat" cmpd="sng" algn="ctr">
-                      <a:solidFill>
-                        <a:schemeClr val="tx1"/>
-                      </a:solidFill>
-                      <a:prstDash val="solid"/>
-                      <a:round/>
-                      <a:headEnd type="none" w="med" len="med"/>
-                      <a:tailEnd type="none" w="med" len="med"/>
-                    </a:lnT>
-                    <a:lnB w="12700" cap="flat" cmpd="sng" algn="ctr">
-                      <a:solidFill>
-                        <a:schemeClr val="tx1"/>
-                      </a:solidFill>
-                      <a:prstDash val="solid"/>
-                      <a:round/>
-                      <a:headEnd type="none" w="med" len="med"/>
-                      <a:tailEnd type="none" w="med" len="med"/>
-                    </a:lnB>
-                    <a:solidFill>
-                      <a:schemeClr val="bg1">
-                        <a:lumMod val="75000"/>
-                      </a:schemeClr>
-                    </a:solidFill>
-                  </a:tcPr>
-                </a:tc>
-                <a:tc>
-                  <a:txBody>
-                    <a:bodyPr/>
-                    <a:lstStyle/>
-                    <a:p>
-                      <a:pPr>
-                        <a:buNone/>
-                      </a:pPr>
-                      <a:r>
-                        <a:rPr lang="en-IN" sz="1200" b="1" dirty="0">
-                          <a:effectLst/>
-                          <a:latin typeface="Times New Roman" panose="02020603050405020304" pitchFamily="18" charset="0"/>
-                          <a:cs typeface="Times New Roman" panose="02020603050405020304" pitchFamily="18" charset="0"/>
-                        </a:rPr>
-                        <a:t>At Phase II</a:t>
-                      </a:r>
-                    </a:p>
-                  </a:txBody>
-                  <a:tcPr marL="67464" marR="67464" marT="33732" marB="33732" anchor="ctr">
-                    <a:lnL w="12700" cap="flat" cmpd="sng" algn="ctr">
-                      <a:solidFill>
-                        <a:schemeClr val="tx1"/>
-                      </a:solidFill>
-                      <a:prstDash val="solid"/>
-                      <a:round/>
-                      <a:headEnd type="none" w="med" len="med"/>
-                      <a:tailEnd type="none" w="med" len="med"/>
-                    </a:lnL>
-                    <a:lnR w="12700" cap="flat" cmpd="sng" algn="ctr">
-                      <a:solidFill>
-                        <a:schemeClr val="tx1"/>
-                      </a:solidFill>
-                      <a:prstDash val="solid"/>
-                      <a:round/>
-                      <a:headEnd type="none" w="med" len="med"/>
-                      <a:tailEnd type="none" w="med" len="med"/>
-                    </a:lnR>
-                    <a:lnT w="12700" cap="flat" cmpd="sng" algn="ctr">
-                      <a:solidFill>
-                        <a:schemeClr val="tx1"/>
-                      </a:solidFill>
-                      <a:prstDash val="solid"/>
-                      <a:round/>
-                      <a:headEnd type="none" w="med" len="med"/>
-                      <a:tailEnd type="none" w="med" len="med"/>
-                    </a:lnT>
-                    <a:lnB w="12700" cap="flat" cmpd="sng" algn="ctr">
-                      <a:solidFill>
-                        <a:schemeClr val="tx1"/>
-                      </a:solidFill>
-                      <a:prstDash val="solid"/>
-                      <a:round/>
-                      <a:headEnd type="none" w="med" len="med"/>
-                      <a:tailEnd type="none" w="med" len="med"/>
-                    </a:lnB>
-                    <a:solidFill>
-                      <a:schemeClr val="bg1">
-                        <a:lumMod val="75000"/>
-                      </a:schemeClr>
-                    </a:solidFill>
-                  </a:tcPr>
-                </a:tc>
-                <a:tc>
-                  <a:txBody>
-                    <a:bodyPr/>
-                    <a:lstStyle/>
-                    <a:p>
-                      <a:pPr>
-                        <a:buNone/>
-                      </a:pPr>
-                      <a:r>
-                        <a:rPr lang="en-IN" sz="1200" b="1" dirty="0">
-                          <a:effectLst/>
-                          <a:latin typeface="Times New Roman" panose="02020603050405020304" pitchFamily="18" charset="0"/>
-                          <a:cs typeface="Times New Roman" panose="02020603050405020304" pitchFamily="18" charset="0"/>
-                        </a:rPr>
-                        <a:t>At Phase III</a:t>
-                      </a:r>
-                    </a:p>
-                  </a:txBody>
-                  <a:tcPr marL="67464" marR="67464" marT="33732" marB="33732" anchor="ctr">
-                    <a:lnL w="12700" cap="flat" cmpd="sng" algn="ctr">
-                      <a:solidFill>
-                        <a:schemeClr val="tx1"/>
-                      </a:solidFill>
-                      <a:prstDash val="solid"/>
-                      <a:round/>
-                      <a:headEnd type="none" w="med" len="med"/>
-                      <a:tailEnd type="none" w="med" len="med"/>
-                    </a:lnL>
-                    <a:lnR w="12700" cap="flat" cmpd="sng" algn="ctr">
-                      <a:solidFill>
-                        <a:schemeClr val="tx1"/>
-                      </a:solidFill>
-                      <a:prstDash val="solid"/>
-                      <a:round/>
-                      <a:headEnd type="none" w="med" len="med"/>
-                      <a:tailEnd type="none" w="med" len="med"/>
-                    </a:lnR>
-                    <a:lnT w="12700" cap="flat" cmpd="sng" algn="ctr">
-                      <a:solidFill>
-                        <a:schemeClr val="tx1"/>
-                      </a:solidFill>
-                      <a:prstDash val="solid"/>
-                      <a:round/>
-                      <a:headEnd type="none" w="med" len="med"/>
-                      <a:tailEnd type="none" w="med" len="med"/>
-                    </a:lnT>
-                    <a:lnB w="12700" cap="flat" cmpd="sng" algn="ctr">
-                      <a:solidFill>
-                        <a:schemeClr val="tx1"/>
-                      </a:solidFill>
-                      <a:prstDash val="solid"/>
-                      <a:round/>
-                      <a:headEnd type="none" w="med" len="med"/>
-                      <a:tailEnd type="none" w="med" len="med"/>
-                    </a:lnB>
-                    <a:solidFill>
-                      <a:schemeClr val="bg1">
-                        <a:lumMod val="75000"/>
-                      </a:schemeClr>
-                    </a:solidFill>
-                  </a:tcPr>
-                </a:tc>
-                <a:extLst>
-                  <a:ext uri="{0D108BD9-81ED-4DB2-BD59-A6C34878D82A}">
-                    <a16:rowId xmlns:a16="http://schemas.microsoft.com/office/drawing/2014/main" val="2906989919"/>
-                  </a:ext>
-                </a:extLst>
-              </a:tr>
-              <a:tr h="736285">
-                <a:tc>
-                  <a:txBody>
-                    <a:bodyPr/>
-                    <a:lstStyle/>
-                    <a:p>
-                      <a:pPr algn="ctr">
-                        <a:buNone/>
-                      </a:pPr>
-                      <a:r>
-                        <a:rPr lang="en-IN" sz="1200" dirty="0">
-                          <a:effectLst/>
-                          <a:latin typeface="Times New Roman" panose="02020603050405020304" pitchFamily="18" charset="0"/>
-                          <a:cs typeface="Times New Roman" panose="02020603050405020304" pitchFamily="18" charset="0"/>
-                        </a:rPr>
-                        <a:t>Identity</a:t>
-                      </a:r>
-                    </a:p>
-                  </a:txBody>
-                  <a:tcPr marL="67464" marR="67464" marT="33732" marB="33732" anchor="ctr">
-                    <a:lnL w="12700" cap="flat" cmpd="sng" algn="ctr">
-                      <a:solidFill>
-                        <a:schemeClr val="tx1"/>
-                      </a:solidFill>
-                      <a:prstDash val="solid"/>
-                      <a:round/>
-                      <a:headEnd type="none" w="med" len="med"/>
-                      <a:tailEnd type="none" w="med" len="med"/>
-                    </a:lnL>
-                    <a:lnR w="12700" cap="flat" cmpd="sng" algn="ctr">
-                      <a:solidFill>
-                        <a:schemeClr val="tx1"/>
-                      </a:solidFill>
-                      <a:prstDash val="solid"/>
-                      <a:round/>
-                      <a:headEnd type="none" w="med" len="med"/>
-                      <a:tailEnd type="none" w="med" len="med"/>
-                    </a:lnR>
-                    <a:lnT w="12700" cap="flat" cmpd="sng" algn="ctr">
-                      <a:solidFill>
-                        <a:schemeClr val="tx1"/>
-                      </a:solidFill>
-                      <a:prstDash val="solid"/>
-                      <a:round/>
-                      <a:headEnd type="none" w="med" len="med"/>
-                      <a:tailEnd type="none" w="med" len="med"/>
-                    </a:lnT>
-                    <a:lnB w="12700" cap="flat" cmpd="sng" algn="ctr">
-                      <a:solidFill>
-                        <a:schemeClr val="tx1"/>
-                      </a:solidFill>
-                      <a:prstDash val="solid"/>
-                      <a:round/>
-                      <a:headEnd type="none" w="med" len="med"/>
-                      <a:tailEnd type="none" w="med" len="med"/>
-                    </a:lnB>
-                  </a:tcPr>
-                </a:tc>
-                <a:tc>
-                  <a:txBody>
-                    <a:bodyPr/>
-                    <a:lstStyle/>
-                    <a:p>
-                      <a:pPr algn="ctr">
-                        <a:buNone/>
-                      </a:pPr>
-                      <a:r>
-                        <a:rPr lang="en-IN" sz="1200" dirty="0" err="1">
-                          <a:effectLst/>
-                          <a:latin typeface="Times New Roman" panose="02020603050405020304" pitchFamily="18" charset="0"/>
-                          <a:cs typeface="Times New Roman" panose="02020603050405020304" pitchFamily="18" charset="0"/>
-                        </a:rPr>
-                        <a:t>did:key</a:t>
-                      </a:r>
-                      <a:r>
-                        <a:rPr lang="en-IN" sz="1200" dirty="0">
-                          <a:effectLst/>
-                          <a:latin typeface="Times New Roman" panose="02020603050405020304" pitchFamily="18" charset="0"/>
-                          <a:cs typeface="Times New Roman" panose="02020603050405020304" pitchFamily="18" charset="0"/>
-                        </a:rPr>
-                        <a:t> + Ed25519 demonstrated</a:t>
-                      </a:r>
-                    </a:p>
-                  </a:txBody>
-                  <a:tcPr marL="67464" marR="67464" marT="33732" marB="33732" anchor="ctr">
-                    <a:lnL w="12700" cap="flat" cmpd="sng" algn="ctr">
-                      <a:solidFill>
-                        <a:schemeClr val="tx1"/>
-                      </a:solidFill>
-                      <a:prstDash val="solid"/>
-                      <a:round/>
-                      <a:headEnd type="none" w="med" len="med"/>
-                      <a:tailEnd type="none" w="med" len="med"/>
-                    </a:lnL>
-                    <a:lnR w="12700" cap="flat" cmpd="sng" algn="ctr">
-                      <a:solidFill>
-                        <a:schemeClr val="tx1"/>
-                      </a:solidFill>
-                      <a:prstDash val="solid"/>
-                      <a:round/>
-                      <a:headEnd type="none" w="med" len="med"/>
-                      <a:tailEnd type="none" w="med" len="med"/>
-                    </a:lnR>
-                    <a:lnT w="12700" cap="flat" cmpd="sng" algn="ctr">
-                      <a:solidFill>
-                        <a:schemeClr val="tx1"/>
-                      </a:solidFill>
-                      <a:prstDash val="solid"/>
-                      <a:round/>
-                      <a:headEnd type="none" w="med" len="med"/>
-                      <a:tailEnd type="none" w="med" len="med"/>
-                    </a:lnT>
-                    <a:lnB w="12700" cap="flat" cmpd="sng" algn="ctr">
-                      <a:solidFill>
-                        <a:schemeClr val="tx1"/>
-                      </a:solidFill>
-                      <a:prstDash val="solid"/>
-                      <a:round/>
-                      <a:headEnd type="none" w="med" len="med"/>
-                      <a:tailEnd type="none" w="med" len="med"/>
-                    </a:lnB>
-                  </a:tcPr>
-                </a:tc>
-                <a:tc>
-                  <a:txBody>
-                    <a:bodyPr/>
-                    <a:lstStyle/>
-                    <a:p>
-                      <a:pPr algn="ctr">
-                        <a:buNone/>
-                      </a:pPr>
-                      <a:r>
-                        <a:rPr lang="en-IN" sz="1200" dirty="0">
-                          <a:effectLst/>
-                          <a:latin typeface="Times New Roman" panose="02020603050405020304" pitchFamily="18" charset="0"/>
-                          <a:cs typeface="Times New Roman" panose="02020603050405020304" pitchFamily="18" charset="0"/>
-                        </a:rPr>
-                        <a:t>Full </a:t>
-                      </a:r>
-                      <a:r>
-                        <a:rPr lang="en-IN" sz="1200" dirty="0" err="1">
-                          <a:effectLst/>
-                          <a:latin typeface="Times New Roman" panose="02020603050405020304" pitchFamily="18" charset="0"/>
-                          <a:cs typeface="Times New Roman" panose="02020603050405020304" pitchFamily="18" charset="0"/>
-                        </a:rPr>
-                        <a:t>did:key</a:t>
-                      </a:r>
-                      <a:r>
-                        <a:rPr lang="en-IN" sz="1200" dirty="0">
-                          <a:effectLst/>
-                          <a:latin typeface="Times New Roman" panose="02020603050405020304" pitchFamily="18" charset="0"/>
-                          <a:cs typeface="Times New Roman" panose="02020603050405020304" pitchFamily="18" charset="0"/>
-                        </a:rPr>
-                        <a:t> + W3C VC lifecycle with URDNA2015 canonicalization and Ed25519Signature2020 proofs</a:t>
-                      </a:r>
-                    </a:p>
-                  </a:txBody>
-                  <a:tcPr marL="67464" marR="67464" marT="33732" marB="33732" anchor="ctr">
-                    <a:lnL w="12700" cap="flat" cmpd="sng" algn="ctr">
-                      <a:solidFill>
-                        <a:schemeClr val="tx1"/>
-                      </a:solidFill>
-                      <a:prstDash val="solid"/>
-                      <a:round/>
-                      <a:headEnd type="none" w="med" len="med"/>
-                      <a:tailEnd type="none" w="med" len="med"/>
-                    </a:lnL>
-                    <a:lnR w="12700" cap="flat" cmpd="sng" algn="ctr">
-                      <a:solidFill>
-                        <a:schemeClr val="tx1"/>
-                      </a:solidFill>
-                      <a:prstDash val="solid"/>
-                      <a:round/>
-                      <a:headEnd type="none" w="med" len="med"/>
-                      <a:tailEnd type="none" w="med" len="med"/>
-                    </a:lnR>
-                    <a:lnT w="12700" cap="flat" cmpd="sng" algn="ctr">
-                      <a:solidFill>
-                        <a:schemeClr val="tx1"/>
-                      </a:solidFill>
-                      <a:prstDash val="solid"/>
-                      <a:round/>
-                      <a:headEnd type="none" w="med" len="med"/>
-                      <a:tailEnd type="none" w="med" len="med"/>
-                    </a:lnT>
-                    <a:lnB w="12700" cap="flat" cmpd="sng" algn="ctr">
-                      <a:solidFill>
-                        <a:schemeClr val="tx1"/>
-                      </a:solidFill>
-                      <a:prstDash val="solid"/>
-                      <a:round/>
-                      <a:headEnd type="none" w="med" len="med"/>
-                      <a:tailEnd type="none" w="med" len="med"/>
-                    </a:lnB>
-                  </a:tcPr>
-                </a:tc>
-                <a:extLst>
-                  <a:ext uri="{0D108BD9-81ED-4DB2-BD59-A6C34878D82A}">
-                    <a16:rowId xmlns:a16="http://schemas.microsoft.com/office/drawing/2014/main" val="3076031548"/>
-                  </a:ext>
-                </a:extLst>
-              </a:tr>
-              <a:tr h="570027">
-                <a:tc>
-                  <a:txBody>
-                    <a:bodyPr/>
-                    <a:lstStyle/>
-                    <a:p>
-                      <a:pPr algn="ctr">
-                        <a:buNone/>
-                      </a:pPr>
-                      <a:r>
-                        <a:rPr lang="en-IN" sz="1200" dirty="0">
-                          <a:effectLst/>
-                          <a:latin typeface="Times New Roman" panose="02020603050405020304" pitchFamily="18" charset="0"/>
-                          <a:cs typeface="Times New Roman" panose="02020603050405020304" pitchFamily="18" charset="0"/>
-                        </a:rPr>
-                        <a:t>Trust engine</a:t>
-                      </a:r>
-                    </a:p>
-                  </a:txBody>
-                  <a:tcPr marL="67464" marR="67464" marT="33732" marB="33732" anchor="ctr">
-                    <a:lnL w="12700" cap="flat" cmpd="sng" algn="ctr">
-                      <a:solidFill>
-                        <a:schemeClr val="tx1"/>
-                      </a:solidFill>
-                      <a:prstDash val="solid"/>
-                      <a:round/>
-                      <a:headEnd type="none" w="med" len="med"/>
-                      <a:tailEnd type="none" w="med" len="med"/>
-                    </a:lnL>
-                    <a:lnR w="12700" cap="flat" cmpd="sng" algn="ctr">
-                      <a:solidFill>
-                        <a:schemeClr val="tx1"/>
-                      </a:solidFill>
-                      <a:prstDash val="solid"/>
-                      <a:round/>
-                      <a:headEnd type="none" w="med" len="med"/>
-                      <a:tailEnd type="none" w="med" len="med"/>
-                    </a:lnR>
-                    <a:lnT w="12700" cap="flat" cmpd="sng" algn="ctr">
-                      <a:solidFill>
-                        <a:schemeClr val="tx1"/>
-                      </a:solidFill>
-                      <a:prstDash val="solid"/>
-                      <a:round/>
-                      <a:headEnd type="none" w="med" len="med"/>
-                      <a:tailEnd type="none" w="med" len="med"/>
-                    </a:lnT>
-                    <a:lnB w="12700" cap="flat" cmpd="sng" algn="ctr">
-                      <a:solidFill>
-                        <a:schemeClr val="tx1"/>
-                      </a:solidFill>
-                      <a:prstDash val="solid"/>
-                      <a:round/>
-                      <a:headEnd type="none" w="med" len="med"/>
-                      <a:tailEnd type="none" w="med" len="med"/>
-                    </a:lnB>
-                  </a:tcPr>
-                </a:tc>
-                <a:tc>
-                  <a:txBody>
-                    <a:bodyPr/>
-                    <a:lstStyle/>
-                    <a:p>
-                      <a:pPr algn="ctr">
-                        <a:buNone/>
-                      </a:pPr>
-                      <a:r>
-                        <a:rPr lang="en-IN" sz="1200" dirty="0">
-                          <a:effectLst/>
-                          <a:latin typeface="Times New Roman" panose="02020603050405020304" pitchFamily="18" charset="0"/>
-                          <a:cs typeface="Times New Roman" panose="02020603050405020304" pitchFamily="18" charset="0"/>
-                        </a:rPr>
-                        <a:t>EMA scoring, 3 states + revoke</a:t>
-                      </a:r>
-                    </a:p>
-                  </a:txBody>
-                  <a:tcPr marL="67464" marR="67464" marT="33732" marB="33732" anchor="ctr">
-                    <a:lnL w="12700" cap="flat" cmpd="sng" algn="ctr">
-                      <a:solidFill>
-                        <a:schemeClr val="tx1"/>
-                      </a:solidFill>
-                      <a:prstDash val="solid"/>
-                      <a:round/>
-                      <a:headEnd type="none" w="med" len="med"/>
-                      <a:tailEnd type="none" w="med" len="med"/>
-                    </a:lnL>
-                    <a:lnR w="12700" cap="flat" cmpd="sng" algn="ctr">
-                      <a:solidFill>
-                        <a:schemeClr val="tx1"/>
-                      </a:solidFill>
-                      <a:prstDash val="solid"/>
-                      <a:round/>
-                      <a:headEnd type="none" w="med" len="med"/>
-                      <a:tailEnd type="none" w="med" len="med"/>
-                    </a:lnR>
-                    <a:lnT w="12700" cap="flat" cmpd="sng" algn="ctr">
-                      <a:solidFill>
-                        <a:schemeClr val="tx1"/>
-                      </a:solidFill>
-                      <a:prstDash val="solid"/>
-                      <a:round/>
-                      <a:headEnd type="none" w="med" len="med"/>
-                      <a:tailEnd type="none" w="med" len="med"/>
-                    </a:lnT>
-                    <a:lnB w="12700" cap="flat" cmpd="sng" algn="ctr">
-                      <a:solidFill>
-                        <a:schemeClr val="tx1"/>
-                      </a:solidFill>
-                      <a:prstDash val="solid"/>
-                      <a:round/>
-                      <a:headEnd type="none" w="med" len="med"/>
-                      <a:tailEnd type="none" w="med" len="med"/>
-                    </a:lnB>
-                  </a:tcPr>
-                </a:tc>
-                <a:tc>
-                  <a:txBody>
-                    <a:bodyPr/>
-                    <a:lstStyle/>
-                    <a:p>
-                      <a:pPr algn="ctr">
-                        <a:buNone/>
-                      </a:pPr>
-                      <a:r>
-                        <a:rPr lang="en-IN" sz="1200" dirty="0">
-                          <a:effectLst/>
-                          <a:latin typeface="Times New Roman" panose="02020603050405020304" pitchFamily="18" charset="0"/>
-                          <a:cs typeface="Times New Roman" panose="02020603050405020304" pitchFamily="18" charset="0"/>
-                        </a:rPr>
-                        <a:t>Same engine, validated with a 10-round scenario and a live /health probe</a:t>
-                      </a:r>
-                    </a:p>
-                  </a:txBody>
-                  <a:tcPr marL="67464" marR="67464" marT="33732" marB="33732" anchor="ctr">
-                    <a:lnL w="12700" cap="flat" cmpd="sng" algn="ctr">
-                      <a:solidFill>
-                        <a:schemeClr val="tx1"/>
-                      </a:solidFill>
-                      <a:prstDash val="solid"/>
-                      <a:round/>
-                      <a:headEnd type="none" w="med" len="med"/>
-                      <a:tailEnd type="none" w="med" len="med"/>
-                    </a:lnL>
-                    <a:lnR w="12700" cap="flat" cmpd="sng" algn="ctr">
-                      <a:solidFill>
-                        <a:schemeClr val="tx1"/>
-                      </a:solidFill>
-                      <a:prstDash val="solid"/>
-                      <a:round/>
-                      <a:headEnd type="none" w="med" len="med"/>
-                      <a:tailEnd type="none" w="med" len="med"/>
-                    </a:lnR>
-                    <a:lnT w="12700" cap="flat" cmpd="sng" algn="ctr">
-                      <a:solidFill>
-                        <a:schemeClr val="tx1"/>
-                      </a:solidFill>
-                      <a:prstDash val="solid"/>
-                      <a:round/>
-                      <a:headEnd type="none" w="med" len="med"/>
-                      <a:tailEnd type="none" w="med" len="med"/>
-                    </a:lnT>
-                    <a:lnB w="12700" cap="flat" cmpd="sng" algn="ctr">
-                      <a:solidFill>
-                        <a:schemeClr val="tx1"/>
-                      </a:solidFill>
-                      <a:prstDash val="solid"/>
-                      <a:round/>
-                      <a:headEnd type="none" w="med" len="med"/>
-                      <a:tailEnd type="none" w="med" len="med"/>
-                    </a:lnB>
-                  </a:tcPr>
-                </a:tc>
-                <a:extLst>
-                  <a:ext uri="{0D108BD9-81ED-4DB2-BD59-A6C34878D82A}">
-                    <a16:rowId xmlns:a16="http://schemas.microsoft.com/office/drawing/2014/main" val="2373644050"/>
-                  </a:ext>
-                </a:extLst>
-              </a:tr>
-              <a:tr h="736285">
-                <a:tc>
-                  <a:txBody>
-                    <a:bodyPr/>
-                    <a:lstStyle/>
-                    <a:p>
-                      <a:pPr algn="ctr">
-                        <a:buNone/>
-                      </a:pPr>
-                      <a:r>
-                        <a:rPr lang="en-IN" sz="1200" dirty="0">
-                          <a:effectLst/>
-                          <a:latin typeface="Times New Roman" panose="02020603050405020304" pitchFamily="18" charset="0"/>
-                          <a:cs typeface="Times New Roman" panose="02020603050405020304" pitchFamily="18" charset="0"/>
-                        </a:rPr>
-                        <a:t>Authorization</a:t>
-                      </a:r>
-                    </a:p>
-                  </a:txBody>
-                  <a:tcPr marL="67464" marR="67464" marT="33732" marB="33732" anchor="ctr">
-                    <a:lnL w="12700" cap="flat" cmpd="sng" algn="ctr">
-                      <a:solidFill>
-                        <a:schemeClr val="tx1"/>
-                      </a:solidFill>
-                      <a:prstDash val="solid"/>
-                      <a:round/>
-                      <a:headEnd type="none" w="med" len="med"/>
-                      <a:tailEnd type="none" w="med" len="med"/>
-                    </a:lnL>
-                    <a:lnR w="12700" cap="flat" cmpd="sng" algn="ctr">
-                      <a:solidFill>
-                        <a:schemeClr val="tx1"/>
-                      </a:solidFill>
-                      <a:prstDash val="solid"/>
-                      <a:round/>
-                      <a:headEnd type="none" w="med" len="med"/>
-                      <a:tailEnd type="none" w="med" len="med"/>
-                    </a:lnR>
-                    <a:lnT w="12700" cap="flat" cmpd="sng" algn="ctr">
-                      <a:solidFill>
-                        <a:schemeClr val="tx1"/>
-                      </a:solidFill>
-                      <a:prstDash val="solid"/>
-                      <a:round/>
-                      <a:headEnd type="none" w="med" len="med"/>
-                      <a:tailEnd type="none" w="med" len="med"/>
-                    </a:lnT>
-                    <a:lnB w="12700" cap="flat" cmpd="sng" algn="ctr">
-                      <a:solidFill>
-                        <a:schemeClr val="tx1"/>
-                      </a:solidFill>
-                      <a:prstDash val="solid"/>
-                      <a:round/>
-                      <a:headEnd type="none" w="med" len="med"/>
-                      <a:tailEnd type="none" w="med" len="med"/>
-                    </a:lnB>
-                  </a:tcPr>
-                </a:tc>
-                <a:tc>
-                  <a:txBody>
-                    <a:bodyPr/>
-                    <a:lstStyle/>
-                    <a:p>
-                      <a:pPr algn="ctr">
-                        <a:buNone/>
-                      </a:pPr>
-                      <a:r>
-                        <a:rPr lang="en-IN" sz="1200" dirty="0">
-                          <a:effectLst/>
-                          <a:latin typeface="Times New Roman" panose="02020603050405020304" pitchFamily="18" charset="0"/>
-                          <a:cs typeface="Times New Roman" panose="02020603050405020304" pitchFamily="18" charset="0"/>
-                        </a:rPr>
-                        <a:t>SUSPICIOUS allowed (logged)</a:t>
-                      </a:r>
-                    </a:p>
-                  </a:txBody>
-                  <a:tcPr marL="67464" marR="67464" marT="33732" marB="33732" anchor="ctr">
-                    <a:lnL w="12700" cap="flat" cmpd="sng" algn="ctr">
-                      <a:solidFill>
-                        <a:schemeClr val="tx1"/>
-                      </a:solidFill>
-                      <a:prstDash val="solid"/>
-                      <a:round/>
-                      <a:headEnd type="none" w="med" len="med"/>
-                      <a:tailEnd type="none" w="med" len="med"/>
-                    </a:lnL>
-                    <a:lnR w="12700" cap="flat" cmpd="sng" algn="ctr">
-                      <a:solidFill>
-                        <a:schemeClr val="tx1"/>
-                      </a:solidFill>
-                      <a:prstDash val="solid"/>
-                      <a:round/>
-                      <a:headEnd type="none" w="med" len="med"/>
-                      <a:tailEnd type="none" w="med" len="med"/>
-                    </a:lnR>
-                    <a:lnT w="12700" cap="flat" cmpd="sng" algn="ctr">
-                      <a:solidFill>
-                        <a:schemeClr val="tx1"/>
-                      </a:solidFill>
-                      <a:prstDash val="solid"/>
-                      <a:round/>
-                      <a:headEnd type="none" w="med" len="med"/>
-                      <a:tailEnd type="none" w="med" len="med"/>
-                    </a:lnT>
-                    <a:lnB w="12700" cap="flat" cmpd="sng" algn="ctr">
-                      <a:solidFill>
-                        <a:schemeClr val="tx1"/>
-                      </a:solidFill>
-                      <a:prstDash val="solid"/>
-                      <a:round/>
-                      <a:headEnd type="none" w="med" len="med"/>
-                      <a:tailEnd type="none" w="med" len="med"/>
-                    </a:lnB>
-                  </a:tcPr>
-                </a:tc>
-                <a:tc>
-                  <a:txBody>
-                    <a:bodyPr/>
-                    <a:lstStyle/>
-                    <a:p>
-                      <a:pPr algn="ctr">
-                        <a:buNone/>
-                      </a:pPr>
-                      <a:r>
-                        <a:rPr lang="en-IN" sz="1200">
-                          <a:effectLst/>
-                          <a:latin typeface="Times New Roman" panose="02020603050405020304" pitchFamily="18" charset="0"/>
-                          <a:cs typeface="Times New Roman" panose="02020603050405020304" pitchFamily="18" charset="0"/>
-                        </a:rPr>
-                        <a:t>SUSPICIOUS blocks privileged actions (HTTP 403); human RBAC added (ADMIN, OPERATOR, VIEWER)</a:t>
-                      </a:r>
-                    </a:p>
-                  </a:txBody>
-                  <a:tcPr marL="67464" marR="67464" marT="33732" marB="33732" anchor="ctr">
-                    <a:lnL w="12700" cap="flat" cmpd="sng" algn="ctr">
-                      <a:solidFill>
-                        <a:schemeClr val="tx1"/>
-                      </a:solidFill>
-                      <a:prstDash val="solid"/>
-                      <a:round/>
-                      <a:headEnd type="none" w="med" len="med"/>
-                      <a:tailEnd type="none" w="med" len="med"/>
-                    </a:lnL>
-                    <a:lnR w="12700" cap="flat" cmpd="sng" algn="ctr">
-                      <a:solidFill>
-                        <a:schemeClr val="tx1"/>
-                      </a:solidFill>
-                      <a:prstDash val="solid"/>
-                      <a:round/>
-                      <a:headEnd type="none" w="med" len="med"/>
-                      <a:tailEnd type="none" w="med" len="med"/>
-                    </a:lnR>
-                    <a:lnT w="12700" cap="flat" cmpd="sng" algn="ctr">
-                      <a:solidFill>
-                        <a:schemeClr val="tx1"/>
-                      </a:solidFill>
-                      <a:prstDash val="solid"/>
-                      <a:round/>
-                      <a:headEnd type="none" w="med" len="med"/>
-                      <a:tailEnd type="none" w="med" len="med"/>
-                    </a:lnT>
-                    <a:lnB w="12700" cap="flat" cmpd="sng" algn="ctr">
-                      <a:solidFill>
-                        <a:schemeClr val="tx1"/>
-                      </a:solidFill>
-                      <a:prstDash val="solid"/>
-                      <a:round/>
-                      <a:headEnd type="none" w="med" len="med"/>
-                      <a:tailEnd type="none" w="med" len="med"/>
-                    </a:lnB>
-                  </a:tcPr>
-                </a:tc>
-                <a:extLst>
-                  <a:ext uri="{0D108BD9-81ED-4DB2-BD59-A6C34878D82A}">
-                    <a16:rowId xmlns:a16="http://schemas.microsoft.com/office/drawing/2014/main" val="4043239163"/>
-                  </a:ext>
-                </a:extLst>
-              </a:tr>
-              <a:tr h="403769">
-                <a:tc>
-                  <a:txBody>
-                    <a:bodyPr/>
-                    <a:lstStyle/>
-                    <a:p>
-                      <a:pPr algn="ctr">
-                        <a:buNone/>
-                      </a:pPr>
-                      <a:r>
-                        <a:rPr lang="en-IN" sz="1200" dirty="0">
-                          <a:effectLst/>
-                          <a:latin typeface="Times New Roman" panose="02020603050405020304" pitchFamily="18" charset="0"/>
-                          <a:cs typeface="Times New Roman" panose="02020603050405020304" pitchFamily="18" charset="0"/>
-                        </a:rPr>
-                        <a:t>Discovery and matching</a:t>
-                      </a:r>
-                    </a:p>
-                  </a:txBody>
-                  <a:tcPr marL="67464" marR="67464" marT="33732" marB="33732" anchor="ctr">
-                    <a:lnL w="12700" cap="flat" cmpd="sng" algn="ctr">
-                      <a:solidFill>
-                        <a:schemeClr val="tx1"/>
-                      </a:solidFill>
-                      <a:prstDash val="solid"/>
-                      <a:round/>
-                      <a:headEnd type="none" w="med" len="med"/>
-                      <a:tailEnd type="none" w="med" len="med"/>
-                    </a:lnL>
-                    <a:lnR w="12700" cap="flat" cmpd="sng" algn="ctr">
-                      <a:solidFill>
-                        <a:schemeClr val="tx1"/>
-                      </a:solidFill>
-                      <a:prstDash val="solid"/>
-                      <a:round/>
-                      <a:headEnd type="none" w="med" len="med"/>
-                      <a:tailEnd type="none" w="med" len="med"/>
-                    </a:lnR>
-                    <a:lnT w="12700" cap="flat" cmpd="sng" algn="ctr">
-                      <a:solidFill>
-                        <a:schemeClr val="tx1"/>
-                      </a:solidFill>
-                      <a:prstDash val="solid"/>
-                      <a:round/>
-                      <a:headEnd type="none" w="med" len="med"/>
-                      <a:tailEnd type="none" w="med" len="med"/>
-                    </a:lnT>
-                    <a:lnB w="12700" cap="flat" cmpd="sng" algn="ctr">
-                      <a:solidFill>
-                        <a:schemeClr val="tx1"/>
-                      </a:solidFill>
-                      <a:prstDash val="solid"/>
-                      <a:round/>
-                      <a:headEnd type="none" w="med" len="med"/>
-                      <a:tailEnd type="none" w="med" len="med"/>
-                    </a:lnB>
-                  </a:tcPr>
-                </a:tc>
-                <a:tc>
-                  <a:txBody>
-                    <a:bodyPr/>
-                    <a:lstStyle/>
-                    <a:p>
-                      <a:pPr algn="ctr">
-                        <a:buNone/>
-                      </a:pPr>
-                      <a:r>
-                        <a:rPr lang="en-IN" sz="1200" dirty="0">
-                          <a:effectLst/>
-                          <a:latin typeface="Times New Roman" panose="02020603050405020304" pitchFamily="18" charset="0"/>
-                          <a:cs typeface="Times New Roman" panose="02020603050405020304" pitchFamily="18" charset="0"/>
-                        </a:rPr>
-                        <a:t>Not present</a:t>
-                      </a:r>
-                    </a:p>
-                  </a:txBody>
-                  <a:tcPr marL="67464" marR="67464" marT="33732" marB="33732" anchor="ctr">
-                    <a:lnL w="12700" cap="flat" cmpd="sng" algn="ctr">
-                      <a:solidFill>
-                        <a:schemeClr val="tx1"/>
-                      </a:solidFill>
-                      <a:prstDash val="solid"/>
-                      <a:round/>
-                      <a:headEnd type="none" w="med" len="med"/>
-                      <a:tailEnd type="none" w="med" len="med"/>
-                    </a:lnL>
-                    <a:lnR w="12700" cap="flat" cmpd="sng" algn="ctr">
-                      <a:solidFill>
-                        <a:schemeClr val="tx1"/>
-                      </a:solidFill>
-                      <a:prstDash val="solid"/>
-                      <a:round/>
-                      <a:headEnd type="none" w="med" len="med"/>
-                      <a:tailEnd type="none" w="med" len="med"/>
-                    </a:lnR>
-                    <a:lnT w="12700" cap="flat" cmpd="sng" algn="ctr">
-                      <a:solidFill>
-                        <a:schemeClr val="tx1"/>
-                      </a:solidFill>
-                      <a:prstDash val="solid"/>
-                      <a:round/>
-                      <a:headEnd type="none" w="med" len="med"/>
-                      <a:tailEnd type="none" w="med" len="med"/>
-                    </a:lnT>
-                    <a:lnB w="12700" cap="flat" cmpd="sng" algn="ctr">
-                      <a:solidFill>
-                        <a:schemeClr val="tx1"/>
-                      </a:solidFill>
-                      <a:prstDash val="solid"/>
-                      <a:round/>
-                      <a:headEnd type="none" w="med" len="med"/>
-                      <a:tailEnd type="none" w="med" len="med"/>
-                    </a:lnB>
-                  </a:tcPr>
-                </a:tc>
-                <a:tc>
-                  <a:txBody>
-                    <a:bodyPr/>
-                    <a:lstStyle/>
-                    <a:p>
-                      <a:pPr algn="ctr">
-                        <a:buNone/>
-                      </a:pPr>
-                      <a:r>
-                        <a:rPr lang="en-IN" sz="1200">
-                          <a:effectLst/>
-                          <a:latin typeface="Times New Roman" panose="02020603050405020304" pitchFamily="18" charset="0"/>
-                          <a:cs typeface="Times New Roman" panose="02020603050405020304" pitchFamily="18" charset="0"/>
-                        </a:rPr>
-                        <a:t>Explainable discovery and multi-factor MatchScore ranking</a:t>
-                      </a:r>
-                    </a:p>
-                  </a:txBody>
-                  <a:tcPr marL="67464" marR="67464" marT="33732" marB="33732" anchor="ctr">
-                    <a:lnL w="12700" cap="flat" cmpd="sng" algn="ctr">
-                      <a:solidFill>
-                        <a:schemeClr val="tx1"/>
-                      </a:solidFill>
-                      <a:prstDash val="solid"/>
-                      <a:round/>
-                      <a:headEnd type="none" w="med" len="med"/>
-                      <a:tailEnd type="none" w="med" len="med"/>
-                    </a:lnL>
-                    <a:lnR w="12700" cap="flat" cmpd="sng" algn="ctr">
-                      <a:solidFill>
-                        <a:schemeClr val="tx1"/>
-                      </a:solidFill>
-                      <a:prstDash val="solid"/>
-                      <a:round/>
-                      <a:headEnd type="none" w="med" len="med"/>
-                      <a:tailEnd type="none" w="med" len="med"/>
-                    </a:lnR>
-                    <a:lnT w="12700" cap="flat" cmpd="sng" algn="ctr">
-                      <a:solidFill>
-                        <a:schemeClr val="tx1"/>
-                      </a:solidFill>
-                      <a:prstDash val="solid"/>
-                      <a:round/>
-                      <a:headEnd type="none" w="med" len="med"/>
-                      <a:tailEnd type="none" w="med" len="med"/>
-                    </a:lnT>
-                    <a:lnB w="12700" cap="flat" cmpd="sng" algn="ctr">
-                      <a:solidFill>
-                        <a:schemeClr val="tx1"/>
-                      </a:solidFill>
-                      <a:prstDash val="solid"/>
-                      <a:round/>
-                      <a:headEnd type="none" w="med" len="med"/>
-                      <a:tailEnd type="none" w="med" len="med"/>
-                    </a:lnB>
-                  </a:tcPr>
-                </a:tc>
-                <a:extLst>
-                  <a:ext uri="{0D108BD9-81ED-4DB2-BD59-A6C34878D82A}">
-                    <a16:rowId xmlns:a16="http://schemas.microsoft.com/office/drawing/2014/main" val="11376807"/>
-                  </a:ext>
-                </a:extLst>
-              </a:tr>
-              <a:tr h="403769">
-                <a:tc>
-                  <a:txBody>
-                    <a:bodyPr/>
-                    <a:lstStyle/>
-                    <a:p>
-                      <a:pPr algn="ctr">
-                        <a:buNone/>
-                      </a:pPr>
-                      <a:r>
-                        <a:rPr lang="en-IN" sz="1200" dirty="0">
-                          <a:effectLst/>
-                          <a:latin typeface="Times New Roman" panose="02020603050405020304" pitchFamily="18" charset="0"/>
-                          <a:cs typeface="Times New Roman" panose="02020603050405020304" pitchFamily="18" charset="0"/>
-                        </a:rPr>
-                        <a:t>Collaboration</a:t>
-                      </a:r>
-                    </a:p>
-                  </a:txBody>
-                  <a:tcPr marL="67464" marR="67464" marT="33732" marB="33732" anchor="ctr">
-                    <a:lnL w="12700" cap="flat" cmpd="sng" algn="ctr">
-                      <a:solidFill>
-                        <a:schemeClr val="tx1"/>
-                      </a:solidFill>
-                      <a:prstDash val="solid"/>
-                      <a:round/>
-                      <a:headEnd type="none" w="med" len="med"/>
-                      <a:tailEnd type="none" w="med" len="med"/>
-                    </a:lnL>
-                    <a:lnR w="12700" cap="flat" cmpd="sng" algn="ctr">
-                      <a:solidFill>
-                        <a:schemeClr val="tx1"/>
-                      </a:solidFill>
-                      <a:prstDash val="solid"/>
-                      <a:round/>
-                      <a:headEnd type="none" w="med" len="med"/>
-                      <a:tailEnd type="none" w="med" len="med"/>
-                    </a:lnR>
-                    <a:lnT w="12700" cap="flat" cmpd="sng" algn="ctr">
-                      <a:solidFill>
-                        <a:schemeClr val="tx1"/>
-                      </a:solidFill>
-                      <a:prstDash val="solid"/>
-                      <a:round/>
-                      <a:headEnd type="none" w="med" len="med"/>
-                      <a:tailEnd type="none" w="med" len="med"/>
-                    </a:lnT>
-                    <a:lnB w="12700" cap="flat" cmpd="sng" algn="ctr">
-                      <a:solidFill>
-                        <a:schemeClr val="tx1"/>
-                      </a:solidFill>
-                      <a:prstDash val="solid"/>
-                      <a:round/>
-                      <a:headEnd type="none" w="med" len="med"/>
-                      <a:tailEnd type="none" w="med" len="med"/>
-                    </a:lnB>
-                  </a:tcPr>
-                </a:tc>
-                <a:tc>
-                  <a:txBody>
-                    <a:bodyPr/>
-                    <a:lstStyle/>
-                    <a:p>
-                      <a:pPr algn="ctr">
-                        <a:buNone/>
-                      </a:pPr>
-                      <a:r>
-                        <a:rPr lang="en-IN" sz="1200" dirty="0">
-                          <a:effectLst/>
-                          <a:latin typeface="Times New Roman" panose="02020603050405020304" pitchFamily="18" charset="0"/>
-                          <a:cs typeface="Times New Roman" panose="02020603050405020304" pitchFamily="18" charset="0"/>
-                        </a:rPr>
-                        <a:t>Not present</a:t>
-                      </a:r>
-                    </a:p>
-                  </a:txBody>
-                  <a:tcPr marL="67464" marR="67464" marT="33732" marB="33732" anchor="ctr">
-                    <a:lnL w="12700" cap="flat" cmpd="sng" algn="ctr">
-                      <a:solidFill>
-                        <a:schemeClr val="tx1"/>
-                      </a:solidFill>
-                      <a:prstDash val="solid"/>
-                      <a:round/>
-                      <a:headEnd type="none" w="med" len="med"/>
-                      <a:tailEnd type="none" w="med" len="med"/>
-                    </a:lnL>
-                    <a:lnR w="12700" cap="flat" cmpd="sng" algn="ctr">
-                      <a:solidFill>
-                        <a:schemeClr val="tx1"/>
-                      </a:solidFill>
-                      <a:prstDash val="solid"/>
-                      <a:round/>
-                      <a:headEnd type="none" w="med" len="med"/>
-                      <a:tailEnd type="none" w="med" len="med"/>
-                    </a:lnR>
-                    <a:lnT w="12700" cap="flat" cmpd="sng" algn="ctr">
-                      <a:solidFill>
-                        <a:schemeClr val="tx1"/>
-                      </a:solidFill>
-                      <a:prstDash val="solid"/>
-                      <a:round/>
-                      <a:headEnd type="none" w="med" len="med"/>
-                      <a:tailEnd type="none" w="med" len="med"/>
-                    </a:lnT>
-                    <a:lnB w="12700" cap="flat" cmpd="sng" algn="ctr">
-                      <a:solidFill>
-                        <a:schemeClr val="tx1"/>
-                      </a:solidFill>
-                      <a:prstDash val="solid"/>
-                      <a:round/>
-                      <a:headEnd type="none" w="med" len="med"/>
-                      <a:tailEnd type="none" w="med" len="med"/>
-                    </a:lnB>
-                  </a:tcPr>
-                </a:tc>
-                <a:tc>
-                  <a:txBody>
-                    <a:bodyPr/>
-                    <a:lstStyle/>
-                    <a:p>
-                      <a:pPr algn="ctr">
-                        <a:buNone/>
-                      </a:pPr>
-                      <a:r>
-                        <a:rPr lang="en-IN" sz="1200">
-                          <a:effectLst/>
-                          <a:latin typeface="Times New Roman" panose="02020603050405020304" pitchFamily="18" charset="0"/>
-                          <a:cs typeface="Times New Roman" panose="02020603050405020304" pitchFamily="18" charset="0"/>
-                        </a:rPr>
-                        <a:t>Bilateral sessions, sequential pipelines, mid-session abort</a:t>
-                      </a:r>
-                    </a:p>
-                  </a:txBody>
-                  <a:tcPr marL="67464" marR="67464" marT="33732" marB="33732" anchor="ctr">
-                    <a:lnL w="12700" cap="flat" cmpd="sng" algn="ctr">
-                      <a:solidFill>
-                        <a:schemeClr val="tx1"/>
-                      </a:solidFill>
-                      <a:prstDash val="solid"/>
-                      <a:round/>
-                      <a:headEnd type="none" w="med" len="med"/>
-                      <a:tailEnd type="none" w="med" len="med"/>
-                    </a:lnL>
-                    <a:lnR w="12700" cap="flat" cmpd="sng" algn="ctr">
-                      <a:solidFill>
-                        <a:schemeClr val="tx1"/>
-                      </a:solidFill>
-                      <a:prstDash val="solid"/>
-                      <a:round/>
-                      <a:headEnd type="none" w="med" len="med"/>
-                      <a:tailEnd type="none" w="med" len="med"/>
-                    </a:lnR>
-                    <a:lnT w="12700" cap="flat" cmpd="sng" algn="ctr">
-                      <a:solidFill>
-                        <a:schemeClr val="tx1"/>
-                      </a:solidFill>
-                      <a:prstDash val="solid"/>
-                      <a:round/>
-                      <a:headEnd type="none" w="med" len="med"/>
-                      <a:tailEnd type="none" w="med" len="med"/>
-                    </a:lnT>
-                    <a:lnB w="12700" cap="flat" cmpd="sng" algn="ctr">
-                      <a:solidFill>
-                        <a:schemeClr val="tx1"/>
-                      </a:solidFill>
-                      <a:prstDash val="solid"/>
-                      <a:round/>
-                      <a:headEnd type="none" w="med" len="med"/>
-                      <a:tailEnd type="none" w="med" len="med"/>
-                    </a:lnB>
-                  </a:tcPr>
-                </a:tc>
-                <a:extLst>
-                  <a:ext uri="{0D108BD9-81ED-4DB2-BD59-A6C34878D82A}">
-                    <a16:rowId xmlns:a16="http://schemas.microsoft.com/office/drawing/2014/main" val="2982247268"/>
-                  </a:ext>
-                </a:extLst>
-              </a:tr>
-              <a:tr h="403769">
-                <a:tc>
-                  <a:txBody>
-                    <a:bodyPr/>
-                    <a:lstStyle/>
-                    <a:p>
-                      <a:pPr algn="ctr">
-                        <a:buNone/>
-                      </a:pPr>
-                      <a:r>
-                        <a:rPr lang="en-IN" sz="1200" dirty="0">
-                          <a:effectLst/>
-                          <a:latin typeface="Times New Roman" panose="02020603050405020304" pitchFamily="18" charset="0"/>
-                          <a:cs typeface="Times New Roman" panose="02020603050405020304" pitchFamily="18" charset="0"/>
-                        </a:rPr>
-                        <a:t>Storage</a:t>
-                      </a:r>
-                    </a:p>
-                  </a:txBody>
-                  <a:tcPr marL="67464" marR="67464" marT="33732" marB="33732" anchor="ctr">
-                    <a:lnL w="12700" cap="flat" cmpd="sng" algn="ctr">
-                      <a:solidFill>
-                        <a:schemeClr val="tx1"/>
-                      </a:solidFill>
-                      <a:prstDash val="solid"/>
-                      <a:round/>
-                      <a:headEnd type="none" w="med" len="med"/>
-                      <a:tailEnd type="none" w="med" len="med"/>
-                    </a:lnL>
-                    <a:lnR w="12700" cap="flat" cmpd="sng" algn="ctr">
-                      <a:solidFill>
-                        <a:schemeClr val="tx1"/>
-                      </a:solidFill>
-                      <a:prstDash val="solid"/>
-                      <a:round/>
-                      <a:headEnd type="none" w="med" len="med"/>
-                      <a:tailEnd type="none" w="med" len="med"/>
-                    </a:lnR>
-                    <a:lnT w="12700" cap="flat" cmpd="sng" algn="ctr">
-                      <a:solidFill>
-                        <a:schemeClr val="tx1"/>
-                      </a:solidFill>
-                      <a:prstDash val="solid"/>
-                      <a:round/>
-                      <a:headEnd type="none" w="med" len="med"/>
-                      <a:tailEnd type="none" w="med" len="med"/>
-                    </a:lnT>
-                    <a:lnB w="12700" cap="flat" cmpd="sng" algn="ctr">
-                      <a:solidFill>
-                        <a:schemeClr val="tx1"/>
-                      </a:solidFill>
-                      <a:prstDash val="solid"/>
-                      <a:round/>
-                      <a:headEnd type="none" w="med" len="med"/>
-                      <a:tailEnd type="none" w="med" len="med"/>
-                    </a:lnB>
-                  </a:tcPr>
-                </a:tc>
-                <a:tc>
-                  <a:txBody>
-                    <a:bodyPr/>
-                    <a:lstStyle/>
-                    <a:p>
-                      <a:pPr algn="ctr">
-                        <a:buNone/>
-                      </a:pPr>
-                      <a:r>
-                        <a:rPr lang="en-IN" sz="1200" dirty="0">
-                          <a:effectLst/>
-                          <a:latin typeface="Times New Roman" panose="02020603050405020304" pitchFamily="18" charset="0"/>
-                          <a:cs typeface="Times New Roman" panose="02020603050405020304" pitchFamily="18" charset="0"/>
-                        </a:rPr>
-                        <a:t>SQLite VDR</a:t>
-                      </a:r>
-                    </a:p>
-                  </a:txBody>
-                  <a:tcPr marL="67464" marR="67464" marT="33732" marB="33732" anchor="ctr">
-                    <a:lnL w="12700" cap="flat" cmpd="sng" algn="ctr">
-                      <a:solidFill>
-                        <a:schemeClr val="tx1"/>
-                      </a:solidFill>
-                      <a:prstDash val="solid"/>
-                      <a:round/>
-                      <a:headEnd type="none" w="med" len="med"/>
-                      <a:tailEnd type="none" w="med" len="med"/>
-                    </a:lnL>
-                    <a:lnR w="12700" cap="flat" cmpd="sng" algn="ctr">
-                      <a:solidFill>
-                        <a:schemeClr val="tx1"/>
-                      </a:solidFill>
-                      <a:prstDash val="solid"/>
-                      <a:round/>
-                      <a:headEnd type="none" w="med" len="med"/>
-                      <a:tailEnd type="none" w="med" len="med"/>
-                    </a:lnR>
-                    <a:lnT w="12700" cap="flat" cmpd="sng" algn="ctr">
-                      <a:solidFill>
-                        <a:schemeClr val="tx1"/>
-                      </a:solidFill>
-                      <a:prstDash val="solid"/>
-                      <a:round/>
-                      <a:headEnd type="none" w="med" len="med"/>
-                      <a:tailEnd type="none" w="med" len="med"/>
-                    </a:lnT>
-                    <a:lnB w="12700" cap="flat" cmpd="sng" algn="ctr">
-                      <a:solidFill>
-                        <a:schemeClr val="tx1"/>
-                      </a:solidFill>
-                      <a:prstDash val="solid"/>
-                      <a:round/>
-                      <a:headEnd type="none" w="med" len="med"/>
-                      <a:tailEnd type="none" w="med" len="med"/>
-                    </a:lnB>
-                  </a:tcPr>
-                </a:tc>
-                <a:tc>
-                  <a:txBody>
-                    <a:bodyPr/>
-                    <a:lstStyle/>
-                    <a:p>
-                      <a:pPr algn="ctr">
-                        <a:buNone/>
-                      </a:pPr>
-                      <a:r>
-                        <a:rPr lang="en-IN" sz="1200" dirty="0">
-                          <a:effectLst/>
-                          <a:latin typeface="Times New Roman" panose="02020603050405020304" pitchFamily="18" charset="0"/>
-                          <a:cs typeface="Times New Roman" panose="02020603050405020304" pitchFamily="18" charset="0"/>
-                        </a:rPr>
-                        <a:t>13-table SQLite WAL VDR with four audit streams</a:t>
-                      </a:r>
-                    </a:p>
-                  </a:txBody>
-                  <a:tcPr marL="67464" marR="67464" marT="33732" marB="33732" anchor="ctr">
-                    <a:lnL w="12700" cap="flat" cmpd="sng" algn="ctr">
-                      <a:solidFill>
-                        <a:schemeClr val="tx1"/>
-                      </a:solidFill>
-                      <a:prstDash val="solid"/>
-                      <a:round/>
-                      <a:headEnd type="none" w="med" len="med"/>
-                      <a:tailEnd type="none" w="med" len="med"/>
-                    </a:lnL>
-                    <a:lnR w="12700" cap="flat" cmpd="sng" algn="ctr">
-                      <a:solidFill>
-                        <a:schemeClr val="tx1"/>
-                      </a:solidFill>
-                      <a:prstDash val="solid"/>
-                      <a:round/>
-                      <a:headEnd type="none" w="med" len="med"/>
-                      <a:tailEnd type="none" w="med" len="med"/>
-                    </a:lnR>
-                    <a:lnT w="12700" cap="flat" cmpd="sng" algn="ctr">
-                      <a:solidFill>
-                        <a:schemeClr val="tx1"/>
-                      </a:solidFill>
-                      <a:prstDash val="solid"/>
-                      <a:round/>
-                      <a:headEnd type="none" w="med" len="med"/>
-                      <a:tailEnd type="none" w="med" len="med"/>
-                    </a:lnT>
-                    <a:lnB w="12700" cap="flat" cmpd="sng" algn="ctr">
-                      <a:solidFill>
-                        <a:schemeClr val="tx1"/>
-                      </a:solidFill>
-                      <a:prstDash val="solid"/>
-                      <a:round/>
-                      <a:headEnd type="none" w="med" len="med"/>
-                      <a:tailEnd type="none" w="med" len="med"/>
-                    </a:lnB>
-                  </a:tcPr>
-                </a:tc>
-                <a:extLst>
-                  <a:ext uri="{0D108BD9-81ED-4DB2-BD59-A6C34878D82A}">
-                    <a16:rowId xmlns:a16="http://schemas.microsoft.com/office/drawing/2014/main" val="1515333743"/>
-                  </a:ext>
-                </a:extLst>
-              </a:tr>
-              <a:tr h="403769">
-                <a:tc>
-                  <a:txBody>
-                    <a:bodyPr/>
-                    <a:lstStyle/>
-                    <a:p>
-                      <a:pPr algn="ctr">
-                        <a:buNone/>
-                      </a:pPr>
-                      <a:r>
-                        <a:rPr lang="en-IN" sz="1200" dirty="0">
-                          <a:effectLst/>
-                          <a:latin typeface="Times New Roman" panose="02020603050405020304" pitchFamily="18" charset="0"/>
-                          <a:cs typeface="Times New Roman" panose="02020603050405020304" pitchFamily="18" charset="0"/>
-                        </a:rPr>
-                        <a:t>Frontend</a:t>
-                      </a:r>
-                    </a:p>
-                  </a:txBody>
-                  <a:tcPr marL="67464" marR="67464" marT="33732" marB="33732" anchor="ctr">
-                    <a:lnL w="12700" cap="flat" cmpd="sng" algn="ctr">
-                      <a:solidFill>
-                        <a:schemeClr val="tx1"/>
-                      </a:solidFill>
-                      <a:prstDash val="solid"/>
-                      <a:round/>
-                      <a:headEnd type="none" w="med" len="med"/>
-                      <a:tailEnd type="none" w="med" len="med"/>
-                    </a:lnL>
-                    <a:lnR w="12700" cap="flat" cmpd="sng" algn="ctr">
-                      <a:solidFill>
-                        <a:schemeClr val="tx1"/>
-                      </a:solidFill>
-                      <a:prstDash val="solid"/>
-                      <a:round/>
-                      <a:headEnd type="none" w="med" len="med"/>
-                      <a:tailEnd type="none" w="med" len="med"/>
-                    </a:lnR>
-                    <a:lnT w="12700" cap="flat" cmpd="sng" algn="ctr">
-                      <a:solidFill>
-                        <a:schemeClr val="tx1"/>
-                      </a:solidFill>
-                      <a:prstDash val="solid"/>
-                      <a:round/>
-                      <a:headEnd type="none" w="med" len="med"/>
-                      <a:tailEnd type="none" w="med" len="med"/>
-                    </a:lnT>
-                    <a:lnB w="12700" cap="flat" cmpd="sng" algn="ctr">
-                      <a:solidFill>
-                        <a:schemeClr val="tx1"/>
-                      </a:solidFill>
-                      <a:prstDash val="solid"/>
-                      <a:round/>
-                      <a:headEnd type="none" w="med" len="med"/>
-                      <a:tailEnd type="none" w="med" len="med"/>
-                    </a:lnB>
-                  </a:tcPr>
-                </a:tc>
-                <a:tc>
-                  <a:txBody>
-                    <a:bodyPr/>
-                    <a:lstStyle/>
-                    <a:p>
-                      <a:pPr algn="ctr">
-                        <a:buNone/>
-                      </a:pPr>
-                      <a:r>
-                        <a:rPr lang="en-IN" sz="1200">
-                          <a:effectLst/>
-                          <a:latin typeface="Times New Roman" panose="02020603050405020304" pitchFamily="18" charset="0"/>
-                          <a:cs typeface="Times New Roman" panose="02020603050405020304" pitchFamily="18" charset="0"/>
-                        </a:rPr>
-                        <a:t>Dashboard</a:t>
-                      </a:r>
-                    </a:p>
-                  </a:txBody>
-                  <a:tcPr marL="67464" marR="67464" marT="33732" marB="33732" anchor="ctr">
-                    <a:lnL w="12700" cap="flat" cmpd="sng" algn="ctr">
-                      <a:solidFill>
-                        <a:schemeClr val="tx1"/>
-                      </a:solidFill>
-                      <a:prstDash val="solid"/>
-                      <a:round/>
-                      <a:headEnd type="none" w="med" len="med"/>
-                      <a:tailEnd type="none" w="med" len="med"/>
-                    </a:lnL>
-                    <a:lnR w="12700" cap="flat" cmpd="sng" algn="ctr">
-                      <a:solidFill>
-                        <a:schemeClr val="tx1"/>
-                      </a:solidFill>
-                      <a:prstDash val="solid"/>
-                      <a:round/>
-                      <a:headEnd type="none" w="med" len="med"/>
-                      <a:tailEnd type="none" w="med" len="med"/>
-                    </a:lnR>
-                    <a:lnT w="12700" cap="flat" cmpd="sng" algn="ctr">
-                      <a:solidFill>
-                        <a:schemeClr val="tx1"/>
-                      </a:solidFill>
-                      <a:prstDash val="solid"/>
-                      <a:round/>
-                      <a:headEnd type="none" w="med" len="med"/>
-                      <a:tailEnd type="none" w="med" len="med"/>
-                    </a:lnT>
-                    <a:lnB w="12700" cap="flat" cmpd="sng" algn="ctr">
-                      <a:solidFill>
-                        <a:schemeClr val="tx1"/>
-                      </a:solidFill>
-                      <a:prstDash val="solid"/>
-                      <a:round/>
-                      <a:headEnd type="none" w="med" len="med"/>
-                      <a:tailEnd type="none" w="med" len="med"/>
-                    </a:lnB>
-                  </a:tcPr>
-                </a:tc>
-                <a:tc>
-                  <a:txBody>
-                    <a:bodyPr/>
-                    <a:lstStyle/>
-                    <a:p>
-                      <a:pPr algn="ctr">
-                        <a:buNone/>
-                      </a:pPr>
-                      <a:r>
-                        <a:rPr lang="en-IN" sz="1200" dirty="0">
-                          <a:effectLst/>
-                          <a:latin typeface="Times New Roman" panose="02020603050405020304" pitchFamily="18" charset="0"/>
-                          <a:cs typeface="Times New Roman" panose="02020603050405020304" pitchFamily="18" charset="0"/>
-                        </a:rPr>
-                        <a:t>Five-module SOC portal with Agent Investigation Drawer</a:t>
-                      </a:r>
-                    </a:p>
-                  </a:txBody>
-                  <a:tcPr marL="67464" marR="67464" marT="33732" marB="33732" anchor="ctr">
-                    <a:lnL w="12700" cap="flat" cmpd="sng" algn="ctr">
-                      <a:solidFill>
-                        <a:schemeClr val="tx1"/>
-                      </a:solidFill>
-                      <a:prstDash val="solid"/>
-                      <a:round/>
-                      <a:headEnd type="none" w="med" len="med"/>
-                      <a:tailEnd type="none" w="med" len="med"/>
-                    </a:lnL>
-                    <a:lnR w="12700" cap="flat" cmpd="sng" algn="ctr">
-                      <a:solidFill>
-                        <a:schemeClr val="tx1"/>
-                      </a:solidFill>
-                      <a:prstDash val="solid"/>
-                      <a:round/>
-                      <a:headEnd type="none" w="med" len="med"/>
-                      <a:tailEnd type="none" w="med" len="med"/>
-                    </a:lnR>
-                    <a:lnT w="12700" cap="flat" cmpd="sng" algn="ctr">
-                      <a:solidFill>
-                        <a:schemeClr val="tx1"/>
-                      </a:solidFill>
-                      <a:prstDash val="solid"/>
-                      <a:round/>
-                      <a:headEnd type="none" w="med" len="med"/>
-                      <a:tailEnd type="none" w="med" len="med"/>
-                    </a:lnT>
-                    <a:lnB w="12700" cap="flat" cmpd="sng" algn="ctr">
-                      <a:solidFill>
-                        <a:schemeClr val="tx1"/>
-                      </a:solidFill>
-                      <a:prstDash val="solid"/>
-                      <a:round/>
-                      <a:headEnd type="none" w="med" len="med"/>
-                      <a:tailEnd type="none" w="med" len="med"/>
-                    </a:lnB>
-                  </a:tcPr>
-                </a:tc>
-                <a:extLst>
-                  <a:ext uri="{0D108BD9-81ED-4DB2-BD59-A6C34878D82A}">
-                    <a16:rowId xmlns:a16="http://schemas.microsoft.com/office/drawing/2014/main" val="1060874517"/>
-                  </a:ext>
-                </a:extLst>
-              </a:tr>
-              <a:tr h="403769">
-                <a:tc>
-                  <a:txBody>
-                    <a:bodyPr/>
-                    <a:lstStyle/>
-                    <a:p>
-                      <a:pPr algn="ctr">
-                        <a:buNone/>
-                      </a:pPr>
-                      <a:r>
-                        <a:rPr lang="en-IN" sz="1200" dirty="0">
-                          <a:effectLst/>
-                          <a:latin typeface="Times New Roman" panose="02020603050405020304" pitchFamily="18" charset="0"/>
-                          <a:cs typeface="Times New Roman" panose="02020603050405020304" pitchFamily="18" charset="0"/>
-                        </a:rPr>
-                        <a:t>Testing</a:t>
-                      </a:r>
-                    </a:p>
-                  </a:txBody>
-                  <a:tcPr marL="67464" marR="67464" marT="33732" marB="33732" anchor="ctr">
-                    <a:lnL w="12700" cap="flat" cmpd="sng" algn="ctr">
-                      <a:solidFill>
-                        <a:schemeClr val="tx1"/>
-                      </a:solidFill>
-                      <a:prstDash val="solid"/>
-                      <a:round/>
-                      <a:headEnd type="none" w="med" len="med"/>
-                      <a:tailEnd type="none" w="med" len="med"/>
-                    </a:lnL>
-                    <a:lnR w="12700" cap="flat" cmpd="sng" algn="ctr">
-                      <a:solidFill>
-                        <a:schemeClr val="tx1"/>
-                      </a:solidFill>
-                      <a:prstDash val="solid"/>
-                      <a:round/>
-                      <a:headEnd type="none" w="med" len="med"/>
-                      <a:tailEnd type="none" w="med" len="med"/>
-                    </a:lnR>
-                    <a:lnT w="12700" cap="flat" cmpd="sng" algn="ctr">
-                      <a:solidFill>
-                        <a:schemeClr val="tx1"/>
-                      </a:solidFill>
-                      <a:prstDash val="solid"/>
-                      <a:round/>
-                      <a:headEnd type="none" w="med" len="med"/>
-                      <a:tailEnd type="none" w="med" len="med"/>
-                    </a:lnT>
-                    <a:lnB w="12700" cap="flat" cmpd="sng" algn="ctr">
-                      <a:solidFill>
-                        <a:schemeClr val="tx1"/>
-                      </a:solidFill>
-                      <a:prstDash val="solid"/>
-                      <a:round/>
-                      <a:headEnd type="none" w="med" len="med"/>
-                      <a:tailEnd type="none" w="med" len="med"/>
-                    </a:lnB>
-                  </a:tcPr>
-                </a:tc>
-                <a:tc>
-                  <a:txBody>
-                    <a:bodyPr/>
-                    <a:lstStyle/>
-                    <a:p>
-                      <a:pPr algn="ctr">
-                        <a:buNone/>
-                      </a:pPr>
-                      <a:r>
-                        <a:rPr lang="en-IN" sz="1200" dirty="0">
-                          <a:effectLst/>
-                          <a:latin typeface="Times New Roman" panose="02020603050405020304" pitchFamily="18" charset="0"/>
-                          <a:cs typeface="Times New Roman" panose="02020603050405020304" pitchFamily="18" charset="0"/>
-                        </a:rPr>
-                        <a:t>40 tests</a:t>
-                      </a:r>
-                    </a:p>
-                  </a:txBody>
-                  <a:tcPr marL="67464" marR="67464" marT="33732" marB="33732" anchor="ctr">
-                    <a:lnL w="12700" cap="flat" cmpd="sng" algn="ctr">
-                      <a:solidFill>
-                        <a:schemeClr val="tx1"/>
-                      </a:solidFill>
-                      <a:prstDash val="solid"/>
-                      <a:round/>
-                      <a:headEnd type="none" w="med" len="med"/>
-                      <a:tailEnd type="none" w="med" len="med"/>
-                    </a:lnL>
-                    <a:lnR w="12700" cap="flat" cmpd="sng" algn="ctr">
-                      <a:solidFill>
-                        <a:schemeClr val="tx1"/>
-                      </a:solidFill>
-                      <a:prstDash val="solid"/>
-                      <a:round/>
-                      <a:headEnd type="none" w="med" len="med"/>
-                      <a:tailEnd type="none" w="med" len="med"/>
-                    </a:lnR>
-                    <a:lnT w="12700" cap="flat" cmpd="sng" algn="ctr">
-                      <a:solidFill>
-                        <a:schemeClr val="tx1"/>
-                      </a:solidFill>
-                      <a:prstDash val="solid"/>
-                      <a:round/>
-                      <a:headEnd type="none" w="med" len="med"/>
-                      <a:tailEnd type="none" w="med" len="med"/>
-                    </a:lnT>
-                    <a:lnB w="12700" cap="flat" cmpd="sng" algn="ctr">
-                      <a:solidFill>
-                        <a:schemeClr val="tx1"/>
-                      </a:solidFill>
-                      <a:prstDash val="solid"/>
-                      <a:round/>
-                      <a:headEnd type="none" w="med" len="med"/>
-                      <a:tailEnd type="none" w="med" len="med"/>
-                    </a:lnB>
-                  </a:tcPr>
-                </a:tc>
-                <a:tc>
-                  <a:txBody>
-                    <a:bodyPr/>
-                    <a:lstStyle/>
-                    <a:p>
-                      <a:pPr algn="ctr">
-                        <a:buNone/>
-                      </a:pPr>
-                      <a:r>
-                        <a:rPr lang="en-IN" sz="1200" dirty="0">
-                          <a:effectLst/>
-                          <a:latin typeface="Times New Roman" panose="02020603050405020304" pitchFamily="18" charset="0"/>
-                          <a:cs typeface="Times New Roman" panose="02020603050405020304" pitchFamily="18" charset="0"/>
-                        </a:rPr>
-                        <a:t>80 tests passing in 15.04 s; Vite build with 0 errors</a:t>
-                      </a:r>
-                    </a:p>
-                  </a:txBody>
-                  <a:tcPr marL="67464" marR="67464" marT="33732" marB="33732" anchor="ctr">
-                    <a:lnL w="12700" cap="flat" cmpd="sng" algn="ctr">
-                      <a:solidFill>
-                        <a:schemeClr val="tx1"/>
-                      </a:solidFill>
-                      <a:prstDash val="solid"/>
-                      <a:round/>
-                      <a:headEnd type="none" w="med" len="med"/>
-                      <a:tailEnd type="none" w="med" len="med"/>
-                    </a:lnL>
-                    <a:lnR w="12700" cap="flat" cmpd="sng" algn="ctr">
-                      <a:solidFill>
-                        <a:schemeClr val="tx1"/>
-                      </a:solidFill>
-                      <a:prstDash val="solid"/>
-                      <a:round/>
-                      <a:headEnd type="none" w="med" len="med"/>
-                      <a:tailEnd type="none" w="med" len="med"/>
-                    </a:lnR>
-                    <a:lnT w="12700" cap="flat" cmpd="sng" algn="ctr">
-                      <a:solidFill>
-                        <a:schemeClr val="tx1"/>
-                      </a:solidFill>
-                      <a:prstDash val="solid"/>
-                      <a:round/>
-                      <a:headEnd type="none" w="med" len="med"/>
-                      <a:tailEnd type="none" w="med" len="med"/>
-                    </a:lnT>
-                    <a:lnB w="12700" cap="flat" cmpd="sng" algn="ctr">
-                      <a:solidFill>
-                        <a:schemeClr val="tx1"/>
-                      </a:solidFill>
-                      <a:prstDash val="solid"/>
-                      <a:round/>
-                      <a:headEnd type="none" w="med" len="med"/>
-                      <a:tailEnd type="none" w="med" len="med"/>
-                    </a:lnB>
-                  </a:tcPr>
-                </a:tc>
-                <a:extLst>
-                  <a:ext uri="{0D108BD9-81ED-4DB2-BD59-A6C34878D82A}">
-                    <a16:rowId xmlns:a16="http://schemas.microsoft.com/office/drawing/2014/main" val="3621753361"/>
-                  </a:ext>
-                </a:extLst>
-              </a:tr>
-            </a:tbl>
-          </a:graphicData>
-        </a:graphic>
-      </p:graphicFrame>
-    </p:spTree>
-    <p:extLst>
-      <p:ext uri="{BB962C8B-B14F-4D97-AF65-F5344CB8AC3E}">
-        <p14:creationId xmlns:p14="http://schemas.microsoft.com/office/powerpoint/2010/main" val="2211805373"/>
-      </p:ext>
-    </p:extLst>
-  </p:cSld>
-  <p:clrMapOvr>
-    <a:masterClrMapping/>
-  </p:clrMapOvr>
-</p:sld>
-</file>
-
-<file path=ppt/slides/slide30.xml><?xml version="1.0" encoding="utf-8"?>
+<file path=ppt/slides/slide31.xml><?xml version="1.0" encoding="utf-8"?>
 <p:sld xmlns:a="http://schemas.openxmlformats.org/drawingml/2006/main" xmlns:p="http://schemas.openxmlformats.org/presentationml/2006/main" xmlns:r="http://schemas.openxmlformats.org/officeDocument/2006/relationships">
   <p:cSld>
     <p:spTree>
@@ -26443,7 +28063,7 @@
               </a:defRPr>
             </a:pPr>
             <a:r>
-              <a:t>28</a:t>
+              <a:t>29</a:t>
             </a:r>
           </a:p>
         </p:txBody>
@@ -26486,14 +28106,14 @@
           </a:fontRef>
         </p:style>
         <p:txBody>
-          <a:bodyPr rtlCol="0" anchor="ctr" wrap="square" lIns="109728" rIns="109728" tIns="109728" bIns="91440"/>
+          <a:bodyPr rtlCol="0" anchor="ctr" wrap="square" lIns="109728" rIns="109728" tIns="91440" bIns="73152"/>
           <a:lstStyle/>
           <a:p>
             <a:pPr algn="ctr">
               <a:spcAft>
-                <a:spcPts val="400"/>
-              </a:spcAft>
-              <a:defRPr sz="1100" b="1">
+                <a:spcPts val="300"/>
+              </a:spcAft>
+              <a:defRPr sz="1050" b="1">
                 <a:solidFill>
                   <a:srgbClr val="1F497D"/>
                 </a:solidFill>
@@ -26507,9 +28127,9 @@
           <a:p>
             <a:pPr>
               <a:spcAft>
-                <a:spcPts val="300"/>
-              </a:spcAft>
-              <a:defRPr sz="850">
+                <a:spcPts val="200"/>
+              </a:spcAft>
+              <a:defRPr sz="800">
                 <a:latin typeface="Times New Roman"/>
               </a:defRPr>
             </a:pPr>
@@ -26541,9 +28161,9 @@
           <a:p>
             <a:pPr>
               <a:spcAft>
-                <a:spcPts val="300"/>
-              </a:spcAft>
-              <a:defRPr sz="850">
+                <a:spcPts val="200"/>
+              </a:spcAft>
+              <a:defRPr sz="800">
                 <a:latin typeface="Times New Roman"/>
               </a:defRPr>
             </a:pPr>
@@ -26575,9 +28195,9 @@
           <a:p>
             <a:pPr>
               <a:spcAft>
-                <a:spcPts val="300"/>
-              </a:spcAft>
-              <a:defRPr sz="850">
+                <a:spcPts val="200"/>
+              </a:spcAft>
+              <a:defRPr sz="800">
                 <a:latin typeface="Times New Roman"/>
               </a:defRPr>
             </a:pPr>
@@ -26609,9 +28229,9 @@
           <a:p>
             <a:pPr>
               <a:spcAft>
-                <a:spcPts val="300"/>
-              </a:spcAft>
-              <a:defRPr sz="850">
+                <a:spcPts val="200"/>
+              </a:spcAft>
+              <a:defRPr sz="800">
                 <a:latin typeface="Times New Roman"/>
               </a:defRPr>
             </a:pPr>
@@ -26643,9 +28263,9 @@
           <a:p>
             <a:pPr>
               <a:spcAft>
-                <a:spcPts val="300"/>
-              </a:spcAft>
-              <a:defRPr sz="850">
+                <a:spcPts val="200"/>
+              </a:spcAft>
+              <a:defRPr sz="800">
                 <a:latin typeface="Times New Roman"/>
               </a:defRPr>
             </a:pPr>
@@ -26714,14 +28334,14 @@
           </a:fontRef>
         </p:style>
         <p:txBody>
-          <a:bodyPr rtlCol="0" anchor="ctr" wrap="square" lIns="109728" rIns="109728" tIns="109728" bIns="91440"/>
+          <a:bodyPr rtlCol="0" anchor="ctr" wrap="square" lIns="109728" rIns="109728" tIns="91440" bIns="73152"/>
           <a:lstStyle/>
           <a:p>
             <a:pPr algn="ctr">
               <a:spcAft>
-                <a:spcPts val="400"/>
-              </a:spcAft>
-              <a:defRPr sz="1100" b="1">
+                <a:spcPts val="300"/>
+              </a:spcAft>
+              <a:defRPr sz="1050" b="1">
                 <a:solidFill>
                   <a:srgbClr val="1F497D"/>
                 </a:solidFill>
@@ -26735,9 +28355,9 @@
           <a:p>
             <a:pPr>
               <a:spcAft>
-                <a:spcPts val="300"/>
-              </a:spcAft>
-              <a:defRPr sz="850">
+                <a:spcPts val="200"/>
+              </a:spcAft>
+              <a:defRPr sz="800">
                 <a:latin typeface="Times New Roman"/>
               </a:defRPr>
             </a:pPr>
@@ -26769,9 +28389,9 @@
           <a:p>
             <a:pPr>
               <a:spcAft>
-                <a:spcPts val="300"/>
-              </a:spcAft>
-              <a:defRPr sz="850">
+                <a:spcPts val="200"/>
+              </a:spcAft>
+              <a:defRPr sz="800">
                 <a:latin typeface="Times New Roman"/>
               </a:defRPr>
             </a:pPr>
@@ -26803,9 +28423,9 @@
           <a:p>
             <a:pPr>
               <a:spcAft>
-                <a:spcPts val="300"/>
-              </a:spcAft>
-              <a:defRPr sz="850">
+                <a:spcPts val="200"/>
+              </a:spcAft>
+              <a:defRPr sz="800">
                 <a:latin typeface="Times New Roman"/>
               </a:defRPr>
             </a:pPr>
@@ -26837,9 +28457,9 @@
           <a:p>
             <a:pPr>
               <a:spcAft>
-                <a:spcPts val="300"/>
-              </a:spcAft>
-              <a:defRPr sz="850">
+                <a:spcPts val="200"/>
+              </a:spcAft>
+              <a:defRPr sz="800">
                 <a:latin typeface="Times New Roman"/>
               </a:defRPr>
             </a:pPr>
@@ -26908,14 +28528,14 @@
           </a:fontRef>
         </p:style>
         <p:txBody>
-          <a:bodyPr rtlCol="0" anchor="ctr" wrap="square" lIns="109728" rIns="109728" tIns="109728" bIns="91440"/>
+          <a:bodyPr rtlCol="0" anchor="ctr" wrap="square" lIns="109728" rIns="109728" tIns="91440" bIns="73152"/>
           <a:lstStyle/>
           <a:p>
             <a:pPr algn="ctr">
               <a:spcAft>
-                <a:spcPts val="400"/>
-              </a:spcAft>
-              <a:defRPr sz="1100" b="1">
+                <a:spcPts val="300"/>
+              </a:spcAft>
+              <a:defRPr sz="1050" b="1">
                 <a:solidFill>
                   <a:srgbClr val="B91C1C"/>
                 </a:solidFill>
@@ -26929,9 +28549,9 @@
           <a:p>
             <a:pPr>
               <a:spcAft>
-                <a:spcPts val="300"/>
-              </a:spcAft>
-              <a:defRPr sz="850">
+                <a:spcPts val="200"/>
+              </a:spcAft>
+              <a:defRPr sz="800">
                 <a:latin typeface="Times New Roman"/>
               </a:defRPr>
             </a:pPr>
@@ -26963,9 +28583,9 @@
           <a:p>
             <a:pPr>
               <a:spcAft>
-                <a:spcPts val="300"/>
-              </a:spcAft>
-              <a:defRPr sz="850">
+                <a:spcPts val="200"/>
+              </a:spcAft>
+              <a:defRPr sz="800">
                 <a:latin typeface="Times New Roman"/>
               </a:defRPr>
             </a:pPr>
@@ -26997,9 +28617,9 @@
           <a:p>
             <a:pPr>
               <a:spcAft>
-                <a:spcPts val="300"/>
-              </a:spcAft>
-              <a:defRPr sz="850">
+                <a:spcPts val="200"/>
+              </a:spcAft>
+              <a:defRPr sz="800">
                 <a:latin typeface="Times New Roman"/>
               </a:defRPr>
             </a:pPr>
@@ -27031,9 +28651,9 @@
           <a:p>
             <a:pPr>
               <a:spcAft>
-                <a:spcPts val="300"/>
-              </a:spcAft>
-              <a:defRPr sz="850">
+                <a:spcPts val="200"/>
+              </a:spcAft>
+              <a:defRPr sz="800">
                 <a:latin typeface="Times New Roman"/>
               </a:defRPr>
             </a:pPr>
@@ -27102,14 +28722,14 @@
           </a:fontRef>
         </p:style>
         <p:txBody>
-          <a:bodyPr rtlCol="0" anchor="ctr" wrap="square" lIns="109728" rIns="109728" tIns="109728" bIns="91440"/>
+          <a:bodyPr rtlCol="0" anchor="ctr" wrap="square" lIns="109728" rIns="109728" tIns="91440" bIns="73152"/>
           <a:lstStyle/>
           <a:p>
             <a:pPr algn="ctr">
               <a:spcAft>
-                <a:spcPts val="400"/>
-              </a:spcAft>
-              <a:defRPr sz="1100" b="1">
+                <a:spcPts val="300"/>
+              </a:spcAft>
+              <a:defRPr sz="1050" b="1">
                 <a:solidFill>
                   <a:srgbClr val="15803D"/>
                 </a:solidFill>
@@ -27123,9 +28743,9 @@
           <a:p>
             <a:pPr>
               <a:spcAft>
-                <a:spcPts val="300"/>
-              </a:spcAft>
-              <a:defRPr sz="850">
+                <a:spcPts val="200"/>
+              </a:spcAft>
+              <a:defRPr sz="800">
                 <a:latin typeface="Times New Roman"/>
               </a:defRPr>
             </a:pPr>
@@ -27157,9 +28777,9 @@
           <a:p>
             <a:pPr>
               <a:spcAft>
-                <a:spcPts val="300"/>
-              </a:spcAft>
-              <a:defRPr sz="850">
+                <a:spcPts val="200"/>
+              </a:spcAft>
+              <a:defRPr sz="800">
                 <a:latin typeface="Times New Roman"/>
               </a:defRPr>
             </a:pPr>
@@ -27191,9 +28811,9 @@
           <a:p>
             <a:pPr>
               <a:spcAft>
-                <a:spcPts val="300"/>
-              </a:spcAft>
-              <a:defRPr sz="850">
+                <a:spcPts val="200"/>
+              </a:spcAft>
+              <a:defRPr sz="800">
                 <a:latin typeface="Times New Roman"/>
               </a:defRPr>
             </a:pPr>
@@ -27225,9 +28845,9 @@
           <a:p>
             <a:pPr>
               <a:spcAft>
-                <a:spcPts val="300"/>
-              </a:spcAft>
-              <a:defRPr sz="850">
+                <a:spcPts val="200"/>
+              </a:spcAft>
+              <a:defRPr sz="800">
                 <a:latin typeface="Times New Roman"/>
               </a:defRPr>
             </a:pPr>

--- a/docs/presentation/TrustChain_AI_Phase_III_Final_Enhanced.pptx
+++ b/docs/presentation/TrustChain_AI_Phase_III_Final_Enhanced.pptx
@@ -28,15 +28,15 @@
     <p:sldId id="295" r:id="rId19"/>
     <p:sldId id="296" r:id="rId20"/>
     <p:sldId id="297" r:id="rId21"/>
-    <p:sldId id="277" r:id="rId26"/>
     <p:sldId id="300" r:id="rId34"/>
+    <p:sldId id="301" r:id="rId35"/>
     <p:sldId id="298" r:id="rId22"/>
     <p:sldId id="275" r:id="rId23"/>
     <p:sldId id="266" r:id="rId24"/>
     <p:sldId id="267" r:id="rId25"/>
-    <p:sldId id="301" r:id="rId35"/>
     <p:sldId id="302" r:id="rId36"/>
     <p:sldId id="303" r:id="rId37"/>
+    <p:sldId id="304" r:id="rId38"/>
     <p:sldId id="268" r:id="rId27"/>
     <p:sldId id="299" r:id="rId28"/>
   </p:sldIdLst>
@@ -17317,7 +17317,7 @@
               <a:spcAft>
                 <a:spcPts val="250"/>
               </a:spcAft>
-              <a:defRPr sz="1400">
+              <a:defRPr sz="1350">
                 <a:solidFill>
                   <a:srgbClr val="1E293B"/>
                 </a:solidFill>
@@ -17325,7 +17325,7 @@
               </a:defRPr>
             </a:pPr>
             <a:r>
-              <a:t>Objective of Project</a:t>
+              <a:t>Objective of Project &amp; Literature Survey</a:t>
             </a:r>
           </a:p>
           <a:p>
@@ -17333,7 +17333,7 @@
               <a:spcAft>
                 <a:spcPts val="250"/>
               </a:spcAft>
-              <a:defRPr sz="1400">
+              <a:defRPr sz="1350">
                 <a:solidFill>
                   <a:srgbClr val="1E293B"/>
                 </a:solidFill>
@@ -17341,7 +17341,7 @@
               </a:defRPr>
             </a:pPr>
             <a:r>
-              <a:t>Literature Survey &amp; Problem Statement</a:t>
+              <a:t>Problem Statement &amp; Proposed Solution</a:t>
             </a:r>
           </a:p>
           <a:p>
@@ -17349,7 +17349,7 @@
               <a:spcAft>
                 <a:spcPts val="250"/>
               </a:spcAft>
-              <a:defRPr sz="1400">
+              <a:defRPr sz="1350">
                 <a:solidFill>
                   <a:srgbClr val="1E293B"/>
                 </a:solidFill>
@@ -17357,7 +17357,7 @@
               </a:defRPr>
             </a:pPr>
             <a:r>
-              <a:t>Proposed Solution &amp; System Architecture</a:t>
+              <a:t>System Architecture &amp; Core Working Flow</a:t>
             </a:r>
           </a:p>
           <a:p>
@@ -17365,7 +17365,7 @@
               <a:spcAft>
                 <a:spcPts val="250"/>
               </a:spcAft>
-              <a:defRPr sz="1400">
+              <a:defRPr sz="1350">
                 <a:solidFill>
                   <a:srgbClr val="1E293B"/>
                 </a:solidFill>
@@ -17381,7 +17381,7 @@
               <a:spcAft>
                 <a:spcPts val="250"/>
               </a:spcAft>
-              <a:defRPr sz="1400">
+              <a:defRPr sz="1350">
                 <a:solidFill>
                   <a:srgbClr val="1E293B"/>
                 </a:solidFill>
@@ -17389,7 +17389,7 @@
               </a:defRPr>
             </a:pPr>
             <a:r>
-              <a:t>Core Algorithms &amp; Adaptive Policy Enforcement</a:t>
+              <a:t>Adaptive Policy Enforcement &amp; Agent Matchmaking</a:t>
             </a:r>
           </a:p>
           <a:p>
@@ -17397,7 +17397,7 @@
               <a:spcAft>
                 <a:spcPts val="250"/>
               </a:spcAft>
-              <a:defRPr sz="1400">
+              <a:defRPr sz="1350">
                 <a:solidFill>
                   <a:srgbClr val="1E293B"/>
                 </a:solidFill>
@@ -17405,7 +17405,7 @@
               </a:defRPr>
             </a:pPr>
             <a:r>
-              <a:t>SOC Portal &amp; Actual Application Screenshots</a:t>
+              <a:t>Multi-Agent Collaboration &amp; Security Operations (SOC)</a:t>
             </a:r>
           </a:p>
           <a:p>
@@ -17413,7 +17413,7 @@
               <a:spcAft>
                 <a:spcPts val="250"/>
               </a:spcAft>
-              <a:defRPr sz="1400">
+              <a:defRPr sz="1350">
                 <a:solidFill>
                   <a:srgbClr val="1E293B"/>
                 </a:solidFill>
@@ -17421,7 +17421,7 @@
               </a:defRPr>
             </a:pPr>
             <a:r>
-              <a:t>Implementation Status &amp; Key Features</a:t>
+              <a:t>Actual Project Screenshots: Security &amp; Swarm Operations</a:t>
             </a:r>
           </a:p>
           <a:p>
@@ -17429,7 +17429,7 @@
               <a:spcAft>
                 <a:spcPts val="250"/>
               </a:spcAft>
-              <a:defRPr sz="1400">
+              <a:defRPr sz="1350">
                 <a:solidFill>
                   <a:srgbClr val="1E293B"/>
                 </a:solidFill>
@@ -17437,7 +17437,7 @@
               </a:defRPr>
             </a:pPr>
             <a:r>
-              <a:t>Software &amp; Hardware Requirements</a:t>
+              <a:t>Implementation Status, Key Features &amp; Requirements</a:t>
             </a:r>
           </a:p>
           <a:p>
@@ -17445,7 +17445,7 @@
               <a:spcAft>
                 <a:spcPts val="250"/>
               </a:spcAft>
-              <a:defRPr sz="1400">
+              <a:defRPr sz="1350">
                 <a:solidFill>
                   <a:srgbClr val="1E293B"/>
                 </a:solidFill>
@@ -17461,7 +17461,7 @@
               <a:spcAft>
                 <a:spcPts val="250"/>
               </a:spcAft>
-              <a:defRPr sz="1400">
+              <a:defRPr sz="1350">
                 <a:solidFill>
                   <a:srgbClr val="1E293B"/>
                 </a:solidFill>
@@ -17477,7 +17477,7 @@
               <a:spcAft>
                 <a:spcPts val="250"/>
               </a:spcAft>
-              <a:defRPr sz="1400">
+              <a:defRPr sz="1350">
                 <a:solidFill>
                   <a:srgbClr val="1E293B"/>
                 </a:solidFill>
@@ -17485,7 +17485,7 @@
               </a:defRPr>
             </a:pPr>
             <a:r>
-              <a:t>Results Analysis &amp; System Evaluation</a:t>
+              <a:t>Results Analysis &amp; Evaluation</a:t>
             </a:r>
           </a:p>
           <a:p>
@@ -17493,7 +17493,7 @@
               <a:spcAft>
                 <a:spcPts val="250"/>
               </a:spcAft>
-              <a:defRPr sz="1400">
+              <a:defRPr sz="1350">
                 <a:solidFill>
                   <a:srgbClr val="1E293B"/>
                 </a:solidFill>
@@ -17509,7 +17509,7 @@
               <a:spcAft>
                 <a:spcPts val="250"/>
               </a:spcAft>
-              <a:defRPr sz="1400">
+              <a:defRPr sz="1350">
                 <a:solidFill>
                   <a:srgbClr val="1E293B"/>
                 </a:solidFill>
@@ -17590,7 +17590,7 @@
         <p:spPr>
           <a:xfrm>
             <a:off x="457200" y="320040"/>
-            <a:ext cx="8229600" cy="502920"/>
+            <a:ext cx="8229600" cy="685800"/>
           </a:xfrm>
         </p:spPr>
         <p:txBody>
@@ -17647,42 +17647,35 @@
           </a:p>
         </p:txBody>
       </p:sp>
-      <p:sp>
-        <p:nvSpPr>
-          <p:cNvPr id="4" name="TextBox 3"/>
-          <p:cNvSpPr txBox="1"/>
+      <p:pic>
+        <p:nvPicPr>
+          <p:cNvPr id="4" name="Picture 3" descr="zero_trust_policy_matrix.png"/>
+          <p:cNvPicPr>
+            <a:picLocks noChangeAspect="1"/>
+          </p:cNvPicPr>
           <p:nvPr/>
-        </p:nvSpPr>
+        </p:nvPicPr>
+        <p:blipFill>
+          <a:blip r:embed="rId2"/>
+          <a:stretch>
+            <a:fillRect/>
+          </a:stretch>
+        </p:blipFill>
         <p:spPr>
           <a:xfrm>
-            <a:off x="457200" y="804672"/>
-            <a:ext cx="8229600" cy="274320"/>
+            <a:off x="457200" y="1188720"/>
+            <a:ext cx="4343400" cy="2441448"/>
           </a:xfrm>
           <a:prstGeom prst="rect">
             <a:avLst/>
           </a:prstGeom>
-          <a:noFill/>
+          <a:ln w="12700">
+            <a:solidFill>
+              <a:srgbClr val="1F497D"/>
+            </a:solidFill>
+          </a:ln>
         </p:spPr>
-        <p:txBody>
-          <a:bodyPr wrap="square" lIns="0" tIns="0" rIns="0" bIns="0">
-            <a:spAutoFit/>
-          </a:bodyPr>
-          <a:lstStyle/>
-          <a:p>
-            <a:pPr>
-              <a:defRPr sz="1000" i="1">
-                <a:solidFill>
-                  <a:srgbClr val="64748B"/>
-                </a:solidFill>
-                <a:latin typeface="Times New Roman"/>
-              </a:defRPr>
-            </a:pPr>
-            <a:r>
-              <a:t>Security Operations Center Architecture • Live Telemetry Stream • Forensic Audit Drawer</a:t>
-            </a:r>
-          </a:p>
-        </p:txBody>
-      </p:sp>
+      </p:pic>
       <p:sp>
         <p:nvSpPr>
           <p:cNvPr id="5" name="Rounded Rectangle 4"/>
@@ -17691,16 +17684,16 @@
         </p:nvSpPr>
         <p:spPr>
           <a:xfrm>
-            <a:off x="457200" y="1188720"/>
-            <a:ext cx="3977639" cy="4892040"/>
+            <a:off x="457200" y="3794760"/>
+            <a:ext cx="4343400" cy="2331720"/>
           </a:xfrm>
           <a:prstGeom prst="roundRect">
             <a:avLst/>
           </a:prstGeom>
           <a:solidFill>
-            <a:srgbClr val="F1F5F9"/>
+            <a:srgbClr val="EFF6FF"/>
           </a:solidFill>
-          <a:ln w="19050">
+          <a:ln w="12700">
             <a:solidFill>
               <a:srgbClr val="1F497D"/>
             </a:solidFill>
@@ -17721,64 +17714,14 @@
           </a:fontRef>
         </p:style>
         <p:txBody>
-          <a:bodyPr rtlCol="0" anchor="ctr"/>
+          <a:bodyPr rtlCol="0" anchor="ctr" wrap="square" lIns="109728" rIns="109728" tIns="73152"/>
           <a:lstStyle/>
           <a:p>
-            <a:pPr algn="ctr"/>
-          </a:p>
-        </p:txBody>
-      </p:sp>
-      <p:pic>
-        <p:nvPicPr>
-          <p:cNvPr id="6" name="Picture 5" descr="telemetry_pipeline.png"/>
-          <p:cNvPicPr>
-            <a:picLocks noChangeAspect="1"/>
-          </p:cNvPicPr>
-          <p:nvPr/>
-        </p:nvPicPr>
-        <p:blipFill>
-          <a:blip r:embed="rId2"/>
-          <a:stretch>
-            <a:fillRect/>
-          </a:stretch>
-        </p:blipFill>
-        <p:spPr>
-          <a:xfrm>
-            <a:off x="548640" y="1325880"/>
-            <a:ext cx="3794760" cy="2240280"/>
-          </a:xfrm>
-          <a:prstGeom prst="rect">
-            <a:avLst/>
-          </a:prstGeom>
-        </p:spPr>
-      </p:pic>
-      <p:sp>
-        <p:nvSpPr>
-          <p:cNvPr id="7" name="TextBox 6"/>
-          <p:cNvSpPr txBox="1"/>
-          <p:nvPr/>
-        </p:nvSpPr>
-        <p:spPr>
-          <a:xfrm>
-            <a:off x="548640" y="3657600"/>
-            <a:ext cx="3794760" cy="2331720"/>
-          </a:xfrm>
-          <a:prstGeom prst="rect">
-            <a:avLst/>
-          </a:prstGeom>
-          <a:noFill/>
-        </p:spPr>
-        <p:txBody>
-          <a:bodyPr wrap="square" lIns="0" rIns="0" tIns="0" bIns="0">
-            <a:spAutoFit/>
-          </a:bodyPr>
-          <a:lstStyle/>
-          <a:p>
-            <a:pPr>
-              <a:spcAft>
-                <a:spcPts val="400"/>
-              </a:spcAft>
-              <a:defRPr sz="950" b="1">
+            <a:pPr algn="ctr">
+              <a:spcAft>
+                <a:spcPts val="200"/>
+              </a:spcAft>
+              <a:defRPr sz="1000" b="1">
                 <a:solidFill>
                   <a:srgbClr val="1F497D"/>
                 </a:solidFill>
@@ -17786,7 +17729,7 @@
               </a:defRPr>
             </a:pPr>
             <a:r>
-              <a:t>Fig: End-to-End Telemetry Ingestion &amp; Real-Time Monitoring Pipeline</a:t>
+              <a:t>SOC Live Policy Enforcement &amp; Telemetry Stream</a:t>
             </a:r>
           </a:p>
           <a:p>
@@ -17802,7 +17745,7 @@
               </a:defRPr>
             </a:pPr>
             <a:r>
-              <a:t>• Active Agent Monitoring: Captures granular execution metrics across distributed nodes.</a:t>
+              <a:t>• Live Zero-Trust Matrix: Real-time visual mapping of agent identities to dynamic policy enforcement levels.</a:t>
             </a:r>
           </a:p>
           <a:p>
@@ -17818,7 +17761,7 @@
               </a:defRPr>
             </a:pPr>
             <a:r>
-              <a:t>• Dynamic Threat Detection: Identifies aberrant latency and compliance drops instantly.</a:t>
+              <a:t>• Graduated Enforcement: Demonstrates rate-limiting (100 -&gt; 20 -&gt; 0 req/min) based on dynamic behavioral trust.</a:t>
             </a:r>
           </a:p>
           <a:p>
@@ -17834,21 +17777,21 @@
               </a:defRPr>
             </a:pPr>
             <a:r>
-              <a:t>• Immutable SQLite WAL Logging: Stores telemetry events with microsecond timestamps.</a:t>
+              <a:t>• Diagnostic Sandbox: Quarantined agents (T &lt; 0.50) are isolated into a sandbox with zero privileged access.</a:t>
             </a:r>
           </a:p>
         </p:txBody>
       </p:sp>
       <p:sp>
         <p:nvSpPr>
-          <p:cNvPr id="8" name="Rounded Rectangle 7"/>
+          <p:cNvPr id="6" name="Rounded Rectangle 5"/>
           <p:cNvSpPr/>
           <p:nvPr/>
         </p:nvSpPr>
         <p:spPr>
           <a:xfrm>
-            <a:off x="4709160" y="1188720"/>
-            <a:ext cx="3977639" cy="4892040"/>
+            <a:off x="4983480" y="1188720"/>
+            <a:ext cx="3703320" cy="4937760"/>
           </a:xfrm>
           <a:prstGeom prst="roundRect">
             <a:avLst/>
@@ -17882,9 +17825,9 @@
           <a:p>
             <a:pPr algn="ctr">
               <a:spcAft>
-                <a:spcPts val="300"/>
-              </a:spcAft>
-              <a:defRPr sz="1050" b="1">
+                <a:spcPts val="400"/>
+              </a:spcAft>
+              <a:defRPr sz="1100" b="1">
                 <a:solidFill>
                   <a:srgbClr val="1F497D"/>
                 </a:solidFill>
@@ -17892,13 +17835,13 @@
               </a:defRPr>
             </a:pPr>
             <a:r>
-              <a:t>SOC Operational Capabilities &amp; Investigation</a:t>
+              <a:t>SOC Investigation Drawer Capabilities</a:t>
             </a:r>
           </a:p>
           <a:p>
             <a:pPr>
               <a:spcAft>
-                <a:spcPts val="200"/>
+                <a:spcPts val="250"/>
               </a:spcAft>
               <a:defRPr sz="850">
                 <a:latin typeface="Times New Roman"/>
@@ -17918,7 +17861,7 @@
                   <a:srgbClr val="1E293B"/>
                 </a:solidFill>
               </a:rPr>
-              <a:t>Live Behavioral Telemetry Stream: </a:t>
+              <a:t>Centralized Observability: </a:t>
             </a:r>
             <a:r>
               <a:rPr>
@@ -17926,13 +17869,13 @@
                   <a:srgbClr val="1E293B"/>
                 </a:solidFill>
               </a:rPr>
-              <a:t>Ingests Task Success (Si), Compliance (Ci), and Latency penalty (Li) via FastAPI endpoint in real time.</a:t>
+              <a:t>Provides SOC analysts with live visibility into cross-domain agent swarms.</a:t>
             </a:r>
           </a:p>
           <a:p>
             <a:pPr>
               <a:spcAft>
-                <a:spcPts val="200"/>
+                <a:spcPts val="250"/>
               </a:spcAft>
               <a:defRPr sz="850">
                 <a:latin typeface="Times New Roman"/>
@@ -17952,7 +17895,7 @@
                   <a:srgbClr val="1E293B"/>
                 </a:solidFill>
               </a:rPr>
-              <a:t>Interactive Investigation Drawer: </a:t>
+              <a:t>Side-Drawer Investigation Mode: </a:t>
             </a:r>
             <a:r>
               <a:rPr>
@@ -17960,13 +17903,13 @@
                   <a:srgbClr val="1E293B"/>
                 </a:solidFill>
               </a:rPr>
-              <a:t>Enables security analysts to inspect raw DID documents, Ed25519 public keys, issued Verifiable Credentials, and historical trust scores.</a:t>
+              <a:t>Clicking an agent opens a forensic drawer revealing raw cryptographic credentials, signature proofs, and historical telemetry logs.</a:t>
             </a:r>
           </a:p>
           <a:p>
             <a:pPr>
               <a:spcAft>
-                <a:spcPts val="200"/>
+                <a:spcPts val="250"/>
               </a:spcAft>
               <a:defRPr sz="850">
                 <a:latin typeface="Times New Roman"/>
@@ -17986,7 +17929,7 @@
                   <a:srgbClr val="1E293B"/>
                 </a:solidFill>
               </a:rPr>
-              <a:t>Administrative Override Controls: </a:t>
+              <a:t>Dynamic Behavioral Breakdown: </a:t>
             </a:r>
             <a:r>
               <a:rPr>
@@ -17994,13 +17937,13 @@
                   <a:srgbClr val="1E293B"/>
                 </a:solidFill>
               </a:rPr>
-              <a:t>Administrators can quarantine suspicious agents, trigger diagnostic reviews, or execute permanent revocations with one click.</a:t>
+              <a:t>Inspects task success rate (Si), policy compliance rate (Ci), and normalized latency penalty (Li) contributing to the temporal trust score.</a:t>
             </a:r>
           </a:p>
           <a:p>
             <a:pPr>
               <a:spcAft>
-                <a:spcPts val="200"/>
+                <a:spcPts val="250"/>
               </a:spcAft>
               <a:defRPr sz="850">
                 <a:latin typeface="Times New Roman"/>
@@ -18020,7 +17963,7 @@
                   <a:srgbClr val="1E293B"/>
                 </a:solidFill>
               </a:rPr>
-              <a:t>Cryptographic Audit Trail: </a:t>
+              <a:t>Administrative Quarantine Override: </a:t>
             </a:r>
             <a:r>
               <a:rPr>
@@ -18028,13 +17971,13 @@
                   <a:srgbClr val="1E293B"/>
                 </a:solidFill>
               </a:rPr>
-              <a:t>Every state transition, session event, and override is immutably logged into the 13-table SQLite WAL Verifiable Data Registry.</a:t>
+              <a:t>Enables security operators (ADMIN role) to manually revoke compromised agent credentials or release false-positive quarantines.</a:t>
             </a:r>
           </a:p>
           <a:p>
             <a:pPr>
               <a:spcAft>
-                <a:spcPts val="200"/>
+                <a:spcPts val="250"/>
               </a:spcAft>
               <a:defRPr sz="850">
                 <a:latin typeface="Times New Roman"/>
@@ -18054,7 +17997,7 @@
                   <a:srgbClr val="1E293B"/>
                 </a:solidFill>
               </a:rPr>
-              <a:t>Fail-Closed Zero Trust: </a:t>
+              <a:t>Immutable Audit Traceability: </a:t>
             </a:r>
             <a:r>
               <a:rPr>
@@ -18062,7 +18005,7 @@
                   <a:srgbClr val="1E293B"/>
                 </a:solidFill>
               </a:rPr>
-              <a:t>Throttles or severs compromised agent connections before lateral contamination affects critical multi-agent pipelines.</a:t>
+              <a:t>Every investigation query and state modification is appended to the 13-table SQLite WAL audit ledger.</a:t>
             </a:r>
           </a:p>
         </p:txBody>
@@ -21149,635 +21092,31 @@
       </p:grpSpPr>
       <p:sp>
         <p:nvSpPr>
-          <p:cNvPr id="2" name="TextBox 1"/>
-          <p:cNvSpPr txBox="1"/>
-          <p:nvPr/>
+          <p:cNvPr id="2" name="Slide Number Placeholder 1">
+            <a:extLst>
+              <a:ext uri="{FF2B5EF4-FFF2-40B4-BE49-F238E27FC236}">
+                <a16:creationId xmlns:a16="http://schemas.microsoft.com/office/drawing/2014/main" id="{E6573F37-0C5B-9177-8935-CF5CD82924DA}"/>
+              </a:ext>
+            </a:extLst>
+          </p:cNvPr>
+          <p:cNvSpPr>
+            <a:spLocks noGrp="1"/>
+          </p:cNvSpPr>
+          <p:nvPr>
+            <p:ph type="sldNum" sz="quarter" idx="12"/>
+          </p:nvPr>
         </p:nvSpPr>
-        <p:spPr>
-          <a:xfrm>
-            <a:off x="457200" y="320040"/>
-            <a:ext cx="8229600" cy="502920"/>
-          </a:xfrm>
-          <a:prstGeom prst="rect">
-            <a:avLst/>
-          </a:prstGeom>
-          <a:noFill/>
-        </p:spPr>
+        <p:spPr/>
         <p:txBody>
-          <a:bodyPr wrap="square" lIns="0" tIns="0" rIns="0" bIns="0">
-            <a:spAutoFit/>
-          </a:bodyPr>
+          <a:bodyPr/>
           <a:lstStyle/>
           <a:p>
-            <a:pPr>
-              <a:defRPr sz="2200" b="1">
-                <a:solidFill>
-                  <a:srgbClr val="1F497D"/>
-                </a:solidFill>
-                <a:latin typeface="Times New Roman"/>
-              </a:defRPr>
-            </a:pPr>
-            <a:r>
-              <a:t>Actual Project Screenshots: SOC Dashboard &amp; Agent Identity</a:t>
-            </a:r>
-          </a:p>
-        </p:txBody>
-      </p:sp>
-      <p:sp>
-        <p:nvSpPr>
-          <p:cNvPr id="3" name="TextBox 2"/>
-          <p:cNvSpPr txBox="1"/>
-          <p:nvPr/>
-        </p:nvSpPr>
-        <p:spPr>
-          <a:xfrm>
-            <a:off x="457200" y="804672"/>
-            <a:ext cx="8229600" cy="256032"/>
-          </a:xfrm>
-          <a:prstGeom prst="rect">
-            <a:avLst/>
-          </a:prstGeom>
-          <a:noFill/>
-        </p:spPr>
-        <p:txBody>
-          <a:bodyPr wrap="square" lIns="0" tIns="0" rIns="0" bIns="0">
-            <a:spAutoFit/>
-          </a:bodyPr>
-          <a:lstStyle/>
-          <a:p>
-            <a:pPr>
-              <a:defRPr sz="1000" i="1">
-                <a:solidFill>
-                  <a:srgbClr val="64748B"/>
-                </a:solidFill>
-                <a:latin typeface="Times New Roman"/>
-              </a:defRPr>
-            </a:pPr>
-            <a:r>
-              <a:t>Operational Telemetry Monitoring • W3C DID Explorer • Verifiable Credential Verification</a:t>
-            </a:r>
-          </a:p>
-        </p:txBody>
-      </p:sp>
-      <p:sp>
-        <p:nvSpPr>
-          <p:cNvPr id="4" name="TextBox 3"/>
-          <p:cNvSpPr txBox="1"/>
-          <p:nvPr/>
-        </p:nvSpPr>
-        <p:spPr>
-          <a:xfrm>
-            <a:off x="6547104" y="6355080"/>
-            <a:ext cx="2130552" cy="320040"/>
-          </a:xfrm>
-          <a:prstGeom prst="rect">
-            <a:avLst/>
-          </a:prstGeom>
-          <a:noFill/>
-        </p:spPr>
-        <p:txBody>
-          <a:bodyPr wrap="none" lIns="0" tIns="0" rIns="0" bIns="0">
-            <a:spAutoFit/>
-          </a:bodyPr>
-          <a:lstStyle/>
-          <a:p>
-            <a:pPr algn="r">
-              <a:defRPr sz="1200">
-                <a:solidFill>
-                  <a:srgbClr val="64748B"/>
-                </a:solidFill>
-                <a:latin typeface="Times New Roman"/>
-              </a:defRPr>
-            </a:pPr>
-            <a:r>
-              <a:t>21</a:t>
-            </a:r>
-          </a:p>
-        </p:txBody>
-      </p:sp>
-      <p:sp>
-        <p:nvSpPr>
-          <p:cNvPr id="5" name="Rounded Rectangle 4"/>
-          <p:cNvSpPr/>
-          <p:nvPr/>
-        </p:nvSpPr>
-        <p:spPr>
-          <a:xfrm>
-            <a:off x="457200" y="1188720"/>
-            <a:ext cx="3977639" cy="2240280"/>
-          </a:xfrm>
-          <a:prstGeom prst="roundRect">
-            <a:avLst/>
-          </a:prstGeom>
-          <a:solidFill>
-            <a:srgbClr val="F1F5F9"/>
-          </a:solidFill>
-          <a:ln w="19050">
-            <a:solidFill>
-              <a:srgbClr val="1F497D"/>
-            </a:solidFill>
-          </a:ln>
-        </p:spPr>
-        <p:style>
-          <a:lnRef idx="1">
-            <a:schemeClr val="accent1"/>
-          </a:lnRef>
-          <a:fillRef idx="3">
-            <a:schemeClr val="accent1"/>
-          </a:fillRef>
-          <a:effectRef idx="2">
-            <a:schemeClr val="accent1"/>
-          </a:effectRef>
-          <a:fontRef idx="minor">
-            <a:schemeClr val="lt1"/>
-          </a:fontRef>
-        </p:style>
-        <p:txBody>
-          <a:bodyPr rtlCol="0" anchor="ctr"/>
-          <a:lstStyle/>
-          <a:p>
-            <a:pPr algn="ctr"/>
-          </a:p>
-        </p:txBody>
-      </p:sp>
-      <p:pic>
-        <p:nvPicPr>
-          <p:cNvPr id="6" name="Picture 5" descr="trust_degradation_dashboard.png"/>
-          <p:cNvPicPr>
-            <a:picLocks noChangeAspect="1"/>
-          </p:cNvPicPr>
-          <p:nvPr/>
-        </p:nvPicPr>
-        <p:blipFill>
-          <a:blip r:embed="rId2"/>
-          <a:stretch>
-            <a:fillRect/>
-          </a:stretch>
-        </p:blipFill>
-        <p:spPr>
-          <a:xfrm>
-            <a:off x="493776" y="1225296"/>
-            <a:ext cx="3904487" cy="2167128"/>
-          </a:xfrm>
-          <a:prstGeom prst="rect">
-            <a:avLst/>
-          </a:prstGeom>
-        </p:spPr>
-      </p:pic>
-      <p:sp>
-        <p:nvSpPr>
-          <p:cNvPr id="7" name="Rounded Rectangle 6"/>
-          <p:cNvSpPr/>
-          <p:nvPr/>
-        </p:nvSpPr>
-        <p:spPr>
-          <a:xfrm>
-            <a:off x="457200" y="3520440"/>
-            <a:ext cx="3977639" cy="2606040"/>
-          </a:xfrm>
-          <a:prstGeom prst="roundRect">
-            <a:avLst/>
-          </a:prstGeom>
-          <a:solidFill>
-            <a:srgbClr val="F8FAFC"/>
-          </a:solidFill>
-          <a:ln w="15240">
-            <a:solidFill>
-              <a:srgbClr val="1F497D"/>
-            </a:solidFill>
-          </a:ln>
-        </p:spPr>
-        <p:style>
-          <a:lnRef idx="1">
-            <a:schemeClr val="accent1"/>
-          </a:lnRef>
-          <a:fillRef idx="3">
-            <a:schemeClr val="accent1"/>
-          </a:fillRef>
-          <a:effectRef idx="2">
-            <a:schemeClr val="accent1"/>
-          </a:effectRef>
-          <a:fontRef idx="minor">
-            <a:schemeClr val="lt1"/>
-          </a:fontRef>
-        </p:style>
-        <p:txBody>
-          <a:bodyPr rtlCol="0" anchor="ctr" wrap="square" lIns="109728" rIns="109728" tIns="91440" bIns="73152"/>
-          <a:lstStyle/>
-          <a:p>
-            <a:pPr algn="ctr">
-              <a:spcAft>
-                <a:spcPts val="300"/>
-              </a:spcAft>
-              <a:defRPr sz="1050" b="1">
-                <a:solidFill>
-                  <a:srgbClr val="1F497D"/>
-                </a:solidFill>
-                <a:latin typeface="Times New Roman"/>
-              </a:defRPr>
-            </a:pPr>
-            <a:r>
-              <a:t>Fig 1. Real-Time SOC Dashboard &amp; Behavioral Telemetry Stream</a:t>
-            </a:r>
-          </a:p>
-          <a:p>
-            <a:pPr>
-              <a:spcAft>
-                <a:spcPts val="200"/>
-              </a:spcAft>
-              <a:defRPr sz="760">
-                <a:latin typeface="Times New Roman"/>
-              </a:defRPr>
-            </a:pPr>
-            <a:r>
-              <a:rPr b="1">
-                <a:solidFill>
-                  <a:srgbClr val="1F497D"/>
-                </a:solidFill>
-              </a:rPr>
-              <a:t>• </a:t>
-            </a:r>
-            <a:r>
-              <a:rPr b="1">
-                <a:solidFill>
-                  <a:srgbClr val="1E293B"/>
-                </a:solidFill>
-              </a:rPr>
-              <a:t>Live Telemetry Stream: </a:t>
-            </a:r>
-            <a:r>
-              <a:rPr>
-                <a:solidFill>
-                  <a:srgbClr val="1E293B"/>
-                </a:solidFill>
-              </a:rPr>
-              <a:t>Ingests task execution events, policy compliance checks, and response latency (Si, Ci, Li) across active agents.</a:t>
-            </a:r>
-          </a:p>
-          <a:p>
-            <a:pPr>
-              <a:spcAft>
-                <a:spcPts val="200"/>
-              </a:spcAft>
-              <a:defRPr sz="760">
-                <a:latin typeface="Times New Roman"/>
-              </a:defRPr>
-            </a:pPr>
-            <a:r>
-              <a:rPr b="1">
-                <a:solidFill>
-                  <a:srgbClr val="1F497D"/>
-                </a:solidFill>
-              </a:rPr>
-              <a:t>• </a:t>
-            </a:r>
-            <a:r>
-              <a:rPr b="1">
-                <a:solidFill>
-                  <a:srgbClr val="1E293B"/>
-                </a:solidFill>
-              </a:rPr>
-              <a:t>Temporal Trust Trajectory: </a:t>
-            </a:r>
-            <a:r>
-              <a:rPr>
-                <a:solidFill>
-                  <a:srgbClr val="1E293B"/>
-                </a:solidFill>
-              </a:rPr>
-              <a:t>Visualizes Exponential Moving Average (EMA) score evolution over time (Ti(t) = 0.70 Ti(t-1) + 0.30 Pi(t)).</a:t>
-            </a:r>
-          </a:p>
-          <a:p>
-            <a:pPr>
-              <a:spcAft>
-                <a:spcPts val="200"/>
-              </a:spcAft>
-              <a:defRPr sz="760">
-                <a:latin typeface="Times New Roman"/>
-              </a:defRPr>
-            </a:pPr>
-            <a:r>
-              <a:rPr b="1">
-                <a:solidFill>
-                  <a:srgbClr val="1F497D"/>
-                </a:solidFill>
-              </a:rPr>
-              <a:t>• </a:t>
-            </a:r>
-            <a:r>
-              <a:rPr b="1">
-                <a:solidFill>
-                  <a:srgbClr val="1E293B"/>
-                </a:solidFill>
-              </a:rPr>
-              <a:t>Dynamic Trust-State Classification: </a:t>
-            </a:r>
-            <a:r>
-              <a:rPr>
-                <a:solidFill>
-                  <a:srgbClr val="1E293B"/>
-                </a:solidFill>
-              </a:rPr>
-              <a:t>Displays real-time status badges (TRUSTED &gt;= 0.80, SUSPICIOUS 0.50-0.79, QUARANTINED &lt; 0.50, REVOKED).</a:t>
-            </a:r>
-          </a:p>
-          <a:p>
-            <a:pPr>
-              <a:spcAft>
-                <a:spcPts val="200"/>
-              </a:spcAft>
-              <a:defRPr sz="760">
-                <a:latin typeface="Times New Roman"/>
-              </a:defRPr>
-            </a:pPr>
-            <a:r>
-              <a:rPr b="1">
-                <a:solidFill>
-                  <a:srgbClr val="1F497D"/>
-                </a:solidFill>
-              </a:rPr>
-              <a:t>• </a:t>
-            </a:r>
-            <a:r>
-              <a:rPr b="1">
-                <a:solidFill>
-                  <a:srgbClr val="1E293B"/>
-                </a:solidFill>
-              </a:rPr>
-              <a:t>Active Incident Response: </a:t>
-            </a:r>
-            <a:r>
-              <a:rPr>
-                <a:solidFill>
-                  <a:srgbClr val="1E293B"/>
-                </a:solidFill>
-              </a:rPr>
-              <a:t>Real-time alert triggers when an agent's score degrades, alerting security operators.</a:t>
-            </a:r>
-          </a:p>
-        </p:txBody>
-      </p:sp>
-      <p:sp>
-        <p:nvSpPr>
-          <p:cNvPr id="8" name="Rounded Rectangle 7"/>
-          <p:cNvSpPr/>
-          <p:nvPr/>
-        </p:nvSpPr>
-        <p:spPr>
-          <a:xfrm>
-            <a:off x="4709160" y="1188720"/>
-            <a:ext cx="3977639" cy="2240280"/>
-          </a:xfrm>
-          <a:prstGeom prst="roundRect">
-            <a:avLst/>
-          </a:prstGeom>
-          <a:solidFill>
-            <a:srgbClr val="F1F5F9"/>
-          </a:solidFill>
-          <a:ln w="19050">
-            <a:solidFill>
-              <a:srgbClr val="0284C7"/>
-            </a:solidFill>
-          </a:ln>
-        </p:spPr>
-        <p:style>
-          <a:lnRef idx="1">
-            <a:schemeClr val="accent1"/>
-          </a:lnRef>
-          <a:fillRef idx="3">
-            <a:schemeClr val="accent1"/>
-          </a:fillRef>
-          <a:effectRef idx="2">
-            <a:schemeClr val="accent1"/>
-          </a:effectRef>
-          <a:fontRef idx="minor">
-            <a:schemeClr val="lt1"/>
-          </a:fontRef>
-        </p:style>
-        <p:txBody>
-          <a:bodyPr rtlCol="0" anchor="ctr"/>
-          <a:lstStyle/>
-          <a:p>
-            <a:pPr algn="ctr"/>
-          </a:p>
-        </p:txBody>
-      </p:sp>
-      <p:pic>
-        <p:nvPicPr>
-          <p:cNvPr id="9" name="Picture 8" descr="agent_identity_vc.png"/>
-          <p:cNvPicPr>
-            <a:picLocks noChangeAspect="1"/>
-          </p:cNvPicPr>
-          <p:nvPr/>
-        </p:nvPicPr>
-        <p:blipFill>
-          <a:blip r:embed="rId3"/>
-          <a:stretch>
-            <a:fillRect/>
-          </a:stretch>
-        </p:blipFill>
-        <p:spPr>
-          <a:xfrm>
-            <a:off x="4745736" y="1225296"/>
-            <a:ext cx="3904487" cy="2167128"/>
-          </a:xfrm>
-          <a:prstGeom prst="rect">
-            <a:avLst/>
-          </a:prstGeom>
-        </p:spPr>
-      </p:pic>
-      <p:sp>
-        <p:nvSpPr>
-          <p:cNvPr id="10" name="Rounded Rectangle 9"/>
-          <p:cNvSpPr/>
-          <p:nvPr/>
-        </p:nvSpPr>
-        <p:spPr>
-          <a:xfrm>
-            <a:off x="4709160" y="3520440"/>
-            <a:ext cx="3977639" cy="2606040"/>
-          </a:xfrm>
-          <a:prstGeom prst="roundRect">
-            <a:avLst/>
-          </a:prstGeom>
-          <a:solidFill>
-            <a:srgbClr val="F8FAFC"/>
-          </a:solidFill>
-          <a:ln w="15240">
-            <a:solidFill>
-              <a:srgbClr val="0284C7"/>
-            </a:solidFill>
-          </a:ln>
-        </p:spPr>
-        <p:style>
-          <a:lnRef idx="1">
-            <a:schemeClr val="accent1"/>
-          </a:lnRef>
-          <a:fillRef idx="3">
-            <a:schemeClr val="accent1"/>
-          </a:fillRef>
-          <a:effectRef idx="2">
-            <a:schemeClr val="accent1"/>
-          </a:effectRef>
-          <a:fontRef idx="minor">
-            <a:schemeClr val="lt1"/>
-          </a:fontRef>
-        </p:style>
-        <p:txBody>
-          <a:bodyPr rtlCol="0" anchor="ctr" wrap="square" lIns="109728" rIns="109728" tIns="91440" bIns="73152"/>
-          <a:lstStyle/>
-          <a:p>
-            <a:pPr algn="ctr">
-              <a:spcAft>
-                <a:spcPts val="300"/>
-              </a:spcAft>
-              <a:defRPr sz="1050" b="1">
-                <a:solidFill>
-                  <a:srgbClr val="0284C7"/>
-                </a:solidFill>
-                <a:latin typeface="Times New Roman"/>
-              </a:defRPr>
-            </a:pPr>
-            <a:r>
-              <a:t>Fig 2. Agent Identity Explorer &amp; W3C Verifiable Credential Verification</a:t>
-            </a:r>
-          </a:p>
-          <a:p>
-            <a:pPr>
-              <a:spcAft>
-                <a:spcPts val="200"/>
-              </a:spcAft>
-              <a:defRPr sz="760">
-                <a:latin typeface="Times New Roman"/>
-              </a:defRPr>
-            </a:pPr>
-            <a:r>
-              <a:rPr b="1">
-                <a:solidFill>
-                  <a:srgbClr val="0284C7"/>
-                </a:solidFill>
-              </a:rPr>
-              <a:t>• </a:t>
-            </a:r>
-            <a:r>
-              <a:rPr b="1">
-                <a:solidFill>
-                  <a:srgbClr val="1E293B"/>
-                </a:solidFill>
-              </a:rPr>
-              <a:t>W3C Decentralized Identifiers: </a:t>
-            </a:r>
-            <a:r>
-              <a:rPr>
-                <a:solidFill>
-                  <a:srgbClr val="1E293B"/>
-                </a:solidFill>
-              </a:rPr>
-              <a:t>Displays self-sovereign did:key identifiers derived from Ed25519 public keys with multicodec prefix 0xed01.</a:t>
-            </a:r>
-          </a:p>
-          <a:p>
-            <a:pPr>
-              <a:spcAft>
-                <a:spcPts val="200"/>
-              </a:spcAft>
-              <a:defRPr sz="760">
-                <a:latin typeface="Times New Roman"/>
-              </a:defRPr>
-            </a:pPr>
-            <a:r>
-              <a:rPr b="1">
-                <a:solidFill>
-                  <a:srgbClr val="0284C7"/>
-                </a:solidFill>
-              </a:rPr>
-              <a:t>• </a:t>
-            </a:r>
-            <a:r>
-              <a:rPr b="1">
-                <a:solidFill>
-                  <a:srgbClr val="1E293B"/>
-                </a:solidFill>
-              </a:rPr>
-              <a:t>Cryptographic Signatures: </a:t>
-            </a:r>
-            <a:r>
-              <a:rPr>
-                <a:solidFill>
-                  <a:srgbClr val="1E293B"/>
-                </a:solidFill>
-              </a:rPr>
-              <a:t>RFC 8032 Ed25519 256-bit signature verification for authenticating agent identity without passwords.</a:t>
-            </a:r>
-          </a:p>
-          <a:p>
-            <a:pPr>
-              <a:spcAft>
-                <a:spcPts val="200"/>
-              </a:spcAft>
-              <a:defRPr sz="760">
-                <a:latin typeface="Times New Roman"/>
-              </a:defRPr>
-            </a:pPr>
-            <a:r>
-              <a:rPr b="1">
-                <a:solidFill>
-                  <a:srgbClr val="0284C7"/>
-                </a:solidFill>
-              </a:rPr>
-              <a:t>• </a:t>
-            </a:r>
-            <a:r>
-              <a:rPr b="1">
-                <a:solidFill>
-                  <a:srgbClr val="1E293B"/>
-                </a:solidFill>
-              </a:rPr>
-              <a:t>Verifiable Credentials (VC 2.0): </a:t>
-            </a:r>
-            <a:r>
-              <a:rPr>
-                <a:solidFill>
-                  <a:srgbClr val="1E293B"/>
-                </a:solidFill>
-              </a:rPr>
-              <a:t>Inspects JSON-LD credential claims (capabilities, issuer, valid-until) with SHA-256 tamper-evident integrity hashes.</a:t>
-            </a:r>
-          </a:p>
-          <a:p>
-            <a:pPr>
-              <a:spcAft>
-                <a:spcPts val="200"/>
-              </a:spcAft>
-              <a:defRPr sz="760">
-                <a:latin typeface="Times New Roman"/>
-              </a:defRPr>
-            </a:pPr>
-            <a:r>
-              <a:rPr b="1">
-                <a:solidFill>
-                  <a:srgbClr val="0284C7"/>
-                </a:solidFill>
-              </a:rPr>
-              <a:t>• </a:t>
-            </a:r>
-            <a:r>
-              <a:rPr b="1">
-                <a:solidFill>
-                  <a:srgbClr val="1E293B"/>
-                </a:solidFill>
-              </a:rPr>
-              <a:t>Cryptographic Status: </a:t>
-            </a:r>
-            <a:r>
-              <a:rPr>
-                <a:solidFill>
-                  <a:srgbClr val="1E293B"/>
-                </a:solidFill>
-              </a:rPr>
-              <a:t>Shows verified credential validity, issuance timestamps, and cryptographic revocation status.</a:t>
-            </a:r>
+            <a:fld id="{B6F15528-21DE-4FAA-801E-634DDDAF4B2B}" type="slidenum">
+              <a:rPr lang="en-US" smtClean="0"/>
+              <a:pPr/>
+              <a:t>25</a:t>
+            </a:fld>
+            <a:endParaRPr lang="en-US"/>
           </a:p>
         </p:txBody>
       </p:sp>
@@ -22721,7 +22060,7 @@
               </a:defRPr>
             </a:pPr>
             <a:r>
-              <a:t>Actual Project Screenshots: Discovery, Matching &amp; Workflows</a:t>
+              <a:t>Actual Project Screenshots: Security Dashboard &amp; Decentralized Identity</a:t>
             </a:r>
           </a:p>
         </p:txBody>
@@ -22757,7 +22096,7 @@
               </a:defRPr>
             </a:pPr>
             <a:r>
-              <a:t>Capability-Based Discovery • Algorithmic Matchmaker • Multi-Agent Collaboration Pipelines</a:t>
+              <a:t>Real-Time Telemetry Monitoring • Dynamic Trust Degradation Curves • W3C DID &amp; VC Cryptographic Proofs</a:t>
             </a:r>
           </a:p>
         </p:txBody>
@@ -22793,7 +22132,7 @@
               </a:defRPr>
             </a:pPr>
             <a:r>
-              <a:t>22</a:t>
+              <a:t>21</a:t>
             </a:r>
           </a:p>
         </p:txBody>
@@ -22806,77 +22145,8 @@
         </p:nvSpPr>
         <p:spPr>
           <a:xfrm>
-            <a:off x="457200" y="1188720"/>
-            <a:ext cx="3977639" cy="2240280"/>
-          </a:xfrm>
-          <a:prstGeom prst="roundRect">
-            <a:avLst/>
-          </a:prstGeom>
-          <a:solidFill>
-            <a:srgbClr val="F1F5F9"/>
-          </a:solidFill>
-          <a:ln w="19050">
-            <a:solidFill>
-              <a:srgbClr val="1F497D"/>
-            </a:solidFill>
-          </a:ln>
-        </p:spPr>
-        <p:style>
-          <a:lnRef idx="1">
-            <a:schemeClr val="accent1"/>
-          </a:lnRef>
-          <a:fillRef idx="3">
-            <a:schemeClr val="accent1"/>
-          </a:fillRef>
-          <a:effectRef idx="2">
-            <a:schemeClr val="accent1"/>
-          </a:effectRef>
-          <a:fontRef idx="minor">
-            <a:schemeClr val="lt1"/>
-          </a:fontRef>
-        </p:style>
-        <p:txBody>
-          <a:bodyPr rtlCol="0" anchor="ctr"/>
-          <a:lstStyle/>
-          <a:p>
-            <a:pPr algn="ctr"/>
-          </a:p>
-        </p:txBody>
-      </p:sp>
-      <p:pic>
-        <p:nvPicPr>
-          <p:cNvPr id="6" name="Picture 5" descr="agent_matching_view.png"/>
-          <p:cNvPicPr>
-            <a:picLocks noChangeAspect="1"/>
-          </p:cNvPicPr>
-          <p:nvPr/>
-        </p:nvPicPr>
-        <p:blipFill>
-          <a:blip r:embed="rId2"/>
-          <a:stretch>
-            <a:fillRect/>
-          </a:stretch>
-        </p:blipFill>
-        <p:spPr>
-          <a:xfrm>
-            <a:off x="493776" y="1225296"/>
-            <a:ext cx="3904487" cy="2167128"/>
-          </a:xfrm>
-          <a:prstGeom prst="rect">
-            <a:avLst/>
-          </a:prstGeom>
-        </p:spPr>
-      </p:pic>
-      <p:sp>
-        <p:nvSpPr>
-          <p:cNvPr id="7" name="Rounded Rectangle 6"/>
-          <p:cNvSpPr/>
-          <p:nvPr/>
-        </p:nvSpPr>
-        <p:spPr>
-          <a:xfrm>
-            <a:off x="457200" y="3520440"/>
-            <a:ext cx="3977639" cy="2606040"/>
+            <a:off x="457200" y="1115568"/>
+            <a:ext cx="3977639" cy="5120640"/>
           </a:xfrm>
           <a:prstGeom prst="roundRect">
             <a:avLst/>
@@ -22905,182 +22175,257 @@
           </a:fontRef>
         </p:style>
         <p:txBody>
-          <a:bodyPr rtlCol="0" anchor="ctr" wrap="square" lIns="109728" rIns="109728" tIns="91440" bIns="73152"/>
+          <a:bodyPr rtlCol="0" anchor="ctr"/>
           <a:lstStyle/>
           <a:p>
-            <a:pPr algn="ctr">
-              <a:spcAft>
-                <a:spcPts val="300"/>
-              </a:spcAft>
-              <a:defRPr sz="1050" b="1">
-                <a:solidFill>
-                  <a:srgbClr val="1F497D"/>
-                </a:solidFill>
-                <a:latin typeface="Times New Roman"/>
-              </a:defRPr>
-            </a:pPr>
-            <a:r>
-              <a:t>Fig 3. Task-Driven Algorithmic Matchmaker &amp; Explainable Ranking</a:t>
-            </a:r>
-          </a:p>
-          <a:p>
-            <a:pPr>
-              <a:spcAft>
-                <a:spcPts val="200"/>
-              </a:spcAft>
-              <a:defRPr sz="760">
-                <a:latin typeface="Times New Roman"/>
-              </a:defRPr>
-            </a:pPr>
-            <a:r>
-              <a:rPr b="1">
-                <a:solidFill>
-                  <a:srgbClr val="1F497D"/>
-                </a:solidFill>
-              </a:rPr>
-              <a:t>• </a:t>
-            </a:r>
-            <a:r>
-              <a:rPr b="1">
-                <a:solidFill>
-                  <a:srgbClr val="1E293B"/>
-                </a:solidFill>
-              </a:rPr>
-              <a:t>Multi-Factor Ranking Formula: </a:t>
-            </a:r>
-            <a:r>
-              <a:rPr>
-                <a:solidFill>
-                  <a:srgbClr val="1E293B"/>
-                </a:solidFill>
-              </a:rPr>
-              <a:t>Computes MatchScore = 0.40 T + 0.30 (r/5) + 0.20 sigma + 0.10 (1 - lambda).</a:t>
-            </a:r>
-          </a:p>
-          <a:p>
-            <a:pPr>
-              <a:spcAft>
-                <a:spcPts val="200"/>
-              </a:spcAft>
-              <a:defRPr sz="760">
-                <a:latin typeface="Times New Roman"/>
-              </a:defRPr>
-            </a:pPr>
-            <a:r>
-              <a:rPr b="1">
-                <a:solidFill>
-                  <a:srgbClr val="1F497D"/>
-                </a:solidFill>
-              </a:rPr>
-              <a:t>• </a:t>
-            </a:r>
-            <a:r>
-              <a:rPr b="1">
-                <a:solidFill>
-                  <a:srgbClr val="1E293B"/>
-                </a:solidFill>
-              </a:rPr>
-              <a:t>Explainable Match Breakdown: </a:t>
-            </a:r>
-            <a:r>
-              <a:rPr>
-                <a:solidFill>
-                  <a:srgbClr val="1E293B"/>
-                </a:solidFill>
-              </a:rPr>
-              <a:t>Displays transparent decomposition of trust (T), peer reputation (r), success rate (sigma), and latency penalty (lambda).</a:t>
-            </a:r>
-          </a:p>
-          <a:p>
-            <a:pPr>
-              <a:spcAft>
-                <a:spcPts val="200"/>
-              </a:spcAft>
-              <a:defRPr sz="760">
-                <a:latin typeface="Times New Roman"/>
-              </a:defRPr>
-            </a:pPr>
-            <a:r>
-              <a:rPr b="1">
-                <a:solidFill>
-                  <a:srgbClr val="1F497D"/>
-                </a:solidFill>
-              </a:rPr>
-              <a:t>• </a:t>
-            </a:r>
-            <a:r>
-              <a:rPr b="1">
-                <a:solidFill>
-                  <a:srgbClr val="1E293B"/>
-                </a:solidFill>
-              </a:rPr>
-              <a:t>Zero-Trust Policy Clamp: </a:t>
-            </a:r>
-            <a:r>
-              <a:rPr>
-                <a:solidFill>
-                  <a:srgbClr val="1E293B"/>
-                </a:solidFill>
-              </a:rPr>
-              <a:t>Automatically overrides scores for QUARANTINED (T &lt; 0.50) or REVOKED agents, forcing score to 0.000 ('REJECTED BY POLICY').</a:t>
-            </a:r>
-          </a:p>
-          <a:p>
-            <a:pPr>
-              <a:spcAft>
-                <a:spcPts val="200"/>
-              </a:spcAft>
-              <a:defRPr sz="760">
-                <a:latin typeface="Times New Roman"/>
-              </a:defRPr>
-            </a:pPr>
-            <a:r>
-              <a:rPr b="1">
-                <a:solidFill>
-                  <a:srgbClr val="1F497D"/>
-                </a:solidFill>
-              </a:rPr>
-              <a:t>• </a:t>
-            </a:r>
-            <a:r>
-              <a:rPr b="1">
-                <a:solidFill>
-                  <a:srgbClr val="1E293B"/>
-                </a:solidFill>
-              </a:rPr>
-              <a:t>Capability Filtering: </a:t>
-            </a:r>
-            <a:r>
-              <a:rPr>
-                <a:solidFill>
-                  <a:srgbClr val="1E293B"/>
-                </a:solidFill>
-              </a:rPr>
-              <a:t>Pre-filters candidates by capability tags, availability (AVAILABLE), and HTTP 200 health check probe.</a:t>
-            </a:r>
+            <a:pPr algn="ctr"/>
           </a:p>
         </p:txBody>
       </p:sp>
       <p:sp>
         <p:nvSpPr>
-          <p:cNvPr id="8" name="Rounded Rectangle 7"/>
+          <p:cNvPr id="6" name="TextBox 5"/>
+          <p:cNvSpPr txBox="1"/>
+          <p:nvPr/>
+        </p:nvSpPr>
+        <p:spPr>
+          <a:xfrm>
+            <a:off x="548640" y="1188720"/>
+            <a:ext cx="3794759" cy="320040"/>
+          </a:xfrm>
+          <a:prstGeom prst="rect">
+            <a:avLst/>
+          </a:prstGeom>
+          <a:noFill/>
+        </p:spPr>
+        <p:txBody>
+          <a:bodyPr wrap="square">
+            <a:spAutoFit/>
+          </a:bodyPr>
+          <a:lstStyle/>
+          <a:p>
+            <a:pPr>
+              <a:defRPr sz="1050" b="1">
+                <a:solidFill>
+                  <a:srgbClr val="1F497D"/>
+                </a:solidFill>
+                <a:latin typeface="Times New Roman"/>
+              </a:defRPr>
+            </a:pPr>
+            <a:r>
+              <a:t>1. Security Operations Dashboard &amp; Trust Analytics</a:t>
+            </a:r>
+          </a:p>
+        </p:txBody>
+      </p:sp>
+      <p:pic>
+        <p:nvPicPr>
+          <p:cNvPr id="7" name="Picture 6" descr="trust_degradation_dashboard.png"/>
+          <p:cNvPicPr>
+            <a:picLocks noChangeAspect="1"/>
+          </p:cNvPicPr>
+          <p:nvPr/>
+        </p:nvPicPr>
+        <p:blipFill>
+          <a:blip r:embed="rId2"/>
+          <a:stretch>
+            <a:fillRect/>
+          </a:stretch>
+        </p:blipFill>
+        <p:spPr>
+          <a:xfrm>
+            <a:off x="566928" y="1527048"/>
+            <a:ext cx="3758183" cy="2240280"/>
+          </a:xfrm>
+          <a:prstGeom prst="rect">
+            <a:avLst/>
+          </a:prstGeom>
+          <a:ln w="9525">
+            <a:solidFill>
+              <a:srgbClr val="94A3B8"/>
+            </a:solidFill>
+          </a:ln>
+        </p:spPr>
+      </p:pic>
+      <p:sp>
+        <p:nvSpPr>
+          <p:cNvPr id="8" name="TextBox 7"/>
+          <p:cNvSpPr txBox="1"/>
+          <p:nvPr/>
+        </p:nvSpPr>
+        <p:spPr>
+          <a:xfrm>
+            <a:off x="566928" y="3858768"/>
+            <a:ext cx="3758183" cy="2240280"/>
+          </a:xfrm>
+          <a:prstGeom prst="rect">
+            <a:avLst/>
+          </a:prstGeom>
+          <a:noFill/>
+        </p:spPr>
+        <p:txBody>
+          <a:bodyPr wrap="square" lIns="0" tIns="0" rIns="0" bIns="0">
+            <a:spAutoFit/>
+          </a:bodyPr>
+          <a:lstStyle/>
+          <a:p>
+            <a:pPr>
+              <a:spcAft>
+                <a:spcPts val="250"/>
+              </a:spcAft>
+              <a:defRPr sz="800">
+                <a:latin typeface="Times New Roman"/>
+              </a:defRPr>
+            </a:pPr>
+            <a:r>
+              <a:rPr b="1">
+                <a:solidFill>
+                  <a:srgbClr val="1F497D"/>
+                </a:solidFill>
+              </a:rPr>
+              <a:t>• </a:t>
+            </a:r>
+            <a:r>
+              <a:rPr b="1">
+                <a:solidFill>
+                  <a:srgbClr val="1E293B"/>
+                </a:solidFill>
+              </a:rPr>
+              <a:t>Live Telemetry Stream: </a:t>
+            </a:r>
+            <a:r>
+              <a:rPr>
+                <a:solidFill>
+                  <a:srgbClr val="1E293B"/>
+                </a:solidFill>
+              </a:rPr>
+              <a:t>Ingests Task Success (Si), Policy Compliance (Ci), and Latency penalty (Li) at runtime.</a:t>
+            </a:r>
+          </a:p>
+          <a:p>
+            <a:pPr>
+              <a:spcAft>
+                <a:spcPts val="250"/>
+              </a:spcAft>
+              <a:defRPr sz="800">
+                <a:latin typeface="Times New Roman"/>
+              </a:defRPr>
+            </a:pPr>
+            <a:r>
+              <a:rPr b="1">
+                <a:solidFill>
+                  <a:srgbClr val="1F497D"/>
+                </a:solidFill>
+              </a:rPr>
+              <a:t>• </a:t>
+            </a:r>
+            <a:r>
+              <a:rPr b="1">
+                <a:solidFill>
+                  <a:srgbClr val="1E293B"/>
+                </a:solidFill>
+              </a:rPr>
+              <a:t>Dynamic Trust Curve: </a:t>
+            </a:r>
+            <a:r>
+              <a:rPr>
+                <a:solidFill>
+                  <a:srgbClr val="1E293B"/>
+                </a:solidFill>
+              </a:rPr>
+              <a:t>Visualizes temporal EMA smoothing (Ti(t) = 0.70 Ti(t-1) + 0.30 Pi(t)) over consecutive interactions.</a:t>
+            </a:r>
+          </a:p>
+          <a:p>
+            <a:pPr>
+              <a:spcAft>
+                <a:spcPts val="250"/>
+              </a:spcAft>
+              <a:defRPr sz="800">
+                <a:latin typeface="Times New Roman"/>
+              </a:defRPr>
+            </a:pPr>
+            <a:r>
+              <a:rPr b="1">
+                <a:solidFill>
+                  <a:srgbClr val="1F497D"/>
+                </a:solidFill>
+              </a:rPr>
+              <a:t>• </a:t>
+            </a:r>
+            <a:r>
+              <a:rPr b="1">
+                <a:solidFill>
+                  <a:srgbClr val="1E293B"/>
+                </a:solidFill>
+              </a:rPr>
+              <a:t>Operational State Indicators: </a:t>
+            </a:r>
+            <a:r>
+              <a:rPr>
+                <a:solidFill>
+                  <a:srgbClr val="1E293B"/>
+                </a:solidFill>
+              </a:rPr>
+              <a:t>Real-time badges display active counts of TRUSTED, SUSPICIOUS, and QUARANTINED agents.</a:t>
+            </a:r>
+          </a:p>
+          <a:p>
+            <a:pPr>
+              <a:spcAft>
+                <a:spcPts val="250"/>
+              </a:spcAft>
+              <a:defRPr sz="800">
+                <a:latin typeface="Times New Roman"/>
+              </a:defRPr>
+            </a:pPr>
+            <a:r>
+              <a:rPr b="1">
+                <a:solidFill>
+                  <a:srgbClr val="1F497D"/>
+                </a:solidFill>
+              </a:rPr>
+              <a:t>• </a:t>
+            </a:r>
+            <a:r>
+              <a:rPr b="1">
+                <a:solidFill>
+                  <a:srgbClr val="1E293B"/>
+                </a:solidFill>
+              </a:rPr>
+              <a:t>Automated Quarantine Response: </a:t>
+            </a:r>
+            <a:r>
+              <a:rPr>
+                <a:solidFill>
+                  <a:srgbClr val="1E293B"/>
+                </a:solidFill>
+              </a:rPr>
+              <a:t>Injected latency or compliance anomalies immediately trigger automated access restriction alerts.</a:t>
+            </a:r>
+          </a:p>
+        </p:txBody>
+      </p:sp>
+      <p:sp>
+        <p:nvSpPr>
+          <p:cNvPr id="9" name="Rounded Rectangle 8"/>
           <p:cNvSpPr/>
           <p:nvPr/>
         </p:nvSpPr>
         <p:spPr>
           <a:xfrm>
-            <a:off x="4709160" y="1188720"/>
-            <a:ext cx="3977639" cy="2240280"/>
+            <a:off x="4709160" y="1115568"/>
+            <a:ext cx="3977639" cy="5120640"/>
           </a:xfrm>
           <a:prstGeom prst="roundRect">
             <a:avLst/>
           </a:prstGeom>
           <a:solidFill>
-            <a:srgbClr val="F1F5F9"/>
+            <a:srgbClr val="F8FAFC"/>
           </a:solidFill>
-          <a:ln w="19050">
+          <a:ln w="15240">
             <a:solidFill>
-              <a:srgbClr val="0284C7"/>
+              <a:srgbClr val="10B981"/>
             </a:solidFill>
           </a:ln>
         </p:spPr>
@@ -23106,9 +22451,45 @@
           </a:p>
         </p:txBody>
       </p:sp>
+      <p:sp>
+        <p:nvSpPr>
+          <p:cNvPr id="10" name="TextBox 9"/>
+          <p:cNvSpPr txBox="1"/>
+          <p:nvPr/>
+        </p:nvSpPr>
+        <p:spPr>
+          <a:xfrm>
+            <a:off x="4800600" y="1188720"/>
+            <a:ext cx="3794759" cy="320040"/>
+          </a:xfrm>
+          <a:prstGeom prst="rect">
+            <a:avLst/>
+          </a:prstGeom>
+          <a:noFill/>
+        </p:spPr>
+        <p:txBody>
+          <a:bodyPr wrap="square">
+            <a:spAutoFit/>
+          </a:bodyPr>
+          <a:lstStyle/>
+          <a:p>
+            <a:pPr>
+              <a:defRPr sz="1050" b="1">
+                <a:solidFill>
+                  <a:srgbClr val="15803D"/>
+                </a:solidFill>
+                <a:latin typeface="Times New Roman"/>
+              </a:defRPr>
+            </a:pPr>
+            <a:r>
+              <a:t>2. Agent Explorer, W3C DID &amp; Verifiable Credentials</a:t>
+            </a:r>
+          </a:p>
+        </p:txBody>
+      </p:sp>
       <p:pic>
         <p:nvPicPr>
-          <p:cNvPr id="9" name="Picture 8" descr="collaboration_workflows.png"/>
+          <p:cNvPr id="11" name="Picture 10" descr="agent_identity_vc.png"/>
           <p:cNvPicPr>
             <a:picLocks noChangeAspect="1"/>
           </p:cNvPicPr>
@@ -23122,83 +22503,87 @@
         </p:blipFill>
         <p:spPr>
           <a:xfrm>
-            <a:off x="4745736" y="1225296"/>
-            <a:ext cx="3904487" cy="2167128"/>
+            <a:off x="4818888" y="1527048"/>
+            <a:ext cx="3758183" cy="2240280"/>
           </a:xfrm>
           <a:prstGeom prst="rect">
             <a:avLst/>
           </a:prstGeom>
+          <a:ln w="9525">
+            <a:solidFill>
+              <a:srgbClr val="94A3B8"/>
+            </a:solidFill>
+          </a:ln>
         </p:spPr>
       </p:pic>
       <p:sp>
         <p:nvSpPr>
-          <p:cNvPr id="10" name="Rounded Rectangle 9"/>
-          <p:cNvSpPr/>
+          <p:cNvPr id="12" name="TextBox 11"/>
+          <p:cNvSpPr txBox="1"/>
           <p:nvPr/>
         </p:nvSpPr>
         <p:spPr>
           <a:xfrm>
-            <a:off x="4709160" y="3520440"/>
-            <a:ext cx="3977639" cy="2606040"/>
+            <a:off x="4818888" y="3858768"/>
+            <a:ext cx="3758183" cy="2240280"/>
           </a:xfrm>
-          <a:prstGeom prst="roundRect">
+          <a:prstGeom prst="rect">
             <a:avLst/>
           </a:prstGeom>
-          <a:solidFill>
-            <a:srgbClr val="F8FAFC"/>
-          </a:solidFill>
-          <a:ln w="15240">
-            <a:solidFill>
-              <a:srgbClr val="0284C7"/>
-            </a:solidFill>
-          </a:ln>
+          <a:noFill/>
         </p:spPr>
-        <p:style>
-          <a:lnRef idx="1">
-            <a:schemeClr val="accent1"/>
-          </a:lnRef>
-          <a:fillRef idx="3">
-            <a:schemeClr val="accent1"/>
-          </a:fillRef>
-          <a:effectRef idx="2">
-            <a:schemeClr val="accent1"/>
-          </a:effectRef>
-          <a:fontRef idx="minor">
-            <a:schemeClr val="lt1"/>
-          </a:fontRef>
-        </p:style>
         <p:txBody>
-          <a:bodyPr rtlCol="0" anchor="ctr" wrap="square" lIns="109728" rIns="109728" tIns="91440" bIns="73152"/>
+          <a:bodyPr wrap="square" lIns="0" tIns="0" rIns="0" bIns="0">
+            <a:spAutoFit/>
+          </a:bodyPr>
           <a:lstStyle/>
           <a:p>
-            <a:pPr algn="ctr">
-              <a:spcAft>
-                <a:spcPts val="300"/>
-              </a:spcAft>
-              <a:defRPr sz="1050" b="1">
-                <a:solidFill>
-                  <a:srgbClr val="0284C7"/>
-                </a:solidFill>
+            <a:pPr>
+              <a:spcAft>
+                <a:spcPts val="250"/>
+              </a:spcAft>
+              <a:defRPr sz="800">
                 <a:latin typeface="Times New Roman"/>
               </a:defRPr>
             </a:pPr>
             <a:r>
-              <a:t>Fig 4. Multi-Agent Collaboration Sessions &amp; Sequential Workflows</a:t>
+              <a:rPr b="1">
+                <a:solidFill>
+                  <a:srgbClr val="15803D"/>
+                </a:solidFill>
+              </a:rPr>
+              <a:t>• </a:t>
+            </a:r>
+            <a:r>
+              <a:rPr b="1">
+                <a:solidFill>
+                  <a:srgbClr val="1E293B"/>
+                </a:solidFill>
+              </a:rPr>
+              <a:t>W3C did: </a:t>
+            </a:r>
+            <a:r>
+              <a:rPr>
+                <a:solidFill>
+                  <a:srgbClr val="1E293B"/>
+                </a:solidFill>
+              </a:rPr>
+              <a:t>key Resolution: Agent identity derived using Ed25519 multicodec prefix 0xed01 and Base58 encoding.</a:t>
             </a:r>
           </a:p>
           <a:p>
             <a:pPr>
               <a:spcAft>
-                <a:spcPts val="200"/>
-              </a:spcAft>
-              <a:defRPr sz="760">
+                <a:spcPts val="250"/>
+              </a:spcAft>
+              <a:defRPr sz="800">
                 <a:latin typeface="Times New Roman"/>
               </a:defRPr>
             </a:pPr>
             <a:r>
               <a:rPr b="1">
                 <a:solidFill>
-                  <a:srgbClr val="0284C7"/>
+                  <a:srgbClr val="15803D"/>
                 </a:solidFill>
               </a:rPr>
               <a:t>• </a:t>
@@ -23209,7 +22594,7 @@
                   <a:srgbClr val="1E293B"/>
                 </a:solidFill>
               </a:rPr>
-              <a:t>Lifecycle State Machine: </a:t>
+              <a:t>RFC 8032 Cryptography: </a:t>
             </a:r>
             <a:r>
               <a:rPr>
@@ -23217,22 +22602,22 @@
                   <a:srgbClr val="1E293B"/>
                 </a:solidFill>
               </a:rPr>
-              <a:t>Governs collaboration sessions across four states: PENDING -&gt; ACTIVE -&gt; COMPLETED (or TERMINATED).</a:t>
+              <a:t>Displays 256-bit elliptic-curve public keys and verifies asymmetric digital signatures.</a:t>
             </a:r>
           </a:p>
           <a:p>
             <a:pPr>
               <a:spcAft>
-                <a:spcPts val="200"/>
-              </a:spcAft>
-              <a:defRPr sz="760">
+                <a:spcPts val="250"/>
+              </a:spcAft>
+              <a:defRPr sz="800">
                 <a:latin typeface="Times New Roman"/>
               </a:defRPr>
             </a:pPr>
             <a:r>
               <a:rPr b="1">
                 <a:solidFill>
-                  <a:srgbClr val="0284C7"/>
+                  <a:srgbClr val="15803D"/>
                 </a:solidFill>
               </a:rPr>
               <a:t>• </a:t>
@@ -23243,7 +22628,7 @@
                   <a:srgbClr val="1E293B"/>
                 </a:solidFill>
               </a:rPr>
-              <a:t>Sequential Workflow Execution: </a:t>
+              <a:t>W3C VC 2.0 Credential Inspection: </a:t>
             </a:r>
             <a:r>
               <a:rPr>
@@ -23251,22 +22636,22 @@
                   <a:srgbClr val="1E293B"/>
                 </a:solidFill>
               </a:rPr>
-              <a:t>Orchestrates multi-step pipelines (e.g. Planning -&gt; Coding -&gt; Review) with mutual authentication.</a:t>
+              <a:t>Validates JSON-LD claims, issuer DID signature, and issuance timestamp.</a:t>
             </a:r>
           </a:p>
           <a:p>
             <a:pPr>
               <a:spcAft>
-                <a:spcPts val="200"/>
-              </a:spcAft>
-              <a:defRPr sz="760">
+                <a:spcPts val="250"/>
+              </a:spcAft>
+              <a:defRPr sz="800">
                 <a:latin typeface="Times New Roman"/>
               </a:defRPr>
             </a:pPr>
             <a:r>
               <a:rPr b="1">
                 <a:solidFill>
-                  <a:srgbClr val="0284C7"/>
+                  <a:srgbClr val="15803D"/>
                 </a:solidFill>
               </a:rPr>
               <a:t>• </a:t>
@@ -23277,7 +22662,7 @@
                   <a:srgbClr val="1E293B"/>
                 </a:solidFill>
               </a:rPr>
-              <a:t>Per-Step Telemetry Ingestion: </a:t>
+              <a:t>Tamper-Evident Integrity: </a:t>
             </a:r>
             <a:r>
               <a:rPr>
@@ -23285,41 +22670,7 @@
                   <a:srgbClr val="1E293B"/>
                 </a:solidFill>
               </a:rPr>
-              <a:t>Collects telemetry after every pipeline step and dynamically re-evaluates the executing agent's trust score.</a:t>
-            </a:r>
-          </a:p>
-          <a:p>
-            <a:pPr>
-              <a:spcAft>
-                <a:spcPts val="200"/>
-              </a:spcAft>
-              <a:defRPr sz="760">
-                <a:latin typeface="Times New Roman"/>
-              </a:defRPr>
-            </a:pPr>
-            <a:r>
-              <a:rPr b="1">
-                <a:solidFill>
-                  <a:srgbClr val="0284C7"/>
-                </a:solidFill>
-              </a:rPr>
-              <a:t>• </a:t>
-            </a:r>
-            <a:r>
-              <a:rPr b="1">
-                <a:solidFill>
-                  <a:srgbClr val="1E293B"/>
-                </a:solidFill>
-              </a:rPr>
-              <a:t>Mid-Execution Fail-Closed Abort: </a:t>
-            </a:r>
-            <a:r>
-              <a:rPr>
-                <a:solidFill>
-                  <a:srgbClr val="1E293B"/>
-                </a:solidFill>
-              </a:rPr>
-              <a:t>If an agent's trust score drops below 0.50 mid-session, the workflow immediately aborts with HTTP 403.</a:t>
+              <a:t>Computes SHA-256 integrity hash across credential claims to detect payload tampering.</a:t>
             </a:r>
           </a:p>
         </p:txBody>
@@ -23373,7 +22724,7 @@
               </a:defRPr>
             </a:pPr>
             <a:r>
-              <a:t>Implementation &amp; Technical Validation</a:t>
+              <a:t>Actual Project Screenshots: Discovery, Matching &amp; Multi-Agent Collaboration</a:t>
             </a:r>
           </a:p>
         </p:txBody>
@@ -23409,7 +22760,7 @@
               </a:defRPr>
             </a:pPr>
             <a:r>
-              <a:t>Complete Architecture Integration • Forensic Codebase Verification • Automated CI/CD Metrics</a:t>
+              <a:t>Multi-Attribute Capability Filtering • Weighted MatchScore Optimization • Sequential Pipeline Workflows</a:t>
             </a:r>
           </a:p>
         </p:txBody>
@@ -23445,7 +22796,7 @@
               </a:defRPr>
             </a:pPr>
             <a:r>
-              <a:t>27</a:t>
+              <a:t>22</a:t>
             </a:r>
           </a:p>
         </p:txBody>
@@ -23459,17 +22810,17 @@
         <p:spPr>
           <a:xfrm>
             <a:off x="457200" y="1115568"/>
-            <a:ext cx="1947672" cy="3794760"/>
+            <a:ext cx="3977639" cy="5120640"/>
           </a:xfrm>
           <a:prstGeom prst="roundRect">
             <a:avLst/>
           </a:prstGeom>
           <a:solidFill>
-            <a:srgbClr val="EFF6FF"/>
+            <a:srgbClr val="F8FAFC"/>
           </a:solidFill>
           <a:ln w="15240">
             <a:solidFill>
-              <a:srgbClr val="3B82F6"/>
+              <a:srgbClr val="0369A1"/>
             </a:solidFill>
           </a:ln>
         </p:spPr>
@@ -23488,28 +22839,103 @@
           </a:fontRef>
         </p:style>
         <p:txBody>
-          <a:bodyPr rtlCol="0" anchor="ctr" wrap="square" lIns="109728" rIns="109728" tIns="91440" bIns="73152"/>
+          <a:bodyPr rtlCol="0" anchor="ctr"/>
           <a:lstStyle/>
           <a:p>
-            <a:pPr algn="ctr">
-              <a:spcAft>
-                <a:spcPts val="300"/>
-              </a:spcAft>
+            <a:pPr algn="ctr"/>
+          </a:p>
+        </p:txBody>
+      </p:sp>
+      <p:sp>
+        <p:nvSpPr>
+          <p:cNvPr id="6" name="TextBox 5"/>
+          <p:cNvSpPr txBox="1"/>
+          <p:nvPr/>
+        </p:nvSpPr>
+        <p:spPr>
+          <a:xfrm>
+            <a:off x="548640" y="1188720"/>
+            <a:ext cx="3794759" cy="320040"/>
+          </a:xfrm>
+          <a:prstGeom prst="rect">
+            <a:avLst/>
+          </a:prstGeom>
+          <a:noFill/>
+        </p:spPr>
+        <p:txBody>
+          <a:bodyPr wrap="square">
+            <a:spAutoFit/>
+          </a:bodyPr>
+          <a:lstStyle/>
+          <a:p>
+            <a:pPr>
               <a:defRPr sz="1050" b="1">
                 <a:solidFill>
-                  <a:srgbClr val="1F497D"/>
+                  <a:srgbClr val="0369A1"/>
                 </a:solidFill>
                 <a:latin typeface="Times New Roman"/>
               </a:defRPr>
             </a:pPr>
             <a:r>
-              <a:t>1. Identity &amp; Cryptography</a:t>
-            </a:r>
-          </a:p>
+              <a:t>1. Agent Discovery &amp; Task-Driven Algorithmic Matching</a:t>
+            </a:r>
+          </a:p>
+        </p:txBody>
+      </p:sp>
+      <p:pic>
+        <p:nvPicPr>
+          <p:cNvPr id="7" name="Picture 6" descr="agent_matching_view.png"/>
+          <p:cNvPicPr>
+            <a:picLocks noChangeAspect="1"/>
+          </p:cNvPicPr>
+          <p:nvPr/>
+        </p:nvPicPr>
+        <p:blipFill>
+          <a:blip r:embed="rId2"/>
+          <a:stretch>
+            <a:fillRect/>
+          </a:stretch>
+        </p:blipFill>
+        <p:spPr>
+          <a:xfrm>
+            <a:off x="566928" y="1527048"/>
+            <a:ext cx="3758183" cy="2240280"/>
+          </a:xfrm>
+          <a:prstGeom prst="rect">
+            <a:avLst/>
+          </a:prstGeom>
+          <a:ln w="9525">
+            <a:solidFill>
+              <a:srgbClr val="94A3B8"/>
+            </a:solidFill>
+          </a:ln>
+        </p:spPr>
+      </p:pic>
+      <p:sp>
+        <p:nvSpPr>
+          <p:cNvPr id="8" name="TextBox 7"/>
+          <p:cNvSpPr txBox="1"/>
+          <p:nvPr/>
+        </p:nvSpPr>
+        <p:spPr>
+          <a:xfrm>
+            <a:off x="566928" y="3858768"/>
+            <a:ext cx="3758183" cy="2240280"/>
+          </a:xfrm>
+          <a:prstGeom prst="rect">
+            <a:avLst/>
+          </a:prstGeom>
+          <a:noFill/>
+        </p:spPr>
+        <p:txBody>
+          <a:bodyPr wrap="square" lIns="0" tIns="0" rIns="0" bIns="0">
+            <a:spAutoFit/>
+          </a:bodyPr>
+          <a:lstStyle/>
           <a:p>
             <a:pPr>
               <a:spcAft>
-                <a:spcPts val="200"/>
+                <a:spcPts val="250"/>
               </a:spcAft>
               <a:defRPr sz="800">
                 <a:latin typeface="Times New Roman"/>
@@ -23518,7 +22944,7 @@
             <a:r>
               <a:rPr b="1">
                 <a:solidFill>
-                  <a:srgbClr val="1F497D"/>
+                  <a:srgbClr val="0369A1"/>
                 </a:solidFill>
               </a:rPr>
               <a:t>• </a:t>
@@ -23529,7 +22955,7 @@
                   <a:srgbClr val="1E293B"/>
                 </a:solidFill>
               </a:rPr>
-              <a:t>W3C DID Specification: </a:t>
+              <a:t>Two-Phase Delegation: </a:t>
             </a:r>
             <a:r>
               <a:rPr>
@@ -23537,13 +22963,13 @@
                   <a:srgbClr val="1E293B"/>
                 </a:solidFill>
               </a:rPr>
-              <a:t>did:key format with multicodec prefix 0xed01 for sovereign agent identity.</a:t>
+              <a:t>Combines boolean capability search with multi-objective weighted ranking.</a:t>
             </a:r>
           </a:p>
           <a:p>
             <a:pPr>
               <a:spcAft>
-                <a:spcPts val="200"/>
+                <a:spcPts val="250"/>
               </a:spcAft>
               <a:defRPr sz="800">
                 <a:latin typeface="Times New Roman"/>
@@ -23552,7 +22978,7 @@
             <a:r>
               <a:rPr b="1">
                 <a:solidFill>
-                  <a:srgbClr val="1F497D"/>
+                  <a:srgbClr val="0369A1"/>
                 </a:solidFill>
               </a:rPr>
               <a:t>• </a:t>
@@ -23563,7 +22989,7 @@
                   <a:srgbClr val="1E293B"/>
                 </a:solidFill>
               </a:rPr>
-              <a:t>Ed25519 Cryptography: </a:t>
+              <a:t>Discovery Filters: </a:t>
             </a:r>
             <a:r>
               <a:rPr>
@@ -23571,13 +22997,13 @@
                   <a:srgbClr val="1E293B"/>
                 </a:solidFill>
               </a:rPr>
-              <a:t>RFC 8032 asymmetric signing &amp; verification; 256-bit elliptic-curve keys.</a:t>
+              <a:t>Tag matching, min-trust threshold slider (0.00-1.00), availability, and HTTP 200 health probe.</a:t>
             </a:r>
           </a:p>
           <a:p>
             <a:pPr>
               <a:spcAft>
-                <a:spcPts val="200"/>
+                <a:spcPts val="250"/>
               </a:spcAft>
               <a:defRPr sz="800">
                 <a:latin typeface="Times New Roman"/>
@@ -23586,7 +23012,7 @@
             <a:r>
               <a:rPr b="1">
                 <a:solidFill>
-                  <a:srgbClr val="1F497D"/>
+                  <a:srgbClr val="0369A1"/>
                 </a:solidFill>
               </a:rPr>
               <a:t>• </a:t>
@@ -23597,7 +23023,7 @@
                   <a:srgbClr val="1E293B"/>
                 </a:solidFill>
               </a:rPr>
-              <a:t>Verifiable Credentials: </a:t>
+              <a:t>Explainable Exclusion: </a:t>
             </a:r>
             <a:r>
               <a:rPr>
@@ -23605,13 +23031,13 @@
                   <a:srgbClr val="1E293B"/>
                 </a:solidFill>
               </a:rPr>
-              <a:t>W3C VC 2.0 JSON-LD data model with SHA-256 tamper-evident integrity hashes.</a:t>
+              <a:t>Displays transparent rejection rationale (e.g. 'Trust 0.42 &lt; requested 0.80').</a:t>
             </a:r>
           </a:p>
           <a:p>
             <a:pPr>
               <a:spcAft>
-                <a:spcPts val="200"/>
+                <a:spcPts val="250"/>
               </a:spcAft>
               <a:defRPr sz="800">
                 <a:latin typeface="Times New Roman"/>
@@ -23620,7 +23046,7 @@
             <a:r>
               <a:rPr b="1">
                 <a:solidFill>
-                  <a:srgbClr val="1F497D"/>
+                  <a:srgbClr val="0369A1"/>
                 </a:solidFill>
               </a:rPr>
               <a:t>• </a:t>
@@ -23631,7 +23057,7 @@
                   <a:srgbClr val="1E293B"/>
                 </a:solidFill>
               </a:rPr>
-              <a:t>Human Auth &amp; RBAC: </a:t>
+              <a:t>Weighted MatchScore: </a:t>
             </a:r>
             <a:r>
               <a:rPr>
@@ -23639,31 +23065,31 @@
                   <a:srgbClr val="1E293B"/>
                 </a:solidFill>
               </a:rPr>
-              <a:t>Argon2id password hashing, 5-strike lockout (HTTP 423), JWT rotation, 3-tier RBAC (ADMIN, OPERATOR, VIEWER).</a:t>
+              <a:t>MatchScore = 0.40 T + 0.30 (r/5) + 0.20 sigma + 0.10 (1 - lambda); quarantined capped to 0.000.</a:t>
             </a:r>
           </a:p>
         </p:txBody>
       </p:sp>
       <p:sp>
         <p:nvSpPr>
-          <p:cNvPr id="6" name="Rounded Rectangle 5"/>
+          <p:cNvPr id="9" name="Rounded Rectangle 8"/>
           <p:cNvSpPr/>
           <p:nvPr/>
         </p:nvSpPr>
         <p:spPr>
           <a:xfrm>
-            <a:off x="2551176" y="1115568"/>
-            <a:ext cx="1947672" cy="3794760"/>
+            <a:off x="4709160" y="1115568"/>
+            <a:ext cx="3977639" cy="5120640"/>
           </a:xfrm>
           <a:prstGeom prst="roundRect">
             <a:avLst/>
           </a:prstGeom>
           <a:solidFill>
-            <a:srgbClr val="F0FDF4"/>
+            <a:srgbClr val="F8FAFC"/>
           </a:solidFill>
           <a:ln w="15240">
             <a:solidFill>
-              <a:srgbClr val="10B981"/>
+              <a:srgbClr val="B45309"/>
             </a:solidFill>
           </a:ln>
         </p:spPr>
@@ -23682,28 +23108,103 @@
           </a:fontRef>
         </p:style>
         <p:txBody>
-          <a:bodyPr rtlCol="0" anchor="ctr" wrap="square" lIns="109728" rIns="109728" tIns="91440" bIns="73152"/>
+          <a:bodyPr rtlCol="0" anchor="ctr"/>
           <a:lstStyle/>
           <a:p>
-            <a:pPr algn="ctr">
-              <a:spcAft>
-                <a:spcPts val="300"/>
-              </a:spcAft>
+            <a:pPr algn="ctr"/>
+          </a:p>
+        </p:txBody>
+      </p:sp>
+      <p:sp>
+        <p:nvSpPr>
+          <p:cNvPr id="10" name="TextBox 9"/>
+          <p:cNvSpPr txBox="1"/>
+          <p:nvPr/>
+        </p:nvSpPr>
+        <p:spPr>
+          <a:xfrm>
+            <a:off x="4800600" y="1188720"/>
+            <a:ext cx="3794759" cy="320040"/>
+          </a:xfrm>
+          <a:prstGeom prst="rect">
+            <a:avLst/>
+          </a:prstGeom>
+          <a:noFill/>
+        </p:spPr>
+        <p:txBody>
+          <a:bodyPr wrap="square">
+            <a:spAutoFit/>
+          </a:bodyPr>
+          <a:lstStyle/>
+          <a:p>
+            <a:pPr>
               <a:defRPr sz="1050" b="1">
                 <a:solidFill>
-                  <a:srgbClr val="15803D"/>
+                  <a:srgbClr val="B45309"/>
                 </a:solidFill>
                 <a:latin typeface="Times New Roman"/>
               </a:defRPr>
             </a:pPr>
             <a:r>
-              <a:t>2. Trust Intelligence Engine</a:t>
-            </a:r>
-          </a:p>
+              <a:t>2. Multi-Agent Collaboration Sessions &amp; Sequential Workflows</a:t>
+            </a:r>
+          </a:p>
+        </p:txBody>
+      </p:sp>
+      <p:pic>
+        <p:nvPicPr>
+          <p:cNvPr id="11" name="Picture 10" descr="collaboration_workflows.png"/>
+          <p:cNvPicPr>
+            <a:picLocks noChangeAspect="1"/>
+          </p:cNvPicPr>
+          <p:nvPr/>
+        </p:nvPicPr>
+        <p:blipFill>
+          <a:blip r:embed="rId3"/>
+          <a:stretch>
+            <a:fillRect/>
+          </a:stretch>
+        </p:blipFill>
+        <p:spPr>
+          <a:xfrm>
+            <a:off x="4818888" y="1527048"/>
+            <a:ext cx="3758183" cy="2240280"/>
+          </a:xfrm>
+          <a:prstGeom prst="rect">
+            <a:avLst/>
+          </a:prstGeom>
+          <a:ln w="9525">
+            <a:solidFill>
+              <a:srgbClr val="94A3B8"/>
+            </a:solidFill>
+          </a:ln>
+        </p:spPr>
+      </p:pic>
+      <p:sp>
+        <p:nvSpPr>
+          <p:cNvPr id="12" name="TextBox 11"/>
+          <p:cNvSpPr txBox="1"/>
+          <p:nvPr/>
+        </p:nvSpPr>
+        <p:spPr>
+          <a:xfrm>
+            <a:off x="4818888" y="3858768"/>
+            <a:ext cx="3758183" cy="2240280"/>
+          </a:xfrm>
+          <a:prstGeom prst="rect">
+            <a:avLst/>
+          </a:prstGeom>
+          <a:noFill/>
+        </p:spPr>
+        <p:txBody>
+          <a:bodyPr wrap="square" lIns="0" tIns="0" rIns="0" bIns="0">
+            <a:spAutoFit/>
+          </a:bodyPr>
+          <a:lstStyle/>
           <a:p>
             <a:pPr>
               <a:spcAft>
-                <a:spcPts val="200"/>
+                <a:spcPts val="250"/>
               </a:spcAft>
               <a:defRPr sz="800">
                 <a:latin typeface="Times New Roman"/>
@@ -23712,7 +23213,7 @@
             <a:r>
               <a:rPr b="1">
                 <a:solidFill>
-                  <a:srgbClr val="15803D"/>
+                  <a:srgbClr val="B45309"/>
                 </a:solidFill>
               </a:rPr>
               <a:t>• </a:t>
@@ -23723,7 +23224,7 @@
                   <a:srgbClr val="1E293B"/>
                 </a:solidFill>
               </a:rPr>
-              <a:t>Telemetry Ingestion: </a:t>
+              <a:t>Session State Lifecycle: </a:t>
             </a:r>
             <a:r>
               <a:rPr>
@@ -23731,13 +23232,13 @@
                   <a:srgbClr val="1E293B"/>
                 </a:solidFill>
               </a:rPr>
-              <a:t>Real-time recording of Task Success (Si), Compliance (Ci), and Latency penalty (Li).</a:t>
+              <a:t>Stateful tracking across PENDING -&gt; ACTIVE -&gt; COMPLETED / TERMINATED.</a:t>
             </a:r>
           </a:p>
           <a:p>
             <a:pPr>
               <a:spcAft>
-                <a:spcPts val="200"/>
+                <a:spcPts val="250"/>
               </a:spcAft>
               <a:defRPr sz="800">
                 <a:latin typeface="Times New Roman"/>
@@ -23746,7 +23247,7 @@
             <a:r>
               <a:rPr b="1">
                 <a:solidFill>
-                  <a:srgbClr val="15803D"/>
+                  <a:srgbClr val="B45309"/>
                 </a:solidFill>
               </a:rPr>
               <a:t>• </a:t>
@@ -23757,7 +23258,7 @@
                   <a:srgbClr val="1E293B"/>
                 </a:solidFill>
               </a:rPr>
-              <a:t>Single-Period Score: </a:t>
+              <a:t>Sequential Pipeline Execution: </a:t>
             </a:r>
             <a:r>
               <a:rPr>
@@ -23765,13 +23266,13 @@
                   <a:srgbClr val="1E293B"/>
                 </a:solidFill>
               </a:rPr>
-              <a:t>Pi(t) = 0.6 Si(t) + 0.3 Ci(t) + 0.1(1 - Li(t)).</a:t>
+              <a:t>Multi-stage workflow runner (Stage 1: Planning -&gt; Stage 2: Coding -&gt; Stage 3: Review).</a:t>
             </a:r>
           </a:p>
           <a:p>
             <a:pPr>
               <a:spcAft>
-                <a:spcPts val="200"/>
+                <a:spcPts val="250"/>
               </a:spcAft>
               <a:defRPr sz="800">
                 <a:latin typeface="Times New Roman"/>
@@ -23780,7 +23281,7 @@
             <a:r>
               <a:rPr b="1">
                 <a:solidFill>
-                  <a:srgbClr val="15803D"/>
+                  <a:srgbClr val="B45309"/>
                 </a:solidFill>
               </a:rPr>
               <a:t>• </a:t>
@@ -23791,7 +23292,7 @@
                   <a:srgbClr val="1E293B"/>
                 </a:solidFill>
               </a:rPr>
-              <a:t>Temporal Trust (EMA): </a:t>
+              <a:t>Per-Step Telemetry Persistence: </a:t>
             </a:r>
             <a:r>
               <a:rPr>
@@ -23799,13 +23300,13 @@
                   <a:srgbClr val="1E293B"/>
                 </a:solidFill>
               </a:rPr>
-              <a:t>Ti(t) = 0.70 Ti(t-1) + 0.30 Pi(t); lambda=0.70 provides hysteresis &amp; dampening.</a:t>
+              <a:t>Intermediate metrics recorded to SQLite WAL ledger at each pipeline transition.</a:t>
             </a:r>
           </a:p>
           <a:p>
             <a:pPr>
               <a:spcAft>
-                <a:spcPts val="200"/>
+                <a:spcPts val="250"/>
               </a:spcAft>
               <a:defRPr sz="800">
                 <a:latin typeface="Times New Roman"/>
@@ -23814,7 +23315,7 @@
             <a:r>
               <a:rPr b="1">
                 <a:solidFill>
-                  <a:srgbClr val="15803D"/>
+                  <a:srgbClr val="B45309"/>
                 </a:solidFill>
               </a:rPr>
               <a:t>• </a:t>
@@ -23825,7 +23326,7 @@
                   <a:srgbClr val="1E293B"/>
                 </a:solidFill>
               </a:rPr>
-              <a:t>Trust-State Machine: </a:t>
+              <a:t>Mid-Execution Trust Abort: </a:t>
             </a:r>
             <a:r>
               <a:rPr>
@@ -23833,892 +23334,7 @@
                   <a:srgbClr val="1E293B"/>
                 </a:solidFill>
               </a:rPr>
-              <a:t>Graduated 4-tier classification: TRUSTED (&gt;=0.80), SUSPICIOUS (0.50-0.79), QUARANTINED (&lt;0.50), REVOKED (blacklist).</a:t>
-            </a:r>
-          </a:p>
-          <a:p>
-            <a:pPr>
-              <a:spcAft>
-                <a:spcPts val="200"/>
-              </a:spcAft>
-              <a:defRPr sz="800">
-                <a:latin typeface="Times New Roman"/>
-              </a:defRPr>
-            </a:pPr>
-            <a:r>
-              <a:rPr b="1">
-                <a:solidFill>
-                  <a:srgbClr val="15803D"/>
-                </a:solidFill>
-              </a:rPr>
-              <a:t>• </a:t>
-            </a:r>
-            <a:r>
-              <a:rPr b="1">
-                <a:solidFill>
-                  <a:srgbClr val="1E293B"/>
-                </a:solidFill>
-              </a:rPr>
-              <a:t>Adaptive Policy Gateway: </a:t>
-            </a:r>
-            <a:r>
-              <a:rPr>
-                <a:solidFill>
-                  <a:srgbClr val="1E293B"/>
-                </a:solidFill>
-              </a:rPr>
-              <a:t>Intercepts all invocations to dynamically enforce least privilege.</a:t>
-            </a:r>
-          </a:p>
-        </p:txBody>
-      </p:sp>
-      <p:sp>
-        <p:nvSpPr>
-          <p:cNvPr id="7" name="Rounded Rectangle 6"/>
-          <p:cNvSpPr/>
-          <p:nvPr/>
-        </p:nvSpPr>
-        <p:spPr>
-          <a:xfrm>
-            <a:off x="4645152" y="1115568"/>
-            <a:ext cx="1947672" cy="3794760"/>
-          </a:xfrm>
-          <a:prstGeom prst="roundRect">
-            <a:avLst/>
-          </a:prstGeom>
-          <a:solidFill>
-            <a:srgbClr val="FEFCE8"/>
-          </a:solidFill>
-          <a:ln w="15240">
-            <a:solidFill>
-              <a:srgbClr val="F59E0B"/>
-            </a:solidFill>
-          </a:ln>
-        </p:spPr>
-        <p:style>
-          <a:lnRef idx="1">
-            <a:schemeClr val="accent1"/>
-          </a:lnRef>
-          <a:fillRef idx="3">
-            <a:schemeClr val="accent1"/>
-          </a:fillRef>
-          <a:effectRef idx="2">
-            <a:schemeClr val="accent1"/>
-          </a:effectRef>
-          <a:fontRef idx="minor">
-            <a:schemeClr val="lt1"/>
-          </a:fontRef>
-        </p:style>
-        <p:txBody>
-          <a:bodyPr rtlCol="0" anchor="ctr" wrap="square" lIns="109728" rIns="109728" tIns="91440" bIns="73152"/>
-          <a:lstStyle/>
-          <a:p>
-            <a:pPr algn="ctr">
-              <a:spcAft>
-                <a:spcPts val="300"/>
-              </a:spcAft>
-              <a:defRPr sz="1050" b="1">
-                <a:solidFill>
-                  <a:srgbClr val="B45309"/>
-                </a:solidFill>
-                <a:latin typeface="Times New Roman"/>
-              </a:defRPr>
-            </a:pPr>
-            <a:r>
-              <a:t>3. Collaboration &amp; Workflows</a:t>
-            </a:r>
-          </a:p>
-          <a:p>
-            <a:pPr>
-              <a:spcAft>
-                <a:spcPts val="200"/>
-              </a:spcAft>
-              <a:defRPr sz="800">
-                <a:latin typeface="Times New Roman"/>
-              </a:defRPr>
-            </a:pPr>
-            <a:r>
-              <a:rPr b="1">
-                <a:solidFill>
-                  <a:srgbClr val="B45309"/>
-                </a:solidFill>
-              </a:rPr>
-              <a:t>• </a:t>
-            </a:r>
-            <a:r>
-              <a:rPr b="1">
-                <a:solidFill>
-                  <a:srgbClr val="1E293B"/>
-                </a:solidFill>
-              </a:rPr>
-              <a:t>Capability Discovery: </a:t>
-            </a:r>
-            <a:r>
-              <a:rPr>
-                <a:solidFill>
-                  <a:srgbClr val="1E293B"/>
-                </a:solidFill>
-              </a:rPr>
-              <a:t>Multi-attribute filtering (tag, min-trust slider 0.0-1.0, status, HTTP health probe).</a:t>
-            </a:r>
-          </a:p>
-          <a:p>
-            <a:pPr>
-              <a:spcAft>
-                <a:spcPts val="200"/>
-              </a:spcAft>
-              <a:defRPr sz="800">
-                <a:latin typeface="Times New Roman"/>
-              </a:defRPr>
-            </a:pPr>
-            <a:r>
-              <a:rPr b="1">
-                <a:solidFill>
-                  <a:srgbClr val="B45309"/>
-                </a:solidFill>
-              </a:rPr>
-              <a:t>• </a:t>
-            </a:r>
-            <a:r>
-              <a:rPr b="1">
-                <a:solidFill>
-                  <a:srgbClr val="1E293B"/>
-                </a:solidFill>
-              </a:rPr>
-              <a:t>Explainable Exclusion: </a:t>
-            </a:r>
-            <a:r>
-              <a:rPr>
-                <a:solidFill>
-                  <a:srgbClr val="1E293B"/>
-                </a:solidFill>
-              </a:rPr>
-              <a:t>Transparent failure rationale (e.g. 'Trust 0.42 &lt; 0.80 requested').</a:t>
-            </a:r>
-          </a:p>
-          <a:p>
-            <a:pPr>
-              <a:spcAft>
-                <a:spcPts val="200"/>
-              </a:spcAft>
-              <a:defRPr sz="800">
-                <a:latin typeface="Times New Roman"/>
-              </a:defRPr>
-            </a:pPr>
-            <a:r>
-              <a:rPr b="1">
-                <a:solidFill>
-                  <a:srgbClr val="B45309"/>
-                </a:solidFill>
-              </a:rPr>
-              <a:t>• </a:t>
-            </a:r>
-            <a:r>
-              <a:rPr b="1">
-                <a:solidFill>
-                  <a:srgbClr val="1E293B"/>
-                </a:solidFill>
-              </a:rPr>
-              <a:t>Task-Driven Matching: </a:t>
-            </a:r>
-            <a:r>
-              <a:rPr>
-                <a:solidFill>
-                  <a:srgbClr val="1E293B"/>
-                </a:solidFill>
-              </a:rPr>
-              <a:t>MatchScore = 0.4 T + 0.3 (r/5) + 0.2 sigma + 0.1 (1 - lambda); quarantined capped to 0.000.</a:t>
-            </a:r>
-          </a:p>
-          <a:p>
-            <a:pPr>
-              <a:spcAft>
-                <a:spcPts val="200"/>
-              </a:spcAft>
-              <a:defRPr sz="800">
-                <a:latin typeface="Times New Roman"/>
-              </a:defRPr>
-            </a:pPr>
-            <a:r>
-              <a:rPr b="1">
-                <a:solidFill>
-                  <a:srgbClr val="B45309"/>
-                </a:solidFill>
-              </a:rPr>
-              <a:t>• </a:t>
-            </a:r>
-            <a:r>
-              <a:rPr b="1">
-                <a:solidFill>
-                  <a:srgbClr val="1E293B"/>
-                </a:solidFill>
-              </a:rPr>
-              <a:t>Multi-Agent Sessions: </a:t>
-            </a:r>
-            <a:r>
-              <a:rPr>
-                <a:solidFill>
-                  <a:srgbClr val="1E293B"/>
-                </a:solidFill>
-              </a:rPr>
-              <a:t>State machine (PENDING, ACTIVE, COMPLETED, TERMINATED).</a:t>
-            </a:r>
-          </a:p>
-          <a:p>
-            <a:pPr>
-              <a:spcAft>
-                <a:spcPts val="200"/>
-              </a:spcAft>
-              <a:defRPr sz="800">
-                <a:latin typeface="Times New Roman"/>
-              </a:defRPr>
-            </a:pPr>
-            <a:r>
-              <a:rPr b="1">
-                <a:solidFill>
-                  <a:srgbClr val="B45309"/>
-                </a:solidFill>
-              </a:rPr>
-              <a:t>• </a:t>
-            </a:r>
-            <a:r>
-              <a:rPr b="1">
-                <a:solidFill>
-                  <a:srgbClr val="1E293B"/>
-                </a:solidFill>
-              </a:rPr>
-              <a:t>Sequential Pipelines: </a:t>
-            </a:r>
-            <a:r>
-              <a:rPr>
-                <a:solidFill>
-                  <a:srgbClr val="1E293B"/>
-                </a:solidFill>
-              </a:rPr>
-              <a:t>Step-wise telemetry collection with mid-workflow abort if Ti(t) &lt; 0.50.</a:t>
-            </a:r>
-          </a:p>
-        </p:txBody>
-      </p:sp>
-      <p:sp>
-        <p:nvSpPr>
-          <p:cNvPr id="8" name="Rounded Rectangle 7"/>
-          <p:cNvSpPr/>
-          <p:nvPr/>
-        </p:nvSpPr>
-        <p:spPr>
-          <a:xfrm>
-            <a:off x="6739128" y="1115568"/>
-            <a:ext cx="1947672" cy="3794760"/>
-          </a:xfrm>
-          <a:prstGeom prst="roundRect">
-            <a:avLst/>
-          </a:prstGeom>
-          <a:solidFill>
-            <a:srgbClr val="F8FAFC"/>
-          </a:solidFill>
-          <a:ln w="15240">
-            <a:solidFill>
-              <a:srgbClr val="64748B"/>
-            </a:solidFill>
-          </a:ln>
-        </p:spPr>
-        <p:style>
-          <a:lnRef idx="1">
-            <a:schemeClr val="accent1"/>
-          </a:lnRef>
-          <a:fillRef idx="3">
-            <a:schemeClr val="accent1"/>
-          </a:fillRef>
-          <a:effectRef idx="2">
-            <a:schemeClr val="accent1"/>
-          </a:effectRef>
-          <a:fontRef idx="minor">
-            <a:schemeClr val="lt1"/>
-          </a:fontRef>
-        </p:style>
-        <p:txBody>
-          <a:bodyPr rtlCol="0" anchor="ctr" wrap="square" lIns="109728" rIns="109728" tIns="91440" bIns="73152"/>
-          <a:lstStyle/>
-          <a:p>
-            <a:pPr algn="ctr">
-              <a:spcAft>
-                <a:spcPts val="300"/>
-              </a:spcAft>
-              <a:defRPr sz="1050" b="1">
-                <a:solidFill>
-                  <a:srgbClr val="334155"/>
-                </a:solidFill>
-                <a:latin typeface="Times New Roman"/>
-              </a:defRPr>
-            </a:pPr>
-            <a:r>
-              <a:t>4. Verified Technology Stack</a:t>
-            </a:r>
-          </a:p>
-          <a:p>
-            <a:pPr>
-              <a:spcAft>
-                <a:spcPts val="200"/>
-              </a:spcAft>
-              <a:defRPr sz="800">
-                <a:latin typeface="Times New Roman"/>
-              </a:defRPr>
-            </a:pPr>
-            <a:r>
-              <a:rPr b="1">
-                <a:solidFill>
-                  <a:srgbClr val="334155"/>
-                </a:solidFill>
-              </a:rPr>
-              <a:t>• </a:t>
-            </a:r>
-            <a:r>
-              <a:rPr b="1">
-                <a:solidFill>
-                  <a:srgbClr val="1E293B"/>
-                </a:solidFill>
-              </a:rPr>
-              <a:t>Backend Architecture: </a:t>
-            </a:r>
-            <a:r>
-              <a:rPr>
-                <a:solidFill>
-                  <a:srgbClr val="1E293B"/>
-                </a:solidFill>
-              </a:rPr>
-              <a:t>Python 3.12, FastAPI (5 modular REST routers), Pydantic v2 schemas.</a:t>
-            </a:r>
-          </a:p>
-          <a:p>
-            <a:pPr>
-              <a:spcAft>
-                <a:spcPts val="200"/>
-              </a:spcAft>
-              <a:defRPr sz="800">
-                <a:latin typeface="Times New Roman"/>
-              </a:defRPr>
-            </a:pPr>
-            <a:r>
-              <a:rPr b="1">
-                <a:solidFill>
-                  <a:srgbClr val="334155"/>
-                </a:solidFill>
-              </a:rPr>
-              <a:t>• </a:t>
-            </a:r>
-            <a:r>
-              <a:rPr b="1">
-                <a:solidFill>
-                  <a:srgbClr val="1E293B"/>
-                </a:solidFill>
-              </a:rPr>
-              <a:t>Verifiable Data Registry: </a:t>
-            </a:r>
-            <a:r>
-              <a:rPr>
-                <a:solidFill>
-                  <a:srgbClr val="1E293B"/>
-                </a:solidFill>
-              </a:rPr>
-              <a:t>SQLite 3 in WAL mode (13 relational tables, zero external daemon, ACID integrity).</a:t>
-            </a:r>
-          </a:p>
-          <a:p>
-            <a:pPr>
-              <a:spcAft>
-                <a:spcPts val="200"/>
-              </a:spcAft>
-              <a:defRPr sz="800">
-                <a:latin typeface="Times New Roman"/>
-              </a:defRPr>
-            </a:pPr>
-            <a:r>
-              <a:rPr b="1">
-                <a:solidFill>
-                  <a:srgbClr val="334155"/>
-                </a:solidFill>
-              </a:rPr>
-              <a:t>• </a:t>
-            </a:r>
-            <a:r>
-              <a:rPr b="1">
-                <a:solidFill>
-                  <a:srgbClr val="1E293B"/>
-                </a:solidFill>
-              </a:rPr>
-              <a:t>Frontend Application: </a:t>
-            </a:r>
-            <a:r>
-              <a:rPr>
-                <a:solidFill>
-                  <a:srgbClr val="1E293B"/>
-                </a:solidFill>
-              </a:rPr>
-              <a:t>React 18/19, Vite 5, Tailwind CSS, Lucide icons, Axios client.</a:t>
-            </a:r>
-          </a:p>
-          <a:p>
-            <a:pPr>
-              <a:spcAft>
-                <a:spcPts val="200"/>
-              </a:spcAft>
-              <a:defRPr sz="800">
-                <a:latin typeface="Times New Roman"/>
-              </a:defRPr>
-            </a:pPr>
-            <a:r>
-              <a:rPr b="1">
-                <a:solidFill>
-                  <a:srgbClr val="334155"/>
-                </a:solidFill>
-              </a:rPr>
-              <a:t>• </a:t>
-            </a:r>
-            <a:r>
-              <a:rPr b="1">
-                <a:solidFill>
-                  <a:srgbClr val="1E293B"/>
-                </a:solidFill>
-              </a:rPr>
-              <a:t>Security &amp; Crypto: </a:t>
-            </a:r>
-            <a:r>
-              <a:rPr>
-                <a:solidFill>
-                  <a:srgbClr val="1E293B"/>
-                </a:solidFill>
-              </a:rPr>
-              <a:t>cryptography (Ed25519), passlib (Argon2id), python-jose (JWT auth).</a:t>
-            </a:r>
-          </a:p>
-          <a:p>
-            <a:pPr>
-              <a:spcAft>
-                <a:spcPts val="200"/>
-              </a:spcAft>
-              <a:defRPr sz="800">
-                <a:latin typeface="Times New Roman"/>
-              </a:defRPr>
-            </a:pPr>
-            <a:r>
-              <a:rPr b="1">
-                <a:solidFill>
-                  <a:srgbClr val="334155"/>
-                </a:solidFill>
-              </a:rPr>
-              <a:t>• </a:t>
-            </a:r>
-            <a:r>
-              <a:rPr b="1">
-                <a:solidFill>
-                  <a:srgbClr val="1E293B"/>
-                </a:solidFill>
-              </a:rPr>
-              <a:t>CI &amp; Quality Assurance: </a:t>
-            </a:r>
-            <a:r>
-              <a:rPr>
-                <a:solidFill>
-                  <a:srgbClr val="1E293B"/>
-                </a:solidFill>
-              </a:rPr>
-              <a:t>Pytest 8.4 test runner, Oxlint linter, Docker containerization.</a:t>
-            </a:r>
-          </a:p>
-        </p:txBody>
-      </p:sp>
-      <p:sp>
-        <p:nvSpPr>
-          <p:cNvPr id="9" name="Rectangle 8"/>
-          <p:cNvSpPr/>
-          <p:nvPr/>
-        </p:nvSpPr>
-        <p:spPr>
-          <a:xfrm>
-            <a:off x="457200" y="5010912"/>
-            <a:ext cx="8229600" cy="1243584"/>
-          </a:xfrm>
-          <a:prstGeom prst="rect">
-            <a:avLst/>
-          </a:prstGeom>
-          <a:solidFill>
-            <a:srgbClr val="0F172A"/>
-          </a:solidFill>
-          <a:ln w="19050">
-            <a:solidFill>
-              <a:srgbClr val="38BDF8"/>
-            </a:solidFill>
-          </a:ln>
-        </p:spPr>
-        <p:style>
-          <a:lnRef idx="1">
-            <a:schemeClr val="accent1"/>
-          </a:lnRef>
-          <a:fillRef idx="3">
-            <a:schemeClr val="accent1"/>
-          </a:fillRef>
-          <a:effectRef idx="2">
-            <a:schemeClr val="accent1"/>
-          </a:effectRef>
-          <a:fontRef idx="minor">
-            <a:schemeClr val="lt1"/>
-          </a:fontRef>
-        </p:style>
-        <p:txBody>
-          <a:bodyPr rtlCol="0" anchor="ctr" tIns="73152" lIns="137160" rIns="137160"/>
-          <a:lstStyle/>
-          <a:p>
-            <a:pPr algn="ctr">
-              <a:defRPr sz="1000" b="1">
-                <a:solidFill>
-                  <a:srgbClr val="38BDF8"/>
-                </a:solidFill>
-                <a:latin typeface="Times New Roman"/>
-              </a:defRPr>
-            </a:pPr>
-            <a:r>
-              <a:t>VERIFIED IMPLEMENTATION EVIDENCE &amp; REPRODUCIBILITY DOSSIER</a:t>
-            </a:r>
-          </a:p>
-        </p:txBody>
-      </p:sp>
-      <p:sp>
-        <p:nvSpPr>
-          <p:cNvPr id="10" name="Rounded Rectangle 9"/>
-          <p:cNvSpPr/>
-          <p:nvPr/>
-        </p:nvSpPr>
-        <p:spPr>
-          <a:xfrm>
-            <a:off x="548640" y="5285232"/>
-            <a:ext cx="1920240" cy="877824"/>
-          </a:xfrm>
-          <a:prstGeom prst="roundRect">
-            <a:avLst/>
-          </a:prstGeom>
-          <a:solidFill>
-            <a:srgbClr val="1E293B"/>
-          </a:solidFill>
-          <a:ln w="12700">
-            <a:solidFill>
-              <a:srgbClr val="10B981"/>
-            </a:solidFill>
-          </a:ln>
-        </p:spPr>
-        <p:style>
-          <a:lnRef idx="1">
-            <a:schemeClr val="accent1"/>
-          </a:lnRef>
-          <a:fillRef idx="3">
-            <a:schemeClr val="accent1"/>
-          </a:fillRef>
-          <a:effectRef idx="2">
-            <a:schemeClr val="accent1"/>
-          </a:effectRef>
-          <a:fontRef idx="minor">
-            <a:schemeClr val="lt1"/>
-          </a:fontRef>
-        </p:style>
-        <p:txBody>
-          <a:bodyPr rtlCol="0" anchor="ctr" lIns="54864" rIns="54864" tIns="36576" bIns="18288"/>
-          <a:lstStyle/>
-          <a:p>
-            <a:pPr algn="ctr">
-              <a:defRPr sz="950" b="1">
-                <a:solidFill>
-                  <a:srgbClr val="10B981"/>
-                </a:solidFill>
-                <a:latin typeface="Times New Roman"/>
-              </a:defRPr>
-            </a:pPr>
-            <a:r>
-              <a:t>80 / 80 Tests Passed</a:t>
-            </a:r>
-          </a:p>
-          <a:p>
-            <a:pPr algn="ctr">
-              <a:defRPr sz="750" b="1">
-                <a:solidFill>
-                  <a:srgbClr val="FFFFFF"/>
-                </a:solidFill>
-                <a:latin typeface="Times New Roman"/>
-              </a:defRPr>
-            </a:pPr>
-            <a:r>
-              <a:t>100% Pass Rate (18.76s)</a:t>
-            </a:r>
-          </a:p>
-          <a:p>
-            <a:pPr algn="ctr">
-              <a:defRPr sz="680">
-                <a:solidFill>
-                  <a:srgbClr val="CBD5E1"/>
-                </a:solidFill>
-                <a:latin typeface="Times New Roman"/>
-              </a:defRPr>
-            </a:pPr>
-            <a:r>
-              <a:t>Pytest 8.4 across 7 test suites:</a:t>
-            </a:r>
-            <a:br/>
-            <a:r>
-              <a:t>DID, VC, Trust, Auth, Matching.</a:t>
-            </a:r>
-          </a:p>
-        </p:txBody>
-      </p:sp>
-      <p:sp>
-        <p:nvSpPr>
-          <p:cNvPr id="11" name="Rounded Rectangle 10"/>
-          <p:cNvSpPr/>
-          <p:nvPr/>
-        </p:nvSpPr>
-        <p:spPr>
-          <a:xfrm>
-            <a:off x="2578608" y="5285232"/>
-            <a:ext cx="1920240" cy="877824"/>
-          </a:xfrm>
-          <a:prstGeom prst="roundRect">
-            <a:avLst/>
-          </a:prstGeom>
-          <a:solidFill>
-            <a:srgbClr val="1E293B"/>
-          </a:solidFill>
-          <a:ln w="12700">
-            <a:solidFill>
-              <a:srgbClr val="38BDF8"/>
-            </a:solidFill>
-          </a:ln>
-        </p:spPr>
-        <p:style>
-          <a:lnRef idx="1">
-            <a:schemeClr val="accent1"/>
-          </a:lnRef>
-          <a:fillRef idx="3">
-            <a:schemeClr val="accent1"/>
-          </a:fillRef>
-          <a:effectRef idx="2">
-            <a:schemeClr val="accent1"/>
-          </a:effectRef>
-          <a:fontRef idx="minor">
-            <a:schemeClr val="lt1"/>
-          </a:fontRef>
-        </p:style>
-        <p:txBody>
-          <a:bodyPr rtlCol="0" anchor="ctr" lIns="54864" rIns="54864" tIns="36576" bIns="18288"/>
-          <a:lstStyle/>
-          <a:p>
-            <a:pPr algn="ctr">
-              <a:defRPr sz="950" b="1">
-                <a:solidFill>
-                  <a:srgbClr val="38BDF8"/>
-                </a:solidFill>
-                <a:latin typeface="Times New Roman"/>
-              </a:defRPr>
-            </a:pPr>
-            <a:r>
-              <a:t>2,478 Modules Built</a:t>
-            </a:r>
-          </a:p>
-          <a:p>
-            <a:pPr algn="ctr">
-              <a:defRPr sz="750" b="1">
-                <a:solidFill>
-                  <a:srgbClr val="FFFFFF"/>
-                </a:solidFill>
-                <a:latin typeface="Times New Roman"/>
-              </a:defRPr>
-            </a:pPr>
-            <a:r>
-              <a:t>Production Vite 5 Build</a:t>
-            </a:r>
-          </a:p>
-          <a:p>
-            <a:pPr algn="ctr">
-              <a:defRPr sz="680">
-                <a:solidFill>
-                  <a:srgbClr val="CBD5E1"/>
-                </a:solidFill>
-                <a:latin typeface="Times New Roman"/>
-              </a:defRPr>
-            </a:pPr>
-            <a:r>
-              <a:t>Clean frontend bundle compile;</a:t>
-            </a:r>
-            <a:br/>
-            <a:r>
-              <a:t>0 syntax errors, 0 linter flaws.</a:t>
-            </a:r>
-          </a:p>
-        </p:txBody>
-      </p:sp>
-      <p:sp>
-        <p:nvSpPr>
-          <p:cNvPr id="12" name="Rounded Rectangle 11"/>
-          <p:cNvSpPr/>
-          <p:nvPr/>
-        </p:nvSpPr>
-        <p:spPr>
-          <a:xfrm>
-            <a:off x="4608576" y="5285232"/>
-            <a:ext cx="1920240" cy="877824"/>
-          </a:xfrm>
-          <a:prstGeom prst="roundRect">
-            <a:avLst/>
-          </a:prstGeom>
-          <a:solidFill>
-            <a:srgbClr val="1E293B"/>
-          </a:solidFill>
-          <a:ln w="12700">
-            <a:solidFill>
-              <a:srgbClr val="F59E0B"/>
-            </a:solidFill>
-          </a:ln>
-        </p:spPr>
-        <p:style>
-          <a:lnRef idx="1">
-            <a:schemeClr val="accent1"/>
-          </a:lnRef>
-          <a:fillRef idx="3">
-            <a:schemeClr val="accent1"/>
-          </a:fillRef>
-          <a:effectRef idx="2">
-            <a:schemeClr val="accent1"/>
-          </a:effectRef>
-          <a:fontRef idx="minor">
-            <a:schemeClr val="lt1"/>
-          </a:fontRef>
-        </p:style>
-        <p:txBody>
-          <a:bodyPr rtlCol="0" anchor="ctr" lIns="54864" rIns="54864" tIns="36576" bIns="18288"/>
-          <a:lstStyle/>
-          <a:p>
-            <a:pPr algn="ctr">
-              <a:defRPr sz="950" b="1">
-                <a:solidFill>
-                  <a:srgbClr val="F59E0B"/>
-                </a:solidFill>
-                <a:latin typeface="Times New Roman"/>
-              </a:defRPr>
-            </a:pPr>
-            <a:r>
-              <a:t>13 VDR Tables</a:t>
-            </a:r>
-          </a:p>
-          <a:p>
-            <a:pPr algn="ctr">
-              <a:defRPr sz="750" b="1">
-                <a:solidFill>
-                  <a:srgbClr val="FFFFFF"/>
-                </a:solidFill>
-                <a:latin typeface="Times New Roman"/>
-              </a:defRPr>
-            </a:pPr>
-            <a:r>
-              <a:t>SQLite WAL Persistence</a:t>
-            </a:r>
-          </a:p>
-          <a:p>
-            <a:pPr algn="ctr">
-              <a:defRPr sz="680">
-                <a:solidFill>
-                  <a:srgbClr val="CBD5E1"/>
-                </a:solidFill>
-                <a:latin typeface="Times New Roman"/>
-              </a:defRPr>
-            </a:pPr>
-            <a:r>
-              <a:t>Relational ACID audit ledger;</a:t>
-            </a:r>
-            <a:br/>
-            <a:r>
-              <a:t>Foreign-key enforced integrity.</a:t>
-            </a:r>
-          </a:p>
-        </p:txBody>
-      </p:sp>
-      <p:sp>
-        <p:nvSpPr>
-          <p:cNvPr id="13" name="Rounded Rectangle 12"/>
-          <p:cNvSpPr/>
-          <p:nvPr/>
-        </p:nvSpPr>
-        <p:spPr>
-          <a:xfrm>
-            <a:off x="6638544" y="5285232"/>
-            <a:ext cx="1920240" cy="877824"/>
-          </a:xfrm>
-          <a:prstGeom prst="roundRect">
-            <a:avLst/>
-          </a:prstGeom>
-          <a:solidFill>
-            <a:srgbClr val="1E293B"/>
-          </a:solidFill>
-          <a:ln w="12700">
-            <a:solidFill>
-              <a:srgbClr val="A855F7"/>
-            </a:solidFill>
-          </a:ln>
-        </p:spPr>
-        <p:style>
-          <a:lnRef idx="1">
-            <a:schemeClr val="accent1"/>
-          </a:lnRef>
-          <a:fillRef idx="3">
-            <a:schemeClr val="accent1"/>
-          </a:fillRef>
-          <a:effectRef idx="2">
-            <a:schemeClr val="accent1"/>
-          </a:effectRef>
-          <a:fontRef idx="minor">
-            <a:schemeClr val="lt1"/>
-          </a:fontRef>
-        </p:style>
-        <p:txBody>
-          <a:bodyPr rtlCol="0" anchor="ctr" lIns="54864" rIns="54864" tIns="36576" bIns="18288"/>
-          <a:lstStyle/>
-          <a:p>
-            <a:pPr algn="ctr">
-              <a:defRPr sz="950" b="1">
-                <a:solidFill>
-                  <a:srgbClr val="A855F7"/>
-                </a:solidFill>
-                <a:latin typeface="Times New Roman"/>
-              </a:defRPr>
-            </a:pPr>
-            <a:r>
-              <a:t>5 REST Routers</a:t>
-            </a:r>
-          </a:p>
-          <a:p>
-            <a:pPr algn="ctr">
-              <a:defRPr sz="750" b="1">
-                <a:solidFill>
-                  <a:srgbClr val="FFFFFF"/>
-                </a:solidFill>
-                <a:latin typeface="Times New Roman"/>
-              </a:defRPr>
-            </a:pPr>
-            <a:r>
-              <a:t>FastAPI Endpoints</a:t>
-            </a:r>
-          </a:p>
-          <a:p>
-            <a:pPr algn="ctr">
-              <a:defRPr sz="680">
-                <a:solidFill>
-                  <a:srgbClr val="CBD5E1"/>
-                </a:solidFill>
-                <a:latin typeface="Times New Roman"/>
-              </a:defRPr>
-            </a:pPr>
-            <a:r>
-              <a:t>/agents, /trust, /discovery,</a:t>
-            </a:r>
-            <a:br/>
-            <a:r>
-              <a:t>/collaboration, /audit live.</a:t>
+              <a:t>If agent trust drops below 0.50 mid-task, session is terminated immediately to contain damage.</a:t>
             </a:r>
           </a:p>
         </p:txBody>
@@ -26565,7 +25181,1362 @@
               </a:defRPr>
             </a:pPr>
             <a:r>
-              <a:t>Results Analysis &amp; System Evaluation</a:t>
+              <a:t>Implementation &amp; Technical Validation</a:t>
+            </a:r>
+          </a:p>
+        </p:txBody>
+      </p:sp>
+      <p:sp>
+        <p:nvSpPr>
+          <p:cNvPr id="3" name="TextBox 2"/>
+          <p:cNvSpPr txBox="1"/>
+          <p:nvPr/>
+        </p:nvSpPr>
+        <p:spPr>
+          <a:xfrm>
+            <a:off x="457200" y="804672"/>
+            <a:ext cx="8229600" cy="256032"/>
+          </a:xfrm>
+          <a:prstGeom prst="rect">
+            <a:avLst/>
+          </a:prstGeom>
+          <a:noFill/>
+        </p:spPr>
+        <p:txBody>
+          <a:bodyPr wrap="square" lIns="0" tIns="0" rIns="0" bIns="0">
+            <a:spAutoFit/>
+          </a:bodyPr>
+          <a:lstStyle/>
+          <a:p>
+            <a:pPr>
+              <a:defRPr sz="1000" i="1">
+                <a:solidFill>
+                  <a:srgbClr val="64748B"/>
+                </a:solidFill>
+                <a:latin typeface="Times New Roman"/>
+              </a:defRPr>
+            </a:pPr>
+            <a:r>
+              <a:t>Module Implementation • Cryptographic Integrity • Automated CI/CD &amp; Build Evidence</a:t>
+            </a:r>
+          </a:p>
+        </p:txBody>
+      </p:sp>
+      <p:sp>
+        <p:nvSpPr>
+          <p:cNvPr id="4" name="TextBox 3"/>
+          <p:cNvSpPr txBox="1"/>
+          <p:nvPr/>
+        </p:nvSpPr>
+        <p:spPr>
+          <a:xfrm>
+            <a:off x="6547104" y="6355080"/>
+            <a:ext cx="2130552" cy="320040"/>
+          </a:xfrm>
+          <a:prstGeom prst="rect">
+            <a:avLst/>
+          </a:prstGeom>
+          <a:noFill/>
+        </p:spPr>
+        <p:txBody>
+          <a:bodyPr wrap="none" lIns="0" tIns="0" rIns="0" bIns="0">
+            <a:spAutoFit/>
+          </a:bodyPr>
+          <a:lstStyle/>
+          <a:p>
+            <a:pPr algn="r">
+              <a:defRPr sz="1200">
+                <a:solidFill>
+                  <a:srgbClr val="64748B"/>
+                </a:solidFill>
+                <a:latin typeface="Times New Roman"/>
+              </a:defRPr>
+            </a:pPr>
+            <a:r>
+              <a:t>27</a:t>
+            </a:r>
+          </a:p>
+        </p:txBody>
+      </p:sp>
+      <p:pic>
+        <p:nvPicPr>
+          <p:cNvPr id="5" name="Picture 4" descr="test_results_chart.png"/>
+          <p:cNvPicPr>
+            <a:picLocks noChangeAspect="1"/>
+          </p:cNvPicPr>
+          <p:nvPr/>
+        </p:nvPicPr>
+        <p:blipFill>
+          <a:blip r:embed="rId2"/>
+          <a:stretch>
+            <a:fillRect/>
+          </a:stretch>
+        </p:blipFill>
+        <p:spPr>
+          <a:xfrm>
+            <a:off x="457200" y="1115568"/>
+            <a:ext cx="4005072" cy="1691640"/>
+          </a:xfrm>
+          <a:prstGeom prst="rect">
+            <a:avLst/>
+          </a:prstGeom>
+          <a:ln w="12700">
+            <a:solidFill>
+              <a:srgbClr val="1F497D"/>
+            </a:solidFill>
+          </a:ln>
+        </p:spPr>
+      </p:pic>
+      <p:pic>
+        <p:nvPicPr>
+          <p:cNvPr id="6" name="Picture 5" descr="test_suite_verification.png"/>
+          <p:cNvPicPr>
+            <a:picLocks noChangeAspect="1"/>
+          </p:cNvPicPr>
+          <p:nvPr/>
+        </p:nvPicPr>
+        <p:blipFill>
+          <a:blip r:embed="rId3"/>
+          <a:stretch>
+            <a:fillRect/>
+          </a:stretch>
+        </p:blipFill>
+        <p:spPr>
+          <a:xfrm>
+            <a:off x="4681728" y="1115568"/>
+            <a:ext cx="4005072" cy="1691640"/>
+          </a:xfrm>
+          <a:prstGeom prst="rect">
+            <a:avLst/>
+          </a:prstGeom>
+          <a:ln w="12700">
+            <a:solidFill>
+              <a:srgbClr val="1F497D"/>
+            </a:solidFill>
+          </a:ln>
+        </p:spPr>
+      </p:pic>
+      <p:sp>
+        <p:nvSpPr>
+          <p:cNvPr id="7" name="Rounded Rectangle 6"/>
+          <p:cNvSpPr/>
+          <p:nvPr/>
+        </p:nvSpPr>
+        <p:spPr>
+          <a:xfrm>
+            <a:off x="457200" y="2907792"/>
+            <a:ext cx="1947672" cy="2011680"/>
+          </a:xfrm>
+          <a:prstGeom prst="roundRect">
+            <a:avLst/>
+          </a:prstGeom>
+          <a:solidFill>
+            <a:srgbClr val="EFF6FF"/>
+          </a:solidFill>
+          <a:ln w="15240">
+            <a:solidFill>
+              <a:srgbClr val="3B82F6"/>
+            </a:solidFill>
+          </a:ln>
+        </p:spPr>
+        <p:style>
+          <a:lnRef idx="1">
+            <a:schemeClr val="accent1"/>
+          </a:lnRef>
+          <a:fillRef idx="3">
+            <a:schemeClr val="accent1"/>
+          </a:fillRef>
+          <a:effectRef idx="2">
+            <a:schemeClr val="accent1"/>
+          </a:effectRef>
+          <a:fontRef idx="minor">
+            <a:schemeClr val="lt1"/>
+          </a:fontRef>
+        </p:style>
+        <p:txBody>
+          <a:bodyPr rtlCol="0" anchor="ctr" wrap="square" lIns="109728" rIns="109728" tIns="91440" bIns="73152"/>
+          <a:lstStyle/>
+          <a:p>
+            <a:pPr algn="ctr">
+              <a:spcAft>
+                <a:spcPts val="400"/>
+              </a:spcAft>
+              <a:defRPr sz="1100" b="1">
+                <a:solidFill>
+                  <a:srgbClr val="1F497D"/>
+                </a:solidFill>
+                <a:latin typeface="Times New Roman"/>
+              </a:defRPr>
+            </a:pPr>
+            <a:r>
+              <a:t>1. Identity &amp; Cryptography</a:t>
+            </a:r>
+          </a:p>
+          <a:p>
+            <a:pPr>
+              <a:spcAft>
+                <a:spcPts val="250"/>
+              </a:spcAft>
+              <a:defRPr sz="720">
+                <a:latin typeface="Times New Roman"/>
+              </a:defRPr>
+            </a:pPr>
+            <a:r>
+              <a:rPr b="1">
+                <a:solidFill>
+                  <a:srgbClr val="1F497D"/>
+                </a:solidFill>
+              </a:rPr>
+              <a:t>• </a:t>
+            </a:r>
+            <a:r>
+              <a:rPr b="1">
+                <a:solidFill>
+                  <a:srgbClr val="1E293B"/>
+                </a:solidFill>
+              </a:rPr>
+              <a:t>W3C DID: </a:t>
+            </a:r>
+            <a:r>
+              <a:rPr>
+                <a:solidFill>
+                  <a:srgbClr val="1E293B"/>
+                </a:solidFill>
+              </a:rPr>
+              <a:t>did:key with 0xed01 multicodec prefix.</a:t>
+            </a:r>
+          </a:p>
+          <a:p>
+            <a:pPr>
+              <a:spcAft>
+                <a:spcPts val="250"/>
+              </a:spcAft>
+              <a:defRPr sz="720">
+                <a:latin typeface="Times New Roman"/>
+              </a:defRPr>
+            </a:pPr>
+            <a:r>
+              <a:rPr b="1">
+                <a:solidFill>
+                  <a:srgbClr val="1F497D"/>
+                </a:solidFill>
+              </a:rPr>
+              <a:t>• </a:t>
+            </a:r>
+            <a:r>
+              <a:rPr b="1">
+                <a:solidFill>
+                  <a:srgbClr val="1E293B"/>
+                </a:solidFill>
+              </a:rPr>
+              <a:t>Ed25519: </a:t>
+            </a:r>
+            <a:r>
+              <a:rPr>
+                <a:solidFill>
+                  <a:srgbClr val="1E293B"/>
+                </a:solidFill>
+              </a:rPr>
+              <a:t>RFC 8032 asymmetric signing &amp; verification.</a:t>
+            </a:r>
+          </a:p>
+          <a:p>
+            <a:pPr>
+              <a:spcAft>
+                <a:spcPts val="250"/>
+              </a:spcAft>
+              <a:defRPr sz="720">
+                <a:latin typeface="Times New Roman"/>
+              </a:defRPr>
+            </a:pPr>
+            <a:r>
+              <a:rPr b="1">
+                <a:solidFill>
+                  <a:srgbClr val="1F497D"/>
+                </a:solidFill>
+              </a:rPr>
+              <a:t>• </a:t>
+            </a:r>
+            <a:r>
+              <a:rPr b="1">
+                <a:solidFill>
+                  <a:srgbClr val="1E293B"/>
+                </a:solidFill>
+              </a:rPr>
+              <a:t>Verifiable Credentials: </a:t>
+            </a:r>
+            <a:r>
+              <a:rPr>
+                <a:solidFill>
+                  <a:srgbClr val="1E293B"/>
+                </a:solidFill>
+              </a:rPr>
+              <a:t>W3C VC 2.0 with SHA-256 hashes.</a:t>
+            </a:r>
+          </a:p>
+          <a:p>
+            <a:pPr>
+              <a:spcAft>
+                <a:spcPts val="250"/>
+              </a:spcAft>
+              <a:defRPr sz="720">
+                <a:latin typeface="Times New Roman"/>
+              </a:defRPr>
+            </a:pPr>
+            <a:r>
+              <a:rPr b="1">
+                <a:solidFill>
+                  <a:srgbClr val="1F497D"/>
+                </a:solidFill>
+              </a:rPr>
+              <a:t>• </a:t>
+            </a:r>
+            <a:r>
+              <a:rPr b="1">
+                <a:solidFill>
+                  <a:srgbClr val="1E293B"/>
+                </a:solidFill>
+              </a:rPr>
+              <a:t>Human Auth: </a:t>
+            </a:r>
+            <a:r>
+              <a:rPr>
+                <a:solidFill>
+                  <a:srgbClr val="1E293B"/>
+                </a:solidFill>
+              </a:rPr>
+              <a:t>Argon2id, 5-strike lockout, JWT, 3-tier RBAC.</a:t>
+            </a:r>
+          </a:p>
+        </p:txBody>
+      </p:sp>
+      <p:sp>
+        <p:nvSpPr>
+          <p:cNvPr id="8" name="Rounded Rectangle 7"/>
+          <p:cNvSpPr/>
+          <p:nvPr/>
+        </p:nvSpPr>
+        <p:spPr>
+          <a:xfrm>
+            <a:off x="2551176" y="2907792"/>
+            <a:ext cx="1947672" cy="2011680"/>
+          </a:xfrm>
+          <a:prstGeom prst="roundRect">
+            <a:avLst/>
+          </a:prstGeom>
+          <a:solidFill>
+            <a:srgbClr val="F0FDF4"/>
+          </a:solidFill>
+          <a:ln w="15240">
+            <a:solidFill>
+              <a:srgbClr val="10B981"/>
+            </a:solidFill>
+          </a:ln>
+        </p:spPr>
+        <p:style>
+          <a:lnRef idx="1">
+            <a:schemeClr val="accent1"/>
+          </a:lnRef>
+          <a:fillRef idx="3">
+            <a:schemeClr val="accent1"/>
+          </a:fillRef>
+          <a:effectRef idx="2">
+            <a:schemeClr val="accent1"/>
+          </a:effectRef>
+          <a:fontRef idx="minor">
+            <a:schemeClr val="lt1"/>
+          </a:fontRef>
+        </p:style>
+        <p:txBody>
+          <a:bodyPr rtlCol="0" anchor="ctr" wrap="square" lIns="109728" rIns="109728" tIns="91440" bIns="73152"/>
+          <a:lstStyle/>
+          <a:p>
+            <a:pPr algn="ctr">
+              <a:spcAft>
+                <a:spcPts val="400"/>
+              </a:spcAft>
+              <a:defRPr sz="1100" b="1">
+                <a:solidFill>
+                  <a:srgbClr val="15803D"/>
+                </a:solidFill>
+                <a:latin typeface="Times New Roman"/>
+              </a:defRPr>
+            </a:pPr>
+            <a:r>
+              <a:t>2. Trust Intelligence Engine</a:t>
+            </a:r>
+          </a:p>
+          <a:p>
+            <a:pPr>
+              <a:spcAft>
+                <a:spcPts val="250"/>
+              </a:spcAft>
+              <a:defRPr sz="720">
+                <a:latin typeface="Times New Roman"/>
+              </a:defRPr>
+            </a:pPr>
+            <a:r>
+              <a:rPr b="1">
+                <a:solidFill>
+                  <a:srgbClr val="15803D"/>
+                </a:solidFill>
+              </a:rPr>
+              <a:t>• </a:t>
+            </a:r>
+            <a:r>
+              <a:rPr b="1">
+                <a:solidFill>
+                  <a:srgbClr val="1E293B"/>
+                </a:solidFill>
+              </a:rPr>
+              <a:t>Telemetry: </a:t>
+            </a:r>
+            <a:r>
+              <a:rPr>
+                <a:solidFill>
+                  <a:srgbClr val="1E293B"/>
+                </a:solidFill>
+              </a:rPr>
+              <a:t>Real-time recording of Si, Ci, and Li.</a:t>
+            </a:r>
+          </a:p>
+          <a:p>
+            <a:pPr>
+              <a:spcAft>
+                <a:spcPts val="250"/>
+              </a:spcAft>
+              <a:defRPr sz="720">
+                <a:latin typeface="Times New Roman"/>
+              </a:defRPr>
+            </a:pPr>
+            <a:r>
+              <a:rPr b="1">
+                <a:solidFill>
+                  <a:srgbClr val="15803D"/>
+                </a:solidFill>
+              </a:rPr>
+              <a:t>• </a:t>
+            </a:r>
+            <a:r>
+              <a:rPr b="1">
+                <a:solidFill>
+                  <a:srgbClr val="1E293B"/>
+                </a:solidFill>
+              </a:rPr>
+              <a:t>Single-Period: </a:t>
+            </a:r>
+            <a:r>
+              <a:rPr>
+                <a:solidFill>
+                  <a:srgbClr val="1E293B"/>
+                </a:solidFill>
+              </a:rPr>
+              <a:t>Pi(t) = 0.6 Si + 0.3 Ci + 0.1(1 - Li).</a:t>
+            </a:r>
+          </a:p>
+          <a:p>
+            <a:pPr>
+              <a:spcAft>
+                <a:spcPts val="250"/>
+              </a:spcAft>
+              <a:defRPr sz="720">
+                <a:latin typeface="Times New Roman"/>
+              </a:defRPr>
+            </a:pPr>
+            <a:r>
+              <a:rPr b="1">
+                <a:solidFill>
+                  <a:srgbClr val="15803D"/>
+                </a:solidFill>
+              </a:rPr>
+              <a:t>• </a:t>
+            </a:r>
+            <a:r>
+              <a:rPr b="1">
+                <a:solidFill>
+                  <a:srgbClr val="1E293B"/>
+                </a:solidFill>
+              </a:rPr>
+              <a:t>Temporal EMA: </a:t>
+            </a:r>
+            <a:r>
+              <a:rPr>
+                <a:solidFill>
+                  <a:srgbClr val="1E293B"/>
+                </a:solidFill>
+              </a:rPr>
+              <a:t>Ti(t) = 0.70 Ti(t-1) + 0.30 Pi(t).</a:t>
+            </a:r>
+          </a:p>
+          <a:p>
+            <a:pPr>
+              <a:spcAft>
+                <a:spcPts val="250"/>
+              </a:spcAft>
+              <a:defRPr sz="720">
+                <a:latin typeface="Times New Roman"/>
+              </a:defRPr>
+            </a:pPr>
+            <a:r>
+              <a:rPr b="1">
+                <a:solidFill>
+                  <a:srgbClr val="15803D"/>
+                </a:solidFill>
+              </a:rPr>
+              <a:t>• </a:t>
+            </a:r>
+            <a:r>
+              <a:rPr b="1">
+                <a:solidFill>
+                  <a:srgbClr val="1E293B"/>
+                </a:solidFill>
+              </a:rPr>
+              <a:t>State Machine: </a:t>
+            </a:r>
+            <a:r>
+              <a:rPr>
+                <a:solidFill>
+                  <a:srgbClr val="1E293B"/>
+                </a:solidFill>
+              </a:rPr>
+              <a:t>TRUSTED, SUSPICIOUS, QUARANTINED, REVOKED.</a:t>
+            </a:r>
+          </a:p>
+        </p:txBody>
+      </p:sp>
+      <p:sp>
+        <p:nvSpPr>
+          <p:cNvPr id="9" name="Rounded Rectangle 8"/>
+          <p:cNvSpPr/>
+          <p:nvPr/>
+        </p:nvSpPr>
+        <p:spPr>
+          <a:xfrm>
+            <a:off x="4645152" y="2907792"/>
+            <a:ext cx="1947672" cy="2011680"/>
+          </a:xfrm>
+          <a:prstGeom prst="roundRect">
+            <a:avLst/>
+          </a:prstGeom>
+          <a:solidFill>
+            <a:srgbClr val="FEFCE8"/>
+          </a:solidFill>
+          <a:ln w="15240">
+            <a:solidFill>
+              <a:srgbClr val="F59E0B"/>
+            </a:solidFill>
+          </a:ln>
+        </p:spPr>
+        <p:style>
+          <a:lnRef idx="1">
+            <a:schemeClr val="accent1"/>
+          </a:lnRef>
+          <a:fillRef idx="3">
+            <a:schemeClr val="accent1"/>
+          </a:fillRef>
+          <a:effectRef idx="2">
+            <a:schemeClr val="accent1"/>
+          </a:effectRef>
+          <a:fontRef idx="minor">
+            <a:schemeClr val="lt1"/>
+          </a:fontRef>
+        </p:style>
+        <p:txBody>
+          <a:bodyPr rtlCol="0" anchor="ctr" wrap="square" lIns="109728" rIns="109728" tIns="91440" bIns="73152"/>
+          <a:lstStyle/>
+          <a:p>
+            <a:pPr algn="ctr">
+              <a:spcAft>
+                <a:spcPts val="400"/>
+              </a:spcAft>
+              <a:defRPr sz="1100" b="1">
+                <a:solidFill>
+                  <a:srgbClr val="B45309"/>
+                </a:solidFill>
+                <a:latin typeface="Times New Roman"/>
+              </a:defRPr>
+            </a:pPr>
+            <a:r>
+              <a:t>3. Collaboration &amp; Workflows</a:t>
+            </a:r>
+          </a:p>
+          <a:p>
+            <a:pPr>
+              <a:spcAft>
+                <a:spcPts val="250"/>
+              </a:spcAft>
+              <a:defRPr sz="720">
+                <a:latin typeface="Times New Roman"/>
+              </a:defRPr>
+            </a:pPr>
+            <a:r>
+              <a:rPr b="1">
+                <a:solidFill>
+                  <a:srgbClr val="B45309"/>
+                </a:solidFill>
+              </a:rPr>
+              <a:t>• </a:t>
+            </a:r>
+            <a:r>
+              <a:rPr b="1">
+                <a:solidFill>
+                  <a:srgbClr val="1E293B"/>
+                </a:solidFill>
+              </a:rPr>
+              <a:t>Capability Discovery: </a:t>
+            </a:r>
+            <a:r>
+              <a:rPr>
+                <a:solidFill>
+                  <a:srgbClr val="1E293B"/>
+                </a:solidFill>
+              </a:rPr>
+              <a:t>Min-trust slider &amp; tag filters.</a:t>
+            </a:r>
+          </a:p>
+          <a:p>
+            <a:pPr>
+              <a:spcAft>
+                <a:spcPts val="250"/>
+              </a:spcAft>
+              <a:defRPr sz="720">
+                <a:latin typeface="Times New Roman"/>
+              </a:defRPr>
+            </a:pPr>
+            <a:r>
+              <a:rPr b="1">
+                <a:solidFill>
+                  <a:srgbClr val="B45309"/>
+                </a:solidFill>
+              </a:rPr>
+              <a:t>• </a:t>
+            </a:r>
+            <a:r>
+              <a:rPr b="1">
+                <a:solidFill>
+                  <a:srgbClr val="1E293B"/>
+                </a:solidFill>
+              </a:rPr>
+              <a:t>Explainable Exclusion: </a:t>
+            </a:r>
+            <a:r>
+              <a:rPr>
+                <a:solidFill>
+                  <a:srgbClr val="1E293B"/>
+                </a:solidFill>
+              </a:rPr>
+              <a:t>Transparent failure reasons.</a:t>
+            </a:r>
+          </a:p>
+          <a:p>
+            <a:pPr>
+              <a:spcAft>
+                <a:spcPts val="250"/>
+              </a:spcAft>
+              <a:defRPr sz="720">
+                <a:latin typeface="Times New Roman"/>
+              </a:defRPr>
+            </a:pPr>
+            <a:r>
+              <a:rPr b="1">
+                <a:solidFill>
+                  <a:srgbClr val="B45309"/>
+                </a:solidFill>
+              </a:rPr>
+              <a:t>• </a:t>
+            </a:r>
+            <a:r>
+              <a:rPr b="1">
+                <a:solidFill>
+                  <a:srgbClr val="1E293B"/>
+                </a:solidFill>
+              </a:rPr>
+              <a:t>MatchScore: </a:t>
+            </a:r>
+            <a:r>
+              <a:rPr>
+                <a:solidFill>
+                  <a:srgbClr val="1E293B"/>
+                </a:solidFill>
+              </a:rPr>
+              <a:t>0.4 T + 0.3(r/5) + 0.2 sigma + 0.1(1 - lambda).</a:t>
+            </a:r>
+          </a:p>
+          <a:p>
+            <a:pPr>
+              <a:spcAft>
+                <a:spcPts val="250"/>
+              </a:spcAft>
+              <a:defRPr sz="720">
+                <a:latin typeface="Times New Roman"/>
+              </a:defRPr>
+            </a:pPr>
+            <a:r>
+              <a:rPr b="1">
+                <a:solidFill>
+                  <a:srgbClr val="B45309"/>
+                </a:solidFill>
+              </a:rPr>
+              <a:t>• </a:t>
+            </a:r>
+            <a:r>
+              <a:rPr b="1">
+                <a:solidFill>
+                  <a:srgbClr val="1E293B"/>
+                </a:solidFill>
+              </a:rPr>
+              <a:t>Pipelines: </a:t>
+            </a:r>
+            <a:r>
+              <a:rPr>
+                <a:solidFill>
+                  <a:srgbClr val="1E293B"/>
+                </a:solidFill>
+              </a:rPr>
+              <a:t>Sequential runner with mid-run abort (T &lt; 0.50).</a:t>
+            </a:r>
+          </a:p>
+        </p:txBody>
+      </p:sp>
+      <p:sp>
+        <p:nvSpPr>
+          <p:cNvPr id="10" name="Rounded Rectangle 9"/>
+          <p:cNvSpPr/>
+          <p:nvPr/>
+        </p:nvSpPr>
+        <p:spPr>
+          <a:xfrm>
+            <a:off x="6739128" y="2907792"/>
+            <a:ext cx="1947672" cy="2011680"/>
+          </a:xfrm>
+          <a:prstGeom prst="roundRect">
+            <a:avLst/>
+          </a:prstGeom>
+          <a:solidFill>
+            <a:srgbClr val="F8FAFC"/>
+          </a:solidFill>
+          <a:ln w="15240">
+            <a:solidFill>
+              <a:srgbClr val="64748B"/>
+            </a:solidFill>
+          </a:ln>
+        </p:spPr>
+        <p:style>
+          <a:lnRef idx="1">
+            <a:schemeClr val="accent1"/>
+          </a:lnRef>
+          <a:fillRef idx="3">
+            <a:schemeClr val="accent1"/>
+          </a:fillRef>
+          <a:effectRef idx="2">
+            <a:schemeClr val="accent1"/>
+          </a:effectRef>
+          <a:fontRef idx="minor">
+            <a:schemeClr val="lt1"/>
+          </a:fontRef>
+        </p:style>
+        <p:txBody>
+          <a:bodyPr rtlCol="0" anchor="ctr" wrap="square" lIns="109728" rIns="109728" tIns="91440" bIns="73152"/>
+          <a:lstStyle/>
+          <a:p>
+            <a:pPr algn="ctr">
+              <a:spcAft>
+                <a:spcPts val="400"/>
+              </a:spcAft>
+              <a:defRPr sz="1100" b="1">
+                <a:solidFill>
+                  <a:srgbClr val="334155"/>
+                </a:solidFill>
+                <a:latin typeface="Times New Roman"/>
+              </a:defRPr>
+            </a:pPr>
+            <a:r>
+              <a:t>4. Verified Tech Stack</a:t>
+            </a:r>
+          </a:p>
+          <a:p>
+            <a:pPr>
+              <a:spcAft>
+                <a:spcPts val="250"/>
+              </a:spcAft>
+              <a:defRPr sz="720">
+                <a:latin typeface="Times New Roman"/>
+              </a:defRPr>
+            </a:pPr>
+            <a:r>
+              <a:rPr b="1">
+                <a:solidFill>
+                  <a:srgbClr val="334155"/>
+                </a:solidFill>
+              </a:rPr>
+              <a:t>• </a:t>
+            </a:r>
+            <a:r>
+              <a:rPr b="1">
+                <a:solidFill>
+                  <a:srgbClr val="1E293B"/>
+                </a:solidFill>
+              </a:rPr>
+              <a:t>Backend: </a:t>
+            </a:r>
+            <a:r>
+              <a:rPr>
+                <a:solidFill>
+                  <a:srgbClr val="1E293B"/>
+                </a:solidFill>
+              </a:rPr>
+              <a:t>Python 3.12, FastAPI (5 routers), Pydantic v2.</a:t>
+            </a:r>
+          </a:p>
+          <a:p>
+            <a:pPr>
+              <a:spcAft>
+                <a:spcPts val="250"/>
+              </a:spcAft>
+              <a:defRPr sz="720">
+                <a:latin typeface="Times New Roman"/>
+              </a:defRPr>
+            </a:pPr>
+            <a:r>
+              <a:rPr b="1">
+                <a:solidFill>
+                  <a:srgbClr val="334155"/>
+                </a:solidFill>
+              </a:rPr>
+              <a:t>• </a:t>
+            </a:r>
+            <a:r>
+              <a:rPr b="1">
+                <a:solidFill>
+                  <a:srgbClr val="1E293B"/>
+                </a:solidFill>
+              </a:rPr>
+              <a:t>VDR: </a:t>
+            </a:r>
+            <a:r>
+              <a:rPr>
+                <a:solidFill>
+                  <a:srgbClr val="1E293B"/>
+                </a:solidFill>
+              </a:rPr>
+              <a:t>SQLite 3 WAL mode (13 relational tables, ACID).</a:t>
+            </a:r>
+          </a:p>
+          <a:p>
+            <a:pPr>
+              <a:spcAft>
+                <a:spcPts val="250"/>
+              </a:spcAft>
+              <a:defRPr sz="720">
+                <a:latin typeface="Times New Roman"/>
+              </a:defRPr>
+            </a:pPr>
+            <a:r>
+              <a:rPr b="1">
+                <a:solidFill>
+                  <a:srgbClr val="334155"/>
+                </a:solidFill>
+              </a:rPr>
+              <a:t>• </a:t>
+            </a:r>
+            <a:r>
+              <a:rPr b="1">
+                <a:solidFill>
+                  <a:srgbClr val="1E293B"/>
+                </a:solidFill>
+              </a:rPr>
+              <a:t>Frontend: </a:t>
+            </a:r>
+            <a:r>
+              <a:rPr>
+                <a:solidFill>
+                  <a:srgbClr val="1E293B"/>
+                </a:solidFill>
+              </a:rPr>
+              <a:t>React 18/19, Vite 5, Tailwind CSS, Axios.</a:t>
+            </a:r>
+          </a:p>
+          <a:p>
+            <a:pPr>
+              <a:spcAft>
+                <a:spcPts val="250"/>
+              </a:spcAft>
+              <a:defRPr sz="720">
+                <a:latin typeface="Times New Roman"/>
+              </a:defRPr>
+            </a:pPr>
+            <a:r>
+              <a:rPr b="1">
+                <a:solidFill>
+                  <a:srgbClr val="334155"/>
+                </a:solidFill>
+              </a:rPr>
+              <a:t>• </a:t>
+            </a:r>
+            <a:r>
+              <a:rPr b="1">
+                <a:solidFill>
+                  <a:srgbClr val="1E293B"/>
+                </a:solidFill>
+              </a:rPr>
+              <a:t>Testing: </a:t>
+            </a:r>
+            <a:r>
+              <a:rPr>
+                <a:solidFill>
+                  <a:srgbClr val="1E293B"/>
+                </a:solidFill>
+              </a:rPr>
+              <a:t>Pytest 8.4, Oxlint linter, Docker container.</a:t>
+            </a:r>
+          </a:p>
+        </p:txBody>
+      </p:sp>
+      <p:sp>
+        <p:nvSpPr>
+          <p:cNvPr id="11" name="Rectangle 10"/>
+          <p:cNvSpPr/>
+          <p:nvPr/>
+        </p:nvSpPr>
+        <p:spPr>
+          <a:xfrm>
+            <a:off x="457200" y="5010912"/>
+            <a:ext cx="8229600" cy="1243584"/>
+          </a:xfrm>
+          <a:prstGeom prst="rect">
+            <a:avLst/>
+          </a:prstGeom>
+          <a:solidFill>
+            <a:srgbClr val="0F172A"/>
+          </a:solidFill>
+          <a:ln w="19050">
+            <a:solidFill>
+              <a:srgbClr val="38BDF8"/>
+            </a:solidFill>
+          </a:ln>
+        </p:spPr>
+        <p:style>
+          <a:lnRef idx="1">
+            <a:schemeClr val="accent1"/>
+          </a:lnRef>
+          <a:fillRef idx="3">
+            <a:schemeClr val="accent1"/>
+          </a:fillRef>
+          <a:effectRef idx="2">
+            <a:schemeClr val="accent1"/>
+          </a:effectRef>
+          <a:fontRef idx="minor">
+            <a:schemeClr val="lt1"/>
+          </a:fontRef>
+        </p:style>
+        <p:txBody>
+          <a:bodyPr rtlCol="0" anchor="ctr" tIns="73152" lIns="137160" rIns="137160"/>
+          <a:lstStyle/>
+          <a:p>
+            <a:pPr algn="ctr">
+              <a:defRPr sz="1000" b="1">
+                <a:solidFill>
+                  <a:srgbClr val="38BDF8"/>
+                </a:solidFill>
+                <a:latin typeface="Times New Roman"/>
+              </a:defRPr>
+            </a:pPr>
+            <a:r>
+              <a:t>VERIFIED IMPLEMENTATION EVIDENCE &amp; REPRODUCIBILITY DOSSIER</a:t>
+            </a:r>
+          </a:p>
+        </p:txBody>
+      </p:sp>
+      <p:sp>
+        <p:nvSpPr>
+          <p:cNvPr id="12" name="Rounded Rectangle 11"/>
+          <p:cNvSpPr/>
+          <p:nvPr/>
+        </p:nvSpPr>
+        <p:spPr>
+          <a:xfrm>
+            <a:off x="548640" y="5285232"/>
+            <a:ext cx="1920240" cy="877824"/>
+          </a:xfrm>
+          <a:prstGeom prst="roundRect">
+            <a:avLst/>
+          </a:prstGeom>
+          <a:solidFill>
+            <a:srgbClr val="1E293B"/>
+          </a:solidFill>
+          <a:ln w="12700">
+            <a:solidFill>
+              <a:srgbClr val="10B981"/>
+            </a:solidFill>
+          </a:ln>
+        </p:spPr>
+        <p:style>
+          <a:lnRef idx="1">
+            <a:schemeClr val="accent1"/>
+          </a:lnRef>
+          <a:fillRef idx="3">
+            <a:schemeClr val="accent1"/>
+          </a:fillRef>
+          <a:effectRef idx="2">
+            <a:schemeClr val="accent1"/>
+          </a:effectRef>
+          <a:fontRef idx="minor">
+            <a:schemeClr val="lt1"/>
+          </a:fontRef>
+        </p:style>
+        <p:txBody>
+          <a:bodyPr rtlCol="0" anchor="ctr" lIns="54864" rIns="54864" tIns="36576" bIns="18288"/>
+          <a:lstStyle/>
+          <a:p>
+            <a:pPr algn="ctr">
+              <a:defRPr sz="950" b="1">
+                <a:solidFill>
+                  <a:srgbClr val="10B981"/>
+                </a:solidFill>
+                <a:latin typeface="Times New Roman"/>
+              </a:defRPr>
+            </a:pPr>
+            <a:r>
+              <a:t>80 / 80 Tests Passed</a:t>
+            </a:r>
+          </a:p>
+          <a:p>
+            <a:pPr algn="ctr">
+              <a:defRPr sz="750" b="1">
+                <a:solidFill>
+                  <a:srgbClr val="FFFFFF"/>
+                </a:solidFill>
+                <a:latin typeface="Times New Roman"/>
+              </a:defRPr>
+            </a:pPr>
+            <a:r>
+              <a:t>100% Pass Rate (18.76s)</a:t>
+            </a:r>
+          </a:p>
+          <a:p>
+            <a:pPr algn="ctr">
+              <a:defRPr sz="680">
+                <a:solidFill>
+                  <a:srgbClr val="CBD5E1"/>
+                </a:solidFill>
+                <a:latin typeface="Times New Roman"/>
+              </a:defRPr>
+            </a:pPr>
+            <a:r>
+              <a:t>Pytest 8.4 across 7 test suites:</a:t>
+            </a:r>
+            <a:br/>
+            <a:r>
+              <a:t>DID, VC, Trust, Auth, Matching.</a:t>
+            </a:r>
+          </a:p>
+        </p:txBody>
+      </p:sp>
+      <p:sp>
+        <p:nvSpPr>
+          <p:cNvPr id="13" name="Rounded Rectangle 12"/>
+          <p:cNvSpPr/>
+          <p:nvPr/>
+        </p:nvSpPr>
+        <p:spPr>
+          <a:xfrm>
+            <a:off x="2578608" y="5285232"/>
+            <a:ext cx="1920240" cy="877824"/>
+          </a:xfrm>
+          <a:prstGeom prst="roundRect">
+            <a:avLst/>
+          </a:prstGeom>
+          <a:solidFill>
+            <a:srgbClr val="1E293B"/>
+          </a:solidFill>
+          <a:ln w="12700">
+            <a:solidFill>
+              <a:srgbClr val="38BDF8"/>
+            </a:solidFill>
+          </a:ln>
+        </p:spPr>
+        <p:style>
+          <a:lnRef idx="1">
+            <a:schemeClr val="accent1"/>
+          </a:lnRef>
+          <a:fillRef idx="3">
+            <a:schemeClr val="accent1"/>
+          </a:fillRef>
+          <a:effectRef idx="2">
+            <a:schemeClr val="accent1"/>
+          </a:effectRef>
+          <a:fontRef idx="minor">
+            <a:schemeClr val="lt1"/>
+          </a:fontRef>
+        </p:style>
+        <p:txBody>
+          <a:bodyPr rtlCol="0" anchor="ctr" lIns="54864" rIns="54864" tIns="36576" bIns="18288"/>
+          <a:lstStyle/>
+          <a:p>
+            <a:pPr algn="ctr">
+              <a:defRPr sz="950" b="1">
+                <a:solidFill>
+                  <a:srgbClr val="38BDF8"/>
+                </a:solidFill>
+                <a:latin typeface="Times New Roman"/>
+              </a:defRPr>
+            </a:pPr>
+            <a:r>
+              <a:t>2,478 Modules Built</a:t>
+            </a:r>
+          </a:p>
+          <a:p>
+            <a:pPr algn="ctr">
+              <a:defRPr sz="750" b="1">
+                <a:solidFill>
+                  <a:srgbClr val="FFFFFF"/>
+                </a:solidFill>
+                <a:latin typeface="Times New Roman"/>
+              </a:defRPr>
+            </a:pPr>
+            <a:r>
+              <a:t>Production Vite 5 Build</a:t>
+            </a:r>
+          </a:p>
+          <a:p>
+            <a:pPr algn="ctr">
+              <a:defRPr sz="680">
+                <a:solidFill>
+                  <a:srgbClr val="CBD5E1"/>
+                </a:solidFill>
+                <a:latin typeface="Times New Roman"/>
+              </a:defRPr>
+            </a:pPr>
+            <a:r>
+              <a:t>Clean frontend bundle compile;</a:t>
+            </a:r>
+            <a:br/>
+            <a:r>
+              <a:t>0 syntax errors, 0 linter flaws.</a:t>
+            </a:r>
+          </a:p>
+        </p:txBody>
+      </p:sp>
+      <p:sp>
+        <p:nvSpPr>
+          <p:cNvPr id="14" name="Rounded Rectangle 13"/>
+          <p:cNvSpPr/>
+          <p:nvPr/>
+        </p:nvSpPr>
+        <p:spPr>
+          <a:xfrm>
+            <a:off x="4608576" y="5285232"/>
+            <a:ext cx="1920240" cy="877824"/>
+          </a:xfrm>
+          <a:prstGeom prst="roundRect">
+            <a:avLst/>
+          </a:prstGeom>
+          <a:solidFill>
+            <a:srgbClr val="1E293B"/>
+          </a:solidFill>
+          <a:ln w="12700">
+            <a:solidFill>
+              <a:srgbClr val="F59E0B"/>
+            </a:solidFill>
+          </a:ln>
+        </p:spPr>
+        <p:style>
+          <a:lnRef idx="1">
+            <a:schemeClr val="accent1"/>
+          </a:lnRef>
+          <a:fillRef idx="3">
+            <a:schemeClr val="accent1"/>
+          </a:fillRef>
+          <a:effectRef idx="2">
+            <a:schemeClr val="accent1"/>
+          </a:effectRef>
+          <a:fontRef idx="minor">
+            <a:schemeClr val="lt1"/>
+          </a:fontRef>
+        </p:style>
+        <p:txBody>
+          <a:bodyPr rtlCol="0" anchor="ctr" lIns="54864" rIns="54864" tIns="36576" bIns="18288"/>
+          <a:lstStyle/>
+          <a:p>
+            <a:pPr algn="ctr">
+              <a:defRPr sz="950" b="1">
+                <a:solidFill>
+                  <a:srgbClr val="F59E0B"/>
+                </a:solidFill>
+                <a:latin typeface="Times New Roman"/>
+              </a:defRPr>
+            </a:pPr>
+            <a:r>
+              <a:t>13 VDR Tables</a:t>
+            </a:r>
+          </a:p>
+          <a:p>
+            <a:pPr algn="ctr">
+              <a:defRPr sz="750" b="1">
+                <a:solidFill>
+                  <a:srgbClr val="FFFFFF"/>
+                </a:solidFill>
+                <a:latin typeface="Times New Roman"/>
+              </a:defRPr>
+            </a:pPr>
+            <a:r>
+              <a:t>SQLite WAL Persistence</a:t>
+            </a:r>
+          </a:p>
+          <a:p>
+            <a:pPr algn="ctr">
+              <a:defRPr sz="680">
+                <a:solidFill>
+                  <a:srgbClr val="CBD5E1"/>
+                </a:solidFill>
+                <a:latin typeface="Times New Roman"/>
+              </a:defRPr>
+            </a:pPr>
+            <a:r>
+              <a:t>Relational ACID audit ledger;</a:t>
+            </a:r>
+            <a:br/>
+            <a:r>
+              <a:t>Foreign-key enforced integrity.</a:t>
+            </a:r>
+          </a:p>
+        </p:txBody>
+      </p:sp>
+      <p:sp>
+        <p:nvSpPr>
+          <p:cNvPr id="15" name="Rounded Rectangle 14"/>
+          <p:cNvSpPr/>
+          <p:nvPr/>
+        </p:nvSpPr>
+        <p:spPr>
+          <a:xfrm>
+            <a:off x="6638544" y="5285232"/>
+            <a:ext cx="1920240" cy="877824"/>
+          </a:xfrm>
+          <a:prstGeom prst="roundRect">
+            <a:avLst/>
+          </a:prstGeom>
+          <a:solidFill>
+            <a:srgbClr val="1E293B"/>
+          </a:solidFill>
+          <a:ln w="12700">
+            <a:solidFill>
+              <a:srgbClr val="A855F7"/>
+            </a:solidFill>
+          </a:ln>
+        </p:spPr>
+        <p:style>
+          <a:lnRef idx="1">
+            <a:schemeClr val="accent1"/>
+          </a:lnRef>
+          <a:fillRef idx="3">
+            <a:schemeClr val="accent1"/>
+          </a:fillRef>
+          <a:effectRef idx="2">
+            <a:schemeClr val="accent1"/>
+          </a:effectRef>
+          <a:fontRef idx="minor">
+            <a:schemeClr val="lt1"/>
+          </a:fontRef>
+        </p:style>
+        <p:txBody>
+          <a:bodyPr rtlCol="0" anchor="ctr" lIns="54864" rIns="54864" tIns="36576" bIns="18288"/>
+          <a:lstStyle/>
+          <a:p>
+            <a:pPr algn="ctr">
+              <a:defRPr sz="950" b="1">
+                <a:solidFill>
+                  <a:srgbClr val="A855F7"/>
+                </a:solidFill>
+                <a:latin typeface="Times New Roman"/>
+              </a:defRPr>
+            </a:pPr>
+            <a:r>
+              <a:t>5 REST Routers</a:t>
+            </a:r>
+          </a:p>
+          <a:p>
+            <a:pPr algn="ctr">
+              <a:defRPr sz="750" b="1">
+                <a:solidFill>
+                  <a:srgbClr val="FFFFFF"/>
+                </a:solidFill>
+                <a:latin typeface="Times New Roman"/>
+              </a:defRPr>
+            </a:pPr>
+            <a:r>
+              <a:t>FastAPI Endpoints</a:t>
+            </a:r>
+          </a:p>
+          <a:p>
+            <a:pPr algn="ctr">
+              <a:defRPr sz="680">
+                <a:solidFill>
+                  <a:srgbClr val="CBD5E1"/>
+                </a:solidFill>
+                <a:latin typeface="Times New Roman"/>
+              </a:defRPr>
+            </a:pPr>
+            <a:r>
+              <a:t>/agents, /trust, /discovery,</a:t>
+            </a:r>
+            <a:br/>
+            <a:r>
+              <a:t>/collaboration, /audit live.</a:t>
+            </a:r>
+          </a:p>
+        </p:txBody>
+      </p:sp>
+    </p:spTree>
+  </p:cSld>
+  <p:clrMapOvr>
+    <a:masterClrMapping/>
+  </p:clrMapOvr>
+</p:sld>
+</file>
+
+<file path=ppt/slides/slide31.xml><?xml version="1.0" encoding="utf-8"?>
+<p:sld xmlns:a="http://schemas.openxmlformats.org/drawingml/2006/main" xmlns:p="http://schemas.openxmlformats.org/presentationml/2006/main" xmlns:r="http://schemas.openxmlformats.org/officeDocument/2006/relationships">
+  <p:cSld>
+    <p:spTree>
+      <p:nvGrpSpPr>
+        <p:cNvPr id="1" name=""/>
+        <p:cNvGrpSpPr/>
+        <p:nvPr/>
+      </p:nvGrpSpPr>
+      <p:grpSpPr/>
+      <p:sp>
+        <p:nvSpPr>
+          <p:cNvPr id="2" name="TextBox 1"/>
+          <p:cNvSpPr txBox="1"/>
+          <p:nvPr/>
+        </p:nvSpPr>
+        <p:spPr>
+          <a:xfrm>
+            <a:off x="457200" y="320040"/>
+            <a:ext cx="8229600" cy="502920"/>
+          </a:xfrm>
+          <a:prstGeom prst="rect">
+            <a:avLst/>
+          </a:prstGeom>
+          <a:noFill/>
+        </p:spPr>
+        <p:txBody>
+          <a:bodyPr wrap="square" lIns="0" tIns="0" rIns="0" bIns="0">
+            <a:spAutoFit/>
+          </a:bodyPr>
+          <a:lstStyle/>
+          <a:p>
+            <a:pPr>
+              <a:defRPr sz="2200" b="1">
+                <a:solidFill>
+                  <a:srgbClr val="1F497D"/>
+                </a:solidFill>
+                <a:latin typeface="Times New Roman"/>
+              </a:defRPr>
+            </a:pPr>
+            <a:r>
+              <a:t>Results Analysis &amp; Evaluation</a:t>
             </a:r>
           </a:p>
         </p:txBody>
@@ -26695,7 +26666,7 @@
               </a:defRPr>
             </a:pPr>
             <a:r>
-              <a:t>1. Dynamic Trust Formulation &amp; Behavioral Response</a:t>
+              <a:t>1. Dynamic Trust Formulation &amp; Degradation Dynamics</a:t>
             </a:r>
           </a:p>
           <a:p>
@@ -27950,7 +27921,7 @@
 </p:sld>
 </file>
 
-<file path=ppt/slides/slide31.xml><?xml version="1.0" encoding="utf-8"?>
+<file path=ppt/slides/slide32.xml><?xml version="1.0" encoding="utf-8"?>
 <p:sld xmlns:a="http://schemas.openxmlformats.org/drawingml/2006/main" xmlns:p="http://schemas.openxmlformats.org/presentationml/2006/main" xmlns:r="http://schemas.openxmlformats.org/officeDocument/2006/relationships">
   <p:cSld>
     <p:spTree>
@@ -28111,9 +28082,9 @@
           <a:p>
             <a:pPr algn="ctr">
               <a:spcAft>
-                <a:spcPts val="300"/>
-              </a:spcAft>
-              <a:defRPr sz="1050" b="1">
+                <a:spcPts val="400"/>
+              </a:spcAft>
+              <a:defRPr sz="1100" b="1">
                 <a:solidFill>
                   <a:srgbClr val="1F497D"/>
                 </a:solidFill>
@@ -28127,9 +28098,9 @@
           <a:p>
             <a:pPr>
               <a:spcAft>
-                <a:spcPts val="200"/>
-              </a:spcAft>
-              <a:defRPr sz="800">
+                <a:spcPts val="250"/>
+              </a:spcAft>
+              <a:defRPr sz="850">
                 <a:latin typeface="Times New Roman"/>
               </a:defRPr>
             </a:pPr>
@@ -28161,9 +28132,9 @@
           <a:p>
             <a:pPr>
               <a:spcAft>
-                <a:spcPts val="200"/>
-              </a:spcAft>
-              <a:defRPr sz="800">
+                <a:spcPts val="250"/>
+              </a:spcAft>
+              <a:defRPr sz="850">
                 <a:latin typeface="Times New Roman"/>
               </a:defRPr>
             </a:pPr>
@@ -28195,9 +28166,9 @@
           <a:p>
             <a:pPr>
               <a:spcAft>
-                <a:spcPts val="200"/>
-              </a:spcAft>
-              <a:defRPr sz="800">
+                <a:spcPts val="250"/>
+              </a:spcAft>
+              <a:defRPr sz="850">
                 <a:latin typeface="Times New Roman"/>
               </a:defRPr>
             </a:pPr>
@@ -28229,9 +28200,9 @@
           <a:p>
             <a:pPr>
               <a:spcAft>
-                <a:spcPts val="200"/>
-              </a:spcAft>
-              <a:defRPr sz="800">
+                <a:spcPts val="250"/>
+              </a:spcAft>
+              <a:defRPr sz="850">
                 <a:latin typeface="Times New Roman"/>
               </a:defRPr>
             </a:pPr>
@@ -28263,9 +28234,9 @@
           <a:p>
             <a:pPr>
               <a:spcAft>
-                <a:spcPts val="200"/>
-              </a:spcAft>
-              <a:defRPr sz="800">
+                <a:spcPts val="250"/>
+              </a:spcAft>
+              <a:defRPr sz="850">
                 <a:latin typeface="Times New Roman"/>
               </a:defRPr>
             </a:pPr>
@@ -28339,9 +28310,9 @@
           <a:p>
             <a:pPr algn="ctr">
               <a:spcAft>
-                <a:spcPts val="300"/>
-              </a:spcAft>
-              <a:defRPr sz="1050" b="1">
+                <a:spcPts val="400"/>
+              </a:spcAft>
+              <a:defRPr sz="1100" b="1">
                 <a:solidFill>
                   <a:srgbClr val="1F497D"/>
                 </a:solidFill>
@@ -28355,9 +28326,9 @@
           <a:p>
             <a:pPr>
               <a:spcAft>
-                <a:spcPts val="200"/>
-              </a:spcAft>
-              <a:defRPr sz="800">
+                <a:spcPts val="250"/>
+              </a:spcAft>
+              <a:defRPr sz="850">
                 <a:latin typeface="Times New Roman"/>
               </a:defRPr>
             </a:pPr>
@@ -28389,9 +28360,9 @@
           <a:p>
             <a:pPr>
               <a:spcAft>
-                <a:spcPts val="200"/>
-              </a:spcAft>
-              <a:defRPr sz="800">
+                <a:spcPts val="250"/>
+              </a:spcAft>
+              <a:defRPr sz="850">
                 <a:latin typeface="Times New Roman"/>
               </a:defRPr>
             </a:pPr>
@@ -28423,9 +28394,9 @@
           <a:p>
             <a:pPr>
               <a:spcAft>
-                <a:spcPts val="200"/>
-              </a:spcAft>
-              <a:defRPr sz="800">
+                <a:spcPts val="250"/>
+              </a:spcAft>
+              <a:defRPr sz="850">
                 <a:latin typeface="Times New Roman"/>
               </a:defRPr>
             </a:pPr>
@@ -28457,9 +28428,9 @@
           <a:p>
             <a:pPr>
               <a:spcAft>
-                <a:spcPts val="200"/>
-              </a:spcAft>
-              <a:defRPr sz="800">
+                <a:spcPts val="250"/>
+              </a:spcAft>
+              <a:defRPr sz="850">
                 <a:latin typeface="Times New Roman"/>
               </a:defRPr>
             </a:pPr>
@@ -28533,9 +28504,9 @@
           <a:p>
             <a:pPr algn="ctr">
               <a:spcAft>
-                <a:spcPts val="300"/>
-              </a:spcAft>
-              <a:defRPr sz="1050" b="1">
+                <a:spcPts val="400"/>
+              </a:spcAft>
+              <a:defRPr sz="1100" b="1">
                 <a:solidFill>
                   <a:srgbClr val="B91C1C"/>
                 </a:solidFill>
@@ -28549,9 +28520,9 @@
           <a:p>
             <a:pPr>
               <a:spcAft>
-                <a:spcPts val="200"/>
-              </a:spcAft>
-              <a:defRPr sz="800">
+                <a:spcPts val="250"/>
+              </a:spcAft>
+              <a:defRPr sz="850">
                 <a:latin typeface="Times New Roman"/>
               </a:defRPr>
             </a:pPr>
@@ -28583,9 +28554,9 @@
           <a:p>
             <a:pPr>
               <a:spcAft>
-                <a:spcPts val="200"/>
-              </a:spcAft>
-              <a:defRPr sz="800">
+                <a:spcPts val="250"/>
+              </a:spcAft>
+              <a:defRPr sz="850">
                 <a:latin typeface="Times New Roman"/>
               </a:defRPr>
             </a:pPr>
@@ -28617,9 +28588,9 @@
           <a:p>
             <a:pPr>
               <a:spcAft>
-                <a:spcPts val="200"/>
-              </a:spcAft>
-              <a:defRPr sz="800">
+                <a:spcPts val="250"/>
+              </a:spcAft>
+              <a:defRPr sz="850">
                 <a:latin typeface="Times New Roman"/>
               </a:defRPr>
             </a:pPr>
@@ -28651,9 +28622,9 @@
           <a:p>
             <a:pPr>
               <a:spcAft>
-                <a:spcPts val="200"/>
-              </a:spcAft>
-              <a:defRPr sz="800">
+                <a:spcPts val="250"/>
+              </a:spcAft>
+              <a:defRPr sz="850">
                 <a:latin typeface="Times New Roman"/>
               </a:defRPr>
             </a:pPr>
@@ -28727,9 +28698,9 @@
           <a:p>
             <a:pPr algn="ctr">
               <a:spcAft>
-                <a:spcPts val="300"/>
-              </a:spcAft>
-              <a:defRPr sz="1050" b="1">
+                <a:spcPts val="400"/>
+              </a:spcAft>
+              <a:defRPr sz="1100" b="1">
                 <a:solidFill>
                   <a:srgbClr val="15803D"/>
                 </a:solidFill>
@@ -28743,9 +28714,9 @@
           <a:p>
             <a:pPr>
               <a:spcAft>
-                <a:spcPts val="200"/>
-              </a:spcAft>
-              <a:defRPr sz="800">
+                <a:spcPts val="250"/>
+              </a:spcAft>
+              <a:defRPr sz="850">
                 <a:latin typeface="Times New Roman"/>
               </a:defRPr>
             </a:pPr>
@@ -28777,9 +28748,9 @@
           <a:p>
             <a:pPr>
               <a:spcAft>
-                <a:spcPts val="200"/>
-              </a:spcAft>
-              <a:defRPr sz="800">
+                <a:spcPts val="250"/>
+              </a:spcAft>
+              <a:defRPr sz="850">
                 <a:latin typeface="Times New Roman"/>
               </a:defRPr>
             </a:pPr>
@@ -28811,9 +28782,9 @@
           <a:p>
             <a:pPr>
               <a:spcAft>
-                <a:spcPts val="200"/>
-              </a:spcAft>
-              <a:defRPr sz="800">
+                <a:spcPts val="250"/>
+              </a:spcAft>
+              <a:defRPr sz="850">
                 <a:latin typeface="Times New Roman"/>
               </a:defRPr>
             </a:pPr>
@@ -28845,9 +28816,9 @@
           <a:p>
             <a:pPr>
               <a:spcAft>
-                <a:spcPts val="200"/>
-              </a:spcAft>
-              <a:defRPr sz="800">
+                <a:spcPts val="250"/>
+              </a:spcAft>
+              <a:defRPr sz="850">
                 <a:latin typeface="Times New Roman"/>
               </a:defRPr>
             </a:pPr>
